--- a/docs/pptx/whole/jx-linsubhr-ratio-anemia2.pptx
+++ b/docs/pptx/whole/jx-linsubhr-ratio-anemia2.pptx
@@ -2271,7 +2271,7 @@
           </p:nvSpPr>
           <p:spPr>
             <a:xfrm>
-              <a:off x="817517" y="5114368"/>
+              <a:off x="817517" y="5142518"/>
               <a:ext cx="7799693" cy="0"/>
             </a:xfrm>
             <a:custGeom>
@@ -2314,7 +2314,7 @@
           </p:nvSpPr>
           <p:spPr>
             <a:xfrm>
-              <a:off x="817517" y="4244691"/>
+              <a:off x="817517" y="4313054"/>
               <a:ext cx="7799693" cy="0"/>
             </a:xfrm>
             <a:custGeom>
@@ -2357,7 +2357,7 @@
           </p:nvSpPr>
           <p:spPr>
             <a:xfrm>
-              <a:off x="817517" y="3375014"/>
+              <a:off x="817517" y="3483591"/>
               <a:ext cx="7799693" cy="0"/>
             </a:xfrm>
             <a:custGeom>
@@ -2400,7 +2400,7 @@
           </p:nvSpPr>
           <p:spPr>
             <a:xfrm>
-              <a:off x="817517" y="2505337"/>
+              <a:off x="817517" y="2654127"/>
               <a:ext cx="7799693" cy="0"/>
             </a:xfrm>
             <a:custGeom>
@@ -2443,15 +2443,15 @@
           </p:nvSpPr>
           <p:spPr>
             <a:xfrm>
-              <a:off x="1615213" y="1896563"/>
-              <a:ext cx="0" cy="3826579"/>
+              <a:off x="1615213" y="2073503"/>
+              <a:ext cx="0" cy="3649639"/>
             </a:xfrm>
             <a:custGeom>
               <a:avLst/>
               <a:pathLst>
-                <a:path w="0" h="3826579">
+                <a:path w="0" h="3649639">
                   <a:moveTo>
-                    <a:pt x="0" y="3826579"/>
+                    <a:pt x="0" y="3649639"/>
                   </a:moveTo>
                   <a:lnTo>
                     <a:pt x="0" y="0"/>
@@ -2486,15 +2486,15 @@
           </p:nvSpPr>
           <p:spPr>
             <a:xfrm>
-              <a:off x="3387871" y="1896563"/>
-              <a:ext cx="0" cy="3826579"/>
+              <a:off x="3387871" y="2073503"/>
+              <a:ext cx="0" cy="3649639"/>
             </a:xfrm>
             <a:custGeom>
               <a:avLst/>
               <a:pathLst>
-                <a:path w="0" h="3826579">
+                <a:path w="0" h="3649639">
                   <a:moveTo>
-                    <a:pt x="0" y="3826579"/>
+                    <a:pt x="0" y="3649639"/>
                   </a:moveTo>
                   <a:lnTo>
                     <a:pt x="0" y="0"/>
@@ -2529,15 +2529,15 @@
           </p:nvSpPr>
           <p:spPr>
             <a:xfrm>
-              <a:off x="5160528" y="1896563"/>
-              <a:ext cx="0" cy="3826579"/>
+              <a:off x="5160528" y="2073503"/>
+              <a:ext cx="0" cy="3649639"/>
             </a:xfrm>
             <a:custGeom>
               <a:avLst/>
               <a:pathLst>
-                <a:path w="0" h="3826579">
+                <a:path w="0" h="3649639">
                   <a:moveTo>
-                    <a:pt x="0" y="3826579"/>
+                    <a:pt x="0" y="3649639"/>
                   </a:moveTo>
                   <a:lnTo>
                     <a:pt x="0" y="0"/>
@@ -2572,15 +2572,15 @@
           </p:nvSpPr>
           <p:spPr>
             <a:xfrm>
-              <a:off x="6933186" y="1896563"/>
-              <a:ext cx="0" cy="3826579"/>
+              <a:off x="6933186" y="2073503"/>
+              <a:ext cx="0" cy="3649639"/>
             </a:xfrm>
             <a:custGeom>
               <a:avLst/>
               <a:pathLst>
-                <a:path w="0" h="3826579">
+                <a:path w="0" h="3649639">
                   <a:moveTo>
-                    <a:pt x="0" y="3826579"/>
+                    <a:pt x="0" y="3649639"/>
                   </a:moveTo>
                   <a:lnTo>
                     <a:pt x="0" y="0"/>
@@ -2615,7 +2615,7 @@
           </p:nvSpPr>
           <p:spPr>
             <a:xfrm>
-              <a:off x="817517" y="5549207"/>
+              <a:off x="817517" y="5557249"/>
               <a:ext cx="7799693" cy="0"/>
             </a:xfrm>
             <a:custGeom>
@@ -2658,7 +2658,7 @@
           </p:nvSpPr>
           <p:spPr>
             <a:xfrm>
-              <a:off x="817517" y="4679530"/>
+              <a:off x="817517" y="4727786"/>
               <a:ext cx="7799693" cy="0"/>
             </a:xfrm>
             <a:custGeom>
@@ -2701,7 +2701,7 @@
           </p:nvSpPr>
           <p:spPr>
             <a:xfrm>
-              <a:off x="817517" y="3809853"/>
+              <a:off x="817517" y="3898322"/>
               <a:ext cx="7799693" cy="0"/>
             </a:xfrm>
             <a:custGeom>
@@ -2744,7 +2744,7 @@
           </p:nvSpPr>
           <p:spPr>
             <a:xfrm>
-              <a:off x="817517" y="2940175"/>
+              <a:off x="817517" y="3068859"/>
               <a:ext cx="7799693" cy="0"/>
             </a:xfrm>
             <a:custGeom>
@@ -2787,7 +2787,7 @@
           </p:nvSpPr>
           <p:spPr>
             <a:xfrm>
-              <a:off x="817517" y="2070498"/>
+              <a:off x="817517" y="2239395"/>
               <a:ext cx="7799693" cy="0"/>
             </a:xfrm>
             <a:custGeom>
@@ -2830,15 +2830,15 @@
           </p:nvSpPr>
           <p:spPr>
             <a:xfrm>
-              <a:off x="2501542" y="1896563"/>
-              <a:ext cx="0" cy="3826579"/>
+              <a:off x="2501542" y="2073503"/>
+              <a:ext cx="0" cy="3649639"/>
             </a:xfrm>
             <a:custGeom>
               <a:avLst/>
               <a:pathLst>
-                <a:path w="0" h="3826579">
+                <a:path w="0" h="3649639">
                   <a:moveTo>
-                    <a:pt x="0" y="3826579"/>
+                    <a:pt x="0" y="3649639"/>
                   </a:moveTo>
                   <a:lnTo>
                     <a:pt x="0" y="0"/>
@@ -2873,15 +2873,15 @@
           </p:nvSpPr>
           <p:spPr>
             <a:xfrm>
-              <a:off x="4274200" y="1896563"/>
-              <a:ext cx="0" cy="3826579"/>
+              <a:off x="4274200" y="2073503"/>
+              <a:ext cx="0" cy="3649639"/>
             </a:xfrm>
             <a:custGeom>
               <a:avLst/>
               <a:pathLst>
-                <a:path w="0" h="3826579">
+                <a:path w="0" h="3649639">
                   <a:moveTo>
-                    <a:pt x="0" y="3826579"/>
+                    <a:pt x="0" y="3649639"/>
                   </a:moveTo>
                   <a:lnTo>
                     <a:pt x="0" y="0"/>
@@ -2916,15 +2916,15 @@
           </p:nvSpPr>
           <p:spPr>
             <a:xfrm>
-              <a:off x="6046857" y="1896563"/>
-              <a:ext cx="0" cy="3826579"/>
+              <a:off x="6046857" y="2073503"/>
+              <a:ext cx="0" cy="3649639"/>
             </a:xfrm>
             <a:custGeom>
               <a:avLst/>
               <a:pathLst>
-                <a:path w="0" h="3826579">
+                <a:path w="0" h="3649639">
                   <a:moveTo>
-                    <a:pt x="0" y="3826579"/>
+                    <a:pt x="0" y="3649639"/>
                   </a:moveTo>
                   <a:lnTo>
                     <a:pt x="0" y="0"/>
@@ -2959,15 +2959,15 @@
           </p:nvSpPr>
           <p:spPr>
             <a:xfrm>
-              <a:off x="7819515" y="1896563"/>
-              <a:ext cx="0" cy="3826579"/>
+              <a:off x="7819515" y="2073503"/>
+              <a:ext cx="0" cy="3649639"/>
             </a:xfrm>
             <a:custGeom>
               <a:avLst/>
               <a:pathLst>
-                <a:path w="0" h="3826579">
+                <a:path w="0" h="3649639">
                   <a:moveTo>
-                    <a:pt x="0" y="3826579"/>
+                    <a:pt x="0" y="3649639"/>
                   </a:moveTo>
                   <a:lnTo>
                     <a:pt x="0" y="0"/>
@@ -3002,612 +3002,612 @@
           </p:nvSpPr>
           <p:spPr>
             <a:xfrm>
-              <a:off x="817517" y="2981956"/>
-              <a:ext cx="7235830" cy="2301810"/>
+              <a:off x="817517" y="3108707"/>
+              <a:ext cx="7235830" cy="2195375"/>
             </a:xfrm>
             <a:custGeom>
               <a:avLst/>
               <a:pathLst>
-                <a:path w="7235830" h="2301810">
+                <a:path w="7235830" h="2195375">
                   <a:moveTo>
                     <a:pt x="0" y="0"/>
                   </a:moveTo>
                   <a:lnTo>
-                    <a:pt x="7347" y="5970"/>
-                  </a:lnTo>
-                  <a:lnTo>
-                    <a:pt x="81107" y="64536"/>
-                  </a:lnTo>
-                  <a:lnTo>
-                    <a:pt x="154867" y="121763"/>
-                  </a:lnTo>
-                  <a:lnTo>
-                    <a:pt x="228627" y="177681"/>
-                  </a:lnTo>
-                  <a:lnTo>
-                    <a:pt x="302387" y="232321"/>
-                  </a:lnTo>
-                  <a:lnTo>
-                    <a:pt x="376147" y="285711"/>
-                  </a:lnTo>
-                  <a:lnTo>
-                    <a:pt x="449907" y="337880"/>
-                  </a:lnTo>
-                  <a:lnTo>
-                    <a:pt x="523667" y="388857"/>
-                  </a:lnTo>
-                  <a:lnTo>
-                    <a:pt x="597427" y="438668"/>
-                  </a:lnTo>
-                  <a:lnTo>
-                    <a:pt x="671187" y="487340"/>
-                  </a:lnTo>
-                  <a:lnTo>
-                    <a:pt x="744947" y="534899"/>
-                  </a:lnTo>
-                  <a:lnTo>
-                    <a:pt x="818707" y="581370"/>
-                  </a:lnTo>
-                  <a:lnTo>
-                    <a:pt x="892467" y="626779"/>
-                  </a:lnTo>
-                  <a:lnTo>
-                    <a:pt x="966227" y="671150"/>
-                  </a:lnTo>
-                  <a:lnTo>
-                    <a:pt x="1039987" y="714506"/>
-                  </a:lnTo>
-                  <a:lnTo>
-                    <a:pt x="1113747" y="756870"/>
-                  </a:lnTo>
-                  <a:lnTo>
-                    <a:pt x="1187508" y="798266"/>
-                  </a:lnTo>
-                  <a:lnTo>
-                    <a:pt x="1261268" y="838716"/>
-                  </a:lnTo>
-                  <a:lnTo>
-                    <a:pt x="1335028" y="878240"/>
-                  </a:lnTo>
-                  <a:lnTo>
-                    <a:pt x="1408788" y="916861"/>
-                  </a:lnTo>
-                  <a:lnTo>
-                    <a:pt x="1482548" y="954599"/>
-                  </a:lnTo>
-                  <a:lnTo>
-                    <a:pt x="1556308" y="991473"/>
-                  </a:lnTo>
-                  <a:lnTo>
-                    <a:pt x="1630068" y="1027505"/>
-                  </a:lnTo>
-                  <a:lnTo>
-                    <a:pt x="1703828" y="1062712"/>
-                  </a:lnTo>
-                  <a:lnTo>
-                    <a:pt x="1777588" y="1097115"/>
-                  </a:lnTo>
-                  <a:lnTo>
-                    <a:pt x="1851348" y="1130731"/>
-                  </a:lnTo>
-                  <a:lnTo>
-                    <a:pt x="1925108" y="1163578"/>
-                  </a:lnTo>
-                  <a:lnTo>
-                    <a:pt x="1998868" y="1195674"/>
-                  </a:lnTo>
-                  <a:lnTo>
-                    <a:pt x="2072628" y="1227037"/>
-                  </a:lnTo>
-                  <a:lnTo>
-                    <a:pt x="2146388" y="1257682"/>
-                  </a:lnTo>
-                  <a:lnTo>
-                    <a:pt x="2220148" y="1287626"/>
-                  </a:lnTo>
-                  <a:lnTo>
-                    <a:pt x="2293908" y="1316886"/>
-                  </a:lnTo>
-                  <a:lnTo>
-                    <a:pt x="2367668" y="1345477"/>
-                  </a:lnTo>
-                  <a:lnTo>
-                    <a:pt x="2441428" y="1373414"/>
-                  </a:lnTo>
-                  <a:lnTo>
-                    <a:pt x="2515188" y="1400712"/>
-                  </a:lnTo>
-                  <a:lnTo>
-                    <a:pt x="2588948" y="1427386"/>
-                  </a:lnTo>
-                  <a:lnTo>
-                    <a:pt x="2662708" y="1453450"/>
-                  </a:lnTo>
-                  <a:lnTo>
-                    <a:pt x="2736468" y="1478918"/>
-                  </a:lnTo>
-                  <a:lnTo>
-                    <a:pt x="2810228" y="1503804"/>
-                  </a:lnTo>
-                  <a:lnTo>
-                    <a:pt x="2883988" y="1528120"/>
-                  </a:lnTo>
-                  <a:lnTo>
-                    <a:pt x="2957748" y="1551881"/>
-                  </a:lnTo>
-                  <a:lnTo>
-                    <a:pt x="3031508" y="1575098"/>
-                  </a:lnTo>
-                  <a:lnTo>
-                    <a:pt x="3105268" y="1597785"/>
-                  </a:lnTo>
-                  <a:lnTo>
-                    <a:pt x="3179028" y="1619952"/>
-                  </a:lnTo>
-                  <a:lnTo>
-                    <a:pt x="3252788" y="1641613"/>
-                  </a:lnTo>
-                  <a:lnTo>
-                    <a:pt x="3326548" y="1662779"/>
-                  </a:lnTo>
-                  <a:lnTo>
-                    <a:pt x="3400308" y="1683460"/>
-                  </a:lnTo>
-                  <a:lnTo>
-                    <a:pt x="3474068" y="1700420"/>
-                  </a:lnTo>
-                  <a:lnTo>
-                    <a:pt x="3547828" y="1709717"/>
-                  </a:lnTo>
-                  <a:lnTo>
-                    <a:pt x="3621588" y="1718914"/>
-                  </a:lnTo>
-                  <a:lnTo>
-                    <a:pt x="3695348" y="1728012"/>
-                  </a:lnTo>
-                  <a:lnTo>
-                    <a:pt x="3769108" y="1737013"/>
-                  </a:lnTo>
-                  <a:lnTo>
-                    <a:pt x="3842868" y="1745918"/>
-                  </a:lnTo>
-                  <a:lnTo>
-                    <a:pt x="3916628" y="1754727"/>
-                  </a:lnTo>
-                  <a:lnTo>
-                    <a:pt x="3990388" y="1763441"/>
-                  </a:lnTo>
-                  <a:lnTo>
-                    <a:pt x="4064149" y="1772062"/>
-                  </a:lnTo>
-                  <a:lnTo>
-                    <a:pt x="4137909" y="1780590"/>
-                  </a:lnTo>
-                  <a:lnTo>
-                    <a:pt x="4211669" y="1789027"/>
-                  </a:lnTo>
-                  <a:lnTo>
-                    <a:pt x="4285429" y="1797374"/>
-                  </a:lnTo>
-                  <a:lnTo>
-                    <a:pt x="4359189" y="1805631"/>
-                  </a:lnTo>
-                  <a:lnTo>
-                    <a:pt x="4432949" y="1813799"/>
-                  </a:lnTo>
-                  <a:lnTo>
-                    <a:pt x="4506709" y="1821880"/>
-                  </a:lnTo>
-                  <a:lnTo>
-                    <a:pt x="4580469" y="1829874"/>
-                  </a:lnTo>
-                  <a:lnTo>
-                    <a:pt x="4654229" y="1837783"/>
-                  </a:lnTo>
-                  <a:lnTo>
-                    <a:pt x="4727989" y="1845606"/>
-                  </a:lnTo>
-                  <a:lnTo>
-                    <a:pt x="4801749" y="1853346"/>
-                  </a:lnTo>
-                  <a:lnTo>
-                    <a:pt x="4875509" y="1861003"/>
-                  </a:lnTo>
-                  <a:lnTo>
-                    <a:pt x="4949269" y="1868577"/>
-                  </a:lnTo>
-                  <a:lnTo>
-                    <a:pt x="5023029" y="1876070"/>
-                  </a:lnTo>
-                  <a:lnTo>
-                    <a:pt x="5096789" y="1883483"/>
-                  </a:lnTo>
-                  <a:lnTo>
-                    <a:pt x="5170549" y="1890817"/>
-                  </a:lnTo>
-                  <a:lnTo>
-                    <a:pt x="5244309" y="1898072"/>
-                  </a:lnTo>
-                  <a:lnTo>
-                    <a:pt x="5318069" y="1905249"/>
-                  </a:lnTo>
-                  <a:lnTo>
-                    <a:pt x="5391829" y="1912349"/>
-                  </a:lnTo>
-                  <a:lnTo>
-                    <a:pt x="5465589" y="1919372"/>
-                  </a:lnTo>
-                  <a:lnTo>
-                    <a:pt x="5539349" y="1926321"/>
-                  </a:lnTo>
-                  <a:lnTo>
-                    <a:pt x="5613109" y="1933195"/>
-                  </a:lnTo>
-                  <a:lnTo>
-                    <a:pt x="5686869" y="1939995"/>
-                  </a:lnTo>
-                  <a:lnTo>
-                    <a:pt x="5760629" y="1946723"/>
-                  </a:lnTo>
-                  <a:lnTo>
-                    <a:pt x="5834389" y="1953378"/>
-                  </a:lnTo>
-                  <a:lnTo>
-                    <a:pt x="5908149" y="1959962"/>
-                  </a:lnTo>
-                  <a:lnTo>
-                    <a:pt x="5981909" y="1966475"/>
-                  </a:lnTo>
-                  <a:lnTo>
-                    <a:pt x="6055669" y="1972918"/>
-                  </a:lnTo>
-                  <a:lnTo>
-                    <a:pt x="6129429" y="1979293"/>
-                  </a:lnTo>
-                  <a:lnTo>
-                    <a:pt x="6203189" y="1985598"/>
-                  </a:lnTo>
-                  <a:lnTo>
-                    <a:pt x="6276949" y="1991837"/>
-                  </a:lnTo>
-                  <a:lnTo>
-                    <a:pt x="6350709" y="1998008"/>
-                  </a:lnTo>
-                  <a:lnTo>
-                    <a:pt x="6424469" y="2004113"/>
-                  </a:lnTo>
-                  <a:lnTo>
-                    <a:pt x="6498229" y="2010153"/>
-                  </a:lnTo>
-                  <a:lnTo>
-                    <a:pt x="6571989" y="2016128"/>
-                  </a:lnTo>
-                  <a:lnTo>
-                    <a:pt x="6645749" y="2022039"/>
-                  </a:lnTo>
-                  <a:lnTo>
-                    <a:pt x="6719509" y="2027886"/>
-                  </a:lnTo>
-                  <a:lnTo>
-                    <a:pt x="6793269" y="2033671"/>
-                  </a:lnTo>
-                  <a:lnTo>
-                    <a:pt x="6867029" y="2039393"/>
-                  </a:lnTo>
-                  <a:lnTo>
-                    <a:pt x="6940789" y="2045055"/>
-                  </a:lnTo>
-                  <a:lnTo>
-                    <a:pt x="7014550" y="2050655"/>
-                  </a:lnTo>
-                  <a:lnTo>
-                    <a:pt x="7088310" y="2056196"/>
-                  </a:lnTo>
-                  <a:lnTo>
-                    <a:pt x="7162070" y="2061677"/>
-                  </a:lnTo>
-                  <a:lnTo>
-                    <a:pt x="7235830" y="2067099"/>
-                  </a:lnTo>
-                  <a:lnTo>
-                    <a:pt x="7235830" y="2301810"/>
-                  </a:lnTo>
-                  <a:lnTo>
-                    <a:pt x="7162070" y="2295599"/>
-                  </a:lnTo>
-                  <a:lnTo>
-                    <a:pt x="7088310" y="2289242"/>
-                  </a:lnTo>
-                  <a:lnTo>
-                    <a:pt x="7014550" y="2282736"/>
-                  </a:lnTo>
-                  <a:lnTo>
-                    <a:pt x="6940789" y="2276078"/>
-                  </a:lnTo>
-                  <a:lnTo>
-                    <a:pt x="6867029" y="2269265"/>
-                  </a:lnTo>
-                  <a:lnTo>
-                    <a:pt x="6793269" y="2262291"/>
-                  </a:lnTo>
-                  <a:lnTo>
-                    <a:pt x="6719509" y="2255155"/>
-                  </a:lnTo>
-                  <a:lnTo>
-                    <a:pt x="6645749" y="2247852"/>
-                  </a:lnTo>
-                  <a:lnTo>
-                    <a:pt x="6571989" y="2240378"/>
-                  </a:lnTo>
-                  <a:lnTo>
-                    <a:pt x="6498229" y="2232728"/>
-                  </a:lnTo>
-                  <a:lnTo>
-                    <a:pt x="6424469" y="2224900"/>
-                  </a:lnTo>
-                  <a:lnTo>
-                    <a:pt x="6350709" y="2216889"/>
-                  </a:lnTo>
-                  <a:lnTo>
-                    <a:pt x="6276949" y="2208690"/>
-                  </a:lnTo>
-                  <a:lnTo>
-                    <a:pt x="6203189" y="2200300"/>
-                  </a:lnTo>
-                  <a:lnTo>
-                    <a:pt x="6129429" y="2191713"/>
-                  </a:lnTo>
-                  <a:lnTo>
-                    <a:pt x="6055669" y="2182925"/>
-                  </a:lnTo>
-                  <a:lnTo>
-                    <a:pt x="5981909" y="2173931"/>
-                  </a:lnTo>
-                  <a:lnTo>
-                    <a:pt x="5908149" y="2164727"/>
-                  </a:lnTo>
-                  <a:lnTo>
-                    <a:pt x="5834389" y="2155307"/>
-                  </a:lnTo>
-                  <a:lnTo>
-                    <a:pt x="5760629" y="2145668"/>
-                  </a:lnTo>
-                  <a:lnTo>
-                    <a:pt x="5686869" y="2135802"/>
-                  </a:lnTo>
-                  <a:lnTo>
-                    <a:pt x="5613109" y="2125706"/>
-                  </a:lnTo>
-                  <a:lnTo>
-                    <a:pt x="5539349" y="2115373"/>
-                  </a:lnTo>
-                  <a:lnTo>
-                    <a:pt x="5465589" y="2104799"/>
-                  </a:lnTo>
-                  <a:lnTo>
-                    <a:pt x="5391829" y="2093977"/>
-                  </a:lnTo>
-                  <a:lnTo>
-                    <a:pt x="5318069" y="2082902"/>
-                  </a:lnTo>
-                  <a:lnTo>
-                    <a:pt x="5244309" y="2071568"/>
-                  </a:lnTo>
-                  <a:lnTo>
-                    <a:pt x="5170549" y="2059968"/>
-                  </a:lnTo>
-                  <a:lnTo>
-                    <a:pt x="5096789" y="2048098"/>
-                  </a:lnTo>
-                  <a:lnTo>
-                    <a:pt x="5023029" y="2035949"/>
-                  </a:lnTo>
-                  <a:lnTo>
-                    <a:pt x="4949269" y="2023516"/>
-                  </a:lnTo>
-                  <a:lnTo>
-                    <a:pt x="4875509" y="2010792"/>
-                  </a:lnTo>
-                  <a:lnTo>
-                    <a:pt x="4801749" y="1997770"/>
-                  </a:lnTo>
-                  <a:lnTo>
-                    <a:pt x="4727989" y="1984444"/>
-                  </a:lnTo>
-                  <a:lnTo>
-                    <a:pt x="4654229" y="1970806"/>
-                  </a:lnTo>
-                  <a:lnTo>
-                    <a:pt x="4580469" y="1956848"/>
-                  </a:lnTo>
-                  <a:lnTo>
-                    <a:pt x="4506709" y="1942564"/>
-                  </a:lnTo>
-                  <a:lnTo>
-                    <a:pt x="4432949" y="1927946"/>
-                  </a:lnTo>
-                  <a:lnTo>
-                    <a:pt x="4359189" y="1912986"/>
-                  </a:lnTo>
-                  <a:lnTo>
-                    <a:pt x="4285429" y="1897675"/>
-                  </a:lnTo>
-                  <a:lnTo>
-                    <a:pt x="4211669" y="1882007"/>
-                  </a:lnTo>
-                  <a:lnTo>
-                    <a:pt x="4137909" y="1865971"/>
-                  </a:lnTo>
-                  <a:lnTo>
-                    <a:pt x="4064149" y="1849561"/>
-                  </a:lnTo>
-                  <a:lnTo>
-                    <a:pt x="3990388" y="1832766"/>
-                  </a:lnTo>
-                  <a:lnTo>
-                    <a:pt x="3916628" y="1815578"/>
-                  </a:lnTo>
-                  <a:lnTo>
-                    <a:pt x="3842868" y="1797988"/>
-                  </a:lnTo>
-                  <a:lnTo>
-                    <a:pt x="3769108" y="1779987"/>
-                  </a:lnTo>
-                  <a:lnTo>
-                    <a:pt x="3695348" y="1761564"/>
-                  </a:lnTo>
-                  <a:lnTo>
-                    <a:pt x="3621588" y="1742710"/>
-                  </a:lnTo>
-                  <a:lnTo>
-                    <a:pt x="3547828" y="1723415"/>
-                  </a:lnTo>
-                  <a:lnTo>
-                    <a:pt x="3474068" y="1703669"/>
-                  </a:lnTo>
-                  <a:lnTo>
-                    <a:pt x="3400308" y="1691022"/>
-                  </a:lnTo>
-                  <a:lnTo>
-                    <a:pt x="3326548" y="1681523"/>
-                  </a:lnTo>
-                  <a:lnTo>
-                    <a:pt x="3252788" y="1671920"/>
-                  </a:lnTo>
-                  <a:lnTo>
-                    <a:pt x="3179028" y="1662214"/>
-                  </a:lnTo>
-                  <a:lnTo>
-                    <a:pt x="3105268" y="1652402"/>
-                  </a:lnTo>
-                  <a:lnTo>
-                    <a:pt x="3031508" y="1642484"/>
-                  </a:lnTo>
-                  <a:lnTo>
-                    <a:pt x="2957748" y="1632458"/>
-                  </a:lnTo>
-                  <a:lnTo>
-                    <a:pt x="2883988" y="1622324"/>
-                  </a:lnTo>
-                  <a:lnTo>
-                    <a:pt x="2810228" y="1612080"/>
-                  </a:lnTo>
-                  <a:lnTo>
-                    <a:pt x="2736468" y="1601724"/>
-                  </a:lnTo>
-                  <a:lnTo>
-                    <a:pt x="2662708" y="1591257"/>
-                  </a:lnTo>
-                  <a:lnTo>
-                    <a:pt x="2588948" y="1580676"/>
-                  </a:lnTo>
-                  <a:lnTo>
-                    <a:pt x="2515188" y="1569980"/>
-                  </a:lnTo>
-                  <a:lnTo>
-                    <a:pt x="2441428" y="1559168"/>
-                  </a:lnTo>
-                  <a:lnTo>
-                    <a:pt x="2367668" y="1548239"/>
-                  </a:lnTo>
-                  <a:lnTo>
-                    <a:pt x="2293908" y="1537192"/>
-                  </a:lnTo>
-                  <a:lnTo>
-                    <a:pt x="2220148" y="1526024"/>
-                  </a:lnTo>
-                  <a:lnTo>
-                    <a:pt x="2146388" y="1514736"/>
-                  </a:lnTo>
-                  <a:lnTo>
-                    <a:pt x="2072628" y="1503325"/>
-                  </a:lnTo>
-                  <a:lnTo>
-                    <a:pt x="1998868" y="1491791"/>
-                  </a:lnTo>
-                  <a:lnTo>
-                    <a:pt x="1925108" y="1480132"/>
-                  </a:lnTo>
-                  <a:lnTo>
-                    <a:pt x="1851348" y="1468346"/>
-                  </a:lnTo>
-                  <a:lnTo>
-                    <a:pt x="1777588" y="1456432"/>
-                  </a:lnTo>
-                  <a:lnTo>
-                    <a:pt x="1703828" y="1444389"/>
-                  </a:lnTo>
-                  <a:lnTo>
-                    <a:pt x="1630068" y="1432216"/>
-                  </a:lnTo>
-                  <a:lnTo>
-                    <a:pt x="1556308" y="1419911"/>
-                  </a:lnTo>
-                  <a:lnTo>
-                    <a:pt x="1482548" y="1407472"/>
-                  </a:lnTo>
-                  <a:lnTo>
-                    <a:pt x="1408788" y="1394898"/>
-                  </a:lnTo>
-                  <a:lnTo>
-                    <a:pt x="1335028" y="1382189"/>
-                  </a:lnTo>
-                  <a:lnTo>
-                    <a:pt x="1261268" y="1369341"/>
-                  </a:lnTo>
-                  <a:lnTo>
-                    <a:pt x="1187508" y="1356354"/>
-                  </a:lnTo>
-                  <a:lnTo>
-                    <a:pt x="1113747" y="1343226"/>
-                  </a:lnTo>
-                  <a:lnTo>
-                    <a:pt x="1039987" y="1329956"/>
-                  </a:lnTo>
-                  <a:lnTo>
-                    <a:pt x="966227" y="1316542"/>
-                  </a:lnTo>
-                  <a:lnTo>
-                    <a:pt x="892467" y="1302983"/>
-                  </a:lnTo>
-                  <a:lnTo>
-                    <a:pt x="818707" y="1289277"/>
-                  </a:lnTo>
-                  <a:lnTo>
-                    <a:pt x="744947" y="1275422"/>
-                  </a:lnTo>
-                  <a:lnTo>
-                    <a:pt x="671187" y="1261416"/>
-                  </a:lnTo>
-                  <a:lnTo>
-                    <a:pt x="597427" y="1247259"/>
-                  </a:lnTo>
-                  <a:lnTo>
-                    <a:pt x="523667" y="1232949"/>
-                  </a:lnTo>
-                  <a:lnTo>
-                    <a:pt x="449907" y="1218483"/>
-                  </a:lnTo>
-                  <a:lnTo>
-                    <a:pt x="376147" y="1203861"/>
-                  </a:lnTo>
-                  <a:lnTo>
-                    <a:pt x="302387" y="1189080"/>
-                  </a:lnTo>
-                  <a:lnTo>
-                    <a:pt x="228627" y="1174139"/>
-                  </a:lnTo>
-                  <a:lnTo>
-                    <a:pt x="154867" y="1159035"/>
-                  </a:lnTo>
-                  <a:lnTo>
-                    <a:pt x="81107" y="1143768"/>
-                  </a:lnTo>
-                  <a:lnTo>
-                    <a:pt x="7347" y="1128336"/>
-                  </a:lnTo>
-                  <a:lnTo>
-                    <a:pt x="0" y="1126782"/>
+                    <a:pt x="7347" y="5694"/>
+                  </a:lnTo>
+                  <a:lnTo>
+                    <a:pt x="81107" y="61552"/>
+                  </a:lnTo>
+                  <a:lnTo>
+                    <a:pt x="154867" y="116133"/>
+                  </a:lnTo>
+                  <a:lnTo>
+                    <a:pt x="228627" y="169465"/>
+                  </a:lnTo>
+                  <a:lnTo>
+                    <a:pt x="302387" y="221578"/>
+                  </a:lnTo>
+                  <a:lnTo>
+                    <a:pt x="376147" y="272500"/>
+                  </a:lnTo>
+                  <a:lnTo>
+                    <a:pt x="449907" y="322257"/>
+                  </a:lnTo>
+                  <a:lnTo>
+                    <a:pt x="523667" y="370876"/>
+                  </a:lnTo>
+                  <a:lnTo>
+                    <a:pt x="597427" y="418384"/>
+                  </a:lnTo>
+                  <a:lnTo>
+                    <a:pt x="671187" y="464805"/>
+                  </a:lnTo>
+                  <a:lnTo>
+                    <a:pt x="744947" y="510165"/>
+                  </a:lnTo>
+                  <a:lnTo>
+                    <a:pt x="818707" y="554488"/>
+                  </a:lnTo>
+                  <a:lnTo>
+                    <a:pt x="892467" y="597797"/>
+                  </a:lnTo>
+                  <a:lnTo>
+                    <a:pt x="966227" y="640116"/>
+                  </a:lnTo>
+                  <a:lnTo>
+                    <a:pt x="1039987" y="681467"/>
+                  </a:lnTo>
+                  <a:lnTo>
+                    <a:pt x="1113747" y="721873"/>
+                  </a:lnTo>
+                  <a:lnTo>
+                    <a:pt x="1187508" y="761355"/>
+                  </a:lnTo>
+                  <a:lnTo>
+                    <a:pt x="1261268" y="799934"/>
+                  </a:lnTo>
+                  <a:lnTo>
+                    <a:pt x="1335028" y="837631"/>
+                  </a:lnTo>
+                  <a:lnTo>
+                    <a:pt x="1408788" y="874466"/>
+                  </a:lnTo>
+                  <a:lnTo>
+                    <a:pt x="1482548" y="910458"/>
+                  </a:lnTo>
+                  <a:lnTo>
+                    <a:pt x="1556308" y="945628"/>
+                  </a:lnTo>
+                  <a:lnTo>
+                    <a:pt x="1630068" y="979993"/>
+                  </a:lnTo>
+                  <a:lnTo>
+                    <a:pt x="1703828" y="1013573"/>
+                  </a:lnTo>
+                  <a:lnTo>
+                    <a:pt x="1777588" y="1046385"/>
+                  </a:lnTo>
+                  <a:lnTo>
+                    <a:pt x="1851348" y="1078446"/>
+                  </a:lnTo>
+                  <a:lnTo>
+                    <a:pt x="1925108" y="1109775"/>
+                  </a:lnTo>
+                  <a:lnTo>
+                    <a:pt x="1998868" y="1140387"/>
+                  </a:lnTo>
+                  <a:lnTo>
+                    <a:pt x="2072628" y="1170299"/>
+                  </a:lnTo>
+                  <a:lnTo>
+                    <a:pt x="2146388" y="1199527"/>
+                  </a:lnTo>
+                  <a:lnTo>
+                    <a:pt x="2220148" y="1228087"/>
+                  </a:lnTo>
+                  <a:lnTo>
+                    <a:pt x="2293908" y="1255994"/>
+                  </a:lnTo>
+                  <a:lnTo>
+                    <a:pt x="2367668" y="1283262"/>
+                  </a:lnTo>
+                  <a:lnTo>
+                    <a:pt x="2441428" y="1309908"/>
+                  </a:lnTo>
+                  <a:lnTo>
+                    <a:pt x="2515188" y="1335943"/>
+                  </a:lnTo>
+                  <a:lnTo>
+                    <a:pt x="2588948" y="1361384"/>
+                  </a:lnTo>
+                  <a:lnTo>
+                    <a:pt x="2662708" y="1386243"/>
+                  </a:lnTo>
+                  <a:lnTo>
+                    <a:pt x="2736468" y="1410533"/>
+                  </a:lnTo>
+                  <a:lnTo>
+                    <a:pt x="2810228" y="1434268"/>
+                  </a:lnTo>
+                  <a:lnTo>
+                    <a:pt x="2883988" y="1457460"/>
+                  </a:lnTo>
+                  <a:lnTo>
+                    <a:pt x="2957748" y="1480122"/>
+                  </a:lnTo>
+                  <a:lnTo>
+                    <a:pt x="3031508" y="1502266"/>
+                  </a:lnTo>
+                  <a:lnTo>
+                    <a:pt x="3105268" y="1523904"/>
+                  </a:lnTo>
+                  <a:lnTo>
+                    <a:pt x="3179028" y="1545046"/>
+                  </a:lnTo>
+                  <a:lnTo>
+                    <a:pt x="3252788" y="1565706"/>
+                  </a:lnTo>
+                  <a:lnTo>
+                    <a:pt x="3326548" y="1585892"/>
+                  </a:lnTo>
+                  <a:lnTo>
+                    <a:pt x="3400308" y="1605618"/>
+                  </a:lnTo>
+                  <a:lnTo>
+                    <a:pt x="3474068" y="1621793"/>
+                  </a:lnTo>
+                  <a:lnTo>
+                    <a:pt x="3547828" y="1630660"/>
+                  </a:lnTo>
+                  <a:lnTo>
+                    <a:pt x="3621588" y="1639432"/>
+                  </a:lnTo>
+                  <a:lnTo>
+                    <a:pt x="3695348" y="1648110"/>
+                  </a:lnTo>
+                  <a:lnTo>
+                    <a:pt x="3769108" y="1656694"/>
+                  </a:lnTo>
+                  <a:lnTo>
+                    <a:pt x="3842868" y="1665187"/>
+                  </a:lnTo>
+                  <a:lnTo>
+                    <a:pt x="3916628" y="1673589"/>
+                  </a:lnTo>
+                  <a:lnTo>
+                    <a:pt x="3990388" y="1681900"/>
+                  </a:lnTo>
+                  <a:lnTo>
+                    <a:pt x="4064149" y="1690122"/>
+                  </a:lnTo>
+                  <a:lnTo>
+                    <a:pt x="4137909" y="1698256"/>
+                  </a:lnTo>
+                  <a:lnTo>
+                    <a:pt x="4211669" y="1706303"/>
+                  </a:lnTo>
+                  <a:lnTo>
+                    <a:pt x="4285429" y="1714264"/>
+                  </a:lnTo>
+                  <a:lnTo>
+                    <a:pt x="4359189" y="1722139"/>
+                  </a:lnTo>
+                  <a:lnTo>
+                    <a:pt x="4432949" y="1729930"/>
+                  </a:lnTo>
+                  <a:lnTo>
+                    <a:pt x="4506709" y="1737637"/>
+                  </a:lnTo>
+                  <a:lnTo>
+                    <a:pt x="4580469" y="1745261"/>
+                  </a:lnTo>
+                  <a:lnTo>
+                    <a:pt x="4654229" y="1752804"/>
+                  </a:lnTo>
+                  <a:lnTo>
+                    <a:pt x="4727989" y="1760266"/>
+                  </a:lnTo>
+                  <a:lnTo>
+                    <a:pt x="4801749" y="1767648"/>
+                  </a:lnTo>
+                  <a:lnTo>
+                    <a:pt x="4875509" y="1774950"/>
+                  </a:lnTo>
+                  <a:lnTo>
+                    <a:pt x="4949269" y="1782175"/>
+                  </a:lnTo>
+                  <a:lnTo>
+                    <a:pt x="5023029" y="1789322"/>
+                  </a:lnTo>
+                  <a:lnTo>
+                    <a:pt x="5096789" y="1796392"/>
+                  </a:lnTo>
+                  <a:lnTo>
+                    <a:pt x="5170549" y="1803386"/>
+                  </a:lnTo>
+                  <a:lnTo>
+                    <a:pt x="5244309" y="1810305"/>
+                  </a:lnTo>
+                  <a:lnTo>
+                    <a:pt x="5318069" y="1817151"/>
+                  </a:lnTo>
+                  <a:lnTo>
+                    <a:pt x="5391829" y="1823922"/>
+                  </a:lnTo>
+                  <a:lnTo>
+                    <a:pt x="5465589" y="1830621"/>
+                  </a:lnTo>
+                  <a:lnTo>
+                    <a:pt x="5539349" y="1837249"/>
+                  </a:lnTo>
+                  <a:lnTo>
+                    <a:pt x="5613109" y="1843805"/>
+                  </a:lnTo>
+                  <a:lnTo>
+                    <a:pt x="5686869" y="1850291"/>
+                  </a:lnTo>
+                  <a:lnTo>
+                    <a:pt x="5760629" y="1856707"/>
+                  </a:lnTo>
+                  <a:lnTo>
+                    <a:pt x="5834389" y="1863054"/>
+                  </a:lnTo>
+                  <a:lnTo>
+                    <a:pt x="5908149" y="1869334"/>
+                  </a:lnTo>
+                  <a:lnTo>
+                    <a:pt x="5981909" y="1875546"/>
+                  </a:lnTo>
+                  <a:lnTo>
+                    <a:pt x="6055669" y="1881691"/>
+                  </a:lnTo>
+                  <a:lnTo>
+                    <a:pt x="6129429" y="1887771"/>
+                  </a:lnTo>
+                  <a:lnTo>
+                    <a:pt x="6203189" y="1893785"/>
+                  </a:lnTo>
+                  <a:lnTo>
+                    <a:pt x="6276949" y="1899735"/>
+                  </a:lnTo>
+                  <a:lnTo>
+                    <a:pt x="6350709" y="1905621"/>
+                  </a:lnTo>
+                  <a:lnTo>
+                    <a:pt x="6424469" y="1911444"/>
+                  </a:lnTo>
+                  <a:lnTo>
+                    <a:pt x="6498229" y="1917204"/>
+                  </a:lnTo>
+                  <a:lnTo>
+                    <a:pt x="6571989" y="1922903"/>
+                  </a:lnTo>
+                  <a:lnTo>
+                    <a:pt x="6645749" y="1928540"/>
+                  </a:lnTo>
+                  <a:lnTo>
+                    <a:pt x="6719509" y="1934117"/>
+                  </a:lnTo>
+                  <a:lnTo>
+                    <a:pt x="6793269" y="1939635"/>
+                  </a:lnTo>
+                  <a:lnTo>
+                    <a:pt x="6867029" y="1945093"/>
+                  </a:lnTo>
+                  <a:lnTo>
+                    <a:pt x="6940789" y="1950492"/>
+                  </a:lnTo>
+                  <a:lnTo>
+                    <a:pt x="7014550" y="1955834"/>
+                  </a:lnTo>
+                  <a:lnTo>
+                    <a:pt x="7088310" y="1961118"/>
+                  </a:lnTo>
+                  <a:lnTo>
+                    <a:pt x="7162070" y="1966346"/>
+                  </a:lnTo>
+                  <a:lnTo>
+                    <a:pt x="7235830" y="1971517"/>
+                  </a:lnTo>
+                  <a:lnTo>
+                    <a:pt x="7235830" y="2195375"/>
+                  </a:lnTo>
+                  <a:lnTo>
+                    <a:pt x="7162070" y="2189451"/>
+                  </a:lnTo>
+                  <a:lnTo>
+                    <a:pt x="7088310" y="2183388"/>
+                  </a:lnTo>
+                  <a:lnTo>
+                    <a:pt x="7014550" y="2177183"/>
+                  </a:lnTo>
+                  <a:lnTo>
+                    <a:pt x="6940789" y="2170833"/>
+                  </a:lnTo>
+                  <a:lnTo>
+                    <a:pt x="6867029" y="2164335"/>
+                  </a:lnTo>
+                  <a:lnTo>
+                    <a:pt x="6793269" y="2157684"/>
+                  </a:lnTo>
+                  <a:lnTo>
+                    <a:pt x="6719509" y="2150878"/>
+                  </a:lnTo>
+                  <a:lnTo>
+                    <a:pt x="6645749" y="2143912"/>
+                  </a:lnTo>
+                  <a:lnTo>
+                    <a:pt x="6571989" y="2136783"/>
+                  </a:lnTo>
+                  <a:lnTo>
+                    <a:pt x="6498229" y="2129488"/>
+                  </a:lnTo>
+                  <a:lnTo>
+                    <a:pt x="6424469" y="2122022"/>
+                  </a:lnTo>
+                  <a:lnTo>
+                    <a:pt x="6350709" y="2114381"/>
+                  </a:lnTo>
+                  <a:lnTo>
+                    <a:pt x="6276949" y="2106561"/>
+                  </a:lnTo>
+                  <a:lnTo>
+                    <a:pt x="6203189" y="2098558"/>
+                  </a:lnTo>
+                  <a:lnTo>
+                    <a:pt x="6129429" y="2090369"/>
+                  </a:lnTo>
+                  <a:lnTo>
+                    <a:pt x="6055669" y="2081987"/>
+                  </a:lnTo>
+                  <a:lnTo>
+                    <a:pt x="5981909" y="2073409"/>
+                  </a:lnTo>
+                  <a:lnTo>
+                    <a:pt x="5908149" y="2064631"/>
+                  </a:lnTo>
+                  <a:lnTo>
+                    <a:pt x="5834389" y="2055647"/>
+                  </a:lnTo>
+                  <a:lnTo>
+                    <a:pt x="5760629" y="2046453"/>
+                  </a:lnTo>
+                  <a:lnTo>
+                    <a:pt x="5686869" y="2037043"/>
+                  </a:lnTo>
+                  <a:lnTo>
+                    <a:pt x="5613109" y="2027414"/>
+                  </a:lnTo>
+                  <a:lnTo>
+                    <a:pt x="5539349" y="2017559"/>
+                  </a:lnTo>
+                  <a:lnTo>
+                    <a:pt x="5465589" y="2007474"/>
+                  </a:lnTo>
+                  <a:lnTo>
+                    <a:pt x="5391829" y="1997152"/>
+                  </a:lnTo>
+                  <a:lnTo>
+                    <a:pt x="5318069" y="1986589"/>
+                  </a:lnTo>
+                  <a:lnTo>
+                    <a:pt x="5244309" y="1975779"/>
+                  </a:lnTo>
+                  <a:lnTo>
+                    <a:pt x="5170549" y="1964716"/>
+                  </a:lnTo>
+                  <a:lnTo>
+                    <a:pt x="5096789" y="1953394"/>
+                  </a:lnTo>
+                  <a:lnTo>
+                    <a:pt x="5023029" y="1941807"/>
+                  </a:lnTo>
+                  <a:lnTo>
+                    <a:pt x="4949269" y="1929949"/>
+                  </a:lnTo>
+                  <a:lnTo>
+                    <a:pt x="4875509" y="1917814"/>
+                  </a:lnTo>
+                  <a:lnTo>
+                    <a:pt x="4801749" y="1905394"/>
+                  </a:lnTo>
+                  <a:lnTo>
+                    <a:pt x="4727989" y="1892684"/>
+                  </a:lnTo>
+                  <a:lnTo>
+                    <a:pt x="4654229" y="1879676"/>
+                  </a:lnTo>
+                  <a:lnTo>
+                    <a:pt x="4580469" y="1866364"/>
+                  </a:lnTo>
+                  <a:lnTo>
+                    <a:pt x="4506709" y="1852741"/>
+                  </a:lnTo>
+                  <a:lnTo>
+                    <a:pt x="4432949" y="1838799"/>
+                  </a:lnTo>
+                  <a:lnTo>
+                    <a:pt x="4359189" y="1824530"/>
+                  </a:lnTo>
+                  <a:lnTo>
+                    <a:pt x="4285429" y="1809927"/>
+                  </a:lnTo>
+                  <a:lnTo>
+                    <a:pt x="4211669" y="1794983"/>
+                  </a:lnTo>
+                  <a:lnTo>
+                    <a:pt x="4137909" y="1779689"/>
+                  </a:lnTo>
+                  <a:lnTo>
+                    <a:pt x="4064149" y="1764038"/>
+                  </a:lnTo>
+                  <a:lnTo>
+                    <a:pt x="3990388" y="1748020"/>
+                  </a:lnTo>
+                  <a:lnTo>
+                    <a:pt x="3916628" y="1731627"/>
+                  </a:lnTo>
+                  <a:lnTo>
+                    <a:pt x="3842868" y="1714850"/>
+                  </a:lnTo>
+                  <a:lnTo>
+                    <a:pt x="3769108" y="1697681"/>
+                  </a:lnTo>
+                  <a:lnTo>
+                    <a:pt x="3695348" y="1680110"/>
+                  </a:lnTo>
+                  <a:lnTo>
+                    <a:pt x="3621588" y="1662128"/>
+                  </a:lnTo>
+                  <a:lnTo>
+                    <a:pt x="3547828" y="1643725"/>
+                  </a:lnTo>
+                  <a:lnTo>
+                    <a:pt x="3474068" y="1624892"/>
+                  </a:lnTo>
+                  <a:lnTo>
+                    <a:pt x="3400308" y="1612830"/>
+                  </a:lnTo>
+                  <a:lnTo>
+                    <a:pt x="3326548" y="1603770"/>
+                  </a:lnTo>
+                  <a:lnTo>
+                    <a:pt x="3252788" y="1594611"/>
+                  </a:lnTo>
+                  <a:lnTo>
+                    <a:pt x="3179028" y="1585354"/>
+                  </a:lnTo>
+                  <a:lnTo>
+                    <a:pt x="3105268" y="1575996"/>
+                  </a:lnTo>
+                  <a:lnTo>
+                    <a:pt x="3031508" y="1566536"/>
+                  </a:lnTo>
+                  <a:lnTo>
+                    <a:pt x="2957748" y="1556974"/>
+                  </a:lnTo>
+                  <a:lnTo>
+                    <a:pt x="2883988" y="1547308"/>
+                  </a:lnTo>
+                  <a:lnTo>
+                    <a:pt x="2810228" y="1537538"/>
+                  </a:lnTo>
+                  <a:lnTo>
+                    <a:pt x="2736468" y="1527661"/>
+                  </a:lnTo>
+                  <a:lnTo>
+                    <a:pt x="2662708" y="1517677"/>
+                  </a:lnTo>
+                  <a:lnTo>
+                    <a:pt x="2588948" y="1507586"/>
+                  </a:lnTo>
+                  <a:lnTo>
+                    <a:pt x="2515188" y="1497384"/>
+                  </a:lnTo>
+                  <a:lnTo>
+                    <a:pt x="2441428" y="1487073"/>
+                  </a:lnTo>
+                  <a:lnTo>
+                    <a:pt x="2367668" y="1476649"/>
+                  </a:lnTo>
+                  <a:lnTo>
+                    <a:pt x="2293908" y="1466112"/>
+                  </a:lnTo>
+                  <a:lnTo>
+                    <a:pt x="2220148" y="1455461"/>
+                  </a:lnTo>
+                  <a:lnTo>
+                    <a:pt x="2146388" y="1444695"/>
+                  </a:lnTo>
+                  <a:lnTo>
+                    <a:pt x="2072628" y="1433812"/>
+                  </a:lnTo>
+                  <a:lnTo>
+                    <a:pt x="1998868" y="1422811"/>
+                  </a:lnTo>
+                  <a:lnTo>
+                    <a:pt x="1925108" y="1411691"/>
+                  </a:lnTo>
+                  <a:lnTo>
+                    <a:pt x="1851348" y="1400450"/>
+                  </a:lnTo>
+                  <a:lnTo>
+                    <a:pt x="1777588" y="1389087"/>
+                  </a:lnTo>
+                  <a:lnTo>
+                    <a:pt x="1703828" y="1377601"/>
+                  </a:lnTo>
+                  <a:lnTo>
+                    <a:pt x="1630068" y="1365991"/>
+                  </a:lnTo>
+                  <a:lnTo>
+                    <a:pt x="1556308" y="1354255"/>
+                  </a:lnTo>
+                  <a:lnTo>
+                    <a:pt x="1482548" y="1342391"/>
+                  </a:lnTo>
+                  <a:lnTo>
+                    <a:pt x="1408788" y="1330399"/>
+                  </a:lnTo>
+                  <a:lnTo>
+                    <a:pt x="1335028" y="1318277"/>
+                  </a:lnTo>
+                  <a:lnTo>
+                    <a:pt x="1261268" y="1306023"/>
+                  </a:lnTo>
+                  <a:lnTo>
+                    <a:pt x="1187508" y="1293637"/>
+                  </a:lnTo>
+                  <a:lnTo>
+                    <a:pt x="1113747" y="1281116"/>
+                  </a:lnTo>
+                  <a:lnTo>
+                    <a:pt x="1039987" y="1268459"/>
+                  </a:lnTo>
+                  <a:lnTo>
+                    <a:pt x="966227" y="1255666"/>
+                  </a:lnTo>
+                  <a:lnTo>
+                    <a:pt x="892467" y="1242733"/>
+                  </a:lnTo>
+                  <a:lnTo>
+                    <a:pt x="818707" y="1229661"/>
+                  </a:lnTo>
+                  <a:lnTo>
+                    <a:pt x="744947" y="1216447"/>
+                  </a:lnTo>
+                  <a:lnTo>
+                    <a:pt x="671187" y="1203089"/>
+                  </a:lnTo>
+                  <a:lnTo>
+                    <a:pt x="597427" y="1189587"/>
+                  </a:lnTo>
+                  <a:lnTo>
+                    <a:pt x="523667" y="1175938"/>
+                  </a:lnTo>
+                  <a:lnTo>
+                    <a:pt x="449907" y="1162141"/>
+                  </a:lnTo>
+                  <a:lnTo>
+                    <a:pt x="376147" y="1148195"/>
+                  </a:lnTo>
+                  <a:lnTo>
+                    <a:pt x="302387" y="1134097"/>
+                  </a:lnTo>
+                  <a:lnTo>
+                    <a:pt x="228627" y="1119847"/>
+                  </a:lnTo>
+                  <a:lnTo>
+                    <a:pt x="154867" y="1105442"/>
+                  </a:lnTo>
+                  <a:lnTo>
+                    <a:pt x="81107" y="1090881"/>
+                  </a:lnTo>
+                  <a:lnTo>
+                    <a:pt x="7347" y="1076162"/>
+                  </a:lnTo>
+                  <a:lnTo>
+                    <a:pt x="0" y="1074680"/>
                   </a:lnTo>
                   <a:close/>
                 </a:path>
@@ -3633,312 +3633,312 @@
           </p:nvSpPr>
           <p:spPr>
             <a:xfrm>
-              <a:off x="817517" y="2981956"/>
-              <a:ext cx="7235830" cy="2067099"/>
+              <a:off x="817517" y="3108707"/>
+              <a:ext cx="7235830" cy="1971517"/>
             </a:xfrm>
             <a:custGeom>
               <a:avLst/>
               <a:pathLst>
-                <a:path w="7235830" h="2067099">
+                <a:path w="7235830" h="1971517">
                   <a:moveTo>
                     <a:pt x="0" y="0"/>
                   </a:moveTo>
                   <a:lnTo>
-                    <a:pt x="7347" y="5970"/>
-                  </a:lnTo>
-                  <a:lnTo>
-                    <a:pt x="81107" y="64536"/>
-                  </a:lnTo>
-                  <a:lnTo>
-                    <a:pt x="154867" y="121763"/>
-                  </a:lnTo>
-                  <a:lnTo>
-                    <a:pt x="228627" y="177681"/>
-                  </a:lnTo>
-                  <a:lnTo>
-                    <a:pt x="302387" y="232321"/>
-                  </a:lnTo>
-                  <a:lnTo>
-                    <a:pt x="376147" y="285711"/>
-                  </a:lnTo>
-                  <a:lnTo>
-                    <a:pt x="449907" y="337880"/>
-                  </a:lnTo>
-                  <a:lnTo>
-                    <a:pt x="523667" y="388857"/>
-                  </a:lnTo>
-                  <a:lnTo>
-                    <a:pt x="597427" y="438668"/>
-                  </a:lnTo>
-                  <a:lnTo>
-                    <a:pt x="671187" y="487340"/>
-                  </a:lnTo>
-                  <a:lnTo>
-                    <a:pt x="744947" y="534899"/>
-                  </a:lnTo>
-                  <a:lnTo>
-                    <a:pt x="818707" y="581370"/>
-                  </a:lnTo>
-                  <a:lnTo>
-                    <a:pt x="892467" y="626779"/>
-                  </a:lnTo>
-                  <a:lnTo>
-                    <a:pt x="966227" y="671150"/>
-                  </a:lnTo>
-                  <a:lnTo>
-                    <a:pt x="1039987" y="714506"/>
-                  </a:lnTo>
-                  <a:lnTo>
-                    <a:pt x="1113747" y="756870"/>
-                  </a:lnTo>
-                  <a:lnTo>
-                    <a:pt x="1187508" y="798266"/>
-                  </a:lnTo>
-                  <a:lnTo>
-                    <a:pt x="1261268" y="838716"/>
-                  </a:lnTo>
-                  <a:lnTo>
-                    <a:pt x="1335028" y="878240"/>
-                  </a:lnTo>
-                  <a:lnTo>
-                    <a:pt x="1408788" y="916861"/>
-                  </a:lnTo>
-                  <a:lnTo>
-                    <a:pt x="1482548" y="954599"/>
-                  </a:lnTo>
-                  <a:lnTo>
-                    <a:pt x="1556308" y="991473"/>
-                  </a:lnTo>
-                  <a:lnTo>
-                    <a:pt x="1630068" y="1027505"/>
-                  </a:lnTo>
-                  <a:lnTo>
-                    <a:pt x="1703828" y="1062712"/>
-                  </a:lnTo>
-                  <a:lnTo>
-                    <a:pt x="1777588" y="1097115"/>
-                  </a:lnTo>
-                  <a:lnTo>
-                    <a:pt x="1851348" y="1130731"/>
-                  </a:lnTo>
-                  <a:lnTo>
-                    <a:pt x="1925108" y="1163578"/>
-                  </a:lnTo>
-                  <a:lnTo>
-                    <a:pt x="1998868" y="1195674"/>
-                  </a:lnTo>
-                  <a:lnTo>
-                    <a:pt x="2072628" y="1227037"/>
-                  </a:lnTo>
-                  <a:lnTo>
-                    <a:pt x="2146388" y="1257682"/>
-                  </a:lnTo>
-                  <a:lnTo>
-                    <a:pt x="2220148" y="1287626"/>
-                  </a:lnTo>
-                  <a:lnTo>
-                    <a:pt x="2293908" y="1316886"/>
-                  </a:lnTo>
-                  <a:lnTo>
-                    <a:pt x="2367668" y="1345477"/>
-                  </a:lnTo>
-                  <a:lnTo>
-                    <a:pt x="2441428" y="1373414"/>
-                  </a:lnTo>
-                  <a:lnTo>
-                    <a:pt x="2515188" y="1400712"/>
-                  </a:lnTo>
-                  <a:lnTo>
-                    <a:pt x="2588948" y="1427386"/>
-                  </a:lnTo>
-                  <a:lnTo>
-                    <a:pt x="2662708" y="1453450"/>
-                  </a:lnTo>
-                  <a:lnTo>
-                    <a:pt x="2736468" y="1478918"/>
-                  </a:lnTo>
-                  <a:lnTo>
-                    <a:pt x="2810228" y="1503804"/>
-                  </a:lnTo>
-                  <a:lnTo>
-                    <a:pt x="2883988" y="1528120"/>
-                  </a:lnTo>
-                  <a:lnTo>
-                    <a:pt x="2957748" y="1551881"/>
-                  </a:lnTo>
-                  <a:lnTo>
-                    <a:pt x="3031508" y="1575098"/>
-                  </a:lnTo>
-                  <a:lnTo>
-                    <a:pt x="3105268" y="1597785"/>
-                  </a:lnTo>
-                  <a:lnTo>
-                    <a:pt x="3179028" y="1619952"/>
-                  </a:lnTo>
-                  <a:lnTo>
-                    <a:pt x="3252788" y="1641613"/>
-                  </a:lnTo>
-                  <a:lnTo>
-                    <a:pt x="3326548" y="1662779"/>
-                  </a:lnTo>
-                  <a:lnTo>
-                    <a:pt x="3400308" y="1683460"/>
-                  </a:lnTo>
-                  <a:lnTo>
-                    <a:pt x="3474068" y="1700420"/>
-                  </a:lnTo>
-                  <a:lnTo>
-                    <a:pt x="3547828" y="1709717"/>
-                  </a:lnTo>
-                  <a:lnTo>
-                    <a:pt x="3621588" y="1718914"/>
-                  </a:lnTo>
-                  <a:lnTo>
-                    <a:pt x="3695348" y="1728012"/>
-                  </a:lnTo>
-                  <a:lnTo>
-                    <a:pt x="3769108" y="1737013"/>
-                  </a:lnTo>
-                  <a:lnTo>
-                    <a:pt x="3842868" y="1745918"/>
-                  </a:lnTo>
-                  <a:lnTo>
-                    <a:pt x="3916628" y="1754727"/>
-                  </a:lnTo>
-                  <a:lnTo>
-                    <a:pt x="3990388" y="1763441"/>
-                  </a:lnTo>
-                  <a:lnTo>
-                    <a:pt x="4064149" y="1772062"/>
-                  </a:lnTo>
-                  <a:lnTo>
-                    <a:pt x="4137909" y="1780590"/>
-                  </a:lnTo>
-                  <a:lnTo>
-                    <a:pt x="4211669" y="1789027"/>
-                  </a:lnTo>
-                  <a:lnTo>
-                    <a:pt x="4285429" y="1797374"/>
-                  </a:lnTo>
-                  <a:lnTo>
-                    <a:pt x="4359189" y="1805631"/>
-                  </a:lnTo>
-                  <a:lnTo>
-                    <a:pt x="4432949" y="1813799"/>
-                  </a:lnTo>
-                  <a:lnTo>
-                    <a:pt x="4506709" y="1821880"/>
-                  </a:lnTo>
-                  <a:lnTo>
-                    <a:pt x="4580469" y="1829874"/>
-                  </a:lnTo>
-                  <a:lnTo>
-                    <a:pt x="4654229" y="1837783"/>
-                  </a:lnTo>
-                  <a:lnTo>
-                    <a:pt x="4727989" y="1845606"/>
-                  </a:lnTo>
-                  <a:lnTo>
-                    <a:pt x="4801749" y="1853346"/>
-                  </a:lnTo>
-                  <a:lnTo>
-                    <a:pt x="4875509" y="1861003"/>
-                  </a:lnTo>
-                  <a:lnTo>
-                    <a:pt x="4949269" y="1868577"/>
-                  </a:lnTo>
-                  <a:lnTo>
-                    <a:pt x="5023029" y="1876070"/>
-                  </a:lnTo>
-                  <a:lnTo>
-                    <a:pt x="5096789" y="1883483"/>
-                  </a:lnTo>
-                  <a:lnTo>
-                    <a:pt x="5170549" y="1890817"/>
-                  </a:lnTo>
-                  <a:lnTo>
-                    <a:pt x="5244309" y="1898072"/>
-                  </a:lnTo>
-                  <a:lnTo>
-                    <a:pt x="5318069" y="1905249"/>
-                  </a:lnTo>
-                  <a:lnTo>
-                    <a:pt x="5391829" y="1912349"/>
-                  </a:lnTo>
-                  <a:lnTo>
-                    <a:pt x="5465589" y="1919372"/>
-                  </a:lnTo>
-                  <a:lnTo>
-                    <a:pt x="5539349" y="1926321"/>
-                  </a:lnTo>
-                  <a:lnTo>
-                    <a:pt x="5613109" y="1933195"/>
-                  </a:lnTo>
-                  <a:lnTo>
-                    <a:pt x="5686869" y="1939995"/>
-                  </a:lnTo>
-                  <a:lnTo>
-                    <a:pt x="5760629" y="1946723"/>
-                  </a:lnTo>
-                  <a:lnTo>
-                    <a:pt x="5834389" y="1953378"/>
-                  </a:lnTo>
-                  <a:lnTo>
-                    <a:pt x="5908149" y="1959962"/>
-                  </a:lnTo>
-                  <a:lnTo>
-                    <a:pt x="5981909" y="1966475"/>
-                  </a:lnTo>
-                  <a:lnTo>
-                    <a:pt x="6055669" y="1972918"/>
-                  </a:lnTo>
-                  <a:lnTo>
-                    <a:pt x="6129429" y="1979293"/>
-                  </a:lnTo>
-                  <a:lnTo>
-                    <a:pt x="6203189" y="1985598"/>
-                  </a:lnTo>
-                  <a:lnTo>
-                    <a:pt x="6276949" y="1991837"/>
-                  </a:lnTo>
-                  <a:lnTo>
-                    <a:pt x="6350709" y="1998008"/>
-                  </a:lnTo>
-                  <a:lnTo>
-                    <a:pt x="6424469" y="2004113"/>
-                  </a:lnTo>
-                  <a:lnTo>
-                    <a:pt x="6498229" y="2010153"/>
-                  </a:lnTo>
-                  <a:lnTo>
-                    <a:pt x="6571989" y="2016128"/>
-                  </a:lnTo>
-                  <a:lnTo>
-                    <a:pt x="6645749" y="2022039"/>
-                  </a:lnTo>
-                  <a:lnTo>
-                    <a:pt x="6719509" y="2027886"/>
-                  </a:lnTo>
-                  <a:lnTo>
-                    <a:pt x="6793269" y="2033671"/>
-                  </a:lnTo>
-                  <a:lnTo>
-                    <a:pt x="6867029" y="2039393"/>
-                  </a:lnTo>
-                  <a:lnTo>
-                    <a:pt x="6940789" y="2045055"/>
-                  </a:lnTo>
-                  <a:lnTo>
-                    <a:pt x="7014550" y="2050655"/>
-                  </a:lnTo>
-                  <a:lnTo>
-                    <a:pt x="7088310" y="2056196"/>
-                  </a:lnTo>
-                  <a:lnTo>
-                    <a:pt x="7162070" y="2061677"/>
-                  </a:lnTo>
-                  <a:lnTo>
-                    <a:pt x="7235830" y="2067099"/>
+                    <a:pt x="7347" y="5694"/>
+                  </a:lnTo>
+                  <a:lnTo>
+                    <a:pt x="81107" y="61552"/>
+                  </a:lnTo>
+                  <a:lnTo>
+                    <a:pt x="154867" y="116133"/>
+                  </a:lnTo>
+                  <a:lnTo>
+                    <a:pt x="228627" y="169465"/>
+                  </a:lnTo>
+                  <a:lnTo>
+                    <a:pt x="302387" y="221578"/>
+                  </a:lnTo>
+                  <a:lnTo>
+                    <a:pt x="376147" y="272500"/>
+                  </a:lnTo>
+                  <a:lnTo>
+                    <a:pt x="449907" y="322257"/>
+                  </a:lnTo>
+                  <a:lnTo>
+                    <a:pt x="523667" y="370876"/>
+                  </a:lnTo>
+                  <a:lnTo>
+                    <a:pt x="597427" y="418384"/>
+                  </a:lnTo>
+                  <a:lnTo>
+                    <a:pt x="671187" y="464805"/>
+                  </a:lnTo>
+                  <a:lnTo>
+                    <a:pt x="744947" y="510165"/>
+                  </a:lnTo>
+                  <a:lnTo>
+                    <a:pt x="818707" y="554488"/>
+                  </a:lnTo>
+                  <a:lnTo>
+                    <a:pt x="892467" y="597797"/>
+                  </a:lnTo>
+                  <a:lnTo>
+                    <a:pt x="966227" y="640116"/>
+                  </a:lnTo>
+                  <a:lnTo>
+                    <a:pt x="1039987" y="681467"/>
+                  </a:lnTo>
+                  <a:lnTo>
+                    <a:pt x="1113747" y="721873"/>
+                  </a:lnTo>
+                  <a:lnTo>
+                    <a:pt x="1187508" y="761355"/>
+                  </a:lnTo>
+                  <a:lnTo>
+                    <a:pt x="1261268" y="799934"/>
+                  </a:lnTo>
+                  <a:lnTo>
+                    <a:pt x="1335028" y="837631"/>
+                  </a:lnTo>
+                  <a:lnTo>
+                    <a:pt x="1408788" y="874466"/>
+                  </a:lnTo>
+                  <a:lnTo>
+                    <a:pt x="1482548" y="910458"/>
+                  </a:lnTo>
+                  <a:lnTo>
+                    <a:pt x="1556308" y="945628"/>
+                  </a:lnTo>
+                  <a:lnTo>
+                    <a:pt x="1630068" y="979993"/>
+                  </a:lnTo>
+                  <a:lnTo>
+                    <a:pt x="1703828" y="1013573"/>
+                  </a:lnTo>
+                  <a:lnTo>
+                    <a:pt x="1777588" y="1046385"/>
+                  </a:lnTo>
+                  <a:lnTo>
+                    <a:pt x="1851348" y="1078446"/>
+                  </a:lnTo>
+                  <a:lnTo>
+                    <a:pt x="1925108" y="1109775"/>
+                  </a:lnTo>
+                  <a:lnTo>
+                    <a:pt x="1998868" y="1140387"/>
+                  </a:lnTo>
+                  <a:lnTo>
+                    <a:pt x="2072628" y="1170299"/>
+                  </a:lnTo>
+                  <a:lnTo>
+                    <a:pt x="2146388" y="1199527"/>
+                  </a:lnTo>
+                  <a:lnTo>
+                    <a:pt x="2220148" y="1228087"/>
+                  </a:lnTo>
+                  <a:lnTo>
+                    <a:pt x="2293908" y="1255994"/>
+                  </a:lnTo>
+                  <a:lnTo>
+                    <a:pt x="2367668" y="1283262"/>
+                  </a:lnTo>
+                  <a:lnTo>
+                    <a:pt x="2441428" y="1309908"/>
+                  </a:lnTo>
+                  <a:lnTo>
+                    <a:pt x="2515188" y="1335943"/>
+                  </a:lnTo>
+                  <a:lnTo>
+                    <a:pt x="2588948" y="1361384"/>
+                  </a:lnTo>
+                  <a:lnTo>
+                    <a:pt x="2662708" y="1386243"/>
+                  </a:lnTo>
+                  <a:lnTo>
+                    <a:pt x="2736468" y="1410533"/>
+                  </a:lnTo>
+                  <a:lnTo>
+                    <a:pt x="2810228" y="1434268"/>
+                  </a:lnTo>
+                  <a:lnTo>
+                    <a:pt x="2883988" y="1457460"/>
+                  </a:lnTo>
+                  <a:lnTo>
+                    <a:pt x="2957748" y="1480122"/>
+                  </a:lnTo>
+                  <a:lnTo>
+                    <a:pt x="3031508" y="1502266"/>
+                  </a:lnTo>
+                  <a:lnTo>
+                    <a:pt x="3105268" y="1523904"/>
+                  </a:lnTo>
+                  <a:lnTo>
+                    <a:pt x="3179028" y="1545046"/>
+                  </a:lnTo>
+                  <a:lnTo>
+                    <a:pt x="3252788" y="1565706"/>
+                  </a:lnTo>
+                  <a:lnTo>
+                    <a:pt x="3326548" y="1585892"/>
+                  </a:lnTo>
+                  <a:lnTo>
+                    <a:pt x="3400308" y="1605618"/>
+                  </a:lnTo>
+                  <a:lnTo>
+                    <a:pt x="3474068" y="1621793"/>
+                  </a:lnTo>
+                  <a:lnTo>
+                    <a:pt x="3547828" y="1630660"/>
+                  </a:lnTo>
+                  <a:lnTo>
+                    <a:pt x="3621588" y="1639432"/>
+                  </a:lnTo>
+                  <a:lnTo>
+                    <a:pt x="3695348" y="1648110"/>
+                  </a:lnTo>
+                  <a:lnTo>
+                    <a:pt x="3769108" y="1656694"/>
+                  </a:lnTo>
+                  <a:lnTo>
+                    <a:pt x="3842868" y="1665187"/>
+                  </a:lnTo>
+                  <a:lnTo>
+                    <a:pt x="3916628" y="1673589"/>
+                  </a:lnTo>
+                  <a:lnTo>
+                    <a:pt x="3990388" y="1681900"/>
+                  </a:lnTo>
+                  <a:lnTo>
+                    <a:pt x="4064149" y="1690122"/>
+                  </a:lnTo>
+                  <a:lnTo>
+                    <a:pt x="4137909" y="1698256"/>
+                  </a:lnTo>
+                  <a:lnTo>
+                    <a:pt x="4211669" y="1706303"/>
+                  </a:lnTo>
+                  <a:lnTo>
+                    <a:pt x="4285429" y="1714264"/>
+                  </a:lnTo>
+                  <a:lnTo>
+                    <a:pt x="4359189" y="1722139"/>
+                  </a:lnTo>
+                  <a:lnTo>
+                    <a:pt x="4432949" y="1729930"/>
+                  </a:lnTo>
+                  <a:lnTo>
+                    <a:pt x="4506709" y="1737637"/>
+                  </a:lnTo>
+                  <a:lnTo>
+                    <a:pt x="4580469" y="1745261"/>
+                  </a:lnTo>
+                  <a:lnTo>
+                    <a:pt x="4654229" y="1752804"/>
+                  </a:lnTo>
+                  <a:lnTo>
+                    <a:pt x="4727989" y="1760266"/>
+                  </a:lnTo>
+                  <a:lnTo>
+                    <a:pt x="4801749" y="1767648"/>
+                  </a:lnTo>
+                  <a:lnTo>
+                    <a:pt x="4875509" y="1774950"/>
+                  </a:lnTo>
+                  <a:lnTo>
+                    <a:pt x="4949269" y="1782175"/>
+                  </a:lnTo>
+                  <a:lnTo>
+                    <a:pt x="5023029" y="1789322"/>
+                  </a:lnTo>
+                  <a:lnTo>
+                    <a:pt x="5096789" y="1796392"/>
+                  </a:lnTo>
+                  <a:lnTo>
+                    <a:pt x="5170549" y="1803386"/>
+                  </a:lnTo>
+                  <a:lnTo>
+                    <a:pt x="5244309" y="1810305"/>
+                  </a:lnTo>
+                  <a:lnTo>
+                    <a:pt x="5318069" y="1817151"/>
+                  </a:lnTo>
+                  <a:lnTo>
+                    <a:pt x="5391829" y="1823922"/>
+                  </a:lnTo>
+                  <a:lnTo>
+                    <a:pt x="5465589" y="1830621"/>
+                  </a:lnTo>
+                  <a:lnTo>
+                    <a:pt x="5539349" y="1837249"/>
+                  </a:lnTo>
+                  <a:lnTo>
+                    <a:pt x="5613109" y="1843805"/>
+                  </a:lnTo>
+                  <a:lnTo>
+                    <a:pt x="5686869" y="1850291"/>
+                  </a:lnTo>
+                  <a:lnTo>
+                    <a:pt x="5760629" y="1856707"/>
+                  </a:lnTo>
+                  <a:lnTo>
+                    <a:pt x="5834389" y="1863054"/>
+                  </a:lnTo>
+                  <a:lnTo>
+                    <a:pt x="5908149" y="1869334"/>
+                  </a:lnTo>
+                  <a:lnTo>
+                    <a:pt x="5981909" y="1875546"/>
+                  </a:lnTo>
+                  <a:lnTo>
+                    <a:pt x="6055669" y="1881691"/>
+                  </a:lnTo>
+                  <a:lnTo>
+                    <a:pt x="6129429" y="1887771"/>
+                  </a:lnTo>
+                  <a:lnTo>
+                    <a:pt x="6203189" y="1893785"/>
+                  </a:lnTo>
+                  <a:lnTo>
+                    <a:pt x="6276949" y="1899735"/>
+                  </a:lnTo>
+                  <a:lnTo>
+                    <a:pt x="6350709" y="1905621"/>
+                  </a:lnTo>
+                  <a:lnTo>
+                    <a:pt x="6424469" y="1911444"/>
+                  </a:lnTo>
+                  <a:lnTo>
+                    <a:pt x="6498229" y="1917204"/>
+                  </a:lnTo>
+                  <a:lnTo>
+                    <a:pt x="6571989" y="1922903"/>
+                  </a:lnTo>
+                  <a:lnTo>
+                    <a:pt x="6645749" y="1928540"/>
+                  </a:lnTo>
+                  <a:lnTo>
+                    <a:pt x="6719509" y="1934117"/>
+                  </a:lnTo>
+                  <a:lnTo>
+                    <a:pt x="6793269" y="1939635"/>
+                  </a:lnTo>
+                  <a:lnTo>
+                    <a:pt x="6867029" y="1945093"/>
+                  </a:lnTo>
+                  <a:lnTo>
+                    <a:pt x="6940789" y="1950492"/>
+                  </a:lnTo>
+                  <a:lnTo>
+                    <a:pt x="7014550" y="1955834"/>
+                  </a:lnTo>
+                  <a:lnTo>
+                    <a:pt x="7088310" y="1961118"/>
+                  </a:lnTo>
+                  <a:lnTo>
+                    <a:pt x="7162070" y="1966346"/>
+                  </a:lnTo>
+                  <a:lnTo>
+                    <a:pt x="7235830" y="1971517"/>
                   </a:lnTo>
                 </a:path>
               </a:pathLst>
@@ -3958,309 +3958,309 @@
           </p:nvSpPr>
           <p:spPr>
             <a:xfrm>
-              <a:off x="817517" y="4108739"/>
-              <a:ext cx="7235830" cy="1175028"/>
+              <a:off x="817517" y="4183388"/>
+              <a:ext cx="7235830" cy="1120695"/>
             </a:xfrm>
             <a:custGeom>
               <a:avLst/>
               <a:pathLst>
-                <a:path w="7235830" h="1175028">
+                <a:path w="7235830" h="1120695">
                   <a:moveTo>
-                    <a:pt x="7235830" y="1175028"/>
+                    <a:pt x="7235830" y="1120695"/>
                   </a:moveTo>
                   <a:lnTo>
-                    <a:pt x="7162070" y="1168816"/>
-                  </a:lnTo>
-                  <a:lnTo>
-                    <a:pt x="7088310" y="1162459"/>
-                  </a:lnTo>
-                  <a:lnTo>
-                    <a:pt x="7014550" y="1155954"/>
-                  </a:lnTo>
-                  <a:lnTo>
-                    <a:pt x="6940789" y="1149296"/>
-                  </a:lnTo>
-                  <a:lnTo>
-                    <a:pt x="6867029" y="1142482"/>
-                  </a:lnTo>
-                  <a:lnTo>
-                    <a:pt x="6793269" y="1135509"/>
-                  </a:lnTo>
-                  <a:lnTo>
-                    <a:pt x="6719509" y="1128373"/>
-                  </a:lnTo>
-                  <a:lnTo>
-                    <a:pt x="6645749" y="1121069"/>
-                  </a:lnTo>
-                  <a:lnTo>
-                    <a:pt x="6571989" y="1113595"/>
-                  </a:lnTo>
-                  <a:lnTo>
-                    <a:pt x="6498229" y="1105946"/>
-                  </a:lnTo>
-                  <a:lnTo>
-                    <a:pt x="6424469" y="1098118"/>
-                  </a:lnTo>
-                  <a:lnTo>
-                    <a:pt x="6350709" y="1090106"/>
-                  </a:lnTo>
-                  <a:lnTo>
-                    <a:pt x="6276949" y="1081908"/>
-                  </a:lnTo>
-                  <a:lnTo>
-                    <a:pt x="6203189" y="1073517"/>
-                  </a:lnTo>
-                  <a:lnTo>
-                    <a:pt x="6129429" y="1064930"/>
-                  </a:lnTo>
-                  <a:lnTo>
-                    <a:pt x="6055669" y="1056142"/>
-                  </a:lnTo>
-                  <a:lnTo>
-                    <a:pt x="5981909" y="1047148"/>
-                  </a:lnTo>
-                  <a:lnTo>
-                    <a:pt x="5908149" y="1037944"/>
-                  </a:lnTo>
-                  <a:lnTo>
-                    <a:pt x="5834389" y="1028525"/>
-                  </a:lnTo>
-                  <a:lnTo>
-                    <a:pt x="5760629" y="1018885"/>
-                  </a:lnTo>
-                  <a:lnTo>
-                    <a:pt x="5686869" y="1009020"/>
-                  </a:lnTo>
-                  <a:lnTo>
-                    <a:pt x="5613109" y="998923"/>
-                  </a:lnTo>
-                  <a:lnTo>
-                    <a:pt x="5539349" y="988591"/>
-                  </a:lnTo>
-                  <a:lnTo>
-                    <a:pt x="5465589" y="978016"/>
-                  </a:lnTo>
-                  <a:lnTo>
-                    <a:pt x="5391829" y="967195"/>
-                  </a:lnTo>
-                  <a:lnTo>
-                    <a:pt x="5318069" y="956120"/>
-                  </a:lnTo>
-                  <a:lnTo>
-                    <a:pt x="5244309" y="944785"/>
-                  </a:lnTo>
-                  <a:lnTo>
-                    <a:pt x="5170549" y="933186"/>
-                  </a:lnTo>
-                  <a:lnTo>
-                    <a:pt x="5096789" y="921315"/>
-                  </a:lnTo>
-                  <a:lnTo>
-                    <a:pt x="5023029" y="909166"/>
-                  </a:lnTo>
-                  <a:lnTo>
-                    <a:pt x="4949269" y="896733"/>
-                  </a:lnTo>
-                  <a:lnTo>
-                    <a:pt x="4875509" y="884009"/>
-                  </a:lnTo>
-                  <a:lnTo>
-                    <a:pt x="4801749" y="870988"/>
-                  </a:lnTo>
-                  <a:lnTo>
-                    <a:pt x="4727989" y="857661"/>
-                  </a:lnTo>
-                  <a:lnTo>
-                    <a:pt x="4654229" y="844023"/>
-                  </a:lnTo>
-                  <a:lnTo>
-                    <a:pt x="4580469" y="830066"/>
-                  </a:lnTo>
-                  <a:lnTo>
-                    <a:pt x="4506709" y="815782"/>
-                  </a:lnTo>
-                  <a:lnTo>
-                    <a:pt x="4432949" y="801163"/>
-                  </a:lnTo>
-                  <a:lnTo>
-                    <a:pt x="4359189" y="786203"/>
-                  </a:lnTo>
-                  <a:lnTo>
-                    <a:pt x="4285429" y="770893"/>
-                  </a:lnTo>
-                  <a:lnTo>
-                    <a:pt x="4211669" y="755224"/>
-                  </a:lnTo>
-                  <a:lnTo>
-                    <a:pt x="4137909" y="739189"/>
-                  </a:lnTo>
-                  <a:lnTo>
-                    <a:pt x="4064149" y="722778"/>
-                  </a:lnTo>
-                  <a:lnTo>
-                    <a:pt x="3990388" y="705983"/>
-                  </a:lnTo>
-                  <a:lnTo>
-                    <a:pt x="3916628" y="688796"/>
-                  </a:lnTo>
-                  <a:lnTo>
-                    <a:pt x="3842868" y="671206"/>
-                  </a:lnTo>
-                  <a:lnTo>
-                    <a:pt x="3769108" y="653204"/>
-                  </a:lnTo>
-                  <a:lnTo>
-                    <a:pt x="3695348" y="634782"/>
-                  </a:lnTo>
-                  <a:lnTo>
-                    <a:pt x="3621588" y="615928"/>
-                  </a:lnTo>
-                  <a:lnTo>
-                    <a:pt x="3547828" y="596633"/>
-                  </a:lnTo>
-                  <a:lnTo>
-                    <a:pt x="3474068" y="576886"/>
-                  </a:lnTo>
-                  <a:lnTo>
-                    <a:pt x="3400308" y="564240"/>
-                  </a:lnTo>
-                  <a:lnTo>
-                    <a:pt x="3326548" y="554740"/>
-                  </a:lnTo>
-                  <a:lnTo>
-                    <a:pt x="3252788" y="545138"/>
-                  </a:lnTo>
-                  <a:lnTo>
-                    <a:pt x="3179028" y="535431"/>
-                  </a:lnTo>
-                  <a:lnTo>
-                    <a:pt x="3105268" y="525620"/>
-                  </a:lnTo>
-                  <a:lnTo>
-                    <a:pt x="3031508" y="515701"/>
-                  </a:lnTo>
-                  <a:lnTo>
-                    <a:pt x="2957748" y="505676"/>
-                  </a:lnTo>
-                  <a:lnTo>
-                    <a:pt x="2883988" y="495541"/>
-                  </a:lnTo>
-                  <a:lnTo>
-                    <a:pt x="2810228" y="485297"/>
-                  </a:lnTo>
-                  <a:lnTo>
-                    <a:pt x="2736468" y="474942"/>
-                  </a:lnTo>
-                  <a:lnTo>
-                    <a:pt x="2662708" y="464474"/>
-                  </a:lnTo>
-                  <a:lnTo>
-                    <a:pt x="2588948" y="453893"/>
-                  </a:lnTo>
-                  <a:lnTo>
-                    <a:pt x="2515188" y="443197"/>
-                  </a:lnTo>
-                  <a:lnTo>
-                    <a:pt x="2441428" y="432385"/>
-                  </a:lnTo>
-                  <a:lnTo>
-                    <a:pt x="2367668" y="421456"/>
-                  </a:lnTo>
-                  <a:lnTo>
-                    <a:pt x="2293908" y="410409"/>
-                  </a:lnTo>
-                  <a:lnTo>
-                    <a:pt x="2220148" y="399242"/>
-                  </a:lnTo>
-                  <a:lnTo>
-                    <a:pt x="2146388" y="387953"/>
-                  </a:lnTo>
-                  <a:lnTo>
-                    <a:pt x="2072628" y="376543"/>
-                  </a:lnTo>
-                  <a:lnTo>
-                    <a:pt x="1998868" y="365008"/>
-                  </a:lnTo>
-                  <a:lnTo>
-                    <a:pt x="1925108" y="353349"/>
-                  </a:lnTo>
-                  <a:lnTo>
-                    <a:pt x="1851348" y="341563"/>
-                  </a:lnTo>
-                  <a:lnTo>
-                    <a:pt x="1777588" y="329650"/>
-                  </a:lnTo>
-                  <a:lnTo>
-                    <a:pt x="1703828" y="317607"/>
-                  </a:lnTo>
-                  <a:lnTo>
-                    <a:pt x="1630068" y="305433"/>
-                  </a:lnTo>
-                  <a:lnTo>
-                    <a:pt x="1556308" y="293128"/>
-                  </a:lnTo>
-                  <a:lnTo>
-                    <a:pt x="1482548" y="280689"/>
-                  </a:lnTo>
-                  <a:lnTo>
-                    <a:pt x="1408788" y="268116"/>
-                  </a:lnTo>
-                  <a:lnTo>
-                    <a:pt x="1335028" y="255406"/>
-                  </a:lnTo>
-                  <a:lnTo>
-                    <a:pt x="1261268" y="242558"/>
-                  </a:lnTo>
-                  <a:lnTo>
-                    <a:pt x="1187508" y="229571"/>
-                  </a:lnTo>
-                  <a:lnTo>
-                    <a:pt x="1113747" y="216444"/>
-                  </a:lnTo>
-                  <a:lnTo>
-                    <a:pt x="1039987" y="203174"/>
-                  </a:lnTo>
-                  <a:lnTo>
-                    <a:pt x="966227" y="189760"/>
-                  </a:lnTo>
-                  <a:lnTo>
-                    <a:pt x="892467" y="176200"/>
-                  </a:lnTo>
-                  <a:lnTo>
-                    <a:pt x="818707" y="162494"/>
-                  </a:lnTo>
-                  <a:lnTo>
-                    <a:pt x="744947" y="148639"/>
-                  </a:lnTo>
-                  <a:lnTo>
-                    <a:pt x="671187" y="134634"/>
-                  </a:lnTo>
-                  <a:lnTo>
-                    <a:pt x="597427" y="120477"/>
-                  </a:lnTo>
-                  <a:lnTo>
-                    <a:pt x="523667" y="106166"/>
-                  </a:lnTo>
-                  <a:lnTo>
-                    <a:pt x="449907" y="91701"/>
-                  </a:lnTo>
-                  <a:lnTo>
-                    <a:pt x="376147" y="77078"/>
-                  </a:lnTo>
-                  <a:lnTo>
-                    <a:pt x="302387" y="62297"/>
-                  </a:lnTo>
-                  <a:lnTo>
-                    <a:pt x="228627" y="47356"/>
-                  </a:lnTo>
-                  <a:lnTo>
-                    <a:pt x="154867" y="32253"/>
-                  </a:lnTo>
-                  <a:lnTo>
-                    <a:pt x="81107" y="16986"/>
-                  </a:lnTo>
-                  <a:lnTo>
-                    <a:pt x="7347" y="1553"/>
+                    <a:pt x="7162070" y="1114771"/>
+                  </a:lnTo>
+                  <a:lnTo>
+                    <a:pt x="7088310" y="1108708"/>
+                  </a:lnTo>
+                  <a:lnTo>
+                    <a:pt x="7014550" y="1102503"/>
+                  </a:lnTo>
+                  <a:lnTo>
+                    <a:pt x="6940789" y="1096153"/>
+                  </a:lnTo>
+                  <a:lnTo>
+                    <a:pt x="6867029" y="1089654"/>
+                  </a:lnTo>
+                  <a:lnTo>
+                    <a:pt x="6793269" y="1083003"/>
+                  </a:lnTo>
+                  <a:lnTo>
+                    <a:pt x="6719509" y="1076197"/>
+                  </a:lnTo>
+                  <a:lnTo>
+                    <a:pt x="6645749" y="1069231"/>
+                  </a:lnTo>
+                  <a:lnTo>
+                    <a:pt x="6571989" y="1062103"/>
+                  </a:lnTo>
+                  <a:lnTo>
+                    <a:pt x="6498229" y="1054807"/>
+                  </a:lnTo>
+                  <a:lnTo>
+                    <a:pt x="6424469" y="1047341"/>
+                  </a:lnTo>
+                  <a:lnTo>
+                    <a:pt x="6350709" y="1039700"/>
+                  </a:lnTo>
+                  <a:lnTo>
+                    <a:pt x="6276949" y="1031881"/>
+                  </a:lnTo>
+                  <a:lnTo>
+                    <a:pt x="6203189" y="1023878"/>
+                  </a:lnTo>
+                  <a:lnTo>
+                    <a:pt x="6129429" y="1015688"/>
+                  </a:lnTo>
+                  <a:lnTo>
+                    <a:pt x="6055669" y="1007306"/>
+                  </a:lnTo>
+                  <a:lnTo>
+                    <a:pt x="5981909" y="998729"/>
+                  </a:lnTo>
+                  <a:lnTo>
+                    <a:pt x="5908149" y="989950"/>
+                  </a:lnTo>
+                  <a:lnTo>
+                    <a:pt x="5834389" y="980966"/>
+                  </a:lnTo>
+                  <a:lnTo>
+                    <a:pt x="5760629" y="971772"/>
+                  </a:lnTo>
+                  <a:lnTo>
+                    <a:pt x="5686869" y="962363"/>
+                  </a:lnTo>
+                  <a:lnTo>
+                    <a:pt x="5613109" y="952733"/>
+                  </a:lnTo>
+                  <a:lnTo>
+                    <a:pt x="5539349" y="942879"/>
+                  </a:lnTo>
+                  <a:lnTo>
+                    <a:pt x="5465589" y="932793"/>
+                  </a:lnTo>
+                  <a:lnTo>
+                    <a:pt x="5391829" y="922472"/>
+                  </a:lnTo>
+                  <a:lnTo>
+                    <a:pt x="5318069" y="911909"/>
+                  </a:lnTo>
+                  <a:lnTo>
+                    <a:pt x="5244309" y="901099"/>
+                  </a:lnTo>
+                  <a:lnTo>
+                    <a:pt x="5170549" y="890036"/>
+                  </a:lnTo>
+                  <a:lnTo>
+                    <a:pt x="5096789" y="878714"/>
+                  </a:lnTo>
+                  <a:lnTo>
+                    <a:pt x="5023029" y="867127"/>
+                  </a:lnTo>
+                  <a:lnTo>
+                    <a:pt x="4949269" y="855269"/>
+                  </a:lnTo>
+                  <a:lnTo>
+                    <a:pt x="4875509" y="843133"/>
+                  </a:lnTo>
+                  <a:lnTo>
+                    <a:pt x="4801749" y="830714"/>
+                  </a:lnTo>
+                  <a:lnTo>
+                    <a:pt x="4727989" y="818003"/>
+                  </a:lnTo>
+                  <a:lnTo>
+                    <a:pt x="4654229" y="804996"/>
+                  </a:lnTo>
+                  <a:lnTo>
+                    <a:pt x="4580469" y="791684"/>
+                  </a:lnTo>
+                  <a:lnTo>
+                    <a:pt x="4506709" y="778060"/>
+                  </a:lnTo>
+                  <a:lnTo>
+                    <a:pt x="4432949" y="764118"/>
+                  </a:lnTo>
+                  <a:lnTo>
+                    <a:pt x="4359189" y="749849"/>
+                  </a:lnTo>
+                  <a:lnTo>
+                    <a:pt x="4285429" y="735247"/>
+                  </a:lnTo>
+                  <a:lnTo>
+                    <a:pt x="4211669" y="720303"/>
+                  </a:lnTo>
+                  <a:lnTo>
+                    <a:pt x="4137909" y="705009"/>
+                  </a:lnTo>
+                  <a:lnTo>
+                    <a:pt x="4064149" y="689357"/>
+                  </a:lnTo>
+                  <a:lnTo>
+                    <a:pt x="3990388" y="673339"/>
+                  </a:lnTo>
+                  <a:lnTo>
+                    <a:pt x="3916628" y="656946"/>
+                  </a:lnTo>
+                  <a:lnTo>
+                    <a:pt x="3842868" y="640170"/>
+                  </a:lnTo>
+                  <a:lnTo>
+                    <a:pt x="3769108" y="623000"/>
+                  </a:lnTo>
+                  <a:lnTo>
+                    <a:pt x="3695348" y="605430"/>
+                  </a:lnTo>
+                  <a:lnTo>
+                    <a:pt x="3621588" y="587448"/>
+                  </a:lnTo>
+                  <a:lnTo>
+                    <a:pt x="3547828" y="569045"/>
+                  </a:lnTo>
+                  <a:lnTo>
+                    <a:pt x="3474068" y="550211"/>
+                  </a:lnTo>
+                  <a:lnTo>
+                    <a:pt x="3400308" y="538150"/>
+                  </a:lnTo>
+                  <a:lnTo>
+                    <a:pt x="3326548" y="529089"/>
+                  </a:lnTo>
+                  <a:lnTo>
+                    <a:pt x="3252788" y="519931"/>
+                  </a:lnTo>
+                  <a:lnTo>
+                    <a:pt x="3179028" y="510673"/>
+                  </a:lnTo>
+                  <a:lnTo>
+                    <a:pt x="3105268" y="501315"/>
+                  </a:lnTo>
+                  <a:lnTo>
+                    <a:pt x="3031508" y="491855"/>
+                  </a:lnTo>
+                  <a:lnTo>
+                    <a:pt x="2957748" y="482293"/>
+                  </a:lnTo>
+                  <a:lnTo>
+                    <a:pt x="2883988" y="472628"/>
+                  </a:lnTo>
+                  <a:lnTo>
+                    <a:pt x="2810228" y="462857"/>
+                  </a:lnTo>
+                  <a:lnTo>
+                    <a:pt x="2736468" y="452980"/>
+                  </a:lnTo>
+                  <a:lnTo>
+                    <a:pt x="2662708" y="442997"/>
+                  </a:lnTo>
+                  <a:lnTo>
+                    <a:pt x="2588948" y="432905"/>
+                  </a:lnTo>
+                  <a:lnTo>
+                    <a:pt x="2515188" y="422704"/>
+                  </a:lnTo>
+                  <a:lnTo>
+                    <a:pt x="2441428" y="412392"/>
+                  </a:lnTo>
+                  <a:lnTo>
+                    <a:pt x="2367668" y="401968"/>
+                  </a:lnTo>
+                  <a:lnTo>
+                    <a:pt x="2293908" y="391432"/>
+                  </a:lnTo>
+                  <a:lnTo>
+                    <a:pt x="2220148" y="380781"/>
+                  </a:lnTo>
+                  <a:lnTo>
+                    <a:pt x="2146388" y="370015"/>
+                  </a:lnTo>
+                  <a:lnTo>
+                    <a:pt x="2072628" y="359132"/>
+                  </a:lnTo>
+                  <a:lnTo>
+                    <a:pt x="1998868" y="348131"/>
+                  </a:lnTo>
+                  <a:lnTo>
+                    <a:pt x="1925108" y="337010"/>
+                  </a:lnTo>
+                  <a:lnTo>
+                    <a:pt x="1851348" y="325769"/>
+                  </a:lnTo>
+                  <a:lnTo>
+                    <a:pt x="1777588" y="314407"/>
+                  </a:lnTo>
+                  <a:lnTo>
+                    <a:pt x="1703828" y="302921"/>
+                  </a:lnTo>
+                  <a:lnTo>
+                    <a:pt x="1630068" y="291310"/>
+                  </a:lnTo>
+                  <a:lnTo>
+                    <a:pt x="1556308" y="279574"/>
+                  </a:lnTo>
+                  <a:lnTo>
+                    <a:pt x="1482548" y="267710"/>
+                  </a:lnTo>
+                  <a:lnTo>
+                    <a:pt x="1408788" y="255718"/>
+                  </a:lnTo>
+                  <a:lnTo>
+                    <a:pt x="1335028" y="243596"/>
+                  </a:lnTo>
+                  <a:lnTo>
+                    <a:pt x="1261268" y="231343"/>
+                  </a:lnTo>
+                  <a:lnTo>
+                    <a:pt x="1187508" y="218956"/>
+                  </a:lnTo>
+                  <a:lnTo>
+                    <a:pt x="1113747" y="206435"/>
+                  </a:lnTo>
+                  <a:lnTo>
+                    <a:pt x="1039987" y="193779"/>
+                  </a:lnTo>
+                  <a:lnTo>
+                    <a:pt x="966227" y="180985"/>
+                  </a:lnTo>
+                  <a:lnTo>
+                    <a:pt x="892467" y="168053"/>
+                  </a:lnTo>
+                  <a:lnTo>
+                    <a:pt x="818707" y="154980"/>
+                  </a:lnTo>
+                  <a:lnTo>
+                    <a:pt x="744947" y="141766"/>
+                  </a:lnTo>
+                  <a:lnTo>
+                    <a:pt x="671187" y="128408"/>
+                  </a:lnTo>
+                  <a:lnTo>
+                    <a:pt x="597427" y="114906"/>
+                  </a:lnTo>
+                  <a:lnTo>
+                    <a:pt x="523667" y="101257"/>
+                  </a:lnTo>
+                  <a:lnTo>
+                    <a:pt x="449907" y="87460"/>
+                  </a:lnTo>
+                  <a:lnTo>
+                    <a:pt x="376147" y="73514"/>
+                  </a:lnTo>
+                  <a:lnTo>
+                    <a:pt x="302387" y="59417"/>
+                  </a:lnTo>
+                  <a:lnTo>
+                    <a:pt x="228627" y="45166"/>
+                  </a:lnTo>
+                  <a:lnTo>
+                    <a:pt x="154867" y="30761"/>
+                  </a:lnTo>
+                  <a:lnTo>
+                    <a:pt x="81107" y="16200"/>
+                  </a:lnTo>
+                  <a:lnTo>
+                    <a:pt x="7347" y="1482"/>
                   </a:lnTo>
                   <a:lnTo>
                     <a:pt x="0" y="0"/>
@@ -4283,312 +4283,312 @@
           </p:nvSpPr>
           <p:spPr>
             <a:xfrm>
-              <a:off x="817517" y="3626180"/>
-              <a:ext cx="7235830" cy="1558663"/>
+              <a:off x="817517" y="3723143"/>
+              <a:ext cx="7235830" cy="1486591"/>
             </a:xfrm>
             <a:custGeom>
               <a:avLst/>
               <a:pathLst>
-                <a:path w="7235830" h="1558663">
+                <a:path w="7235830" h="1486591">
                   <a:moveTo>
                     <a:pt x="0" y="0"/>
                   </a:moveTo>
                   <a:lnTo>
-                    <a:pt x="7347" y="3270"/>
-                  </a:lnTo>
-                  <a:lnTo>
-                    <a:pt x="81107" y="35549"/>
-                  </a:lnTo>
-                  <a:lnTo>
-                    <a:pt x="154867" y="67286"/>
-                  </a:lnTo>
-                  <a:lnTo>
-                    <a:pt x="228627" y="98488"/>
-                  </a:lnTo>
-                  <a:lnTo>
-                    <a:pt x="302387" y="129167"/>
-                  </a:lnTo>
-                  <a:lnTo>
-                    <a:pt x="376147" y="159329"/>
-                  </a:lnTo>
-                  <a:lnTo>
-                    <a:pt x="449907" y="188984"/>
-                  </a:lnTo>
-                  <a:lnTo>
-                    <a:pt x="523667" y="218141"/>
-                  </a:lnTo>
-                  <a:lnTo>
-                    <a:pt x="597427" y="246807"/>
-                  </a:lnTo>
-                  <a:lnTo>
-                    <a:pt x="671187" y="274991"/>
-                  </a:lnTo>
-                  <a:lnTo>
-                    <a:pt x="744947" y="302702"/>
-                  </a:lnTo>
-                  <a:lnTo>
-                    <a:pt x="818707" y="329946"/>
-                  </a:lnTo>
-                  <a:lnTo>
-                    <a:pt x="892467" y="356733"/>
-                  </a:lnTo>
-                  <a:lnTo>
-                    <a:pt x="966227" y="383069"/>
-                  </a:lnTo>
-                  <a:lnTo>
-                    <a:pt x="1039987" y="408962"/>
-                  </a:lnTo>
-                  <a:lnTo>
-                    <a:pt x="1113747" y="434420"/>
-                  </a:lnTo>
-                  <a:lnTo>
-                    <a:pt x="1187508" y="459449"/>
-                  </a:lnTo>
-                  <a:lnTo>
-                    <a:pt x="1261268" y="484058"/>
-                  </a:lnTo>
-                  <a:lnTo>
-                    <a:pt x="1335028" y="508253"/>
-                  </a:lnTo>
-                  <a:lnTo>
-                    <a:pt x="1408788" y="532042"/>
-                  </a:lnTo>
-                  <a:lnTo>
-                    <a:pt x="1482548" y="555430"/>
-                  </a:lnTo>
-                  <a:lnTo>
-                    <a:pt x="1556308" y="578425"/>
-                  </a:lnTo>
-                  <a:lnTo>
-                    <a:pt x="1630068" y="601033"/>
-                  </a:lnTo>
-                  <a:lnTo>
-                    <a:pt x="1703828" y="623262"/>
-                  </a:lnTo>
-                  <a:lnTo>
-                    <a:pt x="1777588" y="645116"/>
-                  </a:lnTo>
-                  <a:lnTo>
-                    <a:pt x="1851348" y="666603"/>
-                  </a:lnTo>
-                  <a:lnTo>
-                    <a:pt x="1925108" y="687729"/>
-                  </a:lnTo>
-                  <a:lnTo>
-                    <a:pt x="1998868" y="708500"/>
-                  </a:lnTo>
-                  <a:lnTo>
-                    <a:pt x="2072628" y="728921"/>
-                  </a:lnTo>
-                  <a:lnTo>
-                    <a:pt x="2146388" y="748999"/>
-                  </a:lnTo>
-                  <a:lnTo>
-                    <a:pt x="2220148" y="768739"/>
-                  </a:lnTo>
-                  <a:lnTo>
-                    <a:pt x="2293908" y="788148"/>
-                  </a:lnTo>
-                  <a:lnTo>
-                    <a:pt x="2367668" y="807230"/>
-                  </a:lnTo>
-                  <a:lnTo>
-                    <a:pt x="2441428" y="825991"/>
-                  </a:lnTo>
-                  <a:lnTo>
-                    <a:pt x="2515188" y="844437"/>
-                  </a:lnTo>
-                  <a:lnTo>
-                    <a:pt x="2588948" y="862572"/>
-                  </a:lnTo>
-                  <a:lnTo>
-                    <a:pt x="2662708" y="880403"/>
-                  </a:lnTo>
-                  <a:lnTo>
-                    <a:pt x="2736468" y="897934"/>
-                  </a:lnTo>
-                  <a:lnTo>
-                    <a:pt x="2810228" y="915170"/>
-                  </a:lnTo>
-                  <a:lnTo>
-                    <a:pt x="2883988" y="932116"/>
-                  </a:lnTo>
-                  <a:lnTo>
-                    <a:pt x="2957748" y="948778"/>
-                  </a:lnTo>
-                  <a:lnTo>
-                    <a:pt x="3031508" y="965159"/>
-                  </a:lnTo>
-                  <a:lnTo>
-                    <a:pt x="3105268" y="981265"/>
-                  </a:lnTo>
-                  <a:lnTo>
-                    <a:pt x="3179028" y="997100"/>
-                  </a:lnTo>
-                  <a:lnTo>
-                    <a:pt x="3252788" y="1012668"/>
-                  </a:lnTo>
-                  <a:lnTo>
-                    <a:pt x="3326548" y="1027975"/>
-                  </a:lnTo>
-                  <a:lnTo>
-                    <a:pt x="3400308" y="1043025"/>
-                  </a:lnTo>
-                  <a:lnTo>
-                    <a:pt x="3474068" y="1057822"/>
-                  </a:lnTo>
-                  <a:lnTo>
-                    <a:pt x="3547828" y="1072369"/>
-                  </a:lnTo>
-                  <a:lnTo>
-                    <a:pt x="3621588" y="1086672"/>
-                  </a:lnTo>
-                  <a:lnTo>
-                    <a:pt x="3695348" y="1100735"/>
-                  </a:lnTo>
-                  <a:lnTo>
-                    <a:pt x="3769108" y="1114561"/>
-                  </a:lnTo>
-                  <a:lnTo>
-                    <a:pt x="3842868" y="1128155"/>
-                  </a:lnTo>
-                  <a:lnTo>
-                    <a:pt x="3916628" y="1141520"/>
-                  </a:lnTo>
-                  <a:lnTo>
-                    <a:pt x="3990388" y="1154660"/>
-                  </a:lnTo>
-                  <a:lnTo>
-                    <a:pt x="4064149" y="1167580"/>
-                  </a:lnTo>
-                  <a:lnTo>
-                    <a:pt x="4137909" y="1180282"/>
-                  </a:lnTo>
-                  <a:lnTo>
-                    <a:pt x="4211669" y="1192771"/>
-                  </a:lnTo>
-                  <a:lnTo>
-                    <a:pt x="4285429" y="1205049"/>
-                  </a:lnTo>
-                  <a:lnTo>
-                    <a:pt x="4359189" y="1217122"/>
-                  </a:lnTo>
-                  <a:lnTo>
-                    <a:pt x="4432949" y="1228991"/>
-                  </a:lnTo>
-                  <a:lnTo>
-                    <a:pt x="4506709" y="1240661"/>
-                  </a:lnTo>
-                  <a:lnTo>
-                    <a:pt x="4580469" y="1252134"/>
-                  </a:lnTo>
-                  <a:lnTo>
-                    <a:pt x="4654229" y="1263415"/>
-                  </a:lnTo>
-                  <a:lnTo>
-                    <a:pt x="4727989" y="1274505"/>
-                  </a:lnTo>
-                  <a:lnTo>
-                    <a:pt x="4801749" y="1285410"/>
-                  </a:lnTo>
-                  <a:lnTo>
-                    <a:pt x="4875509" y="1296131"/>
-                  </a:lnTo>
-                  <a:lnTo>
-                    <a:pt x="4949269" y="1306672"/>
-                  </a:lnTo>
-                  <a:lnTo>
-                    <a:pt x="5023029" y="1317035"/>
-                  </a:lnTo>
-                  <a:lnTo>
-                    <a:pt x="5096789" y="1327224"/>
-                  </a:lnTo>
-                  <a:lnTo>
-                    <a:pt x="5170549" y="1337242"/>
-                  </a:lnTo>
-                  <a:lnTo>
-                    <a:pt x="5244309" y="1347092"/>
-                  </a:lnTo>
-                  <a:lnTo>
-                    <a:pt x="5318069" y="1356776"/>
-                  </a:lnTo>
-                  <a:lnTo>
-                    <a:pt x="5391829" y="1366297"/>
-                  </a:lnTo>
-                  <a:lnTo>
-                    <a:pt x="5465589" y="1375658"/>
-                  </a:lnTo>
-                  <a:lnTo>
-                    <a:pt x="5539349" y="1384861"/>
-                  </a:lnTo>
-                  <a:lnTo>
-                    <a:pt x="5613109" y="1393910"/>
-                  </a:lnTo>
-                  <a:lnTo>
-                    <a:pt x="5686869" y="1402807"/>
-                  </a:lnTo>
-                  <a:lnTo>
-                    <a:pt x="5760629" y="1411554"/>
-                  </a:lnTo>
-                  <a:lnTo>
-                    <a:pt x="5834389" y="1420154"/>
-                  </a:lnTo>
-                  <a:lnTo>
-                    <a:pt x="5908149" y="1428609"/>
-                  </a:lnTo>
-                  <a:lnTo>
-                    <a:pt x="5981909" y="1436922"/>
-                  </a:lnTo>
-                  <a:lnTo>
-                    <a:pt x="6055669" y="1445096"/>
-                  </a:lnTo>
-                  <a:lnTo>
-                    <a:pt x="6129429" y="1453132"/>
-                  </a:lnTo>
-                  <a:lnTo>
-                    <a:pt x="6203189" y="1461033"/>
-                  </a:lnTo>
-                  <a:lnTo>
-                    <a:pt x="6276949" y="1468801"/>
-                  </a:lnTo>
-                  <a:lnTo>
-                    <a:pt x="6350709" y="1476438"/>
-                  </a:lnTo>
-                  <a:lnTo>
-                    <a:pt x="6424469" y="1483947"/>
-                  </a:lnTo>
-                  <a:lnTo>
-                    <a:pt x="6498229" y="1491330"/>
-                  </a:lnTo>
-                  <a:lnTo>
-                    <a:pt x="6571989" y="1498589"/>
-                  </a:lnTo>
-                  <a:lnTo>
-                    <a:pt x="6645749" y="1505725"/>
-                  </a:lnTo>
-                  <a:lnTo>
-                    <a:pt x="6719509" y="1512742"/>
-                  </a:lnTo>
-                  <a:lnTo>
-                    <a:pt x="6793269" y="1519640"/>
-                  </a:lnTo>
-                  <a:lnTo>
-                    <a:pt x="6867029" y="1526423"/>
-                  </a:lnTo>
-                  <a:lnTo>
-                    <a:pt x="6940789" y="1533092"/>
-                  </a:lnTo>
-                  <a:lnTo>
-                    <a:pt x="7014550" y="1539648"/>
-                  </a:lnTo>
-                  <a:lnTo>
-                    <a:pt x="7088310" y="1546094"/>
-                  </a:lnTo>
-                  <a:lnTo>
-                    <a:pt x="7162070" y="1552432"/>
-                  </a:lnTo>
-                  <a:lnTo>
-                    <a:pt x="7235830" y="1558663"/>
+                    <a:pt x="7347" y="3119"/>
+                  </a:lnTo>
+                  <a:lnTo>
+                    <a:pt x="81107" y="33905"/>
+                  </a:lnTo>
+                  <a:lnTo>
+                    <a:pt x="154867" y="64174"/>
+                  </a:lnTo>
+                  <a:lnTo>
+                    <a:pt x="228627" y="93934"/>
+                  </a:lnTo>
+                  <a:lnTo>
+                    <a:pt x="302387" y="123194"/>
+                  </a:lnTo>
+                  <a:lnTo>
+                    <a:pt x="376147" y="151962"/>
+                  </a:lnTo>
+                  <a:lnTo>
+                    <a:pt x="449907" y="180246"/>
+                  </a:lnTo>
+                  <a:lnTo>
+                    <a:pt x="523667" y="208054"/>
+                  </a:lnTo>
+                  <a:lnTo>
+                    <a:pt x="597427" y="235395"/>
+                  </a:lnTo>
+                  <a:lnTo>
+                    <a:pt x="671187" y="262276"/>
+                  </a:lnTo>
+                  <a:lnTo>
+                    <a:pt x="744947" y="288705"/>
+                  </a:lnTo>
+                  <a:lnTo>
+                    <a:pt x="818707" y="314690"/>
+                  </a:lnTo>
+                  <a:lnTo>
+                    <a:pt x="892467" y="340237"/>
+                  </a:lnTo>
+                  <a:lnTo>
+                    <a:pt x="966227" y="365356"/>
+                  </a:lnTo>
+                  <a:lnTo>
+                    <a:pt x="1039987" y="390052"/>
+                  </a:lnTo>
+                  <a:lnTo>
+                    <a:pt x="1113747" y="414332"/>
+                  </a:lnTo>
+                  <a:lnTo>
+                    <a:pt x="1187508" y="438205"/>
+                  </a:lnTo>
+                  <a:lnTo>
+                    <a:pt x="1261268" y="461676"/>
+                  </a:lnTo>
+                  <a:lnTo>
+                    <a:pt x="1335028" y="484752"/>
+                  </a:lnTo>
+                  <a:lnTo>
+                    <a:pt x="1408788" y="507440"/>
+                  </a:lnTo>
+                  <a:lnTo>
+                    <a:pt x="1482548" y="529747"/>
+                  </a:lnTo>
+                  <a:lnTo>
+                    <a:pt x="1556308" y="551679"/>
+                  </a:lnTo>
+                  <a:lnTo>
+                    <a:pt x="1630068" y="573242"/>
+                  </a:lnTo>
+                  <a:lnTo>
+                    <a:pt x="1703828" y="594442"/>
+                  </a:lnTo>
+                  <a:lnTo>
+                    <a:pt x="1777588" y="615286"/>
+                  </a:lnTo>
+                  <a:lnTo>
+                    <a:pt x="1851348" y="635780"/>
+                  </a:lnTo>
+                  <a:lnTo>
+                    <a:pt x="1925108" y="655929"/>
+                  </a:lnTo>
+                  <a:lnTo>
+                    <a:pt x="1998868" y="675739"/>
+                  </a:lnTo>
+                  <a:lnTo>
+                    <a:pt x="2072628" y="695216"/>
+                  </a:lnTo>
+                  <a:lnTo>
+                    <a:pt x="2146388" y="714365"/>
+                  </a:lnTo>
+                  <a:lnTo>
+                    <a:pt x="2220148" y="733193"/>
+                  </a:lnTo>
+                  <a:lnTo>
+                    <a:pt x="2293908" y="751704"/>
+                  </a:lnTo>
+                  <a:lnTo>
+                    <a:pt x="2367668" y="769904"/>
+                  </a:lnTo>
+                  <a:lnTo>
+                    <a:pt x="2441428" y="787797"/>
+                  </a:lnTo>
+                  <a:lnTo>
+                    <a:pt x="2515188" y="805390"/>
+                  </a:lnTo>
+                  <a:lnTo>
+                    <a:pt x="2588948" y="822687"/>
+                  </a:lnTo>
+                  <a:lnTo>
+                    <a:pt x="2662708" y="839694"/>
+                  </a:lnTo>
+                  <a:lnTo>
+                    <a:pt x="2736468" y="856414"/>
+                  </a:lnTo>
+                  <a:lnTo>
+                    <a:pt x="2810228" y="872853"/>
+                  </a:lnTo>
+                  <a:lnTo>
+                    <a:pt x="2883988" y="889016"/>
+                  </a:lnTo>
+                  <a:lnTo>
+                    <a:pt x="2957748" y="904907"/>
+                  </a:lnTo>
+                  <a:lnTo>
+                    <a:pt x="3031508" y="920530"/>
+                  </a:lnTo>
+                  <a:lnTo>
+                    <a:pt x="3105268" y="935891"/>
+                  </a:lnTo>
+                  <a:lnTo>
+                    <a:pt x="3179028" y="950994"/>
+                  </a:lnTo>
+                  <a:lnTo>
+                    <a:pt x="3252788" y="965843"/>
+                  </a:lnTo>
+                  <a:lnTo>
+                    <a:pt x="3326548" y="980442"/>
+                  </a:lnTo>
+                  <a:lnTo>
+                    <a:pt x="3400308" y="994796"/>
+                  </a:lnTo>
+                  <a:lnTo>
+                    <a:pt x="3474068" y="1008908"/>
+                  </a:lnTo>
+                  <a:lnTo>
+                    <a:pt x="3547828" y="1022783"/>
+                  </a:lnTo>
+                  <a:lnTo>
+                    <a:pt x="3621588" y="1036425"/>
+                  </a:lnTo>
+                  <a:lnTo>
+                    <a:pt x="3695348" y="1049837"/>
+                  </a:lnTo>
+                  <a:lnTo>
+                    <a:pt x="3769108" y="1063024"/>
+                  </a:lnTo>
+                  <a:lnTo>
+                    <a:pt x="3842868" y="1075989"/>
+                  </a:lnTo>
+                  <a:lnTo>
+                    <a:pt x="3916628" y="1088737"/>
+                  </a:lnTo>
+                  <a:lnTo>
+                    <a:pt x="3990388" y="1101269"/>
+                  </a:lnTo>
+                  <a:lnTo>
+                    <a:pt x="4064149" y="1113591"/>
+                  </a:lnTo>
+                  <a:lnTo>
+                    <a:pt x="4137909" y="1125706"/>
+                  </a:lnTo>
+                  <a:lnTo>
+                    <a:pt x="4211669" y="1137618"/>
+                  </a:lnTo>
+                  <a:lnTo>
+                    <a:pt x="4285429" y="1149328"/>
+                  </a:lnTo>
+                  <a:lnTo>
+                    <a:pt x="4359189" y="1160842"/>
+                  </a:lnTo>
+                  <a:lnTo>
+                    <a:pt x="4432949" y="1172163"/>
+                  </a:lnTo>
+                  <a:lnTo>
+                    <a:pt x="4506709" y="1183293"/>
+                  </a:lnTo>
+                  <a:lnTo>
+                    <a:pt x="4580469" y="1194236"/>
+                  </a:lnTo>
+                  <a:lnTo>
+                    <a:pt x="4654229" y="1204995"/>
+                  </a:lnTo>
+                  <a:lnTo>
+                    <a:pt x="4727989" y="1215573"/>
+                  </a:lnTo>
+                  <a:lnTo>
+                    <a:pt x="4801749" y="1225973"/>
+                  </a:lnTo>
+                  <a:lnTo>
+                    <a:pt x="4875509" y="1236198"/>
+                  </a:lnTo>
+                  <a:lnTo>
+                    <a:pt x="4949269" y="1246251"/>
+                  </a:lnTo>
+                  <a:lnTo>
+                    <a:pt x="5023029" y="1256136"/>
+                  </a:lnTo>
+                  <a:lnTo>
+                    <a:pt x="5096789" y="1265854"/>
+                  </a:lnTo>
+                  <a:lnTo>
+                    <a:pt x="5170549" y="1275409"/>
+                  </a:lnTo>
+                  <a:lnTo>
+                    <a:pt x="5244309" y="1284803"/>
+                  </a:lnTo>
+                  <a:lnTo>
+                    <a:pt x="5318069" y="1294039"/>
+                  </a:lnTo>
+                  <a:lnTo>
+                    <a:pt x="5391829" y="1303120"/>
+                  </a:lnTo>
+                  <a:lnTo>
+                    <a:pt x="5465589" y="1312048"/>
+                  </a:lnTo>
+                  <a:lnTo>
+                    <a:pt x="5539349" y="1320826"/>
+                  </a:lnTo>
+                  <a:lnTo>
+                    <a:pt x="5613109" y="1329456"/>
+                  </a:lnTo>
+                  <a:lnTo>
+                    <a:pt x="5686869" y="1337941"/>
+                  </a:lnTo>
+                  <a:lnTo>
+                    <a:pt x="5760629" y="1346284"/>
+                  </a:lnTo>
+                  <a:lnTo>
+                    <a:pt x="5834389" y="1354486"/>
+                  </a:lnTo>
+                  <a:lnTo>
+                    <a:pt x="5908149" y="1362551"/>
+                  </a:lnTo>
+                  <a:lnTo>
+                    <a:pt x="5981909" y="1370480"/>
+                  </a:lnTo>
+                  <a:lnTo>
+                    <a:pt x="6055669" y="1378275"/>
+                  </a:lnTo>
+                  <a:lnTo>
+                    <a:pt x="6129429" y="1385940"/>
+                  </a:lnTo>
+                  <a:lnTo>
+                    <a:pt x="6203189" y="1393475"/>
+                  </a:lnTo>
+                  <a:lnTo>
+                    <a:pt x="6276949" y="1400884"/>
+                  </a:lnTo>
+                  <a:lnTo>
+                    <a:pt x="6350709" y="1408168"/>
+                  </a:lnTo>
+                  <a:lnTo>
+                    <a:pt x="6424469" y="1415330"/>
+                  </a:lnTo>
+                  <a:lnTo>
+                    <a:pt x="6498229" y="1422371"/>
+                  </a:lnTo>
+                  <a:lnTo>
+                    <a:pt x="6571989" y="1429294"/>
+                  </a:lnTo>
+                  <a:lnTo>
+                    <a:pt x="6645749" y="1436101"/>
+                  </a:lnTo>
+                  <a:lnTo>
+                    <a:pt x="6719509" y="1442793"/>
+                  </a:lnTo>
+                  <a:lnTo>
+                    <a:pt x="6793269" y="1449373"/>
+                  </a:lnTo>
+                  <a:lnTo>
+                    <a:pt x="6867029" y="1455842"/>
+                  </a:lnTo>
+                  <a:lnTo>
+                    <a:pt x="6940789" y="1462202"/>
+                  </a:lnTo>
+                  <a:lnTo>
+                    <a:pt x="7014550" y="1468455"/>
+                  </a:lnTo>
+                  <a:lnTo>
+                    <a:pt x="7088310" y="1474603"/>
+                  </a:lnTo>
+                  <a:lnTo>
+                    <a:pt x="7162070" y="1480648"/>
+                  </a:lnTo>
+                  <a:lnTo>
+                    <a:pt x="7235830" y="1486591"/>
                   </a:lnTo>
                 </a:path>
               </a:pathLst>
@@ -4617,7 +4617,7 @@
           </p:nvSpPr>
           <p:spPr>
             <a:xfrm>
-              <a:off x="817517" y="4679530"/>
+              <a:off x="817517" y="4727786"/>
               <a:ext cx="7799693" cy="0"/>
             </a:xfrm>
             <a:custGeom>
@@ -4660,15 +4660,15 @@
           </p:nvSpPr>
           <p:spPr>
             <a:xfrm>
-              <a:off x="4269157" y="1896563"/>
-              <a:ext cx="0" cy="3826579"/>
+              <a:off x="4269157" y="2073503"/>
+              <a:ext cx="0" cy="3649639"/>
             </a:xfrm>
             <a:custGeom>
               <a:avLst/>
               <a:pathLst>
-                <a:path w="0" h="3826579">
+                <a:path w="0" h="3649639">
                   <a:moveTo>
-                    <a:pt x="0" y="3826579"/>
+                    <a:pt x="0" y="3649639"/>
                   </a:moveTo>
                   <a:lnTo>
                     <a:pt x="0" y="0"/>
@@ -4703,7 +4703,7 @@
           </p:nvSpPr>
           <p:spPr>
             <a:xfrm>
-              <a:off x="692708" y="5509156"/>
+              <a:off x="692708" y="5517199"/>
               <a:ext cx="62179" cy="80101"/>
             </a:xfrm>
             <a:prstGeom prst="rect">
@@ -4749,7 +4749,7 @@
           </p:nvSpPr>
           <p:spPr>
             <a:xfrm>
-              <a:off x="692708" y="4639479"/>
+              <a:off x="692708" y="4687735"/>
               <a:ext cx="62179" cy="80101"/>
             </a:xfrm>
             <a:prstGeom prst="rect">
@@ -4795,7 +4795,7 @@
           </p:nvSpPr>
           <p:spPr>
             <a:xfrm>
-              <a:off x="692708" y="3769802"/>
+              <a:off x="692708" y="3858272"/>
               <a:ext cx="62179" cy="80101"/>
             </a:xfrm>
             <a:prstGeom prst="rect">
@@ -4841,7 +4841,7 @@
           </p:nvSpPr>
           <p:spPr>
             <a:xfrm>
-              <a:off x="692708" y="2900125"/>
+              <a:off x="692708" y="3028808"/>
               <a:ext cx="62179" cy="80101"/>
             </a:xfrm>
             <a:prstGeom prst="rect">
@@ -4887,7 +4887,7 @@
           </p:nvSpPr>
           <p:spPr>
             <a:xfrm>
-              <a:off x="692708" y="2030448"/>
+              <a:off x="692708" y="2199345"/>
               <a:ext cx="62179" cy="80101"/>
             </a:xfrm>
             <a:prstGeom prst="rect">
@@ -5163,7 +5163,7 @@
           </p:nvSpPr>
           <p:spPr>
             <a:xfrm rot="-5400000">
-              <a:off x="68446" y="3759743"/>
+              <a:off x="68446" y="3848213"/>
               <a:ext cx="1016904" cy="100218"/>
             </a:xfrm>
             <a:prstGeom prst="rect">
@@ -5204,6 +5204,52 @@
         <p:sp>
           <p:nvSpPr>
             <p:cNvPr id="38" name="tx38"/>
+            <p:cNvSpPr/>
+            <p:nvPr/>
+          </p:nvSpPr>
+          <p:spPr>
+            <a:xfrm>
+              <a:off x="817517" y="1896563"/>
+              <a:ext cx="5626211" cy="82021"/>
+            </a:xfrm>
+            <a:prstGeom prst="rect">
+              <a:avLst/>
+            </a:prstGeom>
+            <a:noFill/>
+          </p:spPr>
+          <p:txBody>
+            <a:bodyPr lIns="0" rIns="0" tIns="0" bIns="0" anchorCtr="1" anchor="ctr" wrap="none"/>
+            <a:lstStyle/>
+            <a:p>
+              <a:pPr algn="l" marL="0" marR="0" indent="0">
+                <a:lnSpc>
+                  <a:spcPts val="900"/>
+                </a:lnSpc>
+                <a:spcBef>
+                  <a:spcPts val="0"/>
+                </a:spcBef>
+                <a:spcAft>
+                  <a:spcPts val="0"/>
+                </a:spcAft>
+              </a:pPr>
+              <a:r>
+                <a:rPr sz="900">
+                  <a:solidFill>
+                    <a:srgbClr val="404040">
+                      <a:alpha val="100000"/>
+                    </a:srgbClr>
+                  </a:solidFill>
+                  <a:latin typeface="Helvetica"/>
+                  <a:cs typeface="Helvetica"/>
+                </a:rPr>
+                <a:t>subHR per 0.1 ratio decline: 1.23 (1.14-1.32)  |  per IQR decline (Δ = 0.29): 1.82 (1.46-2.26)  |  IQR: [0.85, 1.15]</a:t>
+              </a:r>
+            </a:p>
+          </p:txBody>
+        </p:sp>
+        <p:sp>
+          <p:nvSpPr>
+            <p:cNvPr id="39" name="tx39"/>
             <p:cNvSpPr/>
             <p:nvPr/>
           </p:nvSpPr>

--- a/docs/pptx/whole/jx-linsubhr-ratio-anemia2.pptx
+++ b/docs/pptx/whole/jx-linsubhr-ratio-anemia2.pptx
@@ -5210,7 +5210,7 @@
           <p:spPr>
             <a:xfrm>
               <a:off x="817517" y="1896563"/>
-              <a:ext cx="5626211" cy="82021"/>
+              <a:ext cx="6236116" cy="82021"/>
             </a:xfrm>
             <a:prstGeom prst="rect">
               <a:avLst/>
@@ -5242,7 +5242,7 @@
                   <a:latin typeface="Helvetica"/>
                   <a:cs typeface="Helvetica"/>
                 </a:rPr>
-                <a:t>subHR per 0.1 ratio decline: 1.23 (1.14-1.32)  |  per IQR decline (Δ = 0.29): 1.82 (1.46-2.26)  |  IQR: [0.85, 1.15]</a:t>
+                <a:t>subHR per 0.1 ratio decline: 1.23 (1.14-1.32), p = &lt;0.001  |  per IQR decline (Δ = 0.29): 1.82 (1.46-2.26)  |  IQR: [0.85, 1.15]</a:t>
               </a:r>
             </a:p>
           </p:txBody>

--- a/docs/pptx/whole/jx-linsubhr-ratio-anemia2.pptx
+++ b/docs/pptx/whole/jx-linsubhr-ratio-anemia2.pptx
@@ -5210,7 +5210,7 @@
           <p:spPr>
             <a:xfrm>
               <a:off x="817517" y="1896563"/>
-              <a:ext cx="6236116" cy="82021"/>
+              <a:ext cx="6899879" cy="82021"/>
             </a:xfrm>
             <a:prstGeom prst="rect">
               <a:avLst/>
@@ -5242,7 +5242,7 @@
                   <a:latin typeface="Helvetica"/>
                   <a:cs typeface="Helvetica"/>
                 </a:rPr>
-                <a:t>subHR per 0.1 ratio decline: 1.23 (1.14-1.32), p = &lt;0.001  |  per IQR decline (Δ = 0.29): 1.82 (1.46-2.26)  |  IQR: [0.85, 1.15]</a:t>
+                <a:t>subHR per 0.1 ratio decline: 1.23 (1.14-1.32), p_Bonf = &lt;0.001 (n = 6)  |  per IQR decline (Δ = 0.29): 1.82 (1.46-2.26)  |  IQR: [0.85, 1.15]</a:t>
               </a:r>
             </a:p>
           </p:txBody>

--- a/docs/pptx/whole/jx-linsubhr-ratio-anemia2.pptx
+++ b/docs/pptx/whole/jx-linsubhr-ratio-anemia2.pptx
@@ -2443,7 +2443,7 @@
           </p:nvSpPr>
           <p:spPr>
             <a:xfrm>
-              <a:off x="1615213" y="2073503"/>
+              <a:off x="1365633" y="2073503"/>
               <a:ext cx="0" cy="3649639"/>
             </a:xfrm>
             <a:custGeom>
@@ -2486,7 +2486,7 @@
           </p:nvSpPr>
           <p:spPr>
             <a:xfrm>
-              <a:off x="3387871" y="2073503"/>
+              <a:off x="3517243" y="2073503"/>
               <a:ext cx="0" cy="3649639"/>
             </a:xfrm>
             <a:custGeom>
@@ -2529,7 +2529,7 @@
           </p:nvSpPr>
           <p:spPr>
             <a:xfrm>
-              <a:off x="5160528" y="2073503"/>
+              <a:off x="5668852" y="2073503"/>
               <a:ext cx="0" cy="3649639"/>
             </a:xfrm>
             <a:custGeom>
@@ -2572,7 +2572,7 @@
           </p:nvSpPr>
           <p:spPr>
             <a:xfrm>
-              <a:off x="6933186" y="2073503"/>
+              <a:off x="7820461" y="2073503"/>
               <a:ext cx="0" cy="3649639"/>
             </a:xfrm>
             <a:custGeom>
@@ -2830,7 +2830,7 @@
           </p:nvSpPr>
           <p:spPr>
             <a:xfrm>
-              <a:off x="2501542" y="2073503"/>
+              <a:off x="2441438" y="2073503"/>
               <a:ext cx="0" cy="3649639"/>
             </a:xfrm>
             <a:custGeom>
@@ -2873,7 +2873,7 @@
           </p:nvSpPr>
           <p:spPr>
             <a:xfrm>
-              <a:off x="4274200" y="2073503"/>
+              <a:off x="4593047" y="2073503"/>
               <a:ext cx="0" cy="3649639"/>
             </a:xfrm>
             <a:custGeom>
@@ -2916,7 +2916,7 @@
           </p:nvSpPr>
           <p:spPr>
             <a:xfrm>
-              <a:off x="6046857" y="2073503"/>
+              <a:off x="6744657" y="2073503"/>
               <a:ext cx="0" cy="3649639"/>
             </a:xfrm>
             <a:custGeom>
@@ -2953,661 +2953,618 @@
         </p:sp>
         <p:sp>
           <p:nvSpPr>
-            <p:cNvPr id="20" name="pl20"/>
+            <p:cNvPr id="20" name="pg20"/>
             <p:cNvSpPr/>
             <p:nvPr/>
           </p:nvSpPr>
           <p:spPr>
             <a:xfrm>
-              <a:off x="7819515" y="2073503"/>
-              <a:ext cx="0" cy="3649639"/>
+              <a:off x="1172049" y="3057237"/>
+              <a:ext cx="7090630" cy="2246846"/>
             </a:xfrm>
             <a:custGeom>
               <a:avLst/>
               <a:pathLst>
-                <a:path w="0" h="3649639">
-                  <a:moveTo>
-                    <a:pt x="0" y="3649639"/>
-                  </a:moveTo>
-                  <a:lnTo>
-                    <a:pt x="0" y="0"/>
-                  </a:lnTo>
-                  <a:lnTo>
-                    <a:pt x="0" y="0"/>
-                  </a:lnTo>
-                </a:path>
-              </a:pathLst>
-            </a:custGeom>
-            <a:ln w="13550" cap="flat">
-              <a:solidFill>
-                <a:srgbClr val="EBEBEB">
-                  <a:alpha val="100000"/>
-                </a:srgbClr>
-              </a:solidFill>
-              <a:prstDash val="solid"/>
-              <a:round/>
-            </a:ln>
-          </p:spPr>
-          <p:txBody>
-            <a:bodyPr/>
-            <a:lstStyle/>
-            <a:p/>
-          </p:txBody>
-        </p:sp>
-        <p:sp>
-          <p:nvSpPr>
-            <p:cNvPr id="21" name="pg21"/>
-            <p:cNvSpPr/>
-            <p:nvPr/>
-          </p:nvSpPr>
-          <p:spPr>
-            <a:xfrm>
-              <a:off x="817517" y="3108707"/>
-              <a:ext cx="7235830" cy="2195375"/>
-            </a:xfrm>
-            <a:custGeom>
-              <a:avLst/>
-              <a:pathLst>
-                <a:path w="7235830" h="2195375">
+                <a:path w="7090630" h="2246846">
                   <a:moveTo>
                     <a:pt x="0" y="0"/>
                   </a:moveTo>
                   <a:lnTo>
-                    <a:pt x="7347" y="5694"/>
-                  </a:lnTo>
-                  <a:lnTo>
-                    <a:pt x="81107" y="61552"/>
-                  </a:lnTo>
-                  <a:lnTo>
-                    <a:pt x="154867" y="116133"/>
-                  </a:lnTo>
-                  <a:lnTo>
-                    <a:pt x="228627" y="169465"/>
-                  </a:lnTo>
-                  <a:lnTo>
-                    <a:pt x="302387" y="221578"/>
-                  </a:lnTo>
-                  <a:lnTo>
-                    <a:pt x="376147" y="272500"/>
-                  </a:lnTo>
-                  <a:lnTo>
-                    <a:pt x="449907" y="322257"/>
-                  </a:lnTo>
-                  <a:lnTo>
-                    <a:pt x="523667" y="370876"/>
-                  </a:lnTo>
-                  <a:lnTo>
-                    <a:pt x="597427" y="418384"/>
-                  </a:lnTo>
-                  <a:lnTo>
-                    <a:pt x="671187" y="464805"/>
-                  </a:lnTo>
-                  <a:lnTo>
-                    <a:pt x="744947" y="510165"/>
-                  </a:lnTo>
-                  <a:lnTo>
-                    <a:pt x="818707" y="554488"/>
-                  </a:lnTo>
-                  <a:lnTo>
-                    <a:pt x="892467" y="597797"/>
-                  </a:lnTo>
-                  <a:lnTo>
-                    <a:pt x="966227" y="640116"/>
-                  </a:lnTo>
-                  <a:lnTo>
-                    <a:pt x="1039987" y="681467"/>
-                  </a:lnTo>
-                  <a:lnTo>
-                    <a:pt x="1113747" y="721873"/>
-                  </a:lnTo>
-                  <a:lnTo>
-                    <a:pt x="1187508" y="761355"/>
-                  </a:lnTo>
-                  <a:lnTo>
-                    <a:pt x="1261268" y="799934"/>
-                  </a:lnTo>
-                  <a:lnTo>
-                    <a:pt x="1335028" y="837631"/>
-                  </a:lnTo>
-                  <a:lnTo>
-                    <a:pt x="1408788" y="874466"/>
-                  </a:lnTo>
-                  <a:lnTo>
-                    <a:pt x="1482548" y="910458"/>
-                  </a:lnTo>
-                  <a:lnTo>
-                    <a:pt x="1556308" y="945628"/>
-                  </a:lnTo>
-                  <a:lnTo>
-                    <a:pt x="1630068" y="979993"/>
-                  </a:lnTo>
-                  <a:lnTo>
-                    <a:pt x="1703828" y="1013573"/>
-                  </a:lnTo>
-                  <a:lnTo>
-                    <a:pt x="1777588" y="1046385"/>
-                  </a:lnTo>
-                  <a:lnTo>
-                    <a:pt x="1851348" y="1078446"/>
-                  </a:lnTo>
-                  <a:lnTo>
-                    <a:pt x="1925108" y="1109775"/>
-                  </a:lnTo>
-                  <a:lnTo>
-                    <a:pt x="1998868" y="1140387"/>
-                  </a:lnTo>
-                  <a:lnTo>
-                    <a:pt x="2072628" y="1170299"/>
-                  </a:lnTo>
-                  <a:lnTo>
-                    <a:pt x="2146388" y="1199527"/>
-                  </a:lnTo>
-                  <a:lnTo>
-                    <a:pt x="2220148" y="1228087"/>
-                  </a:lnTo>
-                  <a:lnTo>
-                    <a:pt x="2293908" y="1255994"/>
-                  </a:lnTo>
-                  <a:lnTo>
-                    <a:pt x="2367668" y="1283262"/>
-                  </a:lnTo>
-                  <a:lnTo>
-                    <a:pt x="2441428" y="1309908"/>
-                  </a:lnTo>
-                  <a:lnTo>
-                    <a:pt x="2515188" y="1335943"/>
-                  </a:lnTo>
-                  <a:lnTo>
-                    <a:pt x="2588948" y="1361384"/>
-                  </a:lnTo>
-                  <a:lnTo>
-                    <a:pt x="2662708" y="1386243"/>
-                  </a:lnTo>
-                  <a:lnTo>
-                    <a:pt x="2736468" y="1410533"/>
-                  </a:lnTo>
-                  <a:lnTo>
-                    <a:pt x="2810228" y="1434268"/>
-                  </a:lnTo>
-                  <a:lnTo>
-                    <a:pt x="2883988" y="1457460"/>
-                  </a:lnTo>
-                  <a:lnTo>
-                    <a:pt x="2957748" y="1480122"/>
-                  </a:lnTo>
-                  <a:lnTo>
-                    <a:pt x="3031508" y="1502266"/>
-                  </a:lnTo>
-                  <a:lnTo>
-                    <a:pt x="3105268" y="1523904"/>
-                  </a:lnTo>
-                  <a:lnTo>
-                    <a:pt x="3179028" y="1545046"/>
-                  </a:lnTo>
-                  <a:lnTo>
-                    <a:pt x="3252788" y="1565706"/>
-                  </a:lnTo>
-                  <a:lnTo>
-                    <a:pt x="3326548" y="1585892"/>
-                  </a:lnTo>
-                  <a:lnTo>
-                    <a:pt x="3400308" y="1605618"/>
-                  </a:lnTo>
-                  <a:lnTo>
-                    <a:pt x="3474068" y="1621793"/>
-                  </a:lnTo>
-                  <a:lnTo>
-                    <a:pt x="3547828" y="1630660"/>
-                  </a:lnTo>
-                  <a:lnTo>
-                    <a:pt x="3621588" y="1639432"/>
-                  </a:lnTo>
-                  <a:lnTo>
-                    <a:pt x="3695348" y="1648110"/>
-                  </a:lnTo>
-                  <a:lnTo>
-                    <a:pt x="3769108" y="1656694"/>
-                  </a:lnTo>
-                  <a:lnTo>
-                    <a:pt x="3842868" y="1665187"/>
-                  </a:lnTo>
-                  <a:lnTo>
-                    <a:pt x="3916628" y="1673589"/>
-                  </a:lnTo>
-                  <a:lnTo>
-                    <a:pt x="3990388" y="1681900"/>
-                  </a:lnTo>
-                  <a:lnTo>
-                    <a:pt x="4064149" y="1690122"/>
-                  </a:lnTo>
-                  <a:lnTo>
-                    <a:pt x="4137909" y="1698256"/>
-                  </a:lnTo>
-                  <a:lnTo>
-                    <a:pt x="4211669" y="1706303"/>
-                  </a:lnTo>
-                  <a:lnTo>
-                    <a:pt x="4285429" y="1714264"/>
-                  </a:lnTo>
-                  <a:lnTo>
-                    <a:pt x="4359189" y="1722139"/>
-                  </a:lnTo>
-                  <a:lnTo>
-                    <a:pt x="4432949" y="1729930"/>
-                  </a:lnTo>
-                  <a:lnTo>
-                    <a:pt x="4506709" y="1737637"/>
-                  </a:lnTo>
-                  <a:lnTo>
-                    <a:pt x="4580469" y="1745261"/>
-                  </a:lnTo>
-                  <a:lnTo>
-                    <a:pt x="4654229" y="1752804"/>
-                  </a:lnTo>
-                  <a:lnTo>
-                    <a:pt x="4727989" y="1760266"/>
-                  </a:lnTo>
-                  <a:lnTo>
-                    <a:pt x="4801749" y="1767648"/>
-                  </a:lnTo>
-                  <a:lnTo>
-                    <a:pt x="4875509" y="1774950"/>
-                  </a:lnTo>
-                  <a:lnTo>
-                    <a:pt x="4949269" y="1782175"/>
-                  </a:lnTo>
-                  <a:lnTo>
-                    <a:pt x="5023029" y="1789322"/>
-                  </a:lnTo>
-                  <a:lnTo>
-                    <a:pt x="5096789" y="1796392"/>
-                  </a:lnTo>
-                  <a:lnTo>
-                    <a:pt x="5170549" y="1803386"/>
-                  </a:lnTo>
-                  <a:lnTo>
-                    <a:pt x="5244309" y="1810305"/>
-                  </a:lnTo>
-                  <a:lnTo>
-                    <a:pt x="5318069" y="1817151"/>
-                  </a:lnTo>
-                  <a:lnTo>
-                    <a:pt x="5391829" y="1823922"/>
-                  </a:lnTo>
-                  <a:lnTo>
-                    <a:pt x="5465589" y="1830621"/>
-                  </a:lnTo>
-                  <a:lnTo>
-                    <a:pt x="5539349" y="1837249"/>
-                  </a:lnTo>
-                  <a:lnTo>
-                    <a:pt x="5613109" y="1843805"/>
-                  </a:lnTo>
-                  <a:lnTo>
-                    <a:pt x="5686869" y="1850291"/>
-                  </a:lnTo>
-                  <a:lnTo>
-                    <a:pt x="5760629" y="1856707"/>
-                  </a:lnTo>
-                  <a:lnTo>
-                    <a:pt x="5834389" y="1863054"/>
-                  </a:lnTo>
-                  <a:lnTo>
-                    <a:pt x="5908149" y="1869334"/>
-                  </a:lnTo>
-                  <a:lnTo>
-                    <a:pt x="5981909" y="1875546"/>
-                  </a:lnTo>
-                  <a:lnTo>
-                    <a:pt x="6055669" y="1881691"/>
-                  </a:lnTo>
-                  <a:lnTo>
-                    <a:pt x="6129429" y="1887771"/>
-                  </a:lnTo>
-                  <a:lnTo>
-                    <a:pt x="6203189" y="1893785"/>
-                  </a:lnTo>
-                  <a:lnTo>
-                    <a:pt x="6276949" y="1899735"/>
-                  </a:lnTo>
-                  <a:lnTo>
-                    <a:pt x="6350709" y="1905621"/>
-                  </a:lnTo>
-                  <a:lnTo>
-                    <a:pt x="6424469" y="1911444"/>
-                  </a:lnTo>
-                  <a:lnTo>
-                    <a:pt x="6498229" y="1917204"/>
-                  </a:lnTo>
-                  <a:lnTo>
-                    <a:pt x="6571989" y="1922903"/>
-                  </a:lnTo>
-                  <a:lnTo>
-                    <a:pt x="6645749" y="1928540"/>
-                  </a:lnTo>
-                  <a:lnTo>
-                    <a:pt x="6719509" y="1934117"/>
-                  </a:lnTo>
-                  <a:lnTo>
-                    <a:pt x="6793269" y="1939635"/>
-                  </a:lnTo>
-                  <a:lnTo>
-                    <a:pt x="6867029" y="1945093"/>
-                  </a:lnTo>
-                  <a:lnTo>
-                    <a:pt x="6940789" y="1950492"/>
-                  </a:lnTo>
-                  <a:lnTo>
-                    <a:pt x="7014550" y="1955834"/>
-                  </a:lnTo>
-                  <a:lnTo>
-                    <a:pt x="7088310" y="1961118"/>
-                  </a:lnTo>
-                  <a:lnTo>
-                    <a:pt x="7162070" y="1966346"/>
-                  </a:lnTo>
-                  <a:lnTo>
-                    <a:pt x="7235830" y="1971517"/>
-                  </a:lnTo>
-                  <a:lnTo>
-                    <a:pt x="7235830" y="2195375"/>
-                  </a:lnTo>
-                  <a:lnTo>
-                    <a:pt x="7162070" y="2189451"/>
-                  </a:lnTo>
-                  <a:lnTo>
-                    <a:pt x="7088310" y="2183388"/>
-                  </a:lnTo>
-                  <a:lnTo>
-                    <a:pt x="7014550" y="2177183"/>
-                  </a:lnTo>
-                  <a:lnTo>
-                    <a:pt x="6940789" y="2170833"/>
-                  </a:lnTo>
-                  <a:lnTo>
-                    <a:pt x="6867029" y="2164335"/>
-                  </a:lnTo>
-                  <a:lnTo>
-                    <a:pt x="6793269" y="2157684"/>
-                  </a:lnTo>
-                  <a:lnTo>
-                    <a:pt x="6719509" y="2150878"/>
-                  </a:lnTo>
-                  <a:lnTo>
-                    <a:pt x="6645749" y="2143912"/>
-                  </a:lnTo>
-                  <a:lnTo>
-                    <a:pt x="6571989" y="2136783"/>
-                  </a:lnTo>
-                  <a:lnTo>
-                    <a:pt x="6498229" y="2129488"/>
-                  </a:lnTo>
-                  <a:lnTo>
-                    <a:pt x="6424469" y="2122022"/>
-                  </a:lnTo>
-                  <a:lnTo>
-                    <a:pt x="6350709" y="2114381"/>
-                  </a:lnTo>
-                  <a:lnTo>
-                    <a:pt x="6276949" y="2106561"/>
-                  </a:lnTo>
-                  <a:lnTo>
-                    <a:pt x="6203189" y="2098558"/>
-                  </a:lnTo>
-                  <a:lnTo>
-                    <a:pt x="6129429" y="2090369"/>
-                  </a:lnTo>
-                  <a:lnTo>
-                    <a:pt x="6055669" y="2081987"/>
-                  </a:lnTo>
-                  <a:lnTo>
-                    <a:pt x="5981909" y="2073409"/>
-                  </a:lnTo>
-                  <a:lnTo>
-                    <a:pt x="5908149" y="2064631"/>
-                  </a:lnTo>
-                  <a:lnTo>
-                    <a:pt x="5834389" y="2055647"/>
-                  </a:lnTo>
-                  <a:lnTo>
-                    <a:pt x="5760629" y="2046453"/>
-                  </a:lnTo>
-                  <a:lnTo>
-                    <a:pt x="5686869" y="2037043"/>
-                  </a:lnTo>
-                  <a:lnTo>
-                    <a:pt x="5613109" y="2027414"/>
-                  </a:lnTo>
-                  <a:lnTo>
-                    <a:pt x="5539349" y="2017559"/>
-                  </a:lnTo>
-                  <a:lnTo>
-                    <a:pt x="5465589" y="2007474"/>
-                  </a:lnTo>
-                  <a:lnTo>
-                    <a:pt x="5391829" y="1997152"/>
-                  </a:lnTo>
-                  <a:lnTo>
-                    <a:pt x="5318069" y="1986589"/>
-                  </a:lnTo>
-                  <a:lnTo>
-                    <a:pt x="5244309" y="1975779"/>
-                  </a:lnTo>
-                  <a:lnTo>
-                    <a:pt x="5170549" y="1964716"/>
-                  </a:lnTo>
-                  <a:lnTo>
-                    <a:pt x="5096789" y="1953394"/>
-                  </a:lnTo>
-                  <a:lnTo>
-                    <a:pt x="5023029" y="1941807"/>
-                  </a:lnTo>
-                  <a:lnTo>
-                    <a:pt x="4949269" y="1929949"/>
-                  </a:lnTo>
-                  <a:lnTo>
-                    <a:pt x="4875509" y="1917814"/>
-                  </a:lnTo>
-                  <a:lnTo>
-                    <a:pt x="4801749" y="1905394"/>
-                  </a:lnTo>
-                  <a:lnTo>
-                    <a:pt x="4727989" y="1892684"/>
-                  </a:lnTo>
-                  <a:lnTo>
-                    <a:pt x="4654229" y="1879676"/>
-                  </a:lnTo>
-                  <a:lnTo>
-                    <a:pt x="4580469" y="1866364"/>
-                  </a:lnTo>
-                  <a:lnTo>
-                    <a:pt x="4506709" y="1852741"/>
-                  </a:lnTo>
-                  <a:lnTo>
-                    <a:pt x="4432949" y="1838799"/>
-                  </a:lnTo>
-                  <a:lnTo>
-                    <a:pt x="4359189" y="1824530"/>
-                  </a:lnTo>
-                  <a:lnTo>
-                    <a:pt x="4285429" y="1809927"/>
-                  </a:lnTo>
-                  <a:lnTo>
-                    <a:pt x="4211669" y="1794983"/>
-                  </a:lnTo>
-                  <a:lnTo>
-                    <a:pt x="4137909" y="1779689"/>
-                  </a:lnTo>
-                  <a:lnTo>
-                    <a:pt x="4064149" y="1764038"/>
-                  </a:lnTo>
-                  <a:lnTo>
-                    <a:pt x="3990388" y="1748020"/>
-                  </a:lnTo>
-                  <a:lnTo>
-                    <a:pt x="3916628" y="1731627"/>
-                  </a:lnTo>
-                  <a:lnTo>
-                    <a:pt x="3842868" y="1714850"/>
-                  </a:lnTo>
-                  <a:lnTo>
-                    <a:pt x="3769108" y="1697681"/>
-                  </a:lnTo>
-                  <a:lnTo>
-                    <a:pt x="3695348" y="1680110"/>
-                  </a:lnTo>
-                  <a:lnTo>
-                    <a:pt x="3621588" y="1662128"/>
-                  </a:lnTo>
-                  <a:lnTo>
-                    <a:pt x="3547828" y="1643725"/>
-                  </a:lnTo>
-                  <a:lnTo>
-                    <a:pt x="3474068" y="1624892"/>
-                  </a:lnTo>
-                  <a:lnTo>
-                    <a:pt x="3400308" y="1612830"/>
-                  </a:lnTo>
-                  <a:lnTo>
-                    <a:pt x="3326548" y="1603770"/>
-                  </a:lnTo>
-                  <a:lnTo>
-                    <a:pt x="3252788" y="1594611"/>
-                  </a:lnTo>
-                  <a:lnTo>
-                    <a:pt x="3179028" y="1585354"/>
-                  </a:lnTo>
-                  <a:lnTo>
-                    <a:pt x="3105268" y="1575996"/>
-                  </a:lnTo>
-                  <a:lnTo>
-                    <a:pt x="3031508" y="1566536"/>
-                  </a:lnTo>
-                  <a:lnTo>
-                    <a:pt x="2957748" y="1556974"/>
-                  </a:lnTo>
-                  <a:lnTo>
-                    <a:pt x="2883988" y="1547308"/>
-                  </a:lnTo>
-                  <a:lnTo>
-                    <a:pt x="2810228" y="1537538"/>
-                  </a:lnTo>
-                  <a:lnTo>
-                    <a:pt x="2736468" y="1527661"/>
-                  </a:lnTo>
-                  <a:lnTo>
-                    <a:pt x="2662708" y="1517677"/>
-                  </a:lnTo>
-                  <a:lnTo>
-                    <a:pt x="2588948" y="1507586"/>
-                  </a:lnTo>
-                  <a:lnTo>
-                    <a:pt x="2515188" y="1497384"/>
-                  </a:lnTo>
-                  <a:lnTo>
-                    <a:pt x="2441428" y="1487073"/>
-                  </a:lnTo>
-                  <a:lnTo>
-                    <a:pt x="2367668" y="1476649"/>
-                  </a:lnTo>
-                  <a:lnTo>
-                    <a:pt x="2293908" y="1466112"/>
-                  </a:lnTo>
-                  <a:lnTo>
-                    <a:pt x="2220148" y="1455461"/>
-                  </a:lnTo>
-                  <a:lnTo>
-                    <a:pt x="2146388" y="1444695"/>
-                  </a:lnTo>
-                  <a:lnTo>
-                    <a:pt x="2072628" y="1433812"/>
-                  </a:lnTo>
-                  <a:lnTo>
-                    <a:pt x="1998868" y="1422811"/>
-                  </a:lnTo>
-                  <a:lnTo>
-                    <a:pt x="1925108" y="1411691"/>
-                  </a:lnTo>
-                  <a:lnTo>
-                    <a:pt x="1851348" y="1400450"/>
-                  </a:lnTo>
-                  <a:lnTo>
-                    <a:pt x="1777588" y="1389087"/>
-                  </a:lnTo>
-                  <a:lnTo>
-                    <a:pt x="1703828" y="1377601"/>
-                  </a:lnTo>
-                  <a:lnTo>
-                    <a:pt x="1630068" y="1365991"/>
-                  </a:lnTo>
-                  <a:lnTo>
-                    <a:pt x="1556308" y="1354255"/>
-                  </a:lnTo>
-                  <a:lnTo>
-                    <a:pt x="1482548" y="1342391"/>
-                  </a:lnTo>
-                  <a:lnTo>
-                    <a:pt x="1408788" y="1330399"/>
-                  </a:lnTo>
-                  <a:lnTo>
-                    <a:pt x="1335028" y="1318277"/>
-                  </a:lnTo>
-                  <a:lnTo>
-                    <a:pt x="1261268" y="1306023"/>
-                  </a:lnTo>
-                  <a:lnTo>
-                    <a:pt x="1187508" y="1293637"/>
-                  </a:lnTo>
-                  <a:lnTo>
-                    <a:pt x="1113747" y="1281116"/>
-                  </a:lnTo>
-                  <a:lnTo>
-                    <a:pt x="1039987" y="1268459"/>
-                  </a:lnTo>
-                  <a:lnTo>
-                    <a:pt x="966227" y="1255666"/>
-                  </a:lnTo>
-                  <a:lnTo>
-                    <a:pt x="892467" y="1242733"/>
-                  </a:lnTo>
-                  <a:lnTo>
-                    <a:pt x="818707" y="1229661"/>
-                  </a:lnTo>
-                  <a:lnTo>
-                    <a:pt x="744947" y="1216447"/>
-                  </a:lnTo>
-                  <a:lnTo>
-                    <a:pt x="671187" y="1203089"/>
-                  </a:lnTo>
-                  <a:lnTo>
-                    <a:pt x="597427" y="1189587"/>
-                  </a:lnTo>
-                  <a:lnTo>
-                    <a:pt x="523667" y="1175938"/>
-                  </a:lnTo>
-                  <a:lnTo>
-                    <a:pt x="449907" y="1162141"/>
-                  </a:lnTo>
-                  <a:lnTo>
-                    <a:pt x="376147" y="1148195"/>
-                  </a:lnTo>
-                  <a:lnTo>
-                    <a:pt x="302387" y="1134097"/>
-                  </a:lnTo>
-                  <a:lnTo>
-                    <a:pt x="228627" y="1119847"/>
-                  </a:lnTo>
-                  <a:lnTo>
-                    <a:pt x="154867" y="1105442"/>
-                  </a:lnTo>
-                  <a:lnTo>
-                    <a:pt x="81107" y="1090881"/>
-                  </a:lnTo>
-                  <a:lnTo>
-                    <a:pt x="7347" y="1076162"/>
-                  </a:lnTo>
-                  <a:lnTo>
-                    <a:pt x="0" y="1074680"/>
+                    <a:pt x="71622" y="57165"/>
+                  </a:lnTo>
+                  <a:lnTo>
+                    <a:pt x="143245" y="113022"/>
+                  </a:lnTo>
+                  <a:lnTo>
+                    <a:pt x="214867" y="167603"/>
+                  </a:lnTo>
+                  <a:lnTo>
+                    <a:pt x="286490" y="220936"/>
+                  </a:lnTo>
+                  <a:lnTo>
+                    <a:pt x="358112" y="273049"/>
+                  </a:lnTo>
+                  <a:lnTo>
+                    <a:pt x="429735" y="323970"/>
+                  </a:lnTo>
+                  <a:lnTo>
+                    <a:pt x="501357" y="373727"/>
+                  </a:lnTo>
+                  <a:lnTo>
+                    <a:pt x="572980" y="422347"/>
+                  </a:lnTo>
+                  <a:lnTo>
+                    <a:pt x="644602" y="469854"/>
+                  </a:lnTo>
+                  <a:lnTo>
+                    <a:pt x="716225" y="516276"/>
+                  </a:lnTo>
+                  <a:lnTo>
+                    <a:pt x="787847" y="561636"/>
+                  </a:lnTo>
+                  <a:lnTo>
+                    <a:pt x="859470" y="605958"/>
+                  </a:lnTo>
+                  <a:lnTo>
+                    <a:pt x="931092" y="649268"/>
+                  </a:lnTo>
+                  <a:lnTo>
+                    <a:pt x="1002715" y="691586"/>
+                  </a:lnTo>
+                  <a:lnTo>
+                    <a:pt x="1074337" y="732938"/>
+                  </a:lnTo>
+                  <a:lnTo>
+                    <a:pt x="1145960" y="773343"/>
+                  </a:lnTo>
+                  <a:lnTo>
+                    <a:pt x="1217582" y="812825"/>
+                  </a:lnTo>
+                  <a:lnTo>
+                    <a:pt x="1289205" y="851404"/>
+                  </a:lnTo>
+                  <a:lnTo>
+                    <a:pt x="1360827" y="889101"/>
+                  </a:lnTo>
+                  <a:lnTo>
+                    <a:pt x="1432450" y="925936"/>
+                  </a:lnTo>
+                  <a:lnTo>
+                    <a:pt x="1504073" y="961929"/>
+                  </a:lnTo>
+                  <a:lnTo>
+                    <a:pt x="1575695" y="997098"/>
+                  </a:lnTo>
+                  <a:lnTo>
+                    <a:pt x="1647318" y="1031464"/>
+                  </a:lnTo>
+                  <a:lnTo>
+                    <a:pt x="1718940" y="1065044"/>
+                  </a:lnTo>
+                  <a:lnTo>
+                    <a:pt x="1790563" y="1097855"/>
+                  </a:lnTo>
+                  <a:lnTo>
+                    <a:pt x="1862185" y="1129917"/>
+                  </a:lnTo>
+                  <a:lnTo>
+                    <a:pt x="1933808" y="1161245"/>
+                  </a:lnTo>
+                  <a:lnTo>
+                    <a:pt x="2005430" y="1191857"/>
+                  </a:lnTo>
+                  <a:lnTo>
+                    <a:pt x="2077053" y="1221770"/>
+                  </a:lnTo>
+                  <a:lnTo>
+                    <a:pt x="2148675" y="1250998"/>
+                  </a:lnTo>
+                  <a:lnTo>
+                    <a:pt x="2220298" y="1279558"/>
+                  </a:lnTo>
+                  <a:lnTo>
+                    <a:pt x="2291920" y="1307464"/>
+                  </a:lnTo>
+                  <a:lnTo>
+                    <a:pt x="2363543" y="1334733"/>
+                  </a:lnTo>
+                  <a:lnTo>
+                    <a:pt x="2435165" y="1361378"/>
+                  </a:lnTo>
+                  <a:lnTo>
+                    <a:pt x="2506788" y="1387414"/>
+                  </a:lnTo>
+                  <a:lnTo>
+                    <a:pt x="2578410" y="1412855"/>
+                  </a:lnTo>
+                  <a:lnTo>
+                    <a:pt x="2650033" y="1437713"/>
+                  </a:lnTo>
+                  <a:lnTo>
+                    <a:pt x="2721655" y="1462004"/>
+                  </a:lnTo>
+                  <a:lnTo>
+                    <a:pt x="2793278" y="1485739"/>
+                  </a:lnTo>
+                  <a:lnTo>
+                    <a:pt x="2864901" y="1508931"/>
+                  </a:lnTo>
+                  <a:lnTo>
+                    <a:pt x="2936523" y="1531593"/>
+                  </a:lnTo>
+                  <a:lnTo>
+                    <a:pt x="3008146" y="1553737"/>
+                  </a:lnTo>
+                  <a:lnTo>
+                    <a:pt x="3079768" y="1575374"/>
+                  </a:lnTo>
+                  <a:lnTo>
+                    <a:pt x="3151391" y="1596517"/>
+                  </a:lnTo>
+                  <a:lnTo>
+                    <a:pt x="3223013" y="1617176"/>
+                  </a:lnTo>
+                  <a:lnTo>
+                    <a:pt x="3294636" y="1637363"/>
+                  </a:lnTo>
+                  <a:lnTo>
+                    <a:pt x="3366258" y="1657088"/>
+                  </a:lnTo>
+                  <a:lnTo>
+                    <a:pt x="3437881" y="1673264"/>
+                  </a:lnTo>
+                  <a:lnTo>
+                    <a:pt x="3509503" y="1682131"/>
+                  </a:lnTo>
+                  <a:lnTo>
+                    <a:pt x="3581126" y="1690903"/>
+                  </a:lnTo>
+                  <a:lnTo>
+                    <a:pt x="3652748" y="1699580"/>
+                  </a:lnTo>
+                  <a:lnTo>
+                    <a:pt x="3724371" y="1708165"/>
+                  </a:lnTo>
+                  <a:lnTo>
+                    <a:pt x="3795993" y="1716658"/>
+                  </a:lnTo>
+                  <a:lnTo>
+                    <a:pt x="3867616" y="1725059"/>
+                  </a:lnTo>
+                  <a:lnTo>
+                    <a:pt x="3939238" y="1733371"/>
+                  </a:lnTo>
+                  <a:lnTo>
+                    <a:pt x="4010861" y="1741593"/>
+                  </a:lnTo>
+                  <a:lnTo>
+                    <a:pt x="4082483" y="1749727"/>
+                  </a:lnTo>
+                  <a:lnTo>
+                    <a:pt x="4154106" y="1757774"/>
+                  </a:lnTo>
+                  <a:lnTo>
+                    <a:pt x="4225729" y="1765734"/>
+                  </a:lnTo>
+                  <a:lnTo>
+                    <a:pt x="4297351" y="1773610"/>
+                  </a:lnTo>
+                  <a:lnTo>
+                    <a:pt x="4368974" y="1781400"/>
+                  </a:lnTo>
+                  <a:lnTo>
+                    <a:pt x="4440596" y="1789107"/>
+                  </a:lnTo>
+                  <a:lnTo>
+                    <a:pt x="4512219" y="1796732"/>
+                  </a:lnTo>
+                  <a:lnTo>
+                    <a:pt x="4583841" y="1804275"/>
+                  </a:lnTo>
+                  <a:lnTo>
+                    <a:pt x="4655464" y="1811736"/>
+                  </a:lnTo>
+                  <a:lnTo>
+                    <a:pt x="4727086" y="1819118"/>
+                  </a:lnTo>
+                  <a:lnTo>
+                    <a:pt x="4798709" y="1826421"/>
+                  </a:lnTo>
+                  <a:lnTo>
+                    <a:pt x="4870331" y="1833645"/>
+                  </a:lnTo>
+                  <a:lnTo>
+                    <a:pt x="4941954" y="1840792"/>
+                  </a:lnTo>
+                  <a:lnTo>
+                    <a:pt x="5013576" y="1847862"/>
+                  </a:lnTo>
+                  <a:lnTo>
+                    <a:pt x="5085199" y="1854857"/>
+                  </a:lnTo>
+                  <a:lnTo>
+                    <a:pt x="5156821" y="1861776"/>
+                  </a:lnTo>
+                  <a:lnTo>
+                    <a:pt x="5228444" y="1868621"/>
+                  </a:lnTo>
+                  <a:lnTo>
+                    <a:pt x="5300066" y="1875393"/>
+                  </a:lnTo>
+                  <a:lnTo>
+                    <a:pt x="5371689" y="1882092"/>
+                  </a:lnTo>
+                  <a:lnTo>
+                    <a:pt x="5443311" y="1888719"/>
+                  </a:lnTo>
+                  <a:lnTo>
+                    <a:pt x="5514934" y="1895275"/>
+                  </a:lnTo>
+                  <a:lnTo>
+                    <a:pt x="5586557" y="1901761"/>
+                  </a:lnTo>
+                  <a:lnTo>
+                    <a:pt x="5658179" y="1908177"/>
+                  </a:lnTo>
+                  <a:lnTo>
+                    <a:pt x="5729802" y="1914525"/>
+                  </a:lnTo>
+                  <a:lnTo>
+                    <a:pt x="5801424" y="1920804"/>
+                  </a:lnTo>
+                  <a:lnTo>
+                    <a:pt x="5873047" y="1927016"/>
+                  </a:lnTo>
+                  <a:lnTo>
+                    <a:pt x="5944669" y="1933162"/>
+                  </a:lnTo>
+                  <a:lnTo>
+                    <a:pt x="6016292" y="1939241"/>
+                  </a:lnTo>
+                  <a:lnTo>
+                    <a:pt x="6087914" y="1945256"/>
+                  </a:lnTo>
+                  <a:lnTo>
+                    <a:pt x="6159537" y="1951205"/>
+                  </a:lnTo>
+                  <a:lnTo>
+                    <a:pt x="6231159" y="1957091"/>
+                  </a:lnTo>
+                  <a:lnTo>
+                    <a:pt x="6302782" y="1962914"/>
+                  </a:lnTo>
+                  <a:lnTo>
+                    <a:pt x="6374404" y="1968675"/>
+                  </a:lnTo>
+                  <a:lnTo>
+                    <a:pt x="6446027" y="1974373"/>
+                  </a:lnTo>
+                  <a:lnTo>
+                    <a:pt x="6517649" y="1980011"/>
+                  </a:lnTo>
+                  <a:lnTo>
+                    <a:pt x="6589272" y="1985588"/>
+                  </a:lnTo>
+                  <a:lnTo>
+                    <a:pt x="6660894" y="1991105"/>
+                  </a:lnTo>
+                  <a:lnTo>
+                    <a:pt x="6732517" y="1996563"/>
+                  </a:lnTo>
+                  <a:lnTo>
+                    <a:pt x="6804139" y="2001963"/>
+                  </a:lnTo>
+                  <a:lnTo>
+                    <a:pt x="6875762" y="2007304"/>
+                  </a:lnTo>
+                  <a:lnTo>
+                    <a:pt x="6947385" y="2012589"/>
+                  </a:lnTo>
+                  <a:lnTo>
+                    <a:pt x="7019007" y="2017816"/>
+                  </a:lnTo>
+                  <a:lnTo>
+                    <a:pt x="7090630" y="2022988"/>
+                  </a:lnTo>
+                  <a:lnTo>
+                    <a:pt x="7090630" y="2246846"/>
+                  </a:lnTo>
+                  <a:lnTo>
+                    <a:pt x="7019007" y="2240922"/>
+                  </a:lnTo>
+                  <a:lnTo>
+                    <a:pt x="6947385" y="2234859"/>
+                  </a:lnTo>
+                  <a:lnTo>
+                    <a:pt x="6875762" y="2228654"/>
+                  </a:lnTo>
+                  <a:lnTo>
+                    <a:pt x="6804139" y="2222304"/>
+                  </a:lnTo>
+                  <a:lnTo>
+                    <a:pt x="6732517" y="2215805"/>
+                  </a:lnTo>
+                  <a:lnTo>
+                    <a:pt x="6660894" y="2209154"/>
+                  </a:lnTo>
+                  <a:lnTo>
+                    <a:pt x="6589272" y="2202348"/>
+                  </a:lnTo>
+                  <a:lnTo>
+                    <a:pt x="6517649" y="2195382"/>
+                  </a:lnTo>
+                  <a:lnTo>
+                    <a:pt x="6446027" y="2188254"/>
+                  </a:lnTo>
+                  <a:lnTo>
+                    <a:pt x="6374404" y="2180958"/>
+                  </a:lnTo>
+                  <a:lnTo>
+                    <a:pt x="6302782" y="2173492"/>
+                  </a:lnTo>
+                  <a:lnTo>
+                    <a:pt x="6231159" y="2165851"/>
+                  </a:lnTo>
+                  <a:lnTo>
+                    <a:pt x="6159537" y="2158032"/>
+                  </a:lnTo>
+                  <a:lnTo>
+                    <a:pt x="6087914" y="2150029"/>
+                  </a:lnTo>
+                  <a:lnTo>
+                    <a:pt x="6016292" y="2141839"/>
+                  </a:lnTo>
+                  <a:lnTo>
+                    <a:pt x="5944669" y="2133457"/>
+                  </a:lnTo>
+                  <a:lnTo>
+                    <a:pt x="5873047" y="2124880"/>
+                  </a:lnTo>
+                  <a:lnTo>
+                    <a:pt x="5801424" y="2116101"/>
+                  </a:lnTo>
+                  <a:lnTo>
+                    <a:pt x="5729802" y="2107117"/>
+                  </a:lnTo>
+                  <a:lnTo>
+                    <a:pt x="5658179" y="2097923"/>
+                  </a:lnTo>
+                  <a:lnTo>
+                    <a:pt x="5586557" y="2088514"/>
+                  </a:lnTo>
+                  <a:lnTo>
+                    <a:pt x="5514934" y="2078885"/>
+                  </a:lnTo>
+                  <a:lnTo>
+                    <a:pt x="5443311" y="2069030"/>
+                  </a:lnTo>
+                  <a:lnTo>
+                    <a:pt x="5371689" y="2058944"/>
+                  </a:lnTo>
+                  <a:lnTo>
+                    <a:pt x="5300066" y="2048623"/>
+                  </a:lnTo>
+                  <a:lnTo>
+                    <a:pt x="5228444" y="2038060"/>
+                  </a:lnTo>
+                  <a:lnTo>
+                    <a:pt x="5156821" y="2027250"/>
+                  </a:lnTo>
+                  <a:lnTo>
+                    <a:pt x="5085199" y="2016187"/>
+                  </a:lnTo>
+                  <a:lnTo>
+                    <a:pt x="5013576" y="2004865"/>
+                  </a:lnTo>
+                  <a:lnTo>
+                    <a:pt x="4941954" y="1993278"/>
+                  </a:lnTo>
+                  <a:lnTo>
+                    <a:pt x="4870331" y="1981420"/>
+                  </a:lnTo>
+                  <a:lnTo>
+                    <a:pt x="4798709" y="1969284"/>
+                  </a:lnTo>
+                  <a:lnTo>
+                    <a:pt x="4727086" y="1956865"/>
+                  </a:lnTo>
+                  <a:lnTo>
+                    <a:pt x="4655464" y="1944154"/>
+                  </a:lnTo>
+                  <a:lnTo>
+                    <a:pt x="4583841" y="1931147"/>
+                  </a:lnTo>
+                  <a:lnTo>
+                    <a:pt x="4512219" y="1917835"/>
+                  </a:lnTo>
+                  <a:lnTo>
+                    <a:pt x="4440596" y="1904211"/>
+                  </a:lnTo>
+                  <a:lnTo>
+                    <a:pt x="4368974" y="1890269"/>
+                  </a:lnTo>
+                  <a:lnTo>
+                    <a:pt x="4297351" y="1876000"/>
+                  </a:lnTo>
+                  <a:lnTo>
+                    <a:pt x="4225729" y="1861398"/>
+                  </a:lnTo>
+                  <a:lnTo>
+                    <a:pt x="4154106" y="1846454"/>
+                  </a:lnTo>
+                  <a:lnTo>
+                    <a:pt x="4082483" y="1831160"/>
+                  </a:lnTo>
+                  <a:lnTo>
+                    <a:pt x="4010861" y="1815508"/>
+                  </a:lnTo>
+                  <a:lnTo>
+                    <a:pt x="3939238" y="1799490"/>
+                  </a:lnTo>
+                  <a:lnTo>
+                    <a:pt x="3867616" y="1783097"/>
+                  </a:lnTo>
+                  <a:lnTo>
+                    <a:pt x="3795993" y="1766321"/>
+                  </a:lnTo>
+                  <a:lnTo>
+                    <a:pt x="3724371" y="1749152"/>
+                  </a:lnTo>
+                  <a:lnTo>
+                    <a:pt x="3652748" y="1731581"/>
+                  </a:lnTo>
+                  <a:lnTo>
+                    <a:pt x="3581126" y="1713599"/>
+                  </a:lnTo>
+                  <a:lnTo>
+                    <a:pt x="3509503" y="1695196"/>
+                  </a:lnTo>
+                  <a:lnTo>
+                    <a:pt x="3437881" y="1676362"/>
+                  </a:lnTo>
+                  <a:lnTo>
+                    <a:pt x="3366258" y="1664301"/>
+                  </a:lnTo>
+                  <a:lnTo>
+                    <a:pt x="3294636" y="1655240"/>
+                  </a:lnTo>
+                  <a:lnTo>
+                    <a:pt x="3223013" y="1646082"/>
+                  </a:lnTo>
+                  <a:lnTo>
+                    <a:pt x="3151391" y="1636824"/>
+                  </a:lnTo>
+                  <a:lnTo>
+                    <a:pt x="3079768" y="1627466"/>
+                  </a:lnTo>
+                  <a:lnTo>
+                    <a:pt x="3008146" y="1618007"/>
+                  </a:lnTo>
+                  <a:lnTo>
+                    <a:pt x="2936523" y="1608444"/>
+                  </a:lnTo>
+                  <a:lnTo>
+                    <a:pt x="2864901" y="1598779"/>
+                  </a:lnTo>
+                  <a:lnTo>
+                    <a:pt x="2793278" y="1589008"/>
+                  </a:lnTo>
+                  <a:lnTo>
+                    <a:pt x="2721655" y="1579132"/>
+                  </a:lnTo>
+                  <a:lnTo>
+                    <a:pt x="2650033" y="1569148"/>
+                  </a:lnTo>
+                  <a:lnTo>
+                    <a:pt x="2578410" y="1559056"/>
+                  </a:lnTo>
+                  <a:lnTo>
+                    <a:pt x="2506788" y="1548855"/>
+                  </a:lnTo>
+                  <a:lnTo>
+                    <a:pt x="2435165" y="1538543"/>
+                  </a:lnTo>
+                  <a:lnTo>
+                    <a:pt x="2363543" y="1528119"/>
+                  </a:lnTo>
+                  <a:lnTo>
+                    <a:pt x="2291920" y="1517583"/>
+                  </a:lnTo>
+                  <a:lnTo>
+                    <a:pt x="2220298" y="1506932"/>
+                  </a:lnTo>
+                  <a:lnTo>
+                    <a:pt x="2148675" y="1496166"/>
+                  </a:lnTo>
+                  <a:lnTo>
+                    <a:pt x="2077053" y="1485283"/>
+                  </a:lnTo>
+                  <a:lnTo>
+                    <a:pt x="2005430" y="1474282"/>
+                  </a:lnTo>
+                  <a:lnTo>
+                    <a:pt x="1933808" y="1463161"/>
+                  </a:lnTo>
+                  <a:lnTo>
+                    <a:pt x="1862185" y="1451920"/>
+                  </a:lnTo>
+                  <a:lnTo>
+                    <a:pt x="1790563" y="1440558"/>
+                  </a:lnTo>
+                  <a:lnTo>
+                    <a:pt x="1718940" y="1429072"/>
+                  </a:lnTo>
+                  <a:lnTo>
+                    <a:pt x="1647318" y="1417461"/>
+                  </a:lnTo>
+                  <a:lnTo>
+                    <a:pt x="1575695" y="1405725"/>
+                  </a:lnTo>
+                  <a:lnTo>
+                    <a:pt x="1504073" y="1393862"/>
+                  </a:lnTo>
+                  <a:lnTo>
+                    <a:pt x="1432450" y="1381869"/>
+                  </a:lnTo>
+                  <a:lnTo>
+                    <a:pt x="1360827" y="1369747"/>
+                  </a:lnTo>
+                  <a:lnTo>
+                    <a:pt x="1289205" y="1357494"/>
+                  </a:lnTo>
+                  <a:lnTo>
+                    <a:pt x="1217582" y="1345107"/>
+                  </a:lnTo>
+                  <a:lnTo>
+                    <a:pt x="1145960" y="1332586"/>
+                  </a:lnTo>
+                  <a:lnTo>
+                    <a:pt x="1074337" y="1319930"/>
+                  </a:lnTo>
+                  <a:lnTo>
+                    <a:pt x="1002715" y="1307136"/>
+                  </a:lnTo>
+                  <a:lnTo>
+                    <a:pt x="931092" y="1294204"/>
+                  </a:lnTo>
+                  <a:lnTo>
+                    <a:pt x="859470" y="1281131"/>
+                  </a:lnTo>
+                  <a:lnTo>
+                    <a:pt x="787847" y="1267917"/>
+                  </a:lnTo>
+                  <a:lnTo>
+                    <a:pt x="716225" y="1254559"/>
+                  </a:lnTo>
+                  <a:lnTo>
+                    <a:pt x="644602" y="1241057"/>
+                  </a:lnTo>
+                  <a:lnTo>
+                    <a:pt x="572980" y="1227408"/>
+                  </a:lnTo>
+                  <a:lnTo>
+                    <a:pt x="501357" y="1213612"/>
+                  </a:lnTo>
+                  <a:lnTo>
+                    <a:pt x="429735" y="1199665"/>
+                  </a:lnTo>
+                  <a:lnTo>
+                    <a:pt x="358112" y="1185568"/>
+                  </a:lnTo>
+                  <a:lnTo>
+                    <a:pt x="286490" y="1171317"/>
+                  </a:lnTo>
+                  <a:lnTo>
+                    <a:pt x="214867" y="1156913"/>
+                  </a:lnTo>
+                  <a:lnTo>
+                    <a:pt x="143245" y="1142352"/>
+                  </a:lnTo>
+                  <a:lnTo>
+                    <a:pt x="71622" y="1127633"/>
+                  </a:lnTo>
+                  <a:lnTo>
+                    <a:pt x="0" y="1112754"/>
                   </a:lnTo>
                   <a:close/>
                 </a:path>
@@ -3627,318 +3584,643 @@
         </p:sp>
         <p:sp>
           <p:nvSpPr>
+            <p:cNvPr id="21" name="pl21"/>
+            <p:cNvSpPr/>
+            <p:nvPr/>
+          </p:nvSpPr>
+          <p:spPr>
+            <a:xfrm>
+              <a:off x="1172049" y="3057237"/>
+              <a:ext cx="7090630" cy="2022988"/>
+            </a:xfrm>
+            <a:custGeom>
+              <a:avLst/>
+              <a:pathLst>
+                <a:path w="7090630" h="2022988">
+                  <a:moveTo>
+                    <a:pt x="0" y="0"/>
+                  </a:moveTo>
+                  <a:lnTo>
+                    <a:pt x="71622" y="57165"/>
+                  </a:lnTo>
+                  <a:lnTo>
+                    <a:pt x="143245" y="113022"/>
+                  </a:lnTo>
+                  <a:lnTo>
+                    <a:pt x="214867" y="167603"/>
+                  </a:lnTo>
+                  <a:lnTo>
+                    <a:pt x="286490" y="220936"/>
+                  </a:lnTo>
+                  <a:lnTo>
+                    <a:pt x="358112" y="273049"/>
+                  </a:lnTo>
+                  <a:lnTo>
+                    <a:pt x="429735" y="323970"/>
+                  </a:lnTo>
+                  <a:lnTo>
+                    <a:pt x="501357" y="373727"/>
+                  </a:lnTo>
+                  <a:lnTo>
+                    <a:pt x="572980" y="422347"/>
+                  </a:lnTo>
+                  <a:lnTo>
+                    <a:pt x="644602" y="469854"/>
+                  </a:lnTo>
+                  <a:lnTo>
+                    <a:pt x="716225" y="516276"/>
+                  </a:lnTo>
+                  <a:lnTo>
+                    <a:pt x="787847" y="561636"/>
+                  </a:lnTo>
+                  <a:lnTo>
+                    <a:pt x="859470" y="605958"/>
+                  </a:lnTo>
+                  <a:lnTo>
+                    <a:pt x="931092" y="649268"/>
+                  </a:lnTo>
+                  <a:lnTo>
+                    <a:pt x="1002715" y="691586"/>
+                  </a:lnTo>
+                  <a:lnTo>
+                    <a:pt x="1074337" y="732938"/>
+                  </a:lnTo>
+                  <a:lnTo>
+                    <a:pt x="1145960" y="773343"/>
+                  </a:lnTo>
+                  <a:lnTo>
+                    <a:pt x="1217582" y="812825"/>
+                  </a:lnTo>
+                  <a:lnTo>
+                    <a:pt x="1289205" y="851404"/>
+                  </a:lnTo>
+                  <a:lnTo>
+                    <a:pt x="1360827" y="889101"/>
+                  </a:lnTo>
+                  <a:lnTo>
+                    <a:pt x="1432450" y="925936"/>
+                  </a:lnTo>
+                  <a:lnTo>
+                    <a:pt x="1504073" y="961929"/>
+                  </a:lnTo>
+                  <a:lnTo>
+                    <a:pt x="1575695" y="997098"/>
+                  </a:lnTo>
+                  <a:lnTo>
+                    <a:pt x="1647318" y="1031464"/>
+                  </a:lnTo>
+                  <a:lnTo>
+                    <a:pt x="1718940" y="1065044"/>
+                  </a:lnTo>
+                  <a:lnTo>
+                    <a:pt x="1790563" y="1097855"/>
+                  </a:lnTo>
+                  <a:lnTo>
+                    <a:pt x="1862185" y="1129917"/>
+                  </a:lnTo>
+                  <a:lnTo>
+                    <a:pt x="1933808" y="1161245"/>
+                  </a:lnTo>
+                  <a:lnTo>
+                    <a:pt x="2005430" y="1191857"/>
+                  </a:lnTo>
+                  <a:lnTo>
+                    <a:pt x="2077053" y="1221770"/>
+                  </a:lnTo>
+                  <a:lnTo>
+                    <a:pt x="2148675" y="1250998"/>
+                  </a:lnTo>
+                  <a:lnTo>
+                    <a:pt x="2220298" y="1279558"/>
+                  </a:lnTo>
+                  <a:lnTo>
+                    <a:pt x="2291920" y="1307464"/>
+                  </a:lnTo>
+                  <a:lnTo>
+                    <a:pt x="2363543" y="1334733"/>
+                  </a:lnTo>
+                  <a:lnTo>
+                    <a:pt x="2435165" y="1361378"/>
+                  </a:lnTo>
+                  <a:lnTo>
+                    <a:pt x="2506788" y="1387414"/>
+                  </a:lnTo>
+                  <a:lnTo>
+                    <a:pt x="2578410" y="1412855"/>
+                  </a:lnTo>
+                  <a:lnTo>
+                    <a:pt x="2650033" y="1437713"/>
+                  </a:lnTo>
+                  <a:lnTo>
+                    <a:pt x="2721655" y="1462004"/>
+                  </a:lnTo>
+                  <a:lnTo>
+                    <a:pt x="2793278" y="1485739"/>
+                  </a:lnTo>
+                  <a:lnTo>
+                    <a:pt x="2864901" y="1508931"/>
+                  </a:lnTo>
+                  <a:lnTo>
+                    <a:pt x="2936523" y="1531593"/>
+                  </a:lnTo>
+                  <a:lnTo>
+                    <a:pt x="3008146" y="1553737"/>
+                  </a:lnTo>
+                  <a:lnTo>
+                    <a:pt x="3079768" y="1575374"/>
+                  </a:lnTo>
+                  <a:lnTo>
+                    <a:pt x="3151391" y="1596517"/>
+                  </a:lnTo>
+                  <a:lnTo>
+                    <a:pt x="3223013" y="1617176"/>
+                  </a:lnTo>
+                  <a:lnTo>
+                    <a:pt x="3294636" y="1637363"/>
+                  </a:lnTo>
+                  <a:lnTo>
+                    <a:pt x="3366258" y="1657088"/>
+                  </a:lnTo>
+                  <a:lnTo>
+                    <a:pt x="3437881" y="1673264"/>
+                  </a:lnTo>
+                  <a:lnTo>
+                    <a:pt x="3509503" y="1682131"/>
+                  </a:lnTo>
+                  <a:lnTo>
+                    <a:pt x="3581126" y="1690903"/>
+                  </a:lnTo>
+                  <a:lnTo>
+                    <a:pt x="3652748" y="1699580"/>
+                  </a:lnTo>
+                  <a:lnTo>
+                    <a:pt x="3724371" y="1708165"/>
+                  </a:lnTo>
+                  <a:lnTo>
+                    <a:pt x="3795993" y="1716658"/>
+                  </a:lnTo>
+                  <a:lnTo>
+                    <a:pt x="3867616" y="1725059"/>
+                  </a:lnTo>
+                  <a:lnTo>
+                    <a:pt x="3939238" y="1733371"/>
+                  </a:lnTo>
+                  <a:lnTo>
+                    <a:pt x="4010861" y="1741593"/>
+                  </a:lnTo>
+                  <a:lnTo>
+                    <a:pt x="4082483" y="1749727"/>
+                  </a:lnTo>
+                  <a:lnTo>
+                    <a:pt x="4154106" y="1757774"/>
+                  </a:lnTo>
+                  <a:lnTo>
+                    <a:pt x="4225729" y="1765734"/>
+                  </a:lnTo>
+                  <a:lnTo>
+                    <a:pt x="4297351" y="1773610"/>
+                  </a:lnTo>
+                  <a:lnTo>
+                    <a:pt x="4368974" y="1781400"/>
+                  </a:lnTo>
+                  <a:lnTo>
+                    <a:pt x="4440596" y="1789107"/>
+                  </a:lnTo>
+                  <a:lnTo>
+                    <a:pt x="4512219" y="1796732"/>
+                  </a:lnTo>
+                  <a:lnTo>
+                    <a:pt x="4583841" y="1804275"/>
+                  </a:lnTo>
+                  <a:lnTo>
+                    <a:pt x="4655464" y="1811736"/>
+                  </a:lnTo>
+                  <a:lnTo>
+                    <a:pt x="4727086" y="1819118"/>
+                  </a:lnTo>
+                  <a:lnTo>
+                    <a:pt x="4798709" y="1826421"/>
+                  </a:lnTo>
+                  <a:lnTo>
+                    <a:pt x="4870331" y="1833645"/>
+                  </a:lnTo>
+                  <a:lnTo>
+                    <a:pt x="4941954" y="1840792"/>
+                  </a:lnTo>
+                  <a:lnTo>
+                    <a:pt x="5013576" y="1847862"/>
+                  </a:lnTo>
+                  <a:lnTo>
+                    <a:pt x="5085199" y="1854857"/>
+                  </a:lnTo>
+                  <a:lnTo>
+                    <a:pt x="5156821" y="1861776"/>
+                  </a:lnTo>
+                  <a:lnTo>
+                    <a:pt x="5228444" y="1868621"/>
+                  </a:lnTo>
+                  <a:lnTo>
+                    <a:pt x="5300066" y="1875393"/>
+                  </a:lnTo>
+                  <a:lnTo>
+                    <a:pt x="5371689" y="1882092"/>
+                  </a:lnTo>
+                  <a:lnTo>
+                    <a:pt x="5443311" y="1888719"/>
+                  </a:lnTo>
+                  <a:lnTo>
+                    <a:pt x="5514934" y="1895275"/>
+                  </a:lnTo>
+                  <a:lnTo>
+                    <a:pt x="5586557" y="1901761"/>
+                  </a:lnTo>
+                  <a:lnTo>
+                    <a:pt x="5658179" y="1908177"/>
+                  </a:lnTo>
+                  <a:lnTo>
+                    <a:pt x="5729802" y="1914525"/>
+                  </a:lnTo>
+                  <a:lnTo>
+                    <a:pt x="5801424" y="1920804"/>
+                  </a:lnTo>
+                  <a:lnTo>
+                    <a:pt x="5873047" y="1927016"/>
+                  </a:lnTo>
+                  <a:lnTo>
+                    <a:pt x="5944669" y="1933162"/>
+                  </a:lnTo>
+                  <a:lnTo>
+                    <a:pt x="6016292" y="1939241"/>
+                  </a:lnTo>
+                  <a:lnTo>
+                    <a:pt x="6087914" y="1945256"/>
+                  </a:lnTo>
+                  <a:lnTo>
+                    <a:pt x="6159537" y="1951205"/>
+                  </a:lnTo>
+                  <a:lnTo>
+                    <a:pt x="6231159" y="1957091"/>
+                  </a:lnTo>
+                  <a:lnTo>
+                    <a:pt x="6302782" y="1962914"/>
+                  </a:lnTo>
+                  <a:lnTo>
+                    <a:pt x="6374404" y="1968675"/>
+                  </a:lnTo>
+                  <a:lnTo>
+                    <a:pt x="6446027" y="1974373"/>
+                  </a:lnTo>
+                  <a:lnTo>
+                    <a:pt x="6517649" y="1980011"/>
+                  </a:lnTo>
+                  <a:lnTo>
+                    <a:pt x="6589272" y="1985588"/>
+                  </a:lnTo>
+                  <a:lnTo>
+                    <a:pt x="6660894" y="1991105"/>
+                  </a:lnTo>
+                  <a:lnTo>
+                    <a:pt x="6732517" y="1996563"/>
+                  </a:lnTo>
+                  <a:lnTo>
+                    <a:pt x="6804139" y="2001963"/>
+                  </a:lnTo>
+                  <a:lnTo>
+                    <a:pt x="6875762" y="2007304"/>
+                  </a:lnTo>
+                  <a:lnTo>
+                    <a:pt x="6947385" y="2012589"/>
+                  </a:lnTo>
+                  <a:lnTo>
+                    <a:pt x="7019007" y="2017816"/>
+                  </a:lnTo>
+                  <a:lnTo>
+                    <a:pt x="7090630" y="2022988"/>
+                  </a:lnTo>
+                </a:path>
+              </a:pathLst>
+            </a:custGeom>
+          </p:spPr>
+          <p:txBody>
+            <a:bodyPr/>
+            <a:lstStyle/>
+            <a:p/>
+          </p:txBody>
+        </p:sp>
+        <p:sp>
+          <p:nvSpPr>
             <p:cNvPr id="22" name="pl22"/>
             <p:cNvSpPr/>
             <p:nvPr/>
           </p:nvSpPr>
           <p:spPr>
             <a:xfrm>
-              <a:off x="817517" y="3108707"/>
-              <a:ext cx="7235830" cy="1971517"/>
+              <a:off x="1172049" y="4169992"/>
+              <a:ext cx="7090630" cy="1134091"/>
             </a:xfrm>
             <a:custGeom>
               <a:avLst/>
               <a:pathLst>
-                <a:path w="7235830" h="1971517">
+                <a:path w="7090630" h="1134091">
                   <a:moveTo>
+                    <a:pt x="7090630" y="1134091"/>
+                  </a:moveTo>
+                  <a:lnTo>
+                    <a:pt x="7019007" y="1128167"/>
+                  </a:lnTo>
+                  <a:lnTo>
+                    <a:pt x="6947385" y="1122104"/>
+                  </a:lnTo>
+                  <a:lnTo>
+                    <a:pt x="6875762" y="1115899"/>
+                  </a:lnTo>
+                  <a:lnTo>
+                    <a:pt x="6804139" y="1109549"/>
+                  </a:lnTo>
+                  <a:lnTo>
+                    <a:pt x="6732517" y="1103050"/>
+                  </a:lnTo>
+                  <a:lnTo>
+                    <a:pt x="6660894" y="1096400"/>
+                  </a:lnTo>
+                  <a:lnTo>
+                    <a:pt x="6589272" y="1089593"/>
+                  </a:lnTo>
+                  <a:lnTo>
+                    <a:pt x="6517649" y="1082628"/>
+                  </a:lnTo>
+                  <a:lnTo>
+                    <a:pt x="6446027" y="1075499"/>
+                  </a:lnTo>
+                  <a:lnTo>
+                    <a:pt x="6374404" y="1068204"/>
+                  </a:lnTo>
+                  <a:lnTo>
+                    <a:pt x="6302782" y="1060737"/>
+                  </a:lnTo>
+                  <a:lnTo>
+                    <a:pt x="6231159" y="1053097"/>
+                  </a:lnTo>
+                  <a:lnTo>
+                    <a:pt x="6159537" y="1045277"/>
+                  </a:lnTo>
+                  <a:lnTo>
+                    <a:pt x="6087914" y="1037274"/>
+                  </a:lnTo>
+                  <a:lnTo>
+                    <a:pt x="6016292" y="1029084"/>
+                  </a:lnTo>
+                  <a:lnTo>
+                    <a:pt x="5944669" y="1020703"/>
+                  </a:lnTo>
+                  <a:lnTo>
+                    <a:pt x="5873047" y="1012125"/>
+                  </a:lnTo>
+                  <a:lnTo>
+                    <a:pt x="5801424" y="1003346"/>
+                  </a:lnTo>
+                  <a:lnTo>
+                    <a:pt x="5729802" y="994363"/>
+                  </a:lnTo>
+                  <a:lnTo>
+                    <a:pt x="5658179" y="985168"/>
+                  </a:lnTo>
+                  <a:lnTo>
+                    <a:pt x="5586557" y="975759"/>
+                  </a:lnTo>
+                  <a:lnTo>
+                    <a:pt x="5514934" y="966130"/>
+                  </a:lnTo>
+                  <a:lnTo>
+                    <a:pt x="5443311" y="956275"/>
+                  </a:lnTo>
+                  <a:lnTo>
+                    <a:pt x="5371689" y="946190"/>
+                  </a:lnTo>
+                  <a:lnTo>
+                    <a:pt x="5300066" y="935868"/>
+                  </a:lnTo>
+                  <a:lnTo>
+                    <a:pt x="5228444" y="925305"/>
+                  </a:lnTo>
+                  <a:lnTo>
+                    <a:pt x="5156821" y="914495"/>
+                  </a:lnTo>
+                  <a:lnTo>
+                    <a:pt x="5085199" y="903432"/>
+                  </a:lnTo>
+                  <a:lnTo>
+                    <a:pt x="5013576" y="892110"/>
+                  </a:lnTo>
+                  <a:lnTo>
+                    <a:pt x="4941954" y="880523"/>
+                  </a:lnTo>
+                  <a:lnTo>
+                    <a:pt x="4870331" y="868665"/>
+                  </a:lnTo>
+                  <a:lnTo>
+                    <a:pt x="4798709" y="856529"/>
+                  </a:lnTo>
+                  <a:lnTo>
+                    <a:pt x="4727086" y="844110"/>
+                  </a:lnTo>
+                  <a:lnTo>
+                    <a:pt x="4655464" y="831400"/>
+                  </a:lnTo>
+                  <a:lnTo>
+                    <a:pt x="4583841" y="818392"/>
+                  </a:lnTo>
+                  <a:lnTo>
+                    <a:pt x="4512219" y="805080"/>
+                  </a:lnTo>
+                  <a:lnTo>
+                    <a:pt x="4440596" y="791457"/>
+                  </a:lnTo>
+                  <a:lnTo>
+                    <a:pt x="4368974" y="777514"/>
+                  </a:lnTo>
+                  <a:lnTo>
+                    <a:pt x="4297351" y="763246"/>
+                  </a:lnTo>
+                  <a:lnTo>
+                    <a:pt x="4225729" y="748643"/>
+                  </a:lnTo>
+                  <a:lnTo>
+                    <a:pt x="4154106" y="733699"/>
+                  </a:lnTo>
+                  <a:lnTo>
+                    <a:pt x="4082483" y="718405"/>
+                  </a:lnTo>
+                  <a:lnTo>
+                    <a:pt x="4010861" y="702753"/>
+                  </a:lnTo>
+                  <a:lnTo>
+                    <a:pt x="3939238" y="686735"/>
+                  </a:lnTo>
+                  <a:lnTo>
+                    <a:pt x="3867616" y="670342"/>
+                  </a:lnTo>
+                  <a:lnTo>
+                    <a:pt x="3795993" y="653566"/>
+                  </a:lnTo>
+                  <a:lnTo>
+                    <a:pt x="3724371" y="636397"/>
+                  </a:lnTo>
+                  <a:lnTo>
+                    <a:pt x="3652748" y="618826"/>
+                  </a:lnTo>
+                  <a:lnTo>
+                    <a:pt x="3581126" y="600844"/>
+                  </a:lnTo>
+                  <a:lnTo>
+                    <a:pt x="3509503" y="582441"/>
+                  </a:lnTo>
+                  <a:lnTo>
+                    <a:pt x="3437881" y="563608"/>
+                  </a:lnTo>
+                  <a:lnTo>
+                    <a:pt x="3366258" y="551546"/>
+                  </a:lnTo>
+                  <a:lnTo>
+                    <a:pt x="3294636" y="542486"/>
+                  </a:lnTo>
+                  <a:lnTo>
+                    <a:pt x="3223013" y="533327"/>
+                  </a:lnTo>
+                  <a:lnTo>
+                    <a:pt x="3151391" y="524070"/>
+                  </a:lnTo>
+                  <a:lnTo>
+                    <a:pt x="3079768" y="514711"/>
+                  </a:lnTo>
+                  <a:lnTo>
+                    <a:pt x="3008146" y="505252"/>
+                  </a:lnTo>
+                  <a:lnTo>
+                    <a:pt x="2936523" y="495690"/>
+                  </a:lnTo>
+                  <a:lnTo>
+                    <a:pt x="2864901" y="486024"/>
+                  </a:lnTo>
+                  <a:lnTo>
+                    <a:pt x="2793278" y="476253"/>
+                  </a:lnTo>
+                  <a:lnTo>
+                    <a:pt x="2721655" y="466377"/>
+                  </a:lnTo>
+                  <a:lnTo>
+                    <a:pt x="2650033" y="456393"/>
+                  </a:lnTo>
+                  <a:lnTo>
+                    <a:pt x="2578410" y="446301"/>
+                  </a:lnTo>
+                  <a:lnTo>
+                    <a:pt x="2506788" y="436100"/>
+                  </a:lnTo>
+                  <a:lnTo>
+                    <a:pt x="2435165" y="425788"/>
+                  </a:lnTo>
+                  <a:lnTo>
+                    <a:pt x="2363543" y="415365"/>
+                  </a:lnTo>
+                  <a:lnTo>
+                    <a:pt x="2291920" y="404828"/>
+                  </a:lnTo>
+                  <a:lnTo>
+                    <a:pt x="2220298" y="394177"/>
+                  </a:lnTo>
+                  <a:lnTo>
+                    <a:pt x="2148675" y="383411"/>
+                  </a:lnTo>
+                  <a:lnTo>
+                    <a:pt x="2077053" y="372528"/>
+                  </a:lnTo>
+                  <a:lnTo>
+                    <a:pt x="2005430" y="361527"/>
+                  </a:lnTo>
+                  <a:lnTo>
+                    <a:pt x="1933808" y="350407"/>
+                  </a:lnTo>
+                  <a:lnTo>
+                    <a:pt x="1862185" y="339166"/>
+                  </a:lnTo>
+                  <a:lnTo>
+                    <a:pt x="1790563" y="327803"/>
+                  </a:lnTo>
+                  <a:lnTo>
+                    <a:pt x="1718940" y="316317"/>
+                  </a:lnTo>
+                  <a:lnTo>
+                    <a:pt x="1647318" y="304707"/>
+                  </a:lnTo>
+                  <a:lnTo>
+                    <a:pt x="1575695" y="292970"/>
+                  </a:lnTo>
+                  <a:lnTo>
+                    <a:pt x="1504073" y="281107"/>
+                  </a:lnTo>
+                  <a:lnTo>
+                    <a:pt x="1432450" y="269115"/>
+                  </a:lnTo>
+                  <a:lnTo>
+                    <a:pt x="1360827" y="256992"/>
+                  </a:lnTo>
+                  <a:lnTo>
+                    <a:pt x="1289205" y="244739"/>
+                  </a:lnTo>
+                  <a:lnTo>
+                    <a:pt x="1217582" y="232352"/>
+                  </a:lnTo>
+                  <a:lnTo>
+                    <a:pt x="1145960" y="219832"/>
+                  </a:lnTo>
+                  <a:lnTo>
+                    <a:pt x="1074337" y="207175"/>
+                  </a:lnTo>
+                  <a:lnTo>
+                    <a:pt x="1002715" y="194382"/>
+                  </a:lnTo>
+                  <a:lnTo>
+                    <a:pt x="931092" y="181449"/>
+                  </a:lnTo>
+                  <a:lnTo>
+                    <a:pt x="859470" y="168377"/>
+                  </a:lnTo>
+                  <a:lnTo>
+                    <a:pt x="787847" y="155162"/>
+                  </a:lnTo>
+                  <a:lnTo>
+                    <a:pt x="716225" y="141805"/>
+                  </a:lnTo>
+                  <a:lnTo>
+                    <a:pt x="644602" y="128302"/>
+                  </a:lnTo>
+                  <a:lnTo>
+                    <a:pt x="572980" y="114654"/>
+                  </a:lnTo>
+                  <a:lnTo>
+                    <a:pt x="501357" y="100857"/>
+                  </a:lnTo>
+                  <a:lnTo>
+                    <a:pt x="429735" y="86911"/>
+                  </a:lnTo>
+                  <a:lnTo>
+                    <a:pt x="358112" y="72813"/>
+                  </a:lnTo>
+                  <a:lnTo>
+                    <a:pt x="286490" y="58563"/>
+                  </a:lnTo>
+                  <a:lnTo>
+                    <a:pt x="214867" y="44158"/>
+                  </a:lnTo>
+                  <a:lnTo>
+                    <a:pt x="143245" y="29597"/>
+                  </a:lnTo>
+                  <a:lnTo>
+                    <a:pt x="71622" y="14878"/>
+                  </a:lnTo>
+                  <a:lnTo>
                     <a:pt x="0" y="0"/>
-                  </a:moveTo>
-                  <a:lnTo>
-                    <a:pt x="7347" y="5694"/>
-                  </a:lnTo>
-                  <a:lnTo>
-                    <a:pt x="81107" y="61552"/>
-                  </a:lnTo>
-                  <a:lnTo>
-                    <a:pt x="154867" y="116133"/>
-                  </a:lnTo>
-                  <a:lnTo>
-                    <a:pt x="228627" y="169465"/>
-                  </a:lnTo>
-                  <a:lnTo>
-                    <a:pt x="302387" y="221578"/>
-                  </a:lnTo>
-                  <a:lnTo>
-                    <a:pt x="376147" y="272500"/>
-                  </a:lnTo>
-                  <a:lnTo>
-                    <a:pt x="449907" y="322257"/>
-                  </a:lnTo>
-                  <a:lnTo>
-                    <a:pt x="523667" y="370876"/>
-                  </a:lnTo>
-                  <a:lnTo>
-                    <a:pt x="597427" y="418384"/>
-                  </a:lnTo>
-                  <a:lnTo>
-                    <a:pt x="671187" y="464805"/>
-                  </a:lnTo>
-                  <a:lnTo>
-                    <a:pt x="744947" y="510165"/>
-                  </a:lnTo>
-                  <a:lnTo>
-                    <a:pt x="818707" y="554488"/>
-                  </a:lnTo>
-                  <a:lnTo>
-                    <a:pt x="892467" y="597797"/>
-                  </a:lnTo>
-                  <a:lnTo>
-                    <a:pt x="966227" y="640116"/>
-                  </a:lnTo>
-                  <a:lnTo>
-                    <a:pt x="1039987" y="681467"/>
-                  </a:lnTo>
-                  <a:lnTo>
-                    <a:pt x="1113747" y="721873"/>
-                  </a:lnTo>
-                  <a:lnTo>
-                    <a:pt x="1187508" y="761355"/>
-                  </a:lnTo>
-                  <a:lnTo>
-                    <a:pt x="1261268" y="799934"/>
-                  </a:lnTo>
-                  <a:lnTo>
-                    <a:pt x="1335028" y="837631"/>
-                  </a:lnTo>
-                  <a:lnTo>
-                    <a:pt x="1408788" y="874466"/>
-                  </a:lnTo>
-                  <a:lnTo>
-                    <a:pt x="1482548" y="910458"/>
-                  </a:lnTo>
-                  <a:lnTo>
-                    <a:pt x="1556308" y="945628"/>
-                  </a:lnTo>
-                  <a:lnTo>
-                    <a:pt x="1630068" y="979993"/>
-                  </a:lnTo>
-                  <a:lnTo>
-                    <a:pt x="1703828" y="1013573"/>
-                  </a:lnTo>
-                  <a:lnTo>
-                    <a:pt x="1777588" y="1046385"/>
-                  </a:lnTo>
-                  <a:lnTo>
-                    <a:pt x="1851348" y="1078446"/>
-                  </a:lnTo>
-                  <a:lnTo>
-                    <a:pt x="1925108" y="1109775"/>
-                  </a:lnTo>
-                  <a:lnTo>
-                    <a:pt x="1998868" y="1140387"/>
-                  </a:lnTo>
-                  <a:lnTo>
-                    <a:pt x="2072628" y="1170299"/>
-                  </a:lnTo>
-                  <a:lnTo>
-                    <a:pt x="2146388" y="1199527"/>
-                  </a:lnTo>
-                  <a:lnTo>
-                    <a:pt x="2220148" y="1228087"/>
-                  </a:lnTo>
-                  <a:lnTo>
-                    <a:pt x="2293908" y="1255994"/>
-                  </a:lnTo>
-                  <a:lnTo>
-                    <a:pt x="2367668" y="1283262"/>
-                  </a:lnTo>
-                  <a:lnTo>
-                    <a:pt x="2441428" y="1309908"/>
-                  </a:lnTo>
-                  <a:lnTo>
-                    <a:pt x="2515188" y="1335943"/>
-                  </a:lnTo>
-                  <a:lnTo>
-                    <a:pt x="2588948" y="1361384"/>
-                  </a:lnTo>
-                  <a:lnTo>
-                    <a:pt x="2662708" y="1386243"/>
-                  </a:lnTo>
-                  <a:lnTo>
-                    <a:pt x="2736468" y="1410533"/>
-                  </a:lnTo>
-                  <a:lnTo>
-                    <a:pt x="2810228" y="1434268"/>
-                  </a:lnTo>
-                  <a:lnTo>
-                    <a:pt x="2883988" y="1457460"/>
-                  </a:lnTo>
-                  <a:lnTo>
-                    <a:pt x="2957748" y="1480122"/>
-                  </a:lnTo>
-                  <a:lnTo>
-                    <a:pt x="3031508" y="1502266"/>
-                  </a:lnTo>
-                  <a:lnTo>
-                    <a:pt x="3105268" y="1523904"/>
-                  </a:lnTo>
-                  <a:lnTo>
-                    <a:pt x="3179028" y="1545046"/>
-                  </a:lnTo>
-                  <a:lnTo>
-                    <a:pt x="3252788" y="1565706"/>
-                  </a:lnTo>
-                  <a:lnTo>
-                    <a:pt x="3326548" y="1585892"/>
-                  </a:lnTo>
-                  <a:lnTo>
-                    <a:pt x="3400308" y="1605618"/>
-                  </a:lnTo>
-                  <a:lnTo>
-                    <a:pt x="3474068" y="1621793"/>
-                  </a:lnTo>
-                  <a:lnTo>
-                    <a:pt x="3547828" y="1630660"/>
-                  </a:lnTo>
-                  <a:lnTo>
-                    <a:pt x="3621588" y="1639432"/>
-                  </a:lnTo>
-                  <a:lnTo>
-                    <a:pt x="3695348" y="1648110"/>
-                  </a:lnTo>
-                  <a:lnTo>
-                    <a:pt x="3769108" y="1656694"/>
-                  </a:lnTo>
-                  <a:lnTo>
-                    <a:pt x="3842868" y="1665187"/>
-                  </a:lnTo>
-                  <a:lnTo>
-                    <a:pt x="3916628" y="1673589"/>
-                  </a:lnTo>
-                  <a:lnTo>
-                    <a:pt x="3990388" y="1681900"/>
-                  </a:lnTo>
-                  <a:lnTo>
-                    <a:pt x="4064149" y="1690122"/>
-                  </a:lnTo>
-                  <a:lnTo>
-                    <a:pt x="4137909" y="1698256"/>
-                  </a:lnTo>
-                  <a:lnTo>
-                    <a:pt x="4211669" y="1706303"/>
-                  </a:lnTo>
-                  <a:lnTo>
-                    <a:pt x="4285429" y="1714264"/>
-                  </a:lnTo>
-                  <a:lnTo>
-                    <a:pt x="4359189" y="1722139"/>
-                  </a:lnTo>
-                  <a:lnTo>
-                    <a:pt x="4432949" y="1729930"/>
-                  </a:lnTo>
-                  <a:lnTo>
-                    <a:pt x="4506709" y="1737637"/>
-                  </a:lnTo>
-                  <a:lnTo>
-                    <a:pt x="4580469" y="1745261"/>
-                  </a:lnTo>
-                  <a:lnTo>
-                    <a:pt x="4654229" y="1752804"/>
-                  </a:lnTo>
-                  <a:lnTo>
-                    <a:pt x="4727989" y="1760266"/>
-                  </a:lnTo>
-                  <a:lnTo>
-                    <a:pt x="4801749" y="1767648"/>
-                  </a:lnTo>
-                  <a:lnTo>
-                    <a:pt x="4875509" y="1774950"/>
-                  </a:lnTo>
-                  <a:lnTo>
-                    <a:pt x="4949269" y="1782175"/>
-                  </a:lnTo>
-                  <a:lnTo>
-                    <a:pt x="5023029" y="1789322"/>
-                  </a:lnTo>
-                  <a:lnTo>
-                    <a:pt x="5096789" y="1796392"/>
-                  </a:lnTo>
-                  <a:lnTo>
-                    <a:pt x="5170549" y="1803386"/>
-                  </a:lnTo>
-                  <a:lnTo>
-                    <a:pt x="5244309" y="1810305"/>
-                  </a:lnTo>
-                  <a:lnTo>
-                    <a:pt x="5318069" y="1817151"/>
-                  </a:lnTo>
-                  <a:lnTo>
-                    <a:pt x="5391829" y="1823922"/>
-                  </a:lnTo>
-                  <a:lnTo>
-                    <a:pt x="5465589" y="1830621"/>
-                  </a:lnTo>
-                  <a:lnTo>
-                    <a:pt x="5539349" y="1837249"/>
-                  </a:lnTo>
-                  <a:lnTo>
-                    <a:pt x="5613109" y="1843805"/>
-                  </a:lnTo>
-                  <a:lnTo>
-                    <a:pt x="5686869" y="1850291"/>
-                  </a:lnTo>
-                  <a:lnTo>
-                    <a:pt x="5760629" y="1856707"/>
-                  </a:lnTo>
-                  <a:lnTo>
-                    <a:pt x="5834389" y="1863054"/>
-                  </a:lnTo>
-                  <a:lnTo>
-                    <a:pt x="5908149" y="1869334"/>
-                  </a:lnTo>
-                  <a:lnTo>
-                    <a:pt x="5981909" y="1875546"/>
-                  </a:lnTo>
-                  <a:lnTo>
-                    <a:pt x="6055669" y="1881691"/>
-                  </a:lnTo>
-                  <a:lnTo>
-                    <a:pt x="6129429" y="1887771"/>
-                  </a:lnTo>
-                  <a:lnTo>
-                    <a:pt x="6203189" y="1893785"/>
-                  </a:lnTo>
-                  <a:lnTo>
-                    <a:pt x="6276949" y="1899735"/>
-                  </a:lnTo>
-                  <a:lnTo>
-                    <a:pt x="6350709" y="1905621"/>
-                  </a:lnTo>
-                  <a:lnTo>
-                    <a:pt x="6424469" y="1911444"/>
-                  </a:lnTo>
-                  <a:lnTo>
-                    <a:pt x="6498229" y="1917204"/>
-                  </a:lnTo>
-                  <a:lnTo>
-                    <a:pt x="6571989" y="1922903"/>
-                  </a:lnTo>
-                  <a:lnTo>
-                    <a:pt x="6645749" y="1928540"/>
-                  </a:lnTo>
-                  <a:lnTo>
-                    <a:pt x="6719509" y="1934117"/>
-                  </a:lnTo>
-                  <a:lnTo>
-                    <a:pt x="6793269" y="1939635"/>
-                  </a:lnTo>
-                  <a:lnTo>
-                    <a:pt x="6867029" y="1945093"/>
-                  </a:lnTo>
-                  <a:lnTo>
-                    <a:pt x="6940789" y="1950492"/>
-                  </a:lnTo>
-                  <a:lnTo>
-                    <a:pt x="7014550" y="1955834"/>
-                  </a:lnTo>
-                  <a:lnTo>
-                    <a:pt x="7088310" y="1961118"/>
-                  </a:lnTo>
-                  <a:lnTo>
-                    <a:pt x="7162070" y="1966346"/>
-                  </a:lnTo>
-                  <a:lnTo>
-                    <a:pt x="7235830" y="1971517"/>
                   </a:lnTo>
                 </a:path>
               </a:pathLst>
@@ -3958,637 +4240,312 @@
           </p:nvSpPr>
           <p:spPr>
             <a:xfrm>
-              <a:off x="817517" y="4183388"/>
-              <a:ext cx="7235830" cy="1120695"/>
+              <a:off x="1172049" y="3694949"/>
+              <a:ext cx="7090630" cy="1514785"/>
             </a:xfrm>
             <a:custGeom>
               <a:avLst/>
               <a:pathLst>
-                <a:path w="7235830" h="1120695">
-                  <a:moveTo>
-                    <a:pt x="7235830" y="1120695"/>
-                  </a:moveTo>
-                  <a:lnTo>
-                    <a:pt x="7162070" y="1114771"/>
-                  </a:lnTo>
-                  <a:lnTo>
-                    <a:pt x="7088310" y="1108708"/>
-                  </a:lnTo>
-                  <a:lnTo>
-                    <a:pt x="7014550" y="1102503"/>
-                  </a:lnTo>
-                  <a:lnTo>
-                    <a:pt x="6940789" y="1096153"/>
-                  </a:lnTo>
-                  <a:lnTo>
-                    <a:pt x="6867029" y="1089654"/>
-                  </a:lnTo>
-                  <a:lnTo>
-                    <a:pt x="6793269" y="1083003"/>
-                  </a:lnTo>
-                  <a:lnTo>
-                    <a:pt x="6719509" y="1076197"/>
-                  </a:lnTo>
-                  <a:lnTo>
-                    <a:pt x="6645749" y="1069231"/>
-                  </a:lnTo>
-                  <a:lnTo>
-                    <a:pt x="6571989" y="1062103"/>
-                  </a:lnTo>
-                  <a:lnTo>
-                    <a:pt x="6498229" y="1054807"/>
-                  </a:lnTo>
-                  <a:lnTo>
-                    <a:pt x="6424469" y="1047341"/>
-                  </a:lnTo>
-                  <a:lnTo>
-                    <a:pt x="6350709" y="1039700"/>
-                  </a:lnTo>
-                  <a:lnTo>
-                    <a:pt x="6276949" y="1031881"/>
-                  </a:lnTo>
-                  <a:lnTo>
-                    <a:pt x="6203189" y="1023878"/>
-                  </a:lnTo>
-                  <a:lnTo>
-                    <a:pt x="6129429" y="1015688"/>
-                  </a:lnTo>
-                  <a:lnTo>
-                    <a:pt x="6055669" y="1007306"/>
-                  </a:lnTo>
-                  <a:lnTo>
-                    <a:pt x="5981909" y="998729"/>
-                  </a:lnTo>
-                  <a:lnTo>
-                    <a:pt x="5908149" y="989950"/>
-                  </a:lnTo>
-                  <a:lnTo>
-                    <a:pt x="5834389" y="980966"/>
-                  </a:lnTo>
-                  <a:lnTo>
-                    <a:pt x="5760629" y="971772"/>
-                  </a:lnTo>
-                  <a:lnTo>
-                    <a:pt x="5686869" y="962363"/>
-                  </a:lnTo>
-                  <a:lnTo>
-                    <a:pt x="5613109" y="952733"/>
-                  </a:lnTo>
-                  <a:lnTo>
-                    <a:pt x="5539349" y="942879"/>
-                  </a:lnTo>
-                  <a:lnTo>
-                    <a:pt x="5465589" y="932793"/>
-                  </a:lnTo>
-                  <a:lnTo>
-                    <a:pt x="5391829" y="922472"/>
-                  </a:lnTo>
-                  <a:lnTo>
-                    <a:pt x="5318069" y="911909"/>
-                  </a:lnTo>
-                  <a:lnTo>
-                    <a:pt x="5244309" y="901099"/>
-                  </a:lnTo>
-                  <a:lnTo>
-                    <a:pt x="5170549" y="890036"/>
-                  </a:lnTo>
-                  <a:lnTo>
-                    <a:pt x="5096789" y="878714"/>
-                  </a:lnTo>
-                  <a:lnTo>
-                    <a:pt x="5023029" y="867127"/>
-                  </a:lnTo>
-                  <a:lnTo>
-                    <a:pt x="4949269" y="855269"/>
-                  </a:lnTo>
-                  <a:lnTo>
-                    <a:pt x="4875509" y="843133"/>
-                  </a:lnTo>
-                  <a:lnTo>
-                    <a:pt x="4801749" y="830714"/>
-                  </a:lnTo>
-                  <a:lnTo>
-                    <a:pt x="4727989" y="818003"/>
-                  </a:lnTo>
-                  <a:lnTo>
-                    <a:pt x="4654229" y="804996"/>
-                  </a:lnTo>
-                  <a:lnTo>
-                    <a:pt x="4580469" y="791684"/>
-                  </a:lnTo>
-                  <a:lnTo>
-                    <a:pt x="4506709" y="778060"/>
-                  </a:lnTo>
-                  <a:lnTo>
-                    <a:pt x="4432949" y="764118"/>
-                  </a:lnTo>
-                  <a:lnTo>
-                    <a:pt x="4359189" y="749849"/>
-                  </a:lnTo>
-                  <a:lnTo>
-                    <a:pt x="4285429" y="735247"/>
-                  </a:lnTo>
-                  <a:lnTo>
-                    <a:pt x="4211669" y="720303"/>
-                  </a:lnTo>
-                  <a:lnTo>
-                    <a:pt x="4137909" y="705009"/>
-                  </a:lnTo>
-                  <a:lnTo>
-                    <a:pt x="4064149" y="689357"/>
-                  </a:lnTo>
-                  <a:lnTo>
-                    <a:pt x="3990388" y="673339"/>
-                  </a:lnTo>
-                  <a:lnTo>
-                    <a:pt x="3916628" y="656946"/>
-                  </a:lnTo>
-                  <a:lnTo>
-                    <a:pt x="3842868" y="640170"/>
-                  </a:lnTo>
-                  <a:lnTo>
-                    <a:pt x="3769108" y="623000"/>
-                  </a:lnTo>
-                  <a:lnTo>
-                    <a:pt x="3695348" y="605430"/>
-                  </a:lnTo>
-                  <a:lnTo>
-                    <a:pt x="3621588" y="587448"/>
-                  </a:lnTo>
-                  <a:lnTo>
-                    <a:pt x="3547828" y="569045"/>
-                  </a:lnTo>
-                  <a:lnTo>
-                    <a:pt x="3474068" y="550211"/>
-                  </a:lnTo>
-                  <a:lnTo>
-                    <a:pt x="3400308" y="538150"/>
-                  </a:lnTo>
-                  <a:lnTo>
-                    <a:pt x="3326548" y="529089"/>
-                  </a:lnTo>
-                  <a:lnTo>
-                    <a:pt x="3252788" y="519931"/>
-                  </a:lnTo>
-                  <a:lnTo>
-                    <a:pt x="3179028" y="510673"/>
-                  </a:lnTo>
-                  <a:lnTo>
-                    <a:pt x="3105268" y="501315"/>
-                  </a:lnTo>
-                  <a:lnTo>
-                    <a:pt x="3031508" y="491855"/>
-                  </a:lnTo>
-                  <a:lnTo>
-                    <a:pt x="2957748" y="482293"/>
-                  </a:lnTo>
-                  <a:lnTo>
-                    <a:pt x="2883988" y="472628"/>
-                  </a:lnTo>
-                  <a:lnTo>
-                    <a:pt x="2810228" y="462857"/>
-                  </a:lnTo>
-                  <a:lnTo>
-                    <a:pt x="2736468" y="452980"/>
-                  </a:lnTo>
-                  <a:lnTo>
-                    <a:pt x="2662708" y="442997"/>
-                  </a:lnTo>
-                  <a:lnTo>
-                    <a:pt x="2588948" y="432905"/>
-                  </a:lnTo>
-                  <a:lnTo>
-                    <a:pt x="2515188" y="422704"/>
-                  </a:lnTo>
-                  <a:lnTo>
-                    <a:pt x="2441428" y="412392"/>
-                  </a:lnTo>
-                  <a:lnTo>
-                    <a:pt x="2367668" y="401968"/>
-                  </a:lnTo>
-                  <a:lnTo>
-                    <a:pt x="2293908" y="391432"/>
-                  </a:lnTo>
-                  <a:lnTo>
-                    <a:pt x="2220148" y="380781"/>
-                  </a:lnTo>
-                  <a:lnTo>
-                    <a:pt x="2146388" y="370015"/>
-                  </a:lnTo>
-                  <a:lnTo>
-                    <a:pt x="2072628" y="359132"/>
-                  </a:lnTo>
-                  <a:lnTo>
-                    <a:pt x="1998868" y="348131"/>
-                  </a:lnTo>
-                  <a:lnTo>
-                    <a:pt x="1925108" y="337010"/>
-                  </a:lnTo>
-                  <a:lnTo>
-                    <a:pt x="1851348" y="325769"/>
-                  </a:lnTo>
-                  <a:lnTo>
-                    <a:pt x="1777588" y="314407"/>
-                  </a:lnTo>
-                  <a:lnTo>
-                    <a:pt x="1703828" y="302921"/>
-                  </a:lnTo>
-                  <a:lnTo>
-                    <a:pt x="1630068" y="291310"/>
-                  </a:lnTo>
-                  <a:lnTo>
-                    <a:pt x="1556308" y="279574"/>
-                  </a:lnTo>
-                  <a:lnTo>
-                    <a:pt x="1482548" y="267710"/>
-                  </a:lnTo>
-                  <a:lnTo>
-                    <a:pt x="1408788" y="255718"/>
-                  </a:lnTo>
-                  <a:lnTo>
-                    <a:pt x="1335028" y="243596"/>
-                  </a:lnTo>
-                  <a:lnTo>
-                    <a:pt x="1261268" y="231343"/>
-                  </a:lnTo>
-                  <a:lnTo>
-                    <a:pt x="1187508" y="218956"/>
-                  </a:lnTo>
-                  <a:lnTo>
-                    <a:pt x="1113747" y="206435"/>
-                  </a:lnTo>
-                  <a:lnTo>
-                    <a:pt x="1039987" y="193779"/>
-                  </a:lnTo>
-                  <a:lnTo>
-                    <a:pt x="966227" y="180985"/>
-                  </a:lnTo>
-                  <a:lnTo>
-                    <a:pt x="892467" y="168053"/>
-                  </a:lnTo>
-                  <a:lnTo>
-                    <a:pt x="818707" y="154980"/>
-                  </a:lnTo>
-                  <a:lnTo>
-                    <a:pt x="744947" y="141766"/>
-                  </a:lnTo>
-                  <a:lnTo>
-                    <a:pt x="671187" y="128408"/>
-                  </a:lnTo>
-                  <a:lnTo>
-                    <a:pt x="597427" y="114906"/>
-                  </a:lnTo>
-                  <a:lnTo>
-                    <a:pt x="523667" y="101257"/>
-                  </a:lnTo>
-                  <a:lnTo>
-                    <a:pt x="449907" y="87460"/>
-                  </a:lnTo>
-                  <a:lnTo>
-                    <a:pt x="376147" y="73514"/>
-                  </a:lnTo>
-                  <a:lnTo>
-                    <a:pt x="302387" y="59417"/>
-                  </a:lnTo>
-                  <a:lnTo>
-                    <a:pt x="228627" y="45166"/>
-                  </a:lnTo>
-                  <a:lnTo>
-                    <a:pt x="154867" y="30761"/>
-                  </a:lnTo>
-                  <a:lnTo>
-                    <a:pt x="81107" y="16200"/>
-                  </a:lnTo>
-                  <a:lnTo>
-                    <a:pt x="7347" y="1482"/>
-                  </a:lnTo>
-                  <a:lnTo>
-                    <a:pt x="0" y="0"/>
-                  </a:lnTo>
-                </a:path>
-              </a:pathLst>
-            </a:custGeom>
-          </p:spPr>
-          <p:txBody>
-            <a:bodyPr/>
-            <a:lstStyle/>
-            <a:p/>
-          </p:txBody>
-        </p:sp>
-        <p:sp>
-          <p:nvSpPr>
-            <p:cNvPr id="24" name="pl24"/>
-            <p:cNvSpPr/>
-            <p:nvPr/>
-          </p:nvSpPr>
-          <p:spPr>
-            <a:xfrm>
-              <a:off x="817517" y="3723143"/>
-              <a:ext cx="7235830" cy="1486591"/>
-            </a:xfrm>
-            <a:custGeom>
-              <a:avLst/>
-              <a:pathLst>
-                <a:path w="7235830" h="1486591">
+                <a:path w="7090630" h="1514785">
                   <a:moveTo>
                     <a:pt x="0" y="0"/>
                   </a:moveTo>
                   <a:lnTo>
-                    <a:pt x="7347" y="3119"/>
-                  </a:lnTo>
-                  <a:lnTo>
-                    <a:pt x="81107" y="33905"/>
-                  </a:lnTo>
-                  <a:lnTo>
-                    <a:pt x="154867" y="64174"/>
-                  </a:lnTo>
-                  <a:lnTo>
-                    <a:pt x="228627" y="93934"/>
-                  </a:lnTo>
-                  <a:lnTo>
-                    <a:pt x="302387" y="123194"/>
-                  </a:lnTo>
-                  <a:lnTo>
-                    <a:pt x="376147" y="151962"/>
-                  </a:lnTo>
-                  <a:lnTo>
-                    <a:pt x="449907" y="180246"/>
-                  </a:lnTo>
-                  <a:lnTo>
-                    <a:pt x="523667" y="208054"/>
-                  </a:lnTo>
-                  <a:lnTo>
-                    <a:pt x="597427" y="235395"/>
-                  </a:lnTo>
-                  <a:lnTo>
-                    <a:pt x="671187" y="262276"/>
-                  </a:lnTo>
-                  <a:lnTo>
-                    <a:pt x="744947" y="288705"/>
-                  </a:lnTo>
-                  <a:lnTo>
-                    <a:pt x="818707" y="314690"/>
-                  </a:lnTo>
-                  <a:lnTo>
-                    <a:pt x="892467" y="340237"/>
-                  </a:lnTo>
-                  <a:lnTo>
-                    <a:pt x="966227" y="365356"/>
-                  </a:lnTo>
-                  <a:lnTo>
-                    <a:pt x="1039987" y="390052"/>
-                  </a:lnTo>
-                  <a:lnTo>
-                    <a:pt x="1113747" y="414332"/>
-                  </a:lnTo>
-                  <a:lnTo>
-                    <a:pt x="1187508" y="438205"/>
-                  </a:lnTo>
-                  <a:lnTo>
-                    <a:pt x="1261268" y="461676"/>
-                  </a:lnTo>
-                  <a:lnTo>
-                    <a:pt x="1335028" y="484752"/>
-                  </a:lnTo>
-                  <a:lnTo>
-                    <a:pt x="1408788" y="507440"/>
-                  </a:lnTo>
-                  <a:lnTo>
-                    <a:pt x="1482548" y="529747"/>
-                  </a:lnTo>
-                  <a:lnTo>
-                    <a:pt x="1556308" y="551679"/>
-                  </a:lnTo>
-                  <a:lnTo>
-                    <a:pt x="1630068" y="573242"/>
-                  </a:lnTo>
-                  <a:lnTo>
-                    <a:pt x="1703828" y="594442"/>
-                  </a:lnTo>
-                  <a:lnTo>
-                    <a:pt x="1777588" y="615286"/>
-                  </a:lnTo>
-                  <a:lnTo>
-                    <a:pt x="1851348" y="635780"/>
-                  </a:lnTo>
-                  <a:lnTo>
-                    <a:pt x="1925108" y="655929"/>
-                  </a:lnTo>
-                  <a:lnTo>
-                    <a:pt x="1998868" y="675739"/>
-                  </a:lnTo>
-                  <a:lnTo>
-                    <a:pt x="2072628" y="695216"/>
-                  </a:lnTo>
-                  <a:lnTo>
-                    <a:pt x="2146388" y="714365"/>
-                  </a:lnTo>
-                  <a:lnTo>
-                    <a:pt x="2220148" y="733193"/>
-                  </a:lnTo>
-                  <a:lnTo>
-                    <a:pt x="2293908" y="751704"/>
-                  </a:lnTo>
-                  <a:lnTo>
-                    <a:pt x="2367668" y="769904"/>
-                  </a:lnTo>
-                  <a:lnTo>
-                    <a:pt x="2441428" y="787797"/>
-                  </a:lnTo>
-                  <a:lnTo>
-                    <a:pt x="2515188" y="805390"/>
-                  </a:lnTo>
-                  <a:lnTo>
-                    <a:pt x="2588948" y="822687"/>
-                  </a:lnTo>
-                  <a:lnTo>
-                    <a:pt x="2662708" y="839694"/>
-                  </a:lnTo>
-                  <a:lnTo>
-                    <a:pt x="2736468" y="856414"/>
-                  </a:lnTo>
-                  <a:lnTo>
-                    <a:pt x="2810228" y="872853"/>
-                  </a:lnTo>
-                  <a:lnTo>
-                    <a:pt x="2883988" y="889016"/>
-                  </a:lnTo>
-                  <a:lnTo>
-                    <a:pt x="2957748" y="904907"/>
-                  </a:lnTo>
-                  <a:lnTo>
-                    <a:pt x="3031508" y="920530"/>
-                  </a:lnTo>
-                  <a:lnTo>
-                    <a:pt x="3105268" y="935891"/>
-                  </a:lnTo>
-                  <a:lnTo>
-                    <a:pt x="3179028" y="950994"/>
-                  </a:lnTo>
-                  <a:lnTo>
-                    <a:pt x="3252788" y="965843"/>
-                  </a:lnTo>
-                  <a:lnTo>
-                    <a:pt x="3326548" y="980442"/>
-                  </a:lnTo>
-                  <a:lnTo>
-                    <a:pt x="3400308" y="994796"/>
-                  </a:lnTo>
-                  <a:lnTo>
-                    <a:pt x="3474068" y="1008908"/>
-                  </a:lnTo>
-                  <a:lnTo>
-                    <a:pt x="3547828" y="1022783"/>
-                  </a:lnTo>
-                  <a:lnTo>
-                    <a:pt x="3621588" y="1036425"/>
-                  </a:lnTo>
-                  <a:lnTo>
-                    <a:pt x="3695348" y="1049837"/>
-                  </a:lnTo>
-                  <a:lnTo>
-                    <a:pt x="3769108" y="1063024"/>
-                  </a:lnTo>
-                  <a:lnTo>
-                    <a:pt x="3842868" y="1075989"/>
-                  </a:lnTo>
-                  <a:lnTo>
-                    <a:pt x="3916628" y="1088737"/>
-                  </a:lnTo>
-                  <a:lnTo>
-                    <a:pt x="3990388" y="1101269"/>
-                  </a:lnTo>
-                  <a:lnTo>
-                    <a:pt x="4064149" y="1113591"/>
-                  </a:lnTo>
-                  <a:lnTo>
-                    <a:pt x="4137909" y="1125706"/>
-                  </a:lnTo>
-                  <a:lnTo>
-                    <a:pt x="4211669" y="1137618"/>
-                  </a:lnTo>
-                  <a:lnTo>
-                    <a:pt x="4285429" y="1149328"/>
-                  </a:lnTo>
-                  <a:lnTo>
-                    <a:pt x="4359189" y="1160842"/>
-                  </a:lnTo>
-                  <a:lnTo>
-                    <a:pt x="4432949" y="1172163"/>
-                  </a:lnTo>
-                  <a:lnTo>
-                    <a:pt x="4506709" y="1183293"/>
-                  </a:lnTo>
-                  <a:lnTo>
-                    <a:pt x="4580469" y="1194236"/>
-                  </a:lnTo>
-                  <a:lnTo>
-                    <a:pt x="4654229" y="1204995"/>
-                  </a:lnTo>
-                  <a:lnTo>
-                    <a:pt x="4727989" y="1215573"/>
-                  </a:lnTo>
-                  <a:lnTo>
-                    <a:pt x="4801749" y="1225973"/>
-                  </a:lnTo>
-                  <a:lnTo>
-                    <a:pt x="4875509" y="1236198"/>
-                  </a:lnTo>
-                  <a:lnTo>
-                    <a:pt x="4949269" y="1246251"/>
-                  </a:lnTo>
-                  <a:lnTo>
-                    <a:pt x="5023029" y="1256136"/>
-                  </a:lnTo>
-                  <a:lnTo>
-                    <a:pt x="5096789" y="1265854"/>
-                  </a:lnTo>
-                  <a:lnTo>
-                    <a:pt x="5170549" y="1275409"/>
-                  </a:lnTo>
-                  <a:lnTo>
-                    <a:pt x="5244309" y="1284803"/>
-                  </a:lnTo>
-                  <a:lnTo>
-                    <a:pt x="5318069" y="1294039"/>
-                  </a:lnTo>
-                  <a:lnTo>
-                    <a:pt x="5391829" y="1303120"/>
-                  </a:lnTo>
-                  <a:lnTo>
-                    <a:pt x="5465589" y="1312048"/>
-                  </a:lnTo>
-                  <a:lnTo>
-                    <a:pt x="5539349" y="1320826"/>
-                  </a:lnTo>
-                  <a:lnTo>
-                    <a:pt x="5613109" y="1329456"/>
-                  </a:lnTo>
-                  <a:lnTo>
-                    <a:pt x="5686869" y="1337941"/>
-                  </a:lnTo>
-                  <a:lnTo>
-                    <a:pt x="5760629" y="1346284"/>
-                  </a:lnTo>
-                  <a:lnTo>
-                    <a:pt x="5834389" y="1354486"/>
-                  </a:lnTo>
-                  <a:lnTo>
-                    <a:pt x="5908149" y="1362551"/>
-                  </a:lnTo>
-                  <a:lnTo>
-                    <a:pt x="5981909" y="1370480"/>
-                  </a:lnTo>
-                  <a:lnTo>
-                    <a:pt x="6055669" y="1378275"/>
-                  </a:lnTo>
-                  <a:lnTo>
-                    <a:pt x="6129429" y="1385940"/>
-                  </a:lnTo>
-                  <a:lnTo>
-                    <a:pt x="6203189" y="1393475"/>
-                  </a:lnTo>
-                  <a:lnTo>
-                    <a:pt x="6276949" y="1400884"/>
-                  </a:lnTo>
-                  <a:lnTo>
-                    <a:pt x="6350709" y="1408168"/>
-                  </a:lnTo>
-                  <a:lnTo>
-                    <a:pt x="6424469" y="1415330"/>
-                  </a:lnTo>
-                  <a:lnTo>
-                    <a:pt x="6498229" y="1422371"/>
-                  </a:lnTo>
-                  <a:lnTo>
-                    <a:pt x="6571989" y="1429294"/>
-                  </a:lnTo>
-                  <a:lnTo>
-                    <a:pt x="6645749" y="1436101"/>
-                  </a:lnTo>
-                  <a:lnTo>
-                    <a:pt x="6719509" y="1442793"/>
-                  </a:lnTo>
-                  <a:lnTo>
-                    <a:pt x="6793269" y="1449373"/>
-                  </a:lnTo>
-                  <a:lnTo>
-                    <a:pt x="6867029" y="1455842"/>
-                  </a:lnTo>
-                  <a:lnTo>
-                    <a:pt x="6940789" y="1462202"/>
-                  </a:lnTo>
-                  <a:lnTo>
-                    <a:pt x="7014550" y="1468455"/>
-                  </a:lnTo>
-                  <a:lnTo>
-                    <a:pt x="7088310" y="1474603"/>
-                  </a:lnTo>
-                  <a:lnTo>
-                    <a:pt x="7162070" y="1480648"/>
-                  </a:lnTo>
-                  <a:lnTo>
-                    <a:pt x="7235830" y="1486591"/>
+                    <a:pt x="71622" y="31313"/>
+                  </a:lnTo>
+                  <a:lnTo>
+                    <a:pt x="143245" y="62099"/>
+                  </a:lnTo>
+                  <a:lnTo>
+                    <a:pt x="214867" y="92368"/>
+                  </a:lnTo>
+                  <a:lnTo>
+                    <a:pt x="286490" y="122128"/>
+                  </a:lnTo>
+                  <a:lnTo>
+                    <a:pt x="358112" y="151388"/>
+                  </a:lnTo>
+                  <a:lnTo>
+                    <a:pt x="429735" y="180155"/>
+                  </a:lnTo>
+                  <a:lnTo>
+                    <a:pt x="501357" y="208439"/>
+                  </a:lnTo>
+                  <a:lnTo>
+                    <a:pt x="572980" y="236248"/>
+                  </a:lnTo>
+                  <a:lnTo>
+                    <a:pt x="644602" y="263589"/>
+                  </a:lnTo>
+                  <a:lnTo>
+                    <a:pt x="716225" y="290470"/>
+                  </a:lnTo>
+                  <a:lnTo>
+                    <a:pt x="787847" y="316899"/>
+                  </a:lnTo>
+                  <a:lnTo>
+                    <a:pt x="859470" y="342883"/>
+                  </a:lnTo>
+                  <a:lnTo>
+                    <a:pt x="931092" y="368431"/>
+                  </a:lnTo>
+                  <a:lnTo>
+                    <a:pt x="1002715" y="393550"/>
+                  </a:lnTo>
+                  <a:lnTo>
+                    <a:pt x="1074337" y="418245"/>
+                  </a:lnTo>
+                  <a:lnTo>
+                    <a:pt x="1145960" y="442526"/>
+                  </a:lnTo>
+                  <a:lnTo>
+                    <a:pt x="1217582" y="466398"/>
+                  </a:lnTo>
+                  <a:lnTo>
+                    <a:pt x="1289205" y="489869"/>
+                  </a:lnTo>
+                  <a:lnTo>
+                    <a:pt x="1360827" y="512946"/>
+                  </a:lnTo>
+                  <a:lnTo>
+                    <a:pt x="1432450" y="535634"/>
+                  </a:lnTo>
+                  <a:lnTo>
+                    <a:pt x="1504073" y="557941"/>
+                  </a:lnTo>
+                  <a:lnTo>
+                    <a:pt x="1575695" y="579873"/>
+                  </a:lnTo>
+                  <a:lnTo>
+                    <a:pt x="1647318" y="601436"/>
+                  </a:lnTo>
+                  <a:lnTo>
+                    <a:pt x="1718940" y="622636"/>
+                  </a:lnTo>
+                  <a:lnTo>
+                    <a:pt x="1790563" y="643480"/>
+                  </a:lnTo>
+                  <a:lnTo>
+                    <a:pt x="1862185" y="663974"/>
+                  </a:lnTo>
+                  <a:lnTo>
+                    <a:pt x="1933808" y="684123"/>
+                  </a:lnTo>
+                  <a:lnTo>
+                    <a:pt x="2005430" y="703933"/>
+                  </a:lnTo>
+                  <a:lnTo>
+                    <a:pt x="2077053" y="723410"/>
+                  </a:lnTo>
+                  <a:lnTo>
+                    <a:pt x="2148675" y="742559"/>
+                  </a:lnTo>
+                  <a:lnTo>
+                    <a:pt x="2220298" y="761387"/>
+                  </a:lnTo>
+                  <a:lnTo>
+                    <a:pt x="2291920" y="779898"/>
+                  </a:lnTo>
+                  <a:lnTo>
+                    <a:pt x="2363543" y="798098"/>
+                  </a:lnTo>
+                  <a:lnTo>
+                    <a:pt x="2435165" y="815991"/>
+                  </a:lnTo>
+                  <a:lnTo>
+                    <a:pt x="2506788" y="833584"/>
+                  </a:lnTo>
+                  <a:lnTo>
+                    <a:pt x="2578410" y="850881"/>
+                  </a:lnTo>
+                  <a:lnTo>
+                    <a:pt x="2650033" y="867887"/>
+                  </a:lnTo>
+                  <a:lnTo>
+                    <a:pt x="2721655" y="884608"/>
+                  </a:lnTo>
+                  <a:lnTo>
+                    <a:pt x="2793278" y="901047"/>
+                  </a:lnTo>
+                  <a:lnTo>
+                    <a:pt x="2864901" y="917210"/>
+                  </a:lnTo>
+                  <a:lnTo>
+                    <a:pt x="2936523" y="933100"/>
+                  </a:lnTo>
+                  <a:lnTo>
+                    <a:pt x="3008146" y="948724"/>
+                  </a:lnTo>
+                  <a:lnTo>
+                    <a:pt x="3079768" y="964085"/>
+                  </a:lnTo>
+                  <a:lnTo>
+                    <a:pt x="3151391" y="979188"/>
+                  </a:lnTo>
+                  <a:lnTo>
+                    <a:pt x="3223013" y="994037"/>
+                  </a:lnTo>
+                  <a:lnTo>
+                    <a:pt x="3294636" y="1008636"/>
+                  </a:lnTo>
+                  <a:lnTo>
+                    <a:pt x="3366258" y="1022990"/>
+                  </a:lnTo>
+                  <a:lnTo>
+                    <a:pt x="3437881" y="1037102"/>
+                  </a:lnTo>
+                  <a:lnTo>
+                    <a:pt x="3509503" y="1050977"/>
+                  </a:lnTo>
+                  <a:lnTo>
+                    <a:pt x="3581126" y="1064619"/>
+                  </a:lnTo>
+                  <a:lnTo>
+                    <a:pt x="3652748" y="1078031"/>
+                  </a:lnTo>
+                  <a:lnTo>
+                    <a:pt x="3724371" y="1091218"/>
+                  </a:lnTo>
+                  <a:lnTo>
+                    <a:pt x="3795993" y="1104183"/>
+                  </a:lnTo>
+                  <a:lnTo>
+                    <a:pt x="3867616" y="1116930"/>
+                  </a:lnTo>
+                  <a:lnTo>
+                    <a:pt x="3939238" y="1129463"/>
+                  </a:lnTo>
+                  <a:lnTo>
+                    <a:pt x="4010861" y="1141785"/>
+                  </a:lnTo>
+                  <a:lnTo>
+                    <a:pt x="4082483" y="1153900"/>
+                  </a:lnTo>
+                  <a:lnTo>
+                    <a:pt x="4154106" y="1165811"/>
+                  </a:lnTo>
+                  <a:lnTo>
+                    <a:pt x="4225729" y="1177522"/>
+                  </a:lnTo>
+                  <a:lnTo>
+                    <a:pt x="4297351" y="1189036"/>
+                  </a:lnTo>
+                  <a:lnTo>
+                    <a:pt x="4368974" y="1200357"/>
+                  </a:lnTo>
+                  <a:lnTo>
+                    <a:pt x="4440596" y="1211487"/>
+                  </a:lnTo>
+                  <a:lnTo>
+                    <a:pt x="4512219" y="1222430"/>
+                  </a:lnTo>
+                  <a:lnTo>
+                    <a:pt x="4583841" y="1233189"/>
+                  </a:lnTo>
+                  <a:lnTo>
+                    <a:pt x="4655464" y="1243767"/>
+                  </a:lnTo>
+                  <a:lnTo>
+                    <a:pt x="4727086" y="1254167"/>
+                  </a:lnTo>
+                  <a:lnTo>
+                    <a:pt x="4798709" y="1264392"/>
+                  </a:lnTo>
+                  <a:lnTo>
+                    <a:pt x="4870331" y="1274445"/>
+                  </a:lnTo>
+                  <a:lnTo>
+                    <a:pt x="4941954" y="1284330"/>
+                  </a:lnTo>
+                  <a:lnTo>
+                    <a:pt x="5013576" y="1294048"/>
+                  </a:lnTo>
+                  <a:lnTo>
+                    <a:pt x="5085199" y="1303602"/>
+                  </a:lnTo>
+                  <a:lnTo>
+                    <a:pt x="5156821" y="1312997"/>
+                  </a:lnTo>
+                  <a:lnTo>
+                    <a:pt x="5228444" y="1322233"/>
+                  </a:lnTo>
+                  <a:lnTo>
+                    <a:pt x="5300066" y="1331313"/>
+                  </a:lnTo>
+                  <a:lnTo>
+                    <a:pt x="5371689" y="1340242"/>
+                  </a:lnTo>
+                  <a:lnTo>
+                    <a:pt x="5443311" y="1349020"/>
+                  </a:lnTo>
+                  <a:lnTo>
+                    <a:pt x="5514934" y="1357650"/>
+                  </a:lnTo>
+                  <a:lnTo>
+                    <a:pt x="5586557" y="1366135"/>
+                  </a:lnTo>
+                  <a:lnTo>
+                    <a:pt x="5658179" y="1374478"/>
+                  </a:lnTo>
+                  <a:lnTo>
+                    <a:pt x="5729802" y="1382680"/>
+                  </a:lnTo>
+                  <a:lnTo>
+                    <a:pt x="5801424" y="1390745"/>
+                  </a:lnTo>
+                  <a:lnTo>
+                    <a:pt x="5873047" y="1398673"/>
+                  </a:lnTo>
+                  <a:lnTo>
+                    <a:pt x="5944669" y="1406469"/>
+                  </a:lnTo>
+                  <a:lnTo>
+                    <a:pt x="6016292" y="1414133"/>
+                  </a:lnTo>
+                  <a:lnTo>
+                    <a:pt x="6087914" y="1421669"/>
+                  </a:lnTo>
+                  <a:lnTo>
+                    <a:pt x="6159537" y="1429078"/>
+                  </a:lnTo>
+                  <a:lnTo>
+                    <a:pt x="6231159" y="1436362"/>
+                  </a:lnTo>
+                  <a:lnTo>
+                    <a:pt x="6302782" y="1443524"/>
+                  </a:lnTo>
+                  <a:lnTo>
+                    <a:pt x="6374404" y="1450565"/>
+                  </a:lnTo>
+                  <a:lnTo>
+                    <a:pt x="6446027" y="1457488"/>
+                  </a:lnTo>
+                  <a:lnTo>
+                    <a:pt x="6517649" y="1464295"/>
+                  </a:lnTo>
+                  <a:lnTo>
+                    <a:pt x="6589272" y="1470987"/>
+                  </a:lnTo>
+                  <a:lnTo>
+                    <a:pt x="6660894" y="1477567"/>
+                  </a:lnTo>
+                  <a:lnTo>
+                    <a:pt x="6732517" y="1484036"/>
+                  </a:lnTo>
+                  <a:lnTo>
+                    <a:pt x="6804139" y="1490396"/>
+                  </a:lnTo>
+                  <a:lnTo>
+                    <a:pt x="6875762" y="1496649"/>
+                  </a:lnTo>
+                  <a:lnTo>
+                    <a:pt x="6947385" y="1502797"/>
+                  </a:lnTo>
+                  <a:lnTo>
+                    <a:pt x="7019007" y="1508842"/>
+                  </a:lnTo>
+                  <a:lnTo>
+                    <a:pt x="7090630" y="1514785"/>
                   </a:lnTo>
                 </a:path>
               </a:pathLst>
@@ -4611,7 +4568,7 @@
         </p:sp>
         <p:sp>
           <p:nvSpPr>
-            <p:cNvPr id="25" name="pl25"/>
+            <p:cNvPr id="24" name="pl24"/>
             <p:cNvSpPr/>
             <p:nvPr/>
           </p:nvSpPr>
@@ -4654,13 +4611,13 @@
         </p:sp>
         <p:sp>
           <p:nvSpPr>
-            <p:cNvPr id="26" name="pl26"/>
+            <p:cNvPr id="25" name="pl25"/>
             <p:cNvSpPr/>
             <p:nvPr/>
           </p:nvSpPr>
           <p:spPr>
             <a:xfrm>
-              <a:off x="4269157" y="2073503"/>
+              <a:off x="4588151" y="2073503"/>
               <a:ext cx="0" cy="3649639"/>
             </a:xfrm>
             <a:custGeom>
@@ -4697,7 +4654,7 @@
         </p:sp>
         <p:sp>
           <p:nvSpPr>
-            <p:cNvPr id="27" name="tx27"/>
+            <p:cNvPr id="26" name="tx26"/>
             <p:cNvSpPr/>
             <p:nvPr/>
           </p:nvSpPr>
@@ -4743,7 +4700,7 @@
         </p:sp>
         <p:sp>
           <p:nvSpPr>
-            <p:cNvPr id="28" name="tx28"/>
+            <p:cNvPr id="27" name="tx27"/>
             <p:cNvSpPr/>
             <p:nvPr/>
           </p:nvSpPr>
@@ -4789,7 +4746,7 @@
         </p:sp>
         <p:sp>
           <p:nvSpPr>
-            <p:cNvPr id="29" name="tx29"/>
+            <p:cNvPr id="28" name="tx28"/>
             <p:cNvSpPr/>
             <p:nvPr/>
           </p:nvSpPr>
@@ -4835,7 +4792,7 @@
         </p:sp>
         <p:sp>
           <p:nvSpPr>
-            <p:cNvPr id="30" name="tx30"/>
+            <p:cNvPr id="29" name="tx29"/>
             <p:cNvSpPr/>
             <p:nvPr/>
           </p:nvSpPr>
@@ -4881,7 +4838,7 @@
         </p:sp>
         <p:sp>
           <p:nvSpPr>
-            <p:cNvPr id="31" name="tx31"/>
+            <p:cNvPr id="30" name="tx30"/>
             <p:cNvSpPr/>
             <p:nvPr/>
           </p:nvSpPr>
@@ -4927,14 +4884,14 @@
         </p:sp>
         <p:sp>
           <p:nvSpPr>
-            <p:cNvPr id="32" name="tx32"/>
+            <p:cNvPr id="31" name="tx31"/>
             <p:cNvSpPr/>
             <p:nvPr/>
           </p:nvSpPr>
           <p:spPr>
             <a:xfrm>
-              <a:off x="2423864" y="5785772"/>
-              <a:ext cx="155356" cy="80101"/>
+              <a:off x="2360651" y="5785772"/>
+              <a:ext cx="161574" cy="80101"/>
             </a:xfrm>
             <a:prstGeom prst="rect">
               <a:avLst/>
@@ -4966,21 +4923,21 @@
                   <a:latin typeface="Helvetica"/>
                   <a:cs typeface="Helvetica"/>
                 </a:rPr>
-                <a:t>0.8</a:t>
+                <a:t>-25</a:t>
               </a:r>
             </a:p>
           </p:txBody>
         </p:sp>
         <p:sp>
           <p:nvSpPr>
-            <p:cNvPr id="33" name="tx33"/>
+            <p:cNvPr id="32" name="tx32"/>
             <p:cNvSpPr/>
             <p:nvPr/>
           </p:nvSpPr>
           <p:spPr>
             <a:xfrm>
-              <a:off x="4196521" y="5785772"/>
-              <a:ext cx="155356" cy="80101"/>
+              <a:off x="4561958" y="5785772"/>
+              <a:ext cx="62179" cy="80101"/>
             </a:xfrm>
             <a:prstGeom prst="rect">
               <a:avLst/>
@@ -5012,21 +4969,21 @@
                   <a:latin typeface="Helvetica"/>
                   <a:cs typeface="Helvetica"/>
                 </a:rPr>
-                <a:t>1.0</a:t>
+                <a:t>0</a:t>
               </a:r>
             </a:p>
           </p:txBody>
         </p:sp>
         <p:sp>
           <p:nvSpPr>
-            <p:cNvPr id="34" name="tx34"/>
+            <p:cNvPr id="33" name="tx33"/>
             <p:cNvSpPr/>
             <p:nvPr/>
           </p:nvSpPr>
           <p:spPr>
             <a:xfrm>
-              <a:off x="5969179" y="5785772"/>
-              <a:ext cx="155356" cy="80101"/>
+              <a:off x="6682478" y="5785772"/>
+              <a:ext cx="124358" cy="80101"/>
             </a:xfrm>
             <a:prstGeom prst="rect">
               <a:avLst/>
@@ -5058,67 +5015,21 @@
                   <a:latin typeface="Helvetica"/>
                   <a:cs typeface="Helvetica"/>
                 </a:rPr>
-                <a:t>1.2</a:t>
+                <a:t>25</a:t>
               </a:r>
             </a:p>
           </p:txBody>
         </p:sp>
         <p:sp>
           <p:nvSpPr>
-            <p:cNvPr id="35" name="tx35"/>
+            <p:cNvPr id="34" name="tx34"/>
             <p:cNvSpPr/>
             <p:nvPr/>
           </p:nvSpPr>
           <p:spPr>
             <a:xfrm>
-              <a:off x="7741836" y="5785772"/>
-              <a:ext cx="155356" cy="80101"/>
-            </a:xfrm>
-            <a:prstGeom prst="rect">
-              <a:avLst/>
-            </a:prstGeom>
-            <a:noFill/>
-          </p:spPr>
-          <p:txBody>
-            <a:bodyPr lIns="0" rIns="0" tIns="0" bIns="0" anchorCtr="1" anchor="ctr" wrap="none"/>
-            <a:lstStyle/>
-            <a:p>
-              <a:pPr algn="l" marL="0" marR="0" indent="0">
-                <a:lnSpc>
-                  <a:spcPts val="880"/>
-                </a:lnSpc>
-                <a:spcBef>
-                  <a:spcPts val="0"/>
-                </a:spcBef>
-                <a:spcAft>
-                  <a:spcPts val="0"/>
-                </a:spcAft>
-              </a:pPr>
-              <a:r>
-                <a:rPr sz="880">
-                  <a:solidFill>
-                    <a:srgbClr val="4D4D4D">
-                      <a:alpha val="100000"/>
-                    </a:srgbClr>
-                  </a:solidFill>
-                  <a:latin typeface="Helvetica"/>
-                  <a:cs typeface="Helvetica"/>
-                </a:rPr>
-                <a:t>1.4</a:t>
-              </a:r>
-            </a:p>
-          </p:txBody>
-        </p:sp>
-        <p:sp>
-          <p:nvSpPr>
-            <p:cNvPr id="36" name="tx36"/>
-            <p:cNvSpPr/>
-            <p:nvPr/>
-          </p:nvSpPr>
-          <p:spPr>
-            <a:xfrm>
-              <a:off x="3879271" y="5925448"/>
-              <a:ext cx="1676186" cy="100218"/>
+              <a:off x="2928340" y="5925448"/>
+              <a:ext cx="3578047" cy="100218"/>
             </a:xfrm>
             <a:prstGeom prst="rect">
               <a:avLst/>
@@ -5150,14 +5061,14 @@
                   <a:latin typeface="Helvetica"/>
                   <a:cs typeface="Helvetica"/>
                 </a:rPr>
-                <a:t>CKD-EPI Cr-Cys / CG ratio</a:t>
+                <a:t>eGFR difference (%): 100 × (CKD-EPI Cr-Cys − CG) / CG</a:t>
               </a:r>
             </a:p>
           </p:txBody>
         </p:sp>
         <p:sp>
           <p:nvSpPr>
-            <p:cNvPr id="37" name="tx37"/>
+            <p:cNvPr id="35" name="tx35"/>
             <p:cNvSpPr/>
             <p:nvPr/>
           </p:nvSpPr>
@@ -5203,14 +5114,14 @@
         </p:sp>
         <p:sp>
           <p:nvSpPr>
-            <p:cNvPr id="38" name="tx38"/>
+            <p:cNvPr id="36" name="tx36"/>
             <p:cNvSpPr/>
             <p:nvPr/>
           </p:nvSpPr>
           <p:spPr>
             <a:xfrm>
               <a:off x="817517" y="1896563"/>
-              <a:ext cx="6899879" cy="82021"/>
+              <a:ext cx="7052127" cy="82021"/>
             </a:xfrm>
             <a:prstGeom prst="rect">
               <a:avLst/>
@@ -5242,14 +5153,14 @@
                   <a:latin typeface="Helvetica"/>
                   <a:cs typeface="Helvetica"/>
                 </a:rPr>
-                <a:t>subHR per 0.1 ratio decline: 1.23 (1.14-1.32), p_Bonf = &lt;0.001 (n = 6)  |  per IQR decline (Δ = 0.29): 1.82 (1.46-2.26)  |  IQR: [0.85, 1.15]</a:t>
+                <a:t>subHR per 10 % decline: 1.23 (1.14-1.32), p_Bonf = &lt;0.001 (n = 6)  |  per IQR decline (Δ = 29.3 %): 1.82 (1.46-2.26)  |  IQR: [-14.6, 14.7] %</a:t>
               </a:r>
             </a:p>
           </p:txBody>
         </p:sp>
         <p:sp>
           <p:nvSpPr>
-            <p:cNvPr id="39" name="tx39"/>
+            <p:cNvPr id="37" name="tx37"/>
             <p:cNvSpPr/>
             <p:nvPr/>
           </p:nvSpPr>

--- a/docs/pptx/whole/jx-linsubhr-ratio-anemia2.pptx
+++ b/docs/pptx/whole/jx-linsubhr-ratio-anemia2.pptx
@@ -2265,34 +2265,26 @@
         </p:sp>
         <p:sp>
           <p:nvSpPr>
-            <p:cNvPr id="4" name="pl4"/>
+            <p:cNvPr id="4" name="rc4"/>
             <p:cNvSpPr/>
             <p:nvPr/>
           </p:nvSpPr>
           <p:spPr>
             <a:xfrm>
-              <a:off x="817517" y="5142518"/>
-              <a:ext cx="7799693" cy="0"/>
+              <a:off x="457200" y="1600200"/>
+              <a:ext cx="8229600" cy="4525962"/>
             </a:xfrm>
-            <a:custGeom>
+            <a:prstGeom prst="rect">
               <a:avLst/>
-              <a:pathLst>
-                <a:path w="7799693" h="0">
-                  <a:moveTo>
-                    <a:pt x="0" y="0"/>
-                  </a:moveTo>
-                  <a:lnTo>
-                    <a:pt x="7799693" y="0"/>
-                  </a:lnTo>
-                  <a:lnTo>
-                    <a:pt x="7799693" y="0"/>
-                  </a:lnTo>
-                </a:path>
-              </a:pathLst>
-            </a:custGeom>
-            <a:ln w="6775" cap="flat">
+            </a:prstGeom>
+            <a:solidFill>
+              <a:srgbClr val="FFFFFF">
+                <a:alpha val="100000"/>
+              </a:srgbClr>
+            </a:solidFill>
+            <a:ln w="13550" cap="rnd">
               <a:solidFill>
-                <a:srgbClr val="EBEBEB">
+                <a:srgbClr val="FFFFFF">
                   <a:alpha val="100000"/>
                 </a:srgbClr>
               </a:solidFill>
@@ -2314,21 +2306,21 @@
           </p:nvSpPr>
           <p:spPr>
             <a:xfrm>
-              <a:off x="817517" y="4313054"/>
-              <a:ext cx="7799693" cy="0"/>
+              <a:off x="887106" y="3250627"/>
+              <a:ext cx="7660515" cy="0"/>
             </a:xfrm>
             <a:custGeom>
               <a:avLst/>
               <a:pathLst>
-                <a:path w="7799693" h="0">
+                <a:path w="7660515" h="0">
                   <a:moveTo>
                     <a:pt x="0" y="0"/>
                   </a:moveTo>
                   <a:lnTo>
-                    <a:pt x="7799693" y="0"/>
-                  </a:lnTo>
-                  <a:lnTo>
-                    <a:pt x="7799693" y="0"/>
+                    <a:pt x="7660515" y="0"/>
+                  </a:lnTo>
+                  <a:lnTo>
+                    <a:pt x="7660515" y="0"/>
                   </a:lnTo>
                 </a:path>
               </a:pathLst>
@@ -2357,21 +2349,21 @@
           </p:nvSpPr>
           <p:spPr>
             <a:xfrm>
-              <a:off x="817517" y="3483591"/>
-              <a:ext cx="7799693" cy="0"/>
+              <a:off x="887106" y="2951293"/>
+              <a:ext cx="7660515" cy="0"/>
             </a:xfrm>
             <a:custGeom>
               <a:avLst/>
               <a:pathLst>
-                <a:path w="7799693" h="0">
+                <a:path w="7660515" h="0">
                   <a:moveTo>
                     <a:pt x="0" y="0"/>
                   </a:moveTo>
                   <a:lnTo>
-                    <a:pt x="7799693" y="0"/>
-                  </a:lnTo>
-                  <a:lnTo>
-                    <a:pt x="7799693" y="0"/>
+                    <a:pt x="7660515" y="0"/>
+                  </a:lnTo>
+                  <a:lnTo>
+                    <a:pt x="7660515" y="0"/>
                   </a:lnTo>
                 </a:path>
               </a:pathLst>
@@ -2400,21 +2392,21 @@
           </p:nvSpPr>
           <p:spPr>
             <a:xfrm>
-              <a:off x="817517" y="2654127"/>
-              <a:ext cx="7799693" cy="0"/>
+              <a:off x="887106" y="2651959"/>
+              <a:ext cx="7660515" cy="0"/>
             </a:xfrm>
             <a:custGeom>
               <a:avLst/>
               <a:pathLst>
-                <a:path w="7799693" h="0">
+                <a:path w="7660515" h="0">
                   <a:moveTo>
                     <a:pt x="0" y="0"/>
                   </a:moveTo>
                   <a:lnTo>
-                    <a:pt x="7799693" y="0"/>
-                  </a:lnTo>
-                  <a:lnTo>
-                    <a:pt x="7799693" y="0"/>
+                    <a:pt x="7660515" y="0"/>
+                  </a:lnTo>
+                  <a:lnTo>
+                    <a:pt x="7660515" y="0"/>
                   </a:lnTo>
                 </a:path>
               </a:pathLst>
@@ -2443,21 +2435,21 @@
           </p:nvSpPr>
           <p:spPr>
             <a:xfrm>
-              <a:off x="1365633" y="2073503"/>
-              <a:ext cx="0" cy="3649639"/>
+              <a:off x="887106" y="2352625"/>
+              <a:ext cx="7660515" cy="0"/>
             </a:xfrm>
             <a:custGeom>
               <a:avLst/>
               <a:pathLst>
-                <a:path w="0" h="3649639">
+                <a:path w="7660515" h="0">
                   <a:moveTo>
-                    <a:pt x="0" y="3649639"/>
+                    <a:pt x="0" y="0"/>
                   </a:moveTo>
                   <a:lnTo>
-                    <a:pt x="0" y="0"/>
-                  </a:lnTo>
-                  <a:lnTo>
-                    <a:pt x="0" y="0"/>
+                    <a:pt x="7660515" y="0"/>
+                  </a:lnTo>
+                  <a:lnTo>
+                    <a:pt x="7660515" y="0"/>
                   </a:lnTo>
                 </a:path>
               </a:pathLst>
@@ -2486,15 +2478,15 @@
           </p:nvSpPr>
           <p:spPr>
             <a:xfrm>
-              <a:off x="3517243" y="2073503"/>
-              <a:ext cx="0" cy="3649639"/>
+              <a:off x="1425442" y="2143092"/>
+              <a:ext cx="0" cy="1317069"/>
             </a:xfrm>
             <a:custGeom>
               <a:avLst/>
               <a:pathLst>
-                <a:path w="0" h="3649639">
+                <a:path w="0" h="1317069">
                   <a:moveTo>
-                    <a:pt x="0" y="3649639"/>
+                    <a:pt x="0" y="1317069"/>
                   </a:moveTo>
                   <a:lnTo>
                     <a:pt x="0" y="0"/>
@@ -2529,15 +2521,15 @@
           </p:nvSpPr>
           <p:spPr>
             <a:xfrm>
-              <a:off x="5668852" y="2073503"/>
-              <a:ext cx="0" cy="3649639"/>
+              <a:off x="3538658" y="2143092"/>
+              <a:ext cx="0" cy="1317069"/>
             </a:xfrm>
             <a:custGeom>
               <a:avLst/>
               <a:pathLst>
-                <a:path w="0" h="3649639">
+                <a:path w="0" h="1317069">
                   <a:moveTo>
-                    <a:pt x="0" y="3649639"/>
+                    <a:pt x="0" y="1317069"/>
                   </a:moveTo>
                   <a:lnTo>
                     <a:pt x="0" y="0"/>
@@ -2572,15 +2564,15 @@
           </p:nvSpPr>
           <p:spPr>
             <a:xfrm>
-              <a:off x="7820461" y="2073503"/>
-              <a:ext cx="0" cy="3649639"/>
+              <a:off x="5651874" y="2143092"/>
+              <a:ext cx="0" cy="1317069"/>
             </a:xfrm>
             <a:custGeom>
               <a:avLst/>
               <a:pathLst>
-                <a:path w="0" h="3649639">
+                <a:path w="0" h="1317069">
                   <a:moveTo>
-                    <a:pt x="0" y="3649639"/>
+                    <a:pt x="0" y="1317069"/>
                   </a:moveTo>
                   <a:lnTo>
                     <a:pt x="0" y="0"/>
@@ -2615,26 +2607,26 @@
           </p:nvSpPr>
           <p:spPr>
             <a:xfrm>
-              <a:off x="817517" y="5557249"/>
-              <a:ext cx="7799693" cy="0"/>
+              <a:off x="7765090" y="2143092"/>
+              <a:ext cx="0" cy="1317069"/>
             </a:xfrm>
             <a:custGeom>
               <a:avLst/>
               <a:pathLst>
-                <a:path w="7799693" h="0">
+                <a:path w="0" h="1317069">
                   <a:moveTo>
+                    <a:pt x="0" y="1317069"/>
+                  </a:moveTo>
+                  <a:lnTo>
                     <a:pt x="0" y="0"/>
-                  </a:moveTo>
-                  <a:lnTo>
-                    <a:pt x="7799693" y="0"/>
-                  </a:lnTo>
-                  <a:lnTo>
-                    <a:pt x="7799693" y="0"/>
+                  </a:lnTo>
+                  <a:lnTo>
+                    <a:pt x="0" y="0"/>
                   </a:lnTo>
                 </a:path>
               </a:pathLst>
             </a:custGeom>
-            <a:ln w="13550" cap="flat">
+            <a:ln w="6775" cap="flat">
               <a:solidFill>
                 <a:srgbClr val="EBEBEB">
                   <a:alpha val="100000"/>
@@ -2658,21 +2650,21 @@
           </p:nvSpPr>
           <p:spPr>
             <a:xfrm>
-              <a:off x="817517" y="4727786"/>
-              <a:ext cx="7799693" cy="0"/>
+              <a:off x="887106" y="3400294"/>
+              <a:ext cx="7660515" cy="0"/>
             </a:xfrm>
             <a:custGeom>
               <a:avLst/>
               <a:pathLst>
-                <a:path w="7799693" h="0">
+                <a:path w="7660515" h="0">
                   <a:moveTo>
                     <a:pt x="0" y="0"/>
                   </a:moveTo>
                   <a:lnTo>
-                    <a:pt x="7799693" y="0"/>
-                  </a:lnTo>
-                  <a:lnTo>
-                    <a:pt x="7799693" y="0"/>
+                    <a:pt x="7660515" y="0"/>
+                  </a:lnTo>
+                  <a:lnTo>
+                    <a:pt x="7660515" y="0"/>
                   </a:lnTo>
                 </a:path>
               </a:pathLst>
@@ -2701,21 +2693,21 @@
           </p:nvSpPr>
           <p:spPr>
             <a:xfrm>
-              <a:off x="817517" y="3898322"/>
-              <a:ext cx="7799693" cy="0"/>
+              <a:off x="887106" y="3100960"/>
+              <a:ext cx="7660515" cy="0"/>
             </a:xfrm>
             <a:custGeom>
               <a:avLst/>
               <a:pathLst>
-                <a:path w="7799693" h="0">
+                <a:path w="7660515" h="0">
                   <a:moveTo>
                     <a:pt x="0" y="0"/>
                   </a:moveTo>
                   <a:lnTo>
-                    <a:pt x="7799693" y="0"/>
-                  </a:lnTo>
-                  <a:lnTo>
-                    <a:pt x="7799693" y="0"/>
+                    <a:pt x="7660515" y="0"/>
+                  </a:lnTo>
+                  <a:lnTo>
+                    <a:pt x="7660515" y="0"/>
                   </a:lnTo>
                 </a:path>
               </a:pathLst>
@@ -2744,21 +2736,21 @@
           </p:nvSpPr>
           <p:spPr>
             <a:xfrm>
-              <a:off x="817517" y="3068859"/>
-              <a:ext cx="7799693" cy="0"/>
+              <a:off x="887106" y="2801626"/>
+              <a:ext cx="7660515" cy="0"/>
             </a:xfrm>
             <a:custGeom>
               <a:avLst/>
               <a:pathLst>
-                <a:path w="7799693" h="0">
+                <a:path w="7660515" h="0">
                   <a:moveTo>
                     <a:pt x="0" y="0"/>
                   </a:moveTo>
                   <a:lnTo>
-                    <a:pt x="7799693" y="0"/>
-                  </a:lnTo>
-                  <a:lnTo>
-                    <a:pt x="7799693" y="0"/>
+                    <a:pt x="7660515" y="0"/>
+                  </a:lnTo>
+                  <a:lnTo>
+                    <a:pt x="7660515" y="0"/>
                   </a:lnTo>
                 </a:path>
               </a:pathLst>
@@ -2787,21 +2779,21 @@
           </p:nvSpPr>
           <p:spPr>
             <a:xfrm>
-              <a:off x="817517" y="2239395"/>
-              <a:ext cx="7799693" cy="0"/>
+              <a:off x="887106" y="2502292"/>
+              <a:ext cx="7660515" cy="0"/>
             </a:xfrm>
             <a:custGeom>
               <a:avLst/>
               <a:pathLst>
-                <a:path w="7799693" h="0">
+                <a:path w="7660515" h="0">
                   <a:moveTo>
                     <a:pt x="0" y="0"/>
                   </a:moveTo>
                   <a:lnTo>
-                    <a:pt x="7799693" y="0"/>
-                  </a:lnTo>
-                  <a:lnTo>
-                    <a:pt x="7799693" y="0"/>
+                    <a:pt x="7660515" y="0"/>
+                  </a:lnTo>
+                  <a:lnTo>
+                    <a:pt x="7660515" y="0"/>
                   </a:lnTo>
                 </a:path>
               </a:pathLst>
@@ -2830,21 +2822,21 @@
           </p:nvSpPr>
           <p:spPr>
             <a:xfrm>
-              <a:off x="2441438" y="2073503"/>
-              <a:ext cx="0" cy="3649639"/>
+              <a:off x="887106" y="2202958"/>
+              <a:ext cx="7660515" cy="0"/>
             </a:xfrm>
             <a:custGeom>
               <a:avLst/>
               <a:pathLst>
-                <a:path w="0" h="3649639">
+                <a:path w="7660515" h="0">
                   <a:moveTo>
-                    <a:pt x="0" y="3649639"/>
+                    <a:pt x="0" y="0"/>
                   </a:moveTo>
                   <a:lnTo>
-                    <a:pt x="0" y="0"/>
-                  </a:lnTo>
-                  <a:lnTo>
-                    <a:pt x="0" y="0"/>
+                    <a:pt x="7660515" y="0"/>
+                  </a:lnTo>
+                  <a:lnTo>
+                    <a:pt x="7660515" y="0"/>
                   </a:lnTo>
                 </a:path>
               </a:pathLst>
@@ -2873,15 +2865,15 @@
           </p:nvSpPr>
           <p:spPr>
             <a:xfrm>
-              <a:off x="4593047" y="2073503"/>
-              <a:ext cx="0" cy="3649639"/>
+              <a:off x="2482050" y="2143092"/>
+              <a:ext cx="0" cy="1317069"/>
             </a:xfrm>
             <a:custGeom>
               <a:avLst/>
               <a:pathLst>
-                <a:path w="0" h="3649639">
+                <a:path w="0" h="1317069">
                   <a:moveTo>
-                    <a:pt x="0" y="3649639"/>
+                    <a:pt x="0" y="1317069"/>
                   </a:moveTo>
                   <a:lnTo>
                     <a:pt x="0" y="0"/>
@@ -2916,15 +2908,15 @@
           </p:nvSpPr>
           <p:spPr>
             <a:xfrm>
-              <a:off x="6744657" y="2073503"/>
-              <a:ext cx="0" cy="3649639"/>
+              <a:off x="4595266" y="2143092"/>
+              <a:ext cx="0" cy="1317069"/>
             </a:xfrm>
             <a:custGeom>
               <a:avLst/>
               <a:pathLst>
-                <a:path w="0" h="3649639">
+                <a:path w="0" h="1317069">
                   <a:moveTo>
-                    <a:pt x="0" y="3649639"/>
+                    <a:pt x="0" y="1317069"/>
                   </a:moveTo>
                   <a:lnTo>
                     <a:pt x="0" y="0"/>
@@ -2953,618 +2945,661 @@
         </p:sp>
         <p:sp>
           <p:nvSpPr>
-            <p:cNvPr id="20" name="pg20"/>
+            <p:cNvPr id="20" name="pl20"/>
             <p:cNvSpPr/>
             <p:nvPr/>
           </p:nvSpPr>
           <p:spPr>
             <a:xfrm>
-              <a:off x="1172049" y="3057237"/>
-              <a:ext cx="7090630" cy="2246846"/>
+              <a:off x="6708482" y="2143092"/>
+              <a:ext cx="0" cy="1317069"/>
             </a:xfrm>
             <a:custGeom>
               <a:avLst/>
               <a:pathLst>
-                <a:path w="7090630" h="2246846">
+                <a:path w="0" h="1317069">
+                  <a:moveTo>
+                    <a:pt x="0" y="1317069"/>
+                  </a:moveTo>
+                  <a:lnTo>
+                    <a:pt x="0" y="0"/>
+                  </a:lnTo>
+                  <a:lnTo>
+                    <a:pt x="0" y="0"/>
+                  </a:lnTo>
+                </a:path>
+              </a:pathLst>
+            </a:custGeom>
+            <a:ln w="13550" cap="flat">
+              <a:solidFill>
+                <a:srgbClr val="EBEBEB">
+                  <a:alpha val="100000"/>
+                </a:srgbClr>
+              </a:solidFill>
+              <a:prstDash val="solid"/>
+              <a:round/>
+            </a:ln>
+          </p:spPr>
+          <p:txBody>
+            <a:bodyPr/>
+            <a:lstStyle/>
+            <a:p/>
+          </p:txBody>
+        </p:sp>
+        <p:sp>
+          <p:nvSpPr>
+            <p:cNvPr id="21" name="pg21"/>
+            <p:cNvSpPr/>
+            <p:nvPr/>
+          </p:nvSpPr>
+          <p:spPr>
+            <a:xfrm>
+              <a:off x="1235312" y="2498098"/>
+              <a:ext cx="6964104" cy="810834"/>
+            </a:xfrm>
+            <a:custGeom>
+              <a:avLst/>
+              <a:pathLst>
+                <a:path w="6964104" h="810834">
                   <a:moveTo>
                     <a:pt x="0" y="0"/>
                   </a:moveTo>
                   <a:lnTo>
-                    <a:pt x="71622" y="57165"/>
-                  </a:lnTo>
-                  <a:lnTo>
-                    <a:pt x="143245" y="113022"/>
-                  </a:lnTo>
-                  <a:lnTo>
-                    <a:pt x="214867" y="167603"/>
-                  </a:lnTo>
-                  <a:lnTo>
-                    <a:pt x="286490" y="220936"/>
-                  </a:lnTo>
-                  <a:lnTo>
-                    <a:pt x="358112" y="273049"/>
-                  </a:lnTo>
-                  <a:lnTo>
-                    <a:pt x="429735" y="323970"/>
-                  </a:lnTo>
-                  <a:lnTo>
-                    <a:pt x="501357" y="373727"/>
-                  </a:lnTo>
-                  <a:lnTo>
-                    <a:pt x="572980" y="422347"/>
-                  </a:lnTo>
-                  <a:lnTo>
-                    <a:pt x="644602" y="469854"/>
-                  </a:lnTo>
-                  <a:lnTo>
-                    <a:pt x="716225" y="516276"/>
-                  </a:lnTo>
-                  <a:lnTo>
-                    <a:pt x="787847" y="561636"/>
-                  </a:lnTo>
-                  <a:lnTo>
-                    <a:pt x="859470" y="605958"/>
-                  </a:lnTo>
-                  <a:lnTo>
-                    <a:pt x="931092" y="649268"/>
-                  </a:lnTo>
-                  <a:lnTo>
-                    <a:pt x="1002715" y="691586"/>
-                  </a:lnTo>
-                  <a:lnTo>
-                    <a:pt x="1074337" y="732938"/>
-                  </a:lnTo>
-                  <a:lnTo>
-                    <a:pt x="1145960" y="773343"/>
-                  </a:lnTo>
-                  <a:lnTo>
-                    <a:pt x="1217582" y="812825"/>
-                  </a:lnTo>
-                  <a:lnTo>
-                    <a:pt x="1289205" y="851404"/>
-                  </a:lnTo>
-                  <a:lnTo>
-                    <a:pt x="1360827" y="889101"/>
-                  </a:lnTo>
-                  <a:lnTo>
-                    <a:pt x="1432450" y="925936"/>
-                  </a:lnTo>
-                  <a:lnTo>
-                    <a:pt x="1504073" y="961929"/>
-                  </a:lnTo>
-                  <a:lnTo>
-                    <a:pt x="1575695" y="997098"/>
-                  </a:lnTo>
-                  <a:lnTo>
-                    <a:pt x="1647318" y="1031464"/>
-                  </a:lnTo>
-                  <a:lnTo>
-                    <a:pt x="1718940" y="1065044"/>
-                  </a:lnTo>
-                  <a:lnTo>
-                    <a:pt x="1790563" y="1097855"/>
-                  </a:lnTo>
-                  <a:lnTo>
-                    <a:pt x="1862185" y="1129917"/>
-                  </a:lnTo>
-                  <a:lnTo>
-                    <a:pt x="1933808" y="1161245"/>
-                  </a:lnTo>
-                  <a:lnTo>
-                    <a:pt x="2005430" y="1191857"/>
-                  </a:lnTo>
-                  <a:lnTo>
-                    <a:pt x="2077053" y="1221770"/>
-                  </a:lnTo>
-                  <a:lnTo>
-                    <a:pt x="2148675" y="1250998"/>
-                  </a:lnTo>
-                  <a:lnTo>
-                    <a:pt x="2220298" y="1279558"/>
-                  </a:lnTo>
-                  <a:lnTo>
-                    <a:pt x="2291920" y="1307464"/>
-                  </a:lnTo>
-                  <a:lnTo>
-                    <a:pt x="2363543" y="1334733"/>
-                  </a:lnTo>
-                  <a:lnTo>
-                    <a:pt x="2435165" y="1361378"/>
-                  </a:lnTo>
-                  <a:lnTo>
-                    <a:pt x="2506788" y="1387414"/>
-                  </a:lnTo>
-                  <a:lnTo>
-                    <a:pt x="2578410" y="1412855"/>
-                  </a:lnTo>
-                  <a:lnTo>
-                    <a:pt x="2650033" y="1437713"/>
-                  </a:lnTo>
-                  <a:lnTo>
-                    <a:pt x="2721655" y="1462004"/>
-                  </a:lnTo>
-                  <a:lnTo>
-                    <a:pt x="2793278" y="1485739"/>
-                  </a:lnTo>
-                  <a:lnTo>
-                    <a:pt x="2864901" y="1508931"/>
-                  </a:lnTo>
-                  <a:lnTo>
-                    <a:pt x="2936523" y="1531593"/>
-                  </a:lnTo>
-                  <a:lnTo>
-                    <a:pt x="3008146" y="1553737"/>
-                  </a:lnTo>
-                  <a:lnTo>
-                    <a:pt x="3079768" y="1575374"/>
-                  </a:lnTo>
-                  <a:lnTo>
-                    <a:pt x="3151391" y="1596517"/>
-                  </a:lnTo>
-                  <a:lnTo>
-                    <a:pt x="3223013" y="1617176"/>
-                  </a:lnTo>
-                  <a:lnTo>
-                    <a:pt x="3294636" y="1637363"/>
-                  </a:lnTo>
-                  <a:lnTo>
-                    <a:pt x="3366258" y="1657088"/>
-                  </a:lnTo>
-                  <a:lnTo>
-                    <a:pt x="3437881" y="1673264"/>
-                  </a:lnTo>
-                  <a:lnTo>
-                    <a:pt x="3509503" y="1682131"/>
-                  </a:lnTo>
-                  <a:lnTo>
-                    <a:pt x="3581126" y="1690903"/>
-                  </a:lnTo>
-                  <a:lnTo>
-                    <a:pt x="3652748" y="1699580"/>
-                  </a:lnTo>
-                  <a:lnTo>
-                    <a:pt x="3724371" y="1708165"/>
-                  </a:lnTo>
-                  <a:lnTo>
-                    <a:pt x="3795993" y="1716658"/>
-                  </a:lnTo>
-                  <a:lnTo>
-                    <a:pt x="3867616" y="1725059"/>
-                  </a:lnTo>
-                  <a:lnTo>
-                    <a:pt x="3939238" y="1733371"/>
-                  </a:lnTo>
-                  <a:lnTo>
-                    <a:pt x="4010861" y="1741593"/>
-                  </a:lnTo>
-                  <a:lnTo>
-                    <a:pt x="4082483" y="1749727"/>
-                  </a:lnTo>
-                  <a:lnTo>
-                    <a:pt x="4154106" y="1757774"/>
-                  </a:lnTo>
-                  <a:lnTo>
-                    <a:pt x="4225729" y="1765734"/>
-                  </a:lnTo>
-                  <a:lnTo>
-                    <a:pt x="4297351" y="1773610"/>
-                  </a:lnTo>
-                  <a:lnTo>
-                    <a:pt x="4368974" y="1781400"/>
-                  </a:lnTo>
-                  <a:lnTo>
-                    <a:pt x="4440596" y="1789107"/>
-                  </a:lnTo>
-                  <a:lnTo>
-                    <a:pt x="4512219" y="1796732"/>
-                  </a:lnTo>
-                  <a:lnTo>
-                    <a:pt x="4583841" y="1804275"/>
-                  </a:lnTo>
-                  <a:lnTo>
-                    <a:pt x="4655464" y="1811736"/>
-                  </a:lnTo>
-                  <a:lnTo>
-                    <a:pt x="4727086" y="1819118"/>
-                  </a:lnTo>
-                  <a:lnTo>
-                    <a:pt x="4798709" y="1826421"/>
-                  </a:lnTo>
-                  <a:lnTo>
-                    <a:pt x="4870331" y="1833645"/>
-                  </a:lnTo>
-                  <a:lnTo>
-                    <a:pt x="4941954" y="1840792"/>
-                  </a:lnTo>
-                  <a:lnTo>
-                    <a:pt x="5013576" y="1847862"/>
-                  </a:lnTo>
-                  <a:lnTo>
-                    <a:pt x="5085199" y="1854857"/>
-                  </a:lnTo>
-                  <a:lnTo>
-                    <a:pt x="5156821" y="1861776"/>
-                  </a:lnTo>
-                  <a:lnTo>
-                    <a:pt x="5228444" y="1868621"/>
-                  </a:lnTo>
-                  <a:lnTo>
-                    <a:pt x="5300066" y="1875393"/>
-                  </a:lnTo>
-                  <a:lnTo>
-                    <a:pt x="5371689" y="1882092"/>
-                  </a:lnTo>
-                  <a:lnTo>
-                    <a:pt x="5443311" y="1888719"/>
-                  </a:lnTo>
-                  <a:lnTo>
-                    <a:pt x="5514934" y="1895275"/>
-                  </a:lnTo>
-                  <a:lnTo>
-                    <a:pt x="5586557" y="1901761"/>
-                  </a:lnTo>
-                  <a:lnTo>
-                    <a:pt x="5658179" y="1908177"/>
-                  </a:lnTo>
-                  <a:lnTo>
-                    <a:pt x="5729802" y="1914525"/>
-                  </a:lnTo>
-                  <a:lnTo>
-                    <a:pt x="5801424" y="1920804"/>
-                  </a:lnTo>
-                  <a:lnTo>
-                    <a:pt x="5873047" y="1927016"/>
-                  </a:lnTo>
-                  <a:lnTo>
-                    <a:pt x="5944669" y="1933162"/>
-                  </a:lnTo>
-                  <a:lnTo>
-                    <a:pt x="6016292" y="1939241"/>
-                  </a:lnTo>
-                  <a:lnTo>
-                    <a:pt x="6087914" y="1945256"/>
-                  </a:lnTo>
-                  <a:lnTo>
-                    <a:pt x="6159537" y="1951205"/>
-                  </a:lnTo>
-                  <a:lnTo>
-                    <a:pt x="6231159" y="1957091"/>
-                  </a:lnTo>
-                  <a:lnTo>
-                    <a:pt x="6302782" y="1962914"/>
-                  </a:lnTo>
-                  <a:lnTo>
-                    <a:pt x="6374404" y="1968675"/>
-                  </a:lnTo>
-                  <a:lnTo>
-                    <a:pt x="6446027" y="1974373"/>
-                  </a:lnTo>
-                  <a:lnTo>
-                    <a:pt x="6517649" y="1980011"/>
-                  </a:lnTo>
-                  <a:lnTo>
-                    <a:pt x="6589272" y="1985588"/>
-                  </a:lnTo>
-                  <a:lnTo>
-                    <a:pt x="6660894" y="1991105"/>
-                  </a:lnTo>
-                  <a:lnTo>
-                    <a:pt x="6732517" y="1996563"/>
-                  </a:lnTo>
-                  <a:lnTo>
-                    <a:pt x="6804139" y="2001963"/>
-                  </a:lnTo>
-                  <a:lnTo>
-                    <a:pt x="6875762" y="2007304"/>
-                  </a:lnTo>
-                  <a:lnTo>
-                    <a:pt x="6947385" y="2012589"/>
-                  </a:lnTo>
-                  <a:lnTo>
-                    <a:pt x="7019007" y="2017816"/>
-                  </a:lnTo>
-                  <a:lnTo>
-                    <a:pt x="7090630" y="2022988"/>
-                  </a:lnTo>
-                  <a:lnTo>
-                    <a:pt x="7090630" y="2246846"/>
-                  </a:lnTo>
-                  <a:lnTo>
-                    <a:pt x="7019007" y="2240922"/>
-                  </a:lnTo>
-                  <a:lnTo>
-                    <a:pt x="6947385" y="2234859"/>
-                  </a:lnTo>
-                  <a:lnTo>
-                    <a:pt x="6875762" y="2228654"/>
-                  </a:lnTo>
-                  <a:lnTo>
-                    <a:pt x="6804139" y="2222304"/>
-                  </a:lnTo>
-                  <a:lnTo>
-                    <a:pt x="6732517" y="2215805"/>
-                  </a:lnTo>
-                  <a:lnTo>
-                    <a:pt x="6660894" y="2209154"/>
-                  </a:lnTo>
-                  <a:lnTo>
-                    <a:pt x="6589272" y="2202348"/>
-                  </a:lnTo>
-                  <a:lnTo>
-                    <a:pt x="6517649" y="2195382"/>
-                  </a:lnTo>
-                  <a:lnTo>
-                    <a:pt x="6446027" y="2188254"/>
-                  </a:lnTo>
-                  <a:lnTo>
-                    <a:pt x="6374404" y="2180958"/>
-                  </a:lnTo>
-                  <a:lnTo>
-                    <a:pt x="6302782" y="2173492"/>
-                  </a:lnTo>
-                  <a:lnTo>
-                    <a:pt x="6231159" y="2165851"/>
-                  </a:lnTo>
-                  <a:lnTo>
-                    <a:pt x="6159537" y="2158032"/>
-                  </a:lnTo>
-                  <a:lnTo>
-                    <a:pt x="6087914" y="2150029"/>
-                  </a:lnTo>
-                  <a:lnTo>
-                    <a:pt x="6016292" y="2141839"/>
-                  </a:lnTo>
-                  <a:lnTo>
-                    <a:pt x="5944669" y="2133457"/>
-                  </a:lnTo>
-                  <a:lnTo>
-                    <a:pt x="5873047" y="2124880"/>
-                  </a:lnTo>
-                  <a:lnTo>
-                    <a:pt x="5801424" y="2116101"/>
-                  </a:lnTo>
-                  <a:lnTo>
-                    <a:pt x="5729802" y="2107117"/>
-                  </a:lnTo>
-                  <a:lnTo>
-                    <a:pt x="5658179" y="2097923"/>
-                  </a:lnTo>
-                  <a:lnTo>
-                    <a:pt x="5586557" y="2088514"/>
-                  </a:lnTo>
-                  <a:lnTo>
-                    <a:pt x="5514934" y="2078885"/>
-                  </a:lnTo>
-                  <a:lnTo>
-                    <a:pt x="5443311" y="2069030"/>
-                  </a:lnTo>
-                  <a:lnTo>
-                    <a:pt x="5371689" y="2058944"/>
-                  </a:lnTo>
-                  <a:lnTo>
-                    <a:pt x="5300066" y="2048623"/>
-                  </a:lnTo>
-                  <a:lnTo>
-                    <a:pt x="5228444" y="2038060"/>
-                  </a:lnTo>
-                  <a:lnTo>
-                    <a:pt x="5156821" y="2027250"/>
-                  </a:lnTo>
-                  <a:lnTo>
-                    <a:pt x="5085199" y="2016187"/>
-                  </a:lnTo>
-                  <a:lnTo>
-                    <a:pt x="5013576" y="2004865"/>
-                  </a:lnTo>
-                  <a:lnTo>
-                    <a:pt x="4941954" y="1993278"/>
-                  </a:lnTo>
-                  <a:lnTo>
-                    <a:pt x="4870331" y="1981420"/>
-                  </a:lnTo>
-                  <a:lnTo>
-                    <a:pt x="4798709" y="1969284"/>
-                  </a:lnTo>
-                  <a:lnTo>
-                    <a:pt x="4727086" y="1956865"/>
-                  </a:lnTo>
-                  <a:lnTo>
-                    <a:pt x="4655464" y="1944154"/>
-                  </a:lnTo>
-                  <a:lnTo>
-                    <a:pt x="4583841" y="1931147"/>
-                  </a:lnTo>
-                  <a:lnTo>
-                    <a:pt x="4512219" y="1917835"/>
-                  </a:lnTo>
-                  <a:lnTo>
-                    <a:pt x="4440596" y="1904211"/>
-                  </a:lnTo>
-                  <a:lnTo>
-                    <a:pt x="4368974" y="1890269"/>
-                  </a:lnTo>
-                  <a:lnTo>
-                    <a:pt x="4297351" y="1876000"/>
-                  </a:lnTo>
-                  <a:lnTo>
-                    <a:pt x="4225729" y="1861398"/>
-                  </a:lnTo>
-                  <a:lnTo>
-                    <a:pt x="4154106" y="1846454"/>
-                  </a:lnTo>
-                  <a:lnTo>
-                    <a:pt x="4082483" y="1831160"/>
-                  </a:lnTo>
-                  <a:lnTo>
-                    <a:pt x="4010861" y="1815508"/>
-                  </a:lnTo>
-                  <a:lnTo>
-                    <a:pt x="3939238" y="1799490"/>
-                  </a:lnTo>
-                  <a:lnTo>
-                    <a:pt x="3867616" y="1783097"/>
-                  </a:lnTo>
-                  <a:lnTo>
-                    <a:pt x="3795993" y="1766321"/>
-                  </a:lnTo>
-                  <a:lnTo>
-                    <a:pt x="3724371" y="1749152"/>
-                  </a:lnTo>
-                  <a:lnTo>
-                    <a:pt x="3652748" y="1731581"/>
-                  </a:lnTo>
-                  <a:lnTo>
-                    <a:pt x="3581126" y="1713599"/>
-                  </a:lnTo>
-                  <a:lnTo>
-                    <a:pt x="3509503" y="1695196"/>
-                  </a:lnTo>
-                  <a:lnTo>
-                    <a:pt x="3437881" y="1676362"/>
-                  </a:lnTo>
-                  <a:lnTo>
-                    <a:pt x="3366258" y="1664301"/>
-                  </a:lnTo>
-                  <a:lnTo>
-                    <a:pt x="3294636" y="1655240"/>
-                  </a:lnTo>
-                  <a:lnTo>
-                    <a:pt x="3223013" y="1646082"/>
-                  </a:lnTo>
-                  <a:lnTo>
-                    <a:pt x="3151391" y="1636824"/>
-                  </a:lnTo>
-                  <a:lnTo>
-                    <a:pt x="3079768" y="1627466"/>
-                  </a:lnTo>
-                  <a:lnTo>
-                    <a:pt x="3008146" y="1618007"/>
-                  </a:lnTo>
-                  <a:lnTo>
-                    <a:pt x="2936523" y="1608444"/>
-                  </a:lnTo>
-                  <a:lnTo>
-                    <a:pt x="2864901" y="1598779"/>
-                  </a:lnTo>
-                  <a:lnTo>
-                    <a:pt x="2793278" y="1589008"/>
-                  </a:lnTo>
-                  <a:lnTo>
-                    <a:pt x="2721655" y="1579132"/>
-                  </a:lnTo>
-                  <a:lnTo>
-                    <a:pt x="2650033" y="1569148"/>
-                  </a:lnTo>
-                  <a:lnTo>
-                    <a:pt x="2578410" y="1559056"/>
-                  </a:lnTo>
-                  <a:lnTo>
-                    <a:pt x="2506788" y="1548855"/>
-                  </a:lnTo>
-                  <a:lnTo>
-                    <a:pt x="2435165" y="1538543"/>
-                  </a:lnTo>
-                  <a:lnTo>
-                    <a:pt x="2363543" y="1528119"/>
-                  </a:lnTo>
-                  <a:lnTo>
-                    <a:pt x="2291920" y="1517583"/>
-                  </a:lnTo>
-                  <a:lnTo>
-                    <a:pt x="2220298" y="1506932"/>
-                  </a:lnTo>
-                  <a:lnTo>
-                    <a:pt x="2148675" y="1496166"/>
-                  </a:lnTo>
-                  <a:lnTo>
-                    <a:pt x="2077053" y="1485283"/>
-                  </a:lnTo>
-                  <a:lnTo>
-                    <a:pt x="2005430" y="1474282"/>
-                  </a:lnTo>
-                  <a:lnTo>
-                    <a:pt x="1933808" y="1463161"/>
-                  </a:lnTo>
-                  <a:lnTo>
-                    <a:pt x="1862185" y="1451920"/>
-                  </a:lnTo>
-                  <a:lnTo>
-                    <a:pt x="1790563" y="1440558"/>
-                  </a:lnTo>
-                  <a:lnTo>
-                    <a:pt x="1718940" y="1429072"/>
-                  </a:lnTo>
-                  <a:lnTo>
-                    <a:pt x="1647318" y="1417461"/>
-                  </a:lnTo>
-                  <a:lnTo>
-                    <a:pt x="1575695" y="1405725"/>
-                  </a:lnTo>
-                  <a:lnTo>
-                    <a:pt x="1504073" y="1393862"/>
-                  </a:lnTo>
-                  <a:lnTo>
-                    <a:pt x="1432450" y="1381869"/>
-                  </a:lnTo>
-                  <a:lnTo>
-                    <a:pt x="1360827" y="1369747"/>
-                  </a:lnTo>
-                  <a:lnTo>
-                    <a:pt x="1289205" y="1357494"/>
-                  </a:lnTo>
-                  <a:lnTo>
-                    <a:pt x="1217582" y="1345107"/>
-                  </a:lnTo>
-                  <a:lnTo>
-                    <a:pt x="1145960" y="1332586"/>
-                  </a:lnTo>
-                  <a:lnTo>
-                    <a:pt x="1074337" y="1319930"/>
-                  </a:lnTo>
-                  <a:lnTo>
-                    <a:pt x="1002715" y="1307136"/>
-                  </a:lnTo>
-                  <a:lnTo>
-                    <a:pt x="931092" y="1294204"/>
-                  </a:lnTo>
-                  <a:lnTo>
-                    <a:pt x="859470" y="1281131"/>
-                  </a:lnTo>
-                  <a:lnTo>
-                    <a:pt x="787847" y="1267917"/>
-                  </a:lnTo>
-                  <a:lnTo>
-                    <a:pt x="716225" y="1254559"/>
-                  </a:lnTo>
-                  <a:lnTo>
-                    <a:pt x="644602" y="1241057"/>
-                  </a:lnTo>
-                  <a:lnTo>
-                    <a:pt x="572980" y="1227408"/>
-                  </a:lnTo>
-                  <a:lnTo>
-                    <a:pt x="501357" y="1213612"/>
-                  </a:lnTo>
-                  <a:lnTo>
-                    <a:pt x="429735" y="1199665"/>
-                  </a:lnTo>
-                  <a:lnTo>
-                    <a:pt x="358112" y="1185568"/>
-                  </a:lnTo>
-                  <a:lnTo>
-                    <a:pt x="286490" y="1171317"/>
-                  </a:lnTo>
-                  <a:lnTo>
-                    <a:pt x="214867" y="1156913"/>
-                  </a:lnTo>
-                  <a:lnTo>
-                    <a:pt x="143245" y="1142352"/>
-                  </a:lnTo>
-                  <a:lnTo>
-                    <a:pt x="71622" y="1127633"/>
-                  </a:lnTo>
-                  <a:lnTo>
-                    <a:pt x="0" y="1112754"/>
+                    <a:pt x="70344" y="20629"/>
+                  </a:lnTo>
+                  <a:lnTo>
+                    <a:pt x="140688" y="40787"/>
+                  </a:lnTo>
+                  <a:lnTo>
+                    <a:pt x="211033" y="60484"/>
+                  </a:lnTo>
+                  <a:lnTo>
+                    <a:pt x="281377" y="79730"/>
+                  </a:lnTo>
+                  <a:lnTo>
+                    <a:pt x="351722" y="98537"/>
+                  </a:lnTo>
+                  <a:lnTo>
+                    <a:pt x="422066" y="116913"/>
+                  </a:lnTo>
+                  <a:lnTo>
+                    <a:pt x="492411" y="134869"/>
+                  </a:lnTo>
+                  <a:lnTo>
+                    <a:pt x="562755" y="152415"/>
+                  </a:lnTo>
+                  <a:lnTo>
+                    <a:pt x="633100" y="169559"/>
+                  </a:lnTo>
+                  <a:lnTo>
+                    <a:pt x="703444" y="186311"/>
+                  </a:lnTo>
+                  <a:lnTo>
+                    <a:pt x="773789" y="202681"/>
+                  </a:lnTo>
+                  <a:lnTo>
+                    <a:pt x="844133" y="218676"/>
+                  </a:lnTo>
+                  <a:lnTo>
+                    <a:pt x="914478" y="234305"/>
+                  </a:lnTo>
+                  <a:lnTo>
+                    <a:pt x="984822" y="249577"/>
+                  </a:lnTo>
+                  <a:lnTo>
+                    <a:pt x="1055167" y="264500"/>
+                  </a:lnTo>
+                  <a:lnTo>
+                    <a:pt x="1125511" y="279081"/>
+                  </a:lnTo>
+                  <a:lnTo>
+                    <a:pt x="1195856" y="293329"/>
+                  </a:lnTo>
+                  <a:lnTo>
+                    <a:pt x="1266200" y="307251"/>
+                  </a:lnTo>
+                  <a:lnTo>
+                    <a:pt x="1336545" y="320855"/>
+                  </a:lnTo>
+                  <a:lnTo>
+                    <a:pt x="1406889" y="334148"/>
+                  </a:lnTo>
+                  <a:lnTo>
+                    <a:pt x="1477234" y="347137"/>
+                  </a:lnTo>
+                  <a:lnTo>
+                    <a:pt x="1547578" y="359829"/>
+                  </a:lnTo>
+                  <a:lnTo>
+                    <a:pt x="1617923" y="372231"/>
+                  </a:lnTo>
+                  <a:lnTo>
+                    <a:pt x="1688267" y="384349"/>
+                  </a:lnTo>
+                  <a:lnTo>
+                    <a:pt x="1758612" y="396190"/>
+                  </a:lnTo>
+                  <a:lnTo>
+                    <a:pt x="1828956" y="407760"/>
+                  </a:lnTo>
+                  <a:lnTo>
+                    <a:pt x="1899301" y="419066"/>
+                  </a:lnTo>
+                  <a:lnTo>
+                    <a:pt x="1969645" y="430113"/>
+                  </a:lnTo>
+                  <a:lnTo>
+                    <a:pt x="2039990" y="440908"/>
+                  </a:lnTo>
+                  <a:lnTo>
+                    <a:pt x="2110334" y="451455"/>
+                  </a:lnTo>
+                  <a:lnTo>
+                    <a:pt x="2180679" y="461762"/>
+                  </a:lnTo>
+                  <a:lnTo>
+                    <a:pt x="2251023" y="471833"/>
+                  </a:lnTo>
+                  <a:lnTo>
+                    <a:pt x="2321368" y="481673"/>
+                  </a:lnTo>
+                  <a:lnTo>
+                    <a:pt x="2391712" y="491289"/>
+                  </a:lnTo>
+                  <a:lnTo>
+                    <a:pt x="2462057" y="500685"/>
+                  </a:lnTo>
+                  <a:lnTo>
+                    <a:pt x="2532401" y="509866"/>
+                  </a:lnTo>
+                  <a:lnTo>
+                    <a:pt x="2602746" y="518837"/>
+                  </a:lnTo>
+                  <a:lnTo>
+                    <a:pt x="2673090" y="527602"/>
+                  </a:lnTo>
+                  <a:lnTo>
+                    <a:pt x="2743435" y="536168"/>
+                  </a:lnTo>
+                  <a:lnTo>
+                    <a:pt x="2813779" y="544537"/>
+                  </a:lnTo>
+                  <a:lnTo>
+                    <a:pt x="2884124" y="552716"/>
+                  </a:lnTo>
+                  <a:lnTo>
+                    <a:pt x="2954468" y="560707"/>
+                  </a:lnTo>
+                  <a:lnTo>
+                    <a:pt x="3024813" y="568515"/>
+                  </a:lnTo>
+                  <a:lnTo>
+                    <a:pt x="3095157" y="576145"/>
+                  </a:lnTo>
+                  <a:lnTo>
+                    <a:pt x="3165502" y="583600"/>
+                  </a:lnTo>
+                  <a:lnTo>
+                    <a:pt x="3235846" y="590885"/>
+                  </a:lnTo>
+                  <a:lnTo>
+                    <a:pt x="3306191" y="598004"/>
+                  </a:lnTo>
+                  <a:lnTo>
+                    <a:pt x="3376535" y="603841"/>
+                  </a:lnTo>
+                  <a:lnTo>
+                    <a:pt x="3446880" y="607041"/>
+                  </a:lnTo>
+                  <a:lnTo>
+                    <a:pt x="3517224" y="610207"/>
+                  </a:lnTo>
+                  <a:lnTo>
+                    <a:pt x="3587569" y="613338"/>
+                  </a:lnTo>
+                  <a:lnTo>
+                    <a:pt x="3657913" y="616436"/>
+                  </a:lnTo>
+                  <a:lnTo>
+                    <a:pt x="3728257" y="619501"/>
+                  </a:lnTo>
+                  <a:lnTo>
+                    <a:pt x="3798602" y="622533"/>
+                  </a:lnTo>
+                  <a:lnTo>
+                    <a:pt x="3868946" y="625532"/>
+                  </a:lnTo>
+                  <a:lnTo>
+                    <a:pt x="3939291" y="628500"/>
+                  </a:lnTo>
+                  <a:lnTo>
+                    <a:pt x="4009635" y="631435"/>
+                  </a:lnTo>
+                  <a:lnTo>
+                    <a:pt x="4079980" y="634339"/>
+                  </a:lnTo>
+                  <a:lnTo>
+                    <a:pt x="4150324" y="637212"/>
+                  </a:lnTo>
+                  <a:lnTo>
+                    <a:pt x="4220669" y="640054"/>
+                  </a:lnTo>
+                  <a:lnTo>
+                    <a:pt x="4291013" y="642865"/>
+                  </a:lnTo>
+                  <a:lnTo>
+                    <a:pt x="4361358" y="645646"/>
+                  </a:lnTo>
+                  <a:lnTo>
+                    <a:pt x="4431702" y="648398"/>
+                  </a:lnTo>
+                  <a:lnTo>
+                    <a:pt x="4502047" y="651120"/>
+                  </a:lnTo>
+                  <a:lnTo>
+                    <a:pt x="4572391" y="653813"/>
+                  </a:lnTo>
+                  <a:lnTo>
+                    <a:pt x="4642736" y="656477"/>
+                  </a:lnTo>
+                  <a:lnTo>
+                    <a:pt x="4713080" y="659112"/>
+                  </a:lnTo>
+                  <a:lnTo>
+                    <a:pt x="4783425" y="661719"/>
+                  </a:lnTo>
+                  <a:lnTo>
+                    <a:pt x="4853769" y="664298"/>
+                  </a:lnTo>
+                  <a:lnTo>
+                    <a:pt x="4924114" y="666850"/>
+                  </a:lnTo>
+                  <a:lnTo>
+                    <a:pt x="4994458" y="669374"/>
+                  </a:lnTo>
+                  <a:lnTo>
+                    <a:pt x="5064803" y="671871"/>
+                  </a:lnTo>
+                  <a:lnTo>
+                    <a:pt x="5135147" y="674341"/>
+                  </a:lnTo>
+                  <a:lnTo>
+                    <a:pt x="5205492" y="676785"/>
+                  </a:lnTo>
+                  <a:lnTo>
+                    <a:pt x="5275836" y="679202"/>
+                  </a:lnTo>
+                  <a:lnTo>
+                    <a:pt x="5346181" y="681594"/>
+                  </a:lnTo>
+                  <a:lnTo>
+                    <a:pt x="5416525" y="683960"/>
+                  </a:lnTo>
+                  <a:lnTo>
+                    <a:pt x="5486870" y="686301"/>
+                  </a:lnTo>
+                  <a:lnTo>
+                    <a:pt x="5557214" y="688616"/>
+                  </a:lnTo>
+                  <a:lnTo>
+                    <a:pt x="5627559" y="690907"/>
+                  </a:lnTo>
+                  <a:lnTo>
+                    <a:pt x="5697903" y="693173"/>
+                  </a:lnTo>
+                  <a:lnTo>
+                    <a:pt x="5768248" y="695415"/>
+                  </a:lnTo>
+                  <a:lnTo>
+                    <a:pt x="5838592" y="697632"/>
+                  </a:lnTo>
+                  <a:lnTo>
+                    <a:pt x="5908937" y="699826"/>
+                  </a:lnTo>
+                  <a:lnTo>
+                    <a:pt x="5979281" y="701997"/>
+                  </a:lnTo>
+                  <a:lnTo>
+                    <a:pt x="6049626" y="704144"/>
+                  </a:lnTo>
+                  <a:lnTo>
+                    <a:pt x="6119970" y="706268"/>
+                  </a:lnTo>
+                  <a:lnTo>
+                    <a:pt x="6190315" y="708369"/>
+                  </a:lnTo>
+                  <a:lnTo>
+                    <a:pt x="6260659" y="710448"/>
+                  </a:lnTo>
+                  <a:lnTo>
+                    <a:pt x="6331004" y="712505"/>
+                  </a:lnTo>
+                  <a:lnTo>
+                    <a:pt x="6401348" y="714539"/>
+                  </a:lnTo>
+                  <a:lnTo>
+                    <a:pt x="6471693" y="716552"/>
+                  </a:lnTo>
+                  <a:lnTo>
+                    <a:pt x="6542037" y="718543"/>
+                  </a:lnTo>
+                  <a:lnTo>
+                    <a:pt x="6612382" y="720512"/>
+                  </a:lnTo>
+                  <a:lnTo>
+                    <a:pt x="6682726" y="722461"/>
+                  </a:lnTo>
+                  <a:lnTo>
+                    <a:pt x="6753071" y="724389"/>
+                  </a:lnTo>
+                  <a:lnTo>
+                    <a:pt x="6823415" y="726296"/>
+                  </a:lnTo>
+                  <a:lnTo>
+                    <a:pt x="6893760" y="728182"/>
+                  </a:lnTo>
+                  <a:lnTo>
+                    <a:pt x="6964104" y="730048"/>
+                  </a:lnTo>
+                  <a:lnTo>
+                    <a:pt x="6964104" y="810834"/>
+                  </a:lnTo>
+                  <a:lnTo>
+                    <a:pt x="6893760" y="808696"/>
+                  </a:lnTo>
+                  <a:lnTo>
+                    <a:pt x="6823415" y="806508"/>
+                  </a:lnTo>
+                  <a:lnTo>
+                    <a:pt x="6753071" y="804268"/>
+                  </a:lnTo>
+                  <a:lnTo>
+                    <a:pt x="6682726" y="801977"/>
+                  </a:lnTo>
+                  <a:lnTo>
+                    <a:pt x="6612382" y="799632"/>
+                  </a:lnTo>
+                  <a:lnTo>
+                    <a:pt x="6542037" y="797232"/>
+                  </a:lnTo>
+                  <a:lnTo>
+                    <a:pt x="6471693" y="794775"/>
+                  </a:lnTo>
+                  <a:lnTo>
+                    <a:pt x="6401348" y="792262"/>
+                  </a:lnTo>
+                  <a:lnTo>
+                    <a:pt x="6331004" y="789689"/>
+                  </a:lnTo>
+                  <a:lnTo>
+                    <a:pt x="6260659" y="787056"/>
+                  </a:lnTo>
+                  <a:lnTo>
+                    <a:pt x="6190315" y="784362"/>
+                  </a:lnTo>
+                  <a:lnTo>
+                    <a:pt x="6119970" y="781604"/>
+                  </a:lnTo>
+                  <a:lnTo>
+                    <a:pt x="6049626" y="778783"/>
+                  </a:lnTo>
+                  <a:lnTo>
+                    <a:pt x="5979281" y="775895"/>
+                  </a:lnTo>
+                  <a:lnTo>
+                    <a:pt x="5908937" y="772939"/>
+                  </a:lnTo>
+                  <a:lnTo>
+                    <a:pt x="5838592" y="769914"/>
+                  </a:lnTo>
+                  <a:lnTo>
+                    <a:pt x="5768248" y="766819"/>
+                  </a:lnTo>
+                  <a:lnTo>
+                    <a:pt x="5697903" y="763651"/>
+                  </a:lnTo>
+                  <a:lnTo>
+                    <a:pt x="5627559" y="760409"/>
+                  </a:lnTo>
+                  <a:lnTo>
+                    <a:pt x="5557214" y="757091"/>
+                  </a:lnTo>
+                  <a:lnTo>
+                    <a:pt x="5486870" y="753695"/>
+                  </a:lnTo>
+                  <a:lnTo>
+                    <a:pt x="5416525" y="750220"/>
+                  </a:lnTo>
+                  <a:lnTo>
+                    <a:pt x="5346181" y="746664"/>
+                  </a:lnTo>
+                  <a:lnTo>
+                    <a:pt x="5275836" y="743024"/>
+                  </a:lnTo>
+                  <a:lnTo>
+                    <a:pt x="5205492" y="739299"/>
+                  </a:lnTo>
+                  <a:lnTo>
+                    <a:pt x="5135147" y="735488"/>
+                  </a:lnTo>
+                  <a:lnTo>
+                    <a:pt x="5064803" y="731586"/>
+                  </a:lnTo>
+                  <a:lnTo>
+                    <a:pt x="4994458" y="727594"/>
+                  </a:lnTo>
+                  <a:lnTo>
+                    <a:pt x="4924114" y="723508"/>
+                  </a:lnTo>
+                  <a:lnTo>
+                    <a:pt x="4853769" y="719327"/>
+                  </a:lnTo>
+                  <a:lnTo>
+                    <a:pt x="4783425" y="715047"/>
+                  </a:lnTo>
+                  <a:lnTo>
+                    <a:pt x="4713080" y="710668"/>
+                  </a:lnTo>
+                  <a:lnTo>
+                    <a:pt x="4642736" y="706186"/>
+                  </a:lnTo>
+                  <a:lnTo>
+                    <a:pt x="4572391" y="701599"/>
+                  </a:lnTo>
+                  <a:lnTo>
+                    <a:pt x="4502047" y="696905"/>
+                  </a:lnTo>
+                  <a:lnTo>
+                    <a:pt x="4431702" y="692101"/>
+                  </a:lnTo>
+                  <a:lnTo>
+                    <a:pt x="4361358" y="687185"/>
+                  </a:lnTo>
+                  <a:lnTo>
+                    <a:pt x="4291013" y="682153"/>
+                  </a:lnTo>
+                  <a:lnTo>
+                    <a:pt x="4220669" y="677004"/>
+                  </a:lnTo>
+                  <a:lnTo>
+                    <a:pt x="4150324" y="671734"/>
+                  </a:lnTo>
+                  <a:lnTo>
+                    <a:pt x="4079980" y="666341"/>
+                  </a:lnTo>
+                  <a:lnTo>
+                    <a:pt x="4009635" y="660822"/>
+                  </a:lnTo>
+                  <a:lnTo>
+                    <a:pt x="3939291" y="655174"/>
+                  </a:lnTo>
+                  <a:lnTo>
+                    <a:pt x="3868946" y="649393"/>
+                  </a:lnTo>
+                  <a:lnTo>
+                    <a:pt x="3798602" y="643477"/>
+                  </a:lnTo>
+                  <a:lnTo>
+                    <a:pt x="3728257" y="637423"/>
+                  </a:lnTo>
+                  <a:lnTo>
+                    <a:pt x="3657913" y="631227"/>
+                  </a:lnTo>
+                  <a:lnTo>
+                    <a:pt x="3587569" y="624886"/>
+                  </a:lnTo>
+                  <a:lnTo>
+                    <a:pt x="3517224" y="618397"/>
+                  </a:lnTo>
+                  <a:lnTo>
+                    <a:pt x="3446880" y="611756"/>
+                  </a:lnTo>
+                  <a:lnTo>
+                    <a:pt x="3376535" y="604959"/>
+                  </a:lnTo>
+                  <a:lnTo>
+                    <a:pt x="3306191" y="600607"/>
+                  </a:lnTo>
+                  <a:lnTo>
+                    <a:pt x="3235846" y="597337"/>
+                  </a:lnTo>
+                  <a:lnTo>
+                    <a:pt x="3165502" y="594032"/>
+                  </a:lnTo>
+                  <a:lnTo>
+                    <a:pt x="3095157" y="590691"/>
+                  </a:lnTo>
+                  <a:lnTo>
+                    <a:pt x="3024813" y="587314"/>
+                  </a:lnTo>
+                  <a:lnTo>
+                    <a:pt x="2954468" y="583900"/>
+                  </a:lnTo>
+                  <a:lnTo>
+                    <a:pt x="2884124" y="580449"/>
+                  </a:lnTo>
+                  <a:lnTo>
+                    <a:pt x="2813779" y="576961"/>
+                  </a:lnTo>
+                  <a:lnTo>
+                    <a:pt x="2743435" y="573435"/>
+                  </a:lnTo>
+                  <a:lnTo>
+                    <a:pt x="2673090" y="569871"/>
+                  </a:lnTo>
+                  <a:lnTo>
+                    <a:pt x="2602746" y="566268"/>
+                  </a:lnTo>
+                  <a:lnTo>
+                    <a:pt x="2532401" y="562626"/>
+                  </a:lnTo>
+                  <a:lnTo>
+                    <a:pt x="2462057" y="558945"/>
+                  </a:lnTo>
+                  <a:lnTo>
+                    <a:pt x="2391712" y="555224"/>
+                  </a:lnTo>
+                  <a:lnTo>
+                    <a:pt x="2321368" y="551462"/>
+                  </a:lnTo>
+                  <a:lnTo>
+                    <a:pt x="2251023" y="547660"/>
+                  </a:lnTo>
+                  <a:lnTo>
+                    <a:pt x="2180679" y="543816"/>
+                  </a:lnTo>
+                  <a:lnTo>
+                    <a:pt x="2110334" y="539931"/>
+                  </a:lnTo>
+                  <a:lnTo>
+                    <a:pt x="2039990" y="536003"/>
+                  </a:lnTo>
+                  <a:lnTo>
+                    <a:pt x="1969645" y="532033"/>
+                  </a:lnTo>
+                  <a:lnTo>
+                    <a:pt x="1899301" y="528020"/>
+                  </a:lnTo>
+                  <a:lnTo>
+                    <a:pt x="1828956" y="523964"/>
+                  </a:lnTo>
+                  <a:lnTo>
+                    <a:pt x="1758612" y="519863"/>
+                  </a:lnTo>
+                  <a:lnTo>
+                    <a:pt x="1688267" y="515718"/>
+                  </a:lnTo>
+                  <a:lnTo>
+                    <a:pt x="1617923" y="511528"/>
+                  </a:lnTo>
+                  <a:lnTo>
+                    <a:pt x="1547578" y="507293"/>
+                  </a:lnTo>
+                  <a:lnTo>
+                    <a:pt x="1477234" y="503012"/>
+                  </a:lnTo>
+                  <a:lnTo>
+                    <a:pt x="1406889" y="498684"/>
+                  </a:lnTo>
+                  <a:lnTo>
+                    <a:pt x="1336545" y="494309"/>
+                  </a:lnTo>
+                  <a:lnTo>
+                    <a:pt x="1266200" y="489887"/>
+                  </a:lnTo>
+                  <a:lnTo>
+                    <a:pt x="1195856" y="485417"/>
+                  </a:lnTo>
+                  <a:lnTo>
+                    <a:pt x="1125511" y="480899"/>
+                  </a:lnTo>
+                  <a:lnTo>
+                    <a:pt x="1055167" y="476331"/>
+                  </a:lnTo>
+                  <a:lnTo>
+                    <a:pt x="984822" y="471714"/>
+                  </a:lnTo>
+                  <a:lnTo>
+                    <a:pt x="914478" y="467047"/>
+                  </a:lnTo>
+                  <a:lnTo>
+                    <a:pt x="844133" y="462330"/>
+                  </a:lnTo>
+                  <a:lnTo>
+                    <a:pt x="773789" y="457561"/>
+                  </a:lnTo>
+                  <a:lnTo>
+                    <a:pt x="703444" y="452741"/>
+                  </a:lnTo>
+                  <a:lnTo>
+                    <a:pt x="633100" y="447868"/>
+                  </a:lnTo>
+                  <a:lnTo>
+                    <a:pt x="562755" y="442942"/>
+                  </a:lnTo>
+                  <a:lnTo>
+                    <a:pt x="492411" y="437964"/>
+                  </a:lnTo>
+                  <a:lnTo>
+                    <a:pt x="422066" y="432931"/>
+                  </a:lnTo>
+                  <a:lnTo>
+                    <a:pt x="351722" y="427843"/>
+                  </a:lnTo>
+                  <a:lnTo>
+                    <a:pt x="281377" y="422701"/>
+                  </a:lnTo>
+                  <a:lnTo>
+                    <a:pt x="211033" y="417502"/>
+                  </a:lnTo>
+                  <a:lnTo>
+                    <a:pt x="140688" y="412247"/>
+                  </a:lnTo>
+                  <a:lnTo>
+                    <a:pt x="70344" y="406936"/>
+                  </a:lnTo>
+                  <a:lnTo>
+                    <a:pt x="0" y="401567"/>
                   </a:lnTo>
                   <a:close/>
                 </a:path>
@@ -3584,643 +3619,318 @@
         </p:sp>
         <p:sp>
           <p:nvSpPr>
-            <p:cNvPr id="21" name="pl21"/>
-            <p:cNvSpPr/>
-            <p:nvPr/>
-          </p:nvSpPr>
-          <p:spPr>
-            <a:xfrm>
-              <a:off x="1172049" y="3057237"/>
-              <a:ext cx="7090630" cy="2022988"/>
-            </a:xfrm>
-            <a:custGeom>
-              <a:avLst/>
-              <a:pathLst>
-                <a:path w="7090630" h="2022988">
-                  <a:moveTo>
-                    <a:pt x="0" y="0"/>
-                  </a:moveTo>
-                  <a:lnTo>
-                    <a:pt x="71622" y="57165"/>
-                  </a:lnTo>
-                  <a:lnTo>
-                    <a:pt x="143245" y="113022"/>
-                  </a:lnTo>
-                  <a:lnTo>
-                    <a:pt x="214867" y="167603"/>
-                  </a:lnTo>
-                  <a:lnTo>
-                    <a:pt x="286490" y="220936"/>
-                  </a:lnTo>
-                  <a:lnTo>
-                    <a:pt x="358112" y="273049"/>
-                  </a:lnTo>
-                  <a:lnTo>
-                    <a:pt x="429735" y="323970"/>
-                  </a:lnTo>
-                  <a:lnTo>
-                    <a:pt x="501357" y="373727"/>
-                  </a:lnTo>
-                  <a:lnTo>
-                    <a:pt x="572980" y="422347"/>
-                  </a:lnTo>
-                  <a:lnTo>
-                    <a:pt x="644602" y="469854"/>
-                  </a:lnTo>
-                  <a:lnTo>
-                    <a:pt x="716225" y="516276"/>
-                  </a:lnTo>
-                  <a:lnTo>
-                    <a:pt x="787847" y="561636"/>
-                  </a:lnTo>
-                  <a:lnTo>
-                    <a:pt x="859470" y="605958"/>
-                  </a:lnTo>
-                  <a:lnTo>
-                    <a:pt x="931092" y="649268"/>
-                  </a:lnTo>
-                  <a:lnTo>
-                    <a:pt x="1002715" y="691586"/>
-                  </a:lnTo>
-                  <a:lnTo>
-                    <a:pt x="1074337" y="732938"/>
-                  </a:lnTo>
-                  <a:lnTo>
-                    <a:pt x="1145960" y="773343"/>
-                  </a:lnTo>
-                  <a:lnTo>
-                    <a:pt x="1217582" y="812825"/>
-                  </a:lnTo>
-                  <a:lnTo>
-                    <a:pt x="1289205" y="851404"/>
-                  </a:lnTo>
-                  <a:lnTo>
-                    <a:pt x="1360827" y="889101"/>
-                  </a:lnTo>
-                  <a:lnTo>
-                    <a:pt x="1432450" y="925936"/>
-                  </a:lnTo>
-                  <a:lnTo>
-                    <a:pt x="1504073" y="961929"/>
-                  </a:lnTo>
-                  <a:lnTo>
-                    <a:pt x="1575695" y="997098"/>
-                  </a:lnTo>
-                  <a:lnTo>
-                    <a:pt x="1647318" y="1031464"/>
-                  </a:lnTo>
-                  <a:lnTo>
-                    <a:pt x="1718940" y="1065044"/>
-                  </a:lnTo>
-                  <a:lnTo>
-                    <a:pt x="1790563" y="1097855"/>
-                  </a:lnTo>
-                  <a:lnTo>
-                    <a:pt x="1862185" y="1129917"/>
-                  </a:lnTo>
-                  <a:lnTo>
-                    <a:pt x="1933808" y="1161245"/>
-                  </a:lnTo>
-                  <a:lnTo>
-                    <a:pt x="2005430" y="1191857"/>
-                  </a:lnTo>
-                  <a:lnTo>
-                    <a:pt x="2077053" y="1221770"/>
-                  </a:lnTo>
-                  <a:lnTo>
-                    <a:pt x="2148675" y="1250998"/>
-                  </a:lnTo>
-                  <a:lnTo>
-                    <a:pt x="2220298" y="1279558"/>
-                  </a:lnTo>
-                  <a:lnTo>
-                    <a:pt x="2291920" y="1307464"/>
-                  </a:lnTo>
-                  <a:lnTo>
-                    <a:pt x="2363543" y="1334733"/>
-                  </a:lnTo>
-                  <a:lnTo>
-                    <a:pt x="2435165" y="1361378"/>
-                  </a:lnTo>
-                  <a:lnTo>
-                    <a:pt x="2506788" y="1387414"/>
-                  </a:lnTo>
-                  <a:lnTo>
-                    <a:pt x="2578410" y="1412855"/>
-                  </a:lnTo>
-                  <a:lnTo>
-                    <a:pt x="2650033" y="1437713"/>
-                  </a:lnTo>
-                  <a:lnTo>
-                    <a:pt x="2721655" y="1462004"/>
-                  </a:lnTo>
-                  <a:lnTo>
-                    <a:pt x="2793278" y="1485739"/>
-                  </a:lnTo>
-                  <a:lnTo>
-                    <a:pt x="2864901" y="1508931"/>
-                  </a:lnTo>
-                  <a:lnTo>
-                    <a:pt x="2936523" y="1531593"/>
-                  </a:lnTo>
-                  <a:lnTo>
-                    <a:pt x="3008146" y="1553737"/>
-                  </a:lnTo>
-                  <a:lnTo>
-                    <a:pt x="3079768" y="1575374"/>
-                  </a:lnTo>
-                  <a:lnTo>
-                    <a:pt x="3151391" y="1596517"/>
-                  </a:lnTo>
-                  <a:lnTo>
-                    <a:pt x="3223013" y="1617176"/>
-                  </a:lnTo>
-                  <a:lnTo>
-                    <a:pt x="3294636" y="1637363"/>
-                  </a:lnTo>
-                  <a:lnTo>
-                    <a:pt x="3366258" y="1657088"/>
-                  </a:lnTo>
-                  <a:lnTo>
-                    <a:pt x="3437881" y="1673264"/>
-                  </a:lnTo>
-                  <a:lnTo>
-                    <a:pt x="3509503" y="1682131"/>
-                  </a:lnTo>
-                  <a:lnTo>
-                    <a:pt x="3581126" y="1690903"/>
-                  </a:lnTo>
-                  <a:lnTo>
-                    <a:pt x="3652748" y="1699580"/>
-                  </a:lnTo>
-                  <a:lnTo>
-                    <a:pt x="3724371" y="1708165"/>
-                  </a:lnTo>
-                  <a:lnTo>
-                    <a:pt x="3795993" y="1716658"/>
-                  </a:lnTo>
-                  <a:lnTo>
-                    <a:pt x="3867616" y="1725059"/>
-                  </a:lnTo>
-                  <a:lnTo>
-                    <a:pt x="3939238" y="1733371"/>
-                  </a:lnTo>
-                  <a:lnTo>
-                    <a:pt x="4010861" y="1741593"/>
-                  </a:lnTo>
-                  <a:lnTo>
-                    <a:pt x="4082483" y="1749727"/>
-                  </a:lnTo>
-                  <a:lnTo>
-                    <a:pt x="4154106" y="1757774"/>
-                  </a:lnTo>
-                  <a:lnTo>
-                    <a:pt x="4225729" y="1765734"/>
-                  </a:lnTo>
-                  <a:lnTo>
-                    <a:pt x="4297351" y="1773610"/>
-                  </a:lnTo>
-                  <a:lnTo>
-                    <a:pt x="4368974" y="1781400"/>
-                  </a:lnTo>
-                  <a:lnTo>
-                    <a:pt x="4440596" y="1789107"/>
-                  </a:lnTo>
-                  <a:lnTo>
-                    <a:pt x="4512219" y="1796732"/>
-                  </a:lnTo>
-                  <a:lnTo>
-                    <a:pt x="4583841" y="1804275"/>
-                  </a:lnTo>
-                  <a:lnTo>
-                    <a:pt x="4655464" y="1811736"/>
-                  </a:lnTo>
-                  <a:lnTo>
-                    <a:pt x="4727086" y="1819118"/>
-                  </a:lnTo>
-                  <a:lnTo>
-                    <a:pt x="4798709" y="1826421"/>
-                  </a:lnTo>
-                  <a:lnTo>
-                    <a:pt x="4870331" y="1833645"/>
-                  </a:lnTo>
-                  <a:lnTo>
-                    <a:pt x="4941954" y="1840792"/>
-                  </a:lnTo>
-                  <a:lnTo>
-                    <a:pt x="5013576" y="1847862"/>
-                  </a:lnTo>
-                  <a:lnTo>
-                    <a:pt x="5085199" y="1854857"/>
-                  </a:lnTo>
-                  <a:lnTo>
-                    <a:pt x="5156821" y="1861776"/>
-                  </a:lnTo>
-                  <a:lnTo>
-                    <a:pt x="5228444" y="1868621"/>
-                  </a:lnTo>
-                  <a:lnTo>
-                    <a:pt x="5300066" y="1875393"/>
-                  </a:lnTo>
-                  <a:lnTo>
-                    <a:pt x="5371689" y="1882092"/>
-                  </a:lnTo>
-                  <a:lnTo>
-                    <a:pt x="5443311" y="1888719"/>
-                  </a:lnTo>
-                  <a:lnTo>
-                    <a:pt x="5514934" y="1895275"/>
-                  </a:lnTo>
-                  <a:lnTo>
-                    <a:pt x="5586557" y="1901761"/>
-                  </a:lnTo>
-                  <a:lnTo>
-                    <a:pt x="5658179" y="1908177"/>
-                  </a:lnTo>
-                  <a:lnTo>
-                    <a:pt x="5729802" y="1914525"/>
-                  </a:lnTo>
-                  <a:lnTo>
-                    <a:pt x="5801424" y="1920804"/>
-                  </a:lnTo>
-                  <a:lnTo>
-                    <a:pt x="5873047" y="1927016"/>
-                  </a:lnTo>
-                  <a:lnTo>
-                    <a:pt x="5944669" y="1933162"/>
-                  </a:lnTo>
-                  <a:lnTo>
-                    <a:pt x="6016292" y="1939241"/>
-                  </a:lnTo>
-                  <a:lnTo>
-                    <a:pt x="6087914" y="1945256"/>
-                  </a:lnTo>
-                  <a:lnTo>
-                    <a:pt x="6159537" y="1951205"/>
-                  </a:lnTo>
-                  <a:lnTo>
-                    <a:pt x="6231159" y="1957091"/>
-                  </a:lnTo>
-                  <a:lnTo>
-                    <a:pt x="6302782" y="1962914"/>
-                  </a:lnTo>
-                  <a:lnTo>
-                    <a:pt x="6374404" y="1968675"/>
-                  </a:lnTo>
-                  <a:lnTo>
-                    <a:pt x="6446027" y="1974373"/>
-                  </a:lnTo>
-                  <a:lnTo>
-                    <a:pt x="6517649" y="1980011"/>
-                  </a:lnTo>
-                  <a:lnTo>
-                    <a:pt x="6589272" y="1985588"/>
-                  </a:lnTo>
-                  <a:lnTo>
-                    <a:pt x="6660894" y="1991105"/>
-                  </a:lnTo>
-                  <a:lnTo>
-                    <a:pt x="6732517" y="1996563"/>
-                  </a:lnTo>
-                  <a:lnTo>
-                    <a:pt x="6804139" y="2001963"/>
-                  </a:lnTo>
-                  <a:lnTo>
-                    <a:pt x="6875762" y="2007304"/>
-                  </a:lnTo>
-                  <a:lnTo>
-                    <a:pt x="6947385" y="2012589"/>
-                  </a:lnTo>
-                  <a:lnTo>
-                    <a:pt x="7019007" y="2017816"/>
-                  </a:lnTo>
-                  <a:lnTo>
-                    <a:pt x="7090630" y="2022988"/>
-                  </a:lnTo>
-                </a:path>
-              </a:pathLst>
-            </a:custGeom>
-          </p:spPr>
-          <p:txBody>
-            <a:bodyPr/>
-            <a:lstStyle/>
-            <a:p/>
-          </p:txBody>
-        </p:sp>
-        <p:sp>
-          <p:nvSpPr>
             <p:cNvPr id="22" name="pl22"/>
             <p:cNvSpPr/>
             <p:nvPr/>
           </p:nvSpPr>
           <p:spPr>
             <a:xfrm>
-              <a:off x="1172049" y="4169992"/>
-              <a:ext cx="7090630" cy="1134091"/>
+              <a:off x="1235312" y="2498098"/>
+              <a:ext cx="6964104" cy="730048"/>
             </a:xfrm>
             <a:custGeom>
               <a:avLst/>
               <a:pathLst>
-                <a:path w="7090630" h="1134091">
+                <a:path w="6964104" h="730048">
                   <a:moveTo>
-                    <a:pt x="7090630" y="1134091"/>
+                    <a:pt x="0" y="0"/>
                   </a:moveTo>
                   <a:lnTo>
-                    <a:pt x="7019007" y="1128167"/>
-                  </a:lnTo>
-                  <a:lnTo>
-                    <a:pt x="6947385" y="1122104"/>
-                  </a:lnTo>
-                  <a:lnTo>
-                    <a:pt x="6875762" y="1115899"/>
-                  </a:lnTo>
-                  <a:lnTo>
-                    <a:pt x="6804139" y="1109549"/>
-                  </a:lnTo>
-                  <a:lnTo>
-                    <a:pt x="6732517" y="1103050"/>
-                  </a:lnTo>
-                  <a:lnTo>
-                    <a:pt x="6660894" y="1096400"/>
-                  </a:lnTo>
-                  <a:lnTo>
-                    <a:pt x="6589272" y="1089593"/>
-                  </a:lnTo>
-                  <a:lnTo>
-                    <a:pt x="6517649" y="1082628"/>
-                  </a:lnTo>
-                  <a:lnTo>
-                    <a:pt x="6446027" y="1075499"/>
-                  </a:lnTo>
-                  <a:lnTo>
-                    <a:pt x="6374404" y="1068204"/>
-                  </a:lnTo>
-                  <a:lnTo>
-                    <a:pt x="6302782" y="1060737"/>
-                  </a:lnTo>
-                  <a:lnTo>
-                    <a:pt x="6231159" y="1053097"/>
-                  </a:lnTo>
-                  <a:lnTo>
-                    <a:pt x="6159537" y="1045277"/>
-                  </a:lnTo>
-                  <a:lnTo>
-                    <a:pt x="6087914" y="1037274"/>
-                  </a:lnTo>
-                  <a:lnTo>
-                    <a:pt x="6016292" y="1029084"/>
-                  </a:lnTo>
-                  <a:lnTo>
-                    <a:pt x="5944669" y="1020703"/>
-                  </a:lnTo>
-                  <a:lnTo>
-                    <a:pt x="5873047" y="1012125"/>
-                  </a:lnTo>
-                  <a:lnTo>
-                    <a:pt x="5801424" y="1003346"/>
-                  </a:lnTo>
-                  <a:lnTo>
-                    <a:pt x="5729802" y="994363"/>
-                  </a:lnTo>
-                  <a:lnTo>
-                    <a:pt x="5658179" y="985168"/>
-                  </a:lnTo>
-                  <a:lnTo>
-                    <a:pt x="5586557" y="975759"/>
-                  </a:lnTo>
-                  <a:lnTo>
-                    <a:pt x="5514934" y="966130"/>
-                  </a:lnTo>
-                  <a:lnTo>
-                    <a:pt x="5443311" y="956275"/>
-                  </a:lnTo>
-                  <a:lnTo>
-                    <a:pt x="5371689" y="946190"/>
-                  </a:lnTo>
-                  <a:lnTo>
-                    <a:pt x="5300066" y="935868"/>
-                  </a:lnTo>
-                  <a:lnTo>
-                    <a:pt x="5228444" y="925305"/>
-                  </a:lnTo>
-                  <a:lnTo>
-                    <a:pt x="5156821" y="914495"/>
-                  </a:lnTo>
-                  <a:lnTo>
-                    <a:pt x="5085199" y="903432"/>
-                  </a:lnTo>
-                  <a:lnTo>
-                    <a:pt x="5013576" y="892110"/>
-                  </a:lnTo>
-                  <a:lnTo>
-                    <a:pt x="4941954" y="880523"/>
-                  </a:lnTo>
-                  <a:lnTo>
-                    <a:pt x="4870331" y="868665"/>
-                  </a:lnTo>
-                  <a:lnTo>
-                    <a:pt x="4798709" y="856529"/>
-                  </a:lnTo>
-                  <a:lnTo>
-                    <a:pt x="4727086" y="844110"/>
-                  </a:lnTo>
-                  <a:lnTo>
-                    <a:pt x="4655464" y="831400"/>
-                  </a:lnTo>
-                  <a:lnTo>
-                    <a:pt x="4583841" y="818392"/>
-                  </a:lnTo>
-                  <a:lnTo>
-                    <a:pt x="4512219" y="805080"/>
-                  </a:lnTo>
-                  <a:lnTo>
-                    <a:pt x="4440596" y="791457"/>
-                  </a:lnTo>
-                  <a:lnTo>
-                    <a:pt x="4368974" y="777514"/>
-                  </a:lnTo>
-                  <a:lnTo>
-                    <a:pt x="4297351" y="763246"/>
-                  </a:lnTo>
-                  <a:lnTo>
-                    <a:pt x="4225729" y="748643"/>
-                  </a:lnTo>
-                  <a:lnTo>
-                    <a:pt x="4154106" y="733699"/>
-                  </a:lnTo>
-                  <a:lnTo>
-                    <a:pt x="4082483" y="718405"/>
-                  </a:lnTo>
-                  <a:lnTo>
-                    <a:pt x="4010861" y="702753"/>
-                  </a:lnTo>
-                  <a:lnTo>
-                    <a:pt x="3939238" y="686735"/>
-                  </a:lnTo>
-                  <a:lnTo>
-                    <a:pt x="3867616" y="670342"/>
-                  </a:lnTo>
-                  <a:lnTo>
-                    <a:pt x="3795993" y="653566"/>
-                  </a:lnTo>
-                  <a:lnTo>
-                    <a:pt x="3724371" y="636397"/>
-                  </a:lnTo>
-                  <a:lnTo>
-                    <a:pt x="3652748" y="618826"/>
-                  </a:lnTo>
-                  <a:lnTo>
-                    <a:pt x="3581126" y="600844"/>
-                  </a:lnTo>
-                  <a:lnTo>
-                    <a:pt x="3509503" y="582441"/>
-                  </a:lnTo>
-                  <a:lnTo>
-                    <a:pt x="3437881" y="563608"/>
-                  </a:lnTo>
-                  <a:lnTo>
-                    <a:pt x="3366258" y="551546"/>
-                  </a:lnTo>
-                  <a:lnTo>
-                    <a:pt x="3294636" y="542486"/>
-                  </a:lnTo>
-                  <a:lnTo>
-                    <a:pt x="3223013" y="533327"/>
-                  </a:lnTo>
-                  <a:lnTo>
-                    <a:pt x="3151391" y="524070"/>
-                  </a:lnTo>
-                  <a:lnTo>
-                    <a:pt x="3079768" y="514711"/>
-                  </a:lnTo>
-                  <a:lnTo>
-                    <a:pt x="3008146" y="505252"/>
-                  </a:lnTo>
-                  <a:lnTo>
-                    <a:pt x="2936523" y="495690"/>
-                  </a:lnTo>
-                  <a:lnTo>
-                    <a:pt x="2864901" y="486024"/>
-                  </a:lnTo>
-                  <a:lnTo>
-                    <a:pt x="2793278" y="476253"/>
-                  </a:lnTo>
-                  <a:lnTo>
-                    <a:pt x="2721655" y="466377"/>
-                  </a:lnTo>
-                  <a:lnTo>
-                    <a:pt x="2650033" y="456393"/>
-                  </a:lnTo>
-                  <a:lnTo>
-                    <a:pt x="2578410" y="446301"/>
-                  </a:lnTo>
-                  <a:lnTo>
-                    <a:pt x="2506788" y="436100"/>
-                  </a:lnTo>
-                  <a:lnTo>
-                    <a:pt x="2435165" y="425788"/>
-                  </a:lnTo>
-                  <a:lnTo>
-                    <a:pt x="2363543" y="415365"/>
-                  </a:lnTo>
-                  <a:lnTo>
-                    <a:pt x="2291920" y="404828"/>
-                  </a:lnTo>
-                  <a:lnTo>
-                    <a:pt x="2220298" y="394177"/>
-                  </a:lnTo>
-                  <a:lnTo>
-                    <a:pt x="2148675" y="383411"/>
-                  </a:lnTo>
-                  <a:lnTo>
-                    <a:pt x="2077053" y="372528"/>
-                  </a:lnTo>
-                  <a:lnTo>
-                    <a:pt x="2005430" y="361527"/>
-                  </a:lnTo>
-                  <a:lnTo>
-                    <a:pt x="1933808" y="350407"/>
-                  </a:lnTo>
-                  <a:lnTo>
-                    <a:pt x="1862185" y="339166"/>
-                  </a:lnTo>
-                  <a:lnTo>
-                    <a:pt x="1790563" y="327803"/>
-                  </a:lnTo>
-                  <a:lnTo>
-                    <a:pt x="1718940" y="316317"/>
-                  </a:lnTo>
-                  <a:lnTo>
-                    <a:pt x="1647318" y="304707"/>
-                  </a:lnTo>
-                  <a:lnTo>
-                    <a:pt x="1575695" y="292970"/>
-                  </a:lnTo>
-                  <a:lnTo>
-                    <a:pt x="1504073" y="281107"/>
-                  </a:lnTo>
-                  <a:lnTo>
-                    <a:pt x="1432450" y="269115"/>
-                  </a:lnTo>
-                  <a:lnTo>
-                    <a:pt x="1360827" y="256992"/>
-                  </a:lnTo>
-                  <a:lnTo>
-                    <a:pt x="1289205" y="244739"/>
-                  </a:lnTo>
-                  <a:lnTo>
-                    <a:pt x="1217582" y="232352"/>
-                  </a:lnTo>
-                  <a:lnTo>
-                    <a:pt x="1145960" y="219832"/>
-                  </a:lnTo>
-                  <a:lnTo>
-                    <a:pt x="1074337" y="207175"/>
-                  </a:lnTo>
-                  <a:lnTo>
-                    <a:pt x="1002715" y="194382"/>
-                  </a:lnTo>
-                  <a:lnTo>
-                    <a:pt x="931092" y="181449"/>
-                  </a:lnTo>
-                  <a:lnTo>
-                    <a:pt x="859470" y="168377"/>
-                  </a:lnTo>
-                  <a:lnTo>
-                    <a:pt x="787847" y="155162"/>
-                  </a:lnTo>
-                  <a:lnTo>
-                    <a:pt x="716225" y="141805"/>
-                  </a:lnTo>
-                  <a:lnTo>
-                    <a:pt x="644602" y="128302"/>
-                  </a:lnTo>
-                  <a:lnTo>
-                    <a:pt x="572980" y="114654"/>
-                  </a:lnTo>
-                  <a:lnTo>
-                    <a:pt x="501357" y="100857"/>
-                  </a:lnTo>
-                  <a:lnTo>
-                    <a:pt x="429735" y="86911"/>
-                  </a:lnTo>
-                  <a:lnTo>
-                    <a:pt x="358112" y="72813"/>
-                  </a:lnTo>
-                  <a:lnTo>
-                    <a:pt x="286490" y="58563"/>
-                  </a:lnTo>
-                  <a:lnTo>
-                    <a:pt x="214867" y="44158"/>
-                  </a:lnTo>
-                  <a:lnTo>
-                    <a:pt x="143245" y="29597"/>
-                  </a:lnTo>
-                  <a:lnTo>
-                    <a:pt x="71622" y="14878"/>
-                  </a:lnTo>
-                  <a:lnTo>
-                    <a:pt x="0" y="0"/>
+                    <a:pt x="70344" y="20629"/>
+                  </a:lnTo>
+                  <a:lnTo>
+                    <a:pt x="140688" y="40787"/>
+                  </a:lnTo>
+                  <a:lnTo>
+                    <a:pt x="211033" y="60484"/>
+                  </a:lnTo>
+                  <a:lnTo>
+                    <a:pt x="281377" y="79730"/>
+                  </a:lnTo>
+                  <a:lnTo>
+                    <a:pt x="351722" y="98537"/>
+                  </a:lnTo>
+                  <a:lnTo>
+                    <a:pt x="422066" y="116913"/>
+                  </a:lnTo>
+                  <a:lnTo>
+                    <a:pt x="492411" y="134869"/>
+                  </a:lnTo>
+                  <a:lnTo>
+                    <a:pt x="562755" y="152415"/>
+                  </a:lnTo>
+                  <a:lnTo>
+                    <a:pt x="633100" y="169559"/>
+                  </a:lnTo>
+                  <a:lnTo>
+                    <a:pt x="703444" y="186311"/>
+                  </a:lnTo>
+                  <a:lnTo>
+                    <a:pt x="773789" y="202681"/>
+                  </a:lnTo>
+                  <a:lnTo>
+                    <a:pt x="844133" y="218676"/>
+                  </a:lnTo>
+                  <a:lnTo>
+                    <a:pt x="914478" y="234305"/>
+                  </a:lnTo>
+                  <a:lnTo>
+                    <a:pt x="984822" y="249577"/>
+                  </a:lnTo>
+                  <a:lnTo>
+                    <a:pt x="1055167" y="264500"/>
+                  </a:lnTo>
+                  <a:lnTo>
+                    <a:pt x="1125511" y="279081"/>
+                  </a:lnTo>
+                  <a:lnTo>
+                    <a:pt x="1195856" y="293329"/>
+                  </a:lnTo>
+                  <a:lnTo>
+                    <a:pt x="1266200" y="307251"/>
+                  </a:lnTo>
+                  <a:lnTo>
+                    <a:pt x="1336545" y="320855"/>
+                  </a:lnTo>
+                  <a:lnTo>
+                    <a:pt x="1406889" y="334148"/>
+                  </a:lnTo>
+                  <a:lnTo>
+                    <a:pt x="1477234" y="347137"/>
+                  </a:lnTo>
+                  <a:lnTo>
+                    <a:pt x="1547578" y="359829"/>
+                  </a:lnTo>
+                  <a:lnTo>
+                    <a:pt x="1617923" y="372231"/>
+                  </a:lnTo>
+                  <a:lnTo>
+                    <a:pt x="1688267" y="384349"/>
+                  </a:lnTo>
+                  <a:lnTo>
+                    <a:pt x="1758612" y="396190"/>
+                  </a:lnTo>
+                  <a:lnTo>
+                    <a:pt x="1828956" y="407760"/>
+                  </a:lnTo>
+                  <a:lnTo>
+                    <a:pt x="1899301" y="419066"/>
+                  </a:lnTo>
+                  <a:lnTo>
+                    <a:pt x="1969645" y="430113"/>
+                  </a:lnTo>
+                  <a:lnTo>
+                    <a:pt x="2039990" y="440908"/>
+                  </a:lnTo>
+                  <a:lnTo>
+                    <a:pt x="2110334" y="451455"/>
+                  </a:lnTo>
+                  <a:lnTo>
+                    <a:pt x="2180679" y="461762"/>
+                  </a:lnTo>
+                  <a:lnTo>
+                    <a:pt x="2251023" y="471833"/>
+                  </a:lnTo>
+                  <a:lnTo>
+                    <a:pt x="2321368" y="481673"/>
+                  </a:lnTo>
+                  <a:lnTo>
+                    <a:pt x="2391712" y="491289"/>
+                  </a:lnTo>
+                  <a:lnTo>
+                    <a:pt x="2462057" y="500685"/>
+                  </a:lnTo>
+                  <a:lnTo>
+                    <a:pt x="2532401" y="509866"/>
+                  </a:lnTo>
+                  <a:lnTo>
+                    <a:pt x="2602746" y="518837"/>
+                  </a:lnTo>
+                  <a:lnTo>
+                    <a:pt x="2673090" y="527602"/>
+                  </a:lnTo>
+                  <a:lnTo>
+                    <a:pt x="2743435" y="536168"/>
+                  </a:lnTo>
+                  <a:lnTo>
+                    <a:pt x="2813779" y="544537"/>
+                  </a:lnTo>
+                  <a:lnTo>
+                    <a:pt x="2884124" y="552716"/>
+                  </a:lnTo>
+                  <a:lnTo>
+                    <a:pt x="2954468" y="560707"/>
+                  </a:lnTo>
+                  <a:lnTo>
+                    <a:pt x="3024813" y="568515"/>
+                  </a:lnTo>
+                  <a:lnTo>
+                    <a:pt x="3095157" y="576145"/>
+                  </a:lnTo>
+                  <a:lnTo>
+                    <a:pt x="3165502" y="583600"/>
+                  </a:lnTo>
+                  <a:lnTo>
+                    <a:pt x="3235846" y="590885"/>
+                  </a:lnTo>
+                  <a:lnTo>
+                    <a:pt x="3306191" y="598004"/>
+                  </a:lnTo>
+                  <a:lnTo>
+                    <a:pt x="3376535" y="603841"/>
+                  </a:lnTo>
+                  <a:lnTo>
+                    <a:pt x="3446880" y="607041"/>
+                  </a:lnTo>
+                  <a:lnTo>
+                    <a:pt x="3517224" y="610207"/>
+                  </a:lnTo>
+                  <a:lnTo>
+                    <a:pt x="3587569" y="613338"/>
+                  </a:lnTo>
+                  <a:lnTo>
+                    <a:pt x="3657913" y="616436"/>
+                  </a:lnTo>
+                  <a:lnTo>
+                    <a:pt x="3728257" y="619501"/>
+                  </a:lnTo>
+                  <a:lnTo>
+                    <a:pt x="3798602" y="622533"/>
+                  </a:lnTo>
+                  <a:lnTo>
+                    <a:pt x="3868946" y="625532"/>
+                  </a:lnTo>
+                  <a:lnTo>
+                    <a:pt x="3939291" y="628500"/>
+                  </a:lnTo>
+                  <a:lnTo>
+                    <a:pt x="4009635" y="631435"/>
+                  </a:lnTo>
+                  <a:lnTo>
+                    <a:pt x="4079980" y="634339"/>
+                  </a:lnTo>
+                  <a:lnTo>
+                    <a:pt x="4150324" y="637212"/>
+                  </a:lnTo>
+                  <a:lnTo>
+                    <a:pt x="4220669" y="640054"/>
+                  </a:lnTo>
+                  <a:lnTo>
+                    <a:pt x="4291013" y="642865"/>
+                  </a:lnTo>
+                  <a:lnTo>
+                    <a:pt x="4361358" y="645646"/>
+                  </a:lnTo>
+                  <a:lnTo>
+                    <a:pt x="4431702" y="648398"/>
+                  </a:lnTo>
+                  <a:lnTo>
+                    <a:pt x="4502047" y="651120"/>
+                  </a:lnTo>
+                  <a:lnTo>
+                    <a:pt x="4572391" y="653813"/>
+                  </a:lnTo>
+                  <a:lnTo>
+                    <a:pt x="4642736" y="656477"/>
+                  </a:lnTo>
+                  <a:lnTo>
+                    <a:pt x="4713080" y="659112"/>
+                  </a:lnTo>
+                  <a:lnTo>
+                    <a:pt x="4783425" y="661719"/>
+                  </a:lnTo>
+                  <a:lnTo>
+                    <a:pt x="4853769" y="664298"/>
+                  </a:lnTo>
+                  <a:lnTo>
+                    <a:pt x="4924114" y="666850"/>
+                  </a:lnTo>
+                  <a:lnTo>
+                    <a:pt x="4994458" y="669374"/>
+                  </a:lnTo>
+                  <a:lnTo>
+                    <a:pt x="5064803" y="671871"/>
+                  </a:lnTo>
+                  <a:lnTo>
+                    <a:pt x="5135147" y="674341"/>
+                  </a:lnTo>
+                  <a:lnTo>
+                    <a:pt x="5205492" y="676785"/>
+                  </a:lnTo>
+                  <a:lnTo>
+                    <a:pt x="5275836" y="679202"/>
+                  </a:lnTo>
+                  <a:lnTo>
+                    <a:pt x="5346181" y="681594"/>
+                  </a:lnTo>
+                  <a:lnTo>
+                    <a:pt x="5416525" y="683960"/>
+                  </a:lnTo>
+                  <a:lnTo>
+                    <a:pt x="5486870" y="686301"/>
+                  </a:lnTo>
+                  <a:lnTo>
+                    <a:pt x="5557214" y="688616"/>
+                  </a:lnTo>
+                  <a:lnTo>
+                    <a:pt x="5627559" y="690907"/>
+                  </a:lnTo>
+                  <a:lnTo>
+                    <a:pt x="5697903" y="693173"/>
+                  </a:lnTo>
+                  <a:lnTo>
+                    <a:pt x="5768248" y="695415"/>
+                  </a:lnTo>
+                  <a:lnTo>
+                    <a:pt x="5838592" y="697632"/>
+                  </a:lnTo>
+                  <a:lnTo>
+                    <a:pt x="5908937" y="699826"/>
+                  </a:lnTo>
+                  <a:lnTo>
+                    <a:pt x="5979281" y="701997"/>
+                  </a:lnTo>
+                  <a:lnTo>
+                    <a:pt x="6049626" y="704144"/>
+                  </a:lnTo>
+                  <a:lnTo>
+                    <a:pt x="6119970" y="706268"/>
+                  </a:lnTo>
+                  <a:lnTo>
+                    <a:pt x="6190315" y="708369"/>
+                  </a:lnTo>
+                  <a:lnTo>
+                    <a:pt x="6260659" y="710448"/>
+                  </a:lnTo>
+                  <a:lnTo>
+                    <a:pt x="6331004" y="712505"/>
+                  </a:lnTo>
+                  <a:lnTo>
+                    <a:pt x="6401348" y="714539"/>
+                  </a:lnTo>
+                  <a:lnTo>
+                    <a:pt x="6471693" y="716552"/>
+                  </a:lnTo>
+                  <a:lnTo>
+                    <a:pt x="6542037" y="718543"/>
+                  </a:lnTo>
+                  <a:lnTo>
+                    <a:pt x="6612382" y="720512"/>
+                  </a:lnTo>
+                  <a:lnTo>
+                    <a:pt x="6682726" y="722461"/>
+                  </a:lnTo>
+                  <a:lnTo>
+                    <a:pt x="6753071" y="724389"/>
+                  </a:lnTo>
+                  <a:lnTo>
+                    <a:pt x="6823415" y="726296"/>
+                  </a:lnTo>
+                  <a:lnTo>
+                    <a:pt x="6893760" y="728182"/>
+                  </a:lnTo>
+                  <a:lnTo>
+                    <a:pt x="6964104" y="730048"/>
                   </a:lnTo>
                 </a:path>
               </a:pathLst>
@@ -4240,312 +3950,637 @@
           </p:nvSpPr>
           <p:spPr>
             <a:xfrm>
-              <a:off x="1172049" y="3694949"/>
-              <a:ext cx="7090630" cy="1514785"/>
+              <a:off x="1235312" y="2899665"/>
+              <a:ext cx="6964104" cy="409267"/>
             </a:xfrm>
             <a:custGeom>
               <a:avLst/>
               <a:pathLst>
-                <a:path w="7090630" h="1514785">
+                <a:path w="6964104" h="409267">
+                  <a:moveTo>
+                    <a:pt x="6964104" y="409267"/>
+                  </a:moveTo>
+                  <a:lnTo>
+                    <a:pt x="6893760" y="407129"/>
+                  </a:lnTo>
+                  <a:lnTo>
+                    <a:pt x="6823415" y="404941"/>
+                  </a:lnTo>
+                  <a:lnTo>
+                    <a:pt x="6753071" y="402701"/>
+                  </a:lnTo>
+                  <a:lnTo>
+                    <a:pt x="6682726" y="400410"/>
+                  </a:lnTo>
+                  <a:lnTo>
+                    <a:pt x="6612382" y="398065"/>
+                  </a:lnTo>
+                  <a:lnTo>
+                    <a:pt x="6542037" y="395665"/>
+                  </a:lnTo>
+                  <a:lnTo>
+                    <a:pt x="6471693" y="393208"/>
+                  </a:lnTo>
+                  <a:lnTo>
+                    <a:pt x="6401348" y="390695"/>
+                  </a:lnTo>
+                  <a:lnTo>
+                    <a:pt x="6331004" y="388122"/>
+                  </a:lnTo>
+                  <a:lnTo>
+                    <a:pt x="6260659" y="385489"/>
+                  </a:lnTo>
+                  <a:lnTo>
+                    <a:pt x="6190315" y="382795"/>
+                  </a:lnTo>
+                  <a:lnTo>
+                    <a:pt x="6119970" y="380037"/>
+                  </a:lnTo>
+                  <a:lnTo>
+                    <a:pt x="6049626" y="377216"/>
+                  </a:lnTo>
+                  <a:lnTo>
+                    <a:pt x="5979281" y="374328"/>
+                  </a:lnTo>
+                  <a:lnTo>
+                    <a:pt x="5908937" y="371372"/>
+                  </a:lnTo>
+                  <a:lnTo>
+                    <a:pt x="5838592" y="368347"/>
+                  </a:lnTo>
+                  <a:lnTo>
+                    <a:pt x="5768248" y="365252"/>
+                  </a:lnTo>
+                  <a:lnTo>
+                    <a:pt x="5697903" y="362084"/>
+                  </a:lnTo>
+                  <a:lnTo>
+                    <a:pt x="5627559" y="358842"/>
+                  </a:lnTo>
+                  <a:lnTo>
+                    <a:pt x="5557214" y="355524"/>
+                  </a:lnTo>
+                  <a:lnTo>
+                    <a:pt x="5486870" y="352128"/>
+                  </a:lnTo>
+                  <a:lnTo>
+                    <a:pt x="5416525" y="348653"/>
+                  </a:lnTo>
+                  <a:lnTo>
+                    <a:pt x="5346181" y="345097"/>
+                  </a:lnTo>
+                  <a:lnTo>
+                    <a:pt x="5275836" y="341457"/>
+                  </a:lnTo>
+                  <a:lnTo>
+                    <a:pt x="5205492" y="337732"/>
+                  </a:lnTo>
+                  <a:lnTo>
+                    <a:pt x="5135147" y="333921"/>
+                  </a:lnTo>
+                  <a:lnTo>
+                    <a:pt x="5064803" y="330019"/>
+                  </a:lnTo>
+                  <a:lnTo>
+                    <a:pt x="4994458" y="326027"/>
+                  </a:lnTo>
+                  <a:lnTo>
+                    <a:pt x="4924114" y="321941"/>
+                  </a:lnTo>
+                  <a:lnTo>
+                    <a:pt x="4853769" y="317760"/>
+                  </a:lnTo>
+                  <a:lnTo>
+                    <a:pt x="4783425" y="313480"/>
+                  </a:lnTo>
+                  <a:lnTo>
+                    <a:pt x="4713080" y="309101"/>
+                  </a:lnTo>
+                  <a:lnTo>
+                    <a:pt x="4642736" y="304619"/>
+                  </a:lnTo>
+                  <a:lnTo>
+                    <a:pt x="4572391" y="300032"/>
+                  </a:lnTo>
+                  <a:lnTo>
+                    <a:pt x="4502047" y="295338"/>
+                  </a:lnTo>
+                  <a:lnTo>
+                    <a:pt x="4431702" y="290534"/>
+                  </a:lnTo>
+                  <a:lnTo>
+                    <a:pt x="4361358" y="285618"/>
+                  </a:lnTo>
+                  <a:lnTo>
+                    <a:pt x="4291013" y="280586"/>
+                  </a:lnTo>
+                  <a:lnTo>
+                    <a:pt x="4220669" y="275437"/>
+                  </a:lnTo>
+                  <a:lnTo>
+                    <a:pt x="4150324" y="270167"/>
+                  </a:lnTo>
+                  <a:lnTo>
+                    <a:pt x="4079980" y="264774"/>
+                  </a:lnTo>
+                  <a:lnTo>
+                    <a:pt x="4009635" y="259255"/>
+                  </a:lnTo>
+                  <a:lnTo>
+                    <a:pt x="3939291" y="253607"/>
+                  </a:lnTo>
+                  <a:lnTo>
+                    <a:pt x="3868946" y="247826"/>
+                  </a:lnTo>
+                  <a:lnTo>
+                    <a:pt x="3798602" y="241910"/>
+                  </a:lnTo>
+                  <a:lnTo>
+                    <a:pt x="3728257" y="235856"/>
+                  </a:lnTo>
+                  <a:lnTo>
+                    <a:pt x="3657913" y="229660"/>
+                  </a:lnTo>
+                  <a:lnTo>
+                    <a:pt x="3587569" y="223319"/>
+                  </a:lnTo>
+                  <a:lnTo>
+                    <a:pt x="3517224" y="216830"/>
+                  </a:lnTo>
+                  <a:lnTo>
+                    <a:pt x="3446880" y="210189"/>
+                  </a:lnTo>
+                  <a:lnTo>
+                    <a:pt x="3376535" y="203392"/>
+                  </a:lnTo>
+                  <a:lnTo>
+                    <a:pt x="3306191" y="199040"/>
+                  </a:lnTo>
+                  <a:lnTo>
+                    <a:pt x="3235846" y="195770"/>
+                  </a:lnTo>
+                  <a:lnTo>
+                    <a:pt x="3165502" y="192465"/>
+                  </a:lnTo>
+                  <a:lnTo>
+                    <a:pt x="3095157" y="189124"/>
+                  </a:lnTo>
+                  <a:lnTo>
+                    <a:pt x="3024813" y="185747"/>
+                  </a:lnTo>
+                  <a:lnTo>
+                    <a:pt x="2954468" y="182333"/>
+                  </a:lnTo>
+                  <a:lnTo>
+                    <a:pt x="2884124" y="178882"/>
+                  </a:lnTo>
+                  <a:lnTo>
+                    <a:pt x="2813779" y="175394"/>
+                  </a:lnTo>
+                  <a:lnTo>
+                    <a:pt x="2743435" y="171868"/>
+                  </a:lnTo>
+                  <a:lnTo>
+                    <a:pt x="2673090" y="168304"/>
+                  </a:lnTo>
+                  <a:lnTo>
+                    <a:pt x="2602746" y="164701"/>
+                  </a:lnTo>
+                  <a:lnTo>
+                    <a:pt x="2532401" y="161059"/>
+                  </a:lnTo>
+                  <a:lnTo>
+                    <a:pt x="2462057" y="157378"/>
+                  </a:lnTo>
+                  <a:lnTo>
+                    <a:pt x="2391712" y="153657"/>
+                  </a:lnTo>
+                  <a:lnTo>
+                    <a:pt x="2321368" y="149895"/>
+                  </a:lnTo>
+                  <a:lnTo>
+                    <a:pt x="2251023" y="146093"/>
+                  </a:lnTo>
+                  <a:lnTo>
+                    <a:pt x="2180679" y="142249"/>
+                  </a:lnTo>
+                  <a:lnTo>
+                    <a:pt x="2110334" y="138364"/>
+                  </a:lnTo>
+                  <a:lnTo>
+                    <a:pt x="2039990" y="134436"/>
+                  </a:lnTo>
+                  <a:lnTo>
+                    <a:pt x="1969645" y="130466"/>
+                  </a:lnTo>
+                  <a:lnTo>
+                    <a:pt x="1899301" y="126453"/>
+                  </a:lnTo>
+                  <a:lnTo>
+                    <a:pt x="1828956" y="122397"/>
+                  </a:lnTo>
+                  <a:lnTo>
+                    <a:pt x="1758612" y="118296"/>
+                  </a:lnTo>
+                  <a:lnTo>
+                    <a:pt x="1688267" y="114151"/>
+                  </a:lnTo>
+                  <a:lnTo>
+                    <a:pt x="1617923" y="109961"/>
+                  </a:lnTo>
+                  <a:lnTo>
+                    <a:pt x="1547578" y="105726"/>
+                  </a:lnTo>
+                  <a:lnTo>
+                    <a:pt x="1477234" y="101445"/>
+                  </a:lnTo>
+                  <a:lnTo>
+                    <a:pt x="1406889" y="97117"/>
+                  </a:lnTo>
+                  <a:lnTo>
+                    <a:pt x="1336545" y="92742"/>
+                  </a:lnTo>
+                  <a:lnTo>
+                    <a:pt x="1266200" y="88320"/>
+                  </a:lnTo>
+                  <a:lnTo>
+                    <a:pt x="1195856" y="83850"/>
+                  </a:lnTo>
+                  <a:lnTo>
+                    <a:pt x="1125511" y="79332"/>
+                  </a:lnTo>
+                  <a:lnTo>
+                    <a:pt x="1055167" y="74764"/>
+                  </a:lnTo>
+                  <a:lnTo>
+                    <a:pt x="984822" y="70147"/>
+                  </a:lnTo>
+                  <a:lnTo>
+                    <a:pt x="914478" y="65480"/>
+                  </a:lnTo>
+                  <a:lnTo>
+                    <a:pt x="844133" y="60763"/>
+                  </a:lnTo>
+                  <a:lnTo>
+                    <a:pt x="773789" y="55994"/>
+                  </a:lnTo>
+                  <a:lnTo>
+                    <a:pt x="703444" y="51174"/>
+                  </a:lnTo>
+                  <a:lnTo>
+                    <a:pt x="633100" y="46301"/>
+                  </a:lnTo>
+                  <a:lnTo>
+                    <a:pt x="562755" y="41375"/>
+                  </a:lnTo>
+                  <a:lnTo>
+                    <a:pt x="492411" y="36397"/>
+                  </a:lnTo>
+                  <a:lnTo>
+                    <a:pt x="422066" y="31364"/>
+                  </a:lnTo>
+                  <a:lnTo>
+                    <a:pt x="351722" y="26276"/>
+                  </a:lnTo>
+                  <a:lnTo>
+                    <a:pt x="281377" y="21134"/>
+                  </a:lnTo>
+                  <a:lnTo>
+                    <a:pt x="211033" y="15935"/>
+                  </a:lnTo>
+                  <a:lnTo>
+                    <a:pt x="140688" y="10680"/>
+                  </a:lnTo>
+                  <a:lnTo>
+                    <a:pt x="70344" y="5369"/>
+                  </a:lnTo>
+                  <a:lnTo>
+                    <a:pt x="0" y="0"/>
+                  </a:lnTo>
+                </a:path>
+              </a:pathLst>
+            </a:custGeom>
+          </p:spPr>
+          <p:txBody>
+            <a:bodyPr/>
+            <a:lstStyle/>
+            <a:p/>
+          </p:txBody>
+        </p:sp>
+        <p:sp>
+          <p:nvSpPr>
+            <p:cNvPr id="24" name="pl24"/>
+            <p:cNvSpPr/>
+            <p:nvPr/>
+          </p:nvSpPr>
+          <p:spPr>
+            <a:xfrm>
+              <a:off x="1235312" y="2728234"/>
+              <a:ext cx="6964104" cy="546650"/>
+            </a:xfrm>
+            <a:custGeom>
+              <a:avLst/>
+              <a:pathLst>
+                <a:path w="6964104" h="546650">
                   <a:moveTo>
                     <a:pt x="0" y="0"/>
                   </a:moveTo>
                   <a:lnTo>
-                    <a:pt x="71622" y="31313"/>
-                  </a:lnTo>
-                  <a:lnTo>
-                    <a:pt x="143245" y="62099"/>
-                  </a:lnTo>
-                  <a:lnTo>
-                    <a:pt x="214867" y="92368"/>
-                  </a:lnTo>
-                  <a:lnTo>
-                    <a:pt x="286490" y="122128"/>
-                  </a:lnTo>
-                  <a:lnTo>
-                    <a:pt x="358112" y="151388"/>
-                  </a:lnTo>
-                  <a:lnTo>
-                    <a:pt x="429735" y="180155"/>
-                  </a:lnTo>
-                  <a:lnTo>
-                    <a:pt x="501357" y="208439"/>
-                  </a:lnTo>
-                  <a:lnTo>
-                    <a:pt x="572980" y="236248"/>
-                  </a:lnTo>
-                  <a:lnTo>
-                    <a:pt x="644602" y="263589"/>
-                  </a:lnTo>
-                  <a:lnTo>
-                    <a:pt x="716225" y="290470"/>
-                  </a:lnTo>
-                  <a:lnTo>
-                    <a:pt x="787847" y="316899"/>
-                  </a:lnTo>
-                  <a:lnTo>
-                    <a:pt x="859470" y="342883"/>
-                  </a:lnTo>
-                  <a:lnTo>
-                    <a:pt x="931092" y="368431"/>
-                  </a:lnTo>
-                  <a:lnTo>
-                    <a:pt x="1002715" y="393550"/>
-                  </a:lnTo>
-                  <a:lnTo>
-                    <a:pt x="1074337" y="418245"/>
-                  </a:lnTo>
-                  <a:lnTo>
-                    <a:pt x="1145960" y="442526"/>
-                  </a:lnTo>
-                  <a:lnTo>
-                    <a:pt x="1217582" y="466398"/>
-                  </a:lnTo>
-                  <a:lnTo>
-                    <a:pt x="1289205" y="489869"/>
-                  </a:lnTo>
-                  <a:lnTo>
-                    <a:pt x="1360827" y="512946"/>
-                  </a:lnTo>
-                  <a:lnTo>
-                    <a:pt x="1432450" y="535634"/>
-                  </a:lnTo>
-                  <a:lnTo>
-                    <a:pt x="1504073" y="557941"/>
-                  </a:lnTo>
-                  <a:lnTo>
-                    <a:pt x="1575695" y="579873"/>
-                  </a:lnTo>
-                  <a:lnTo>
-                    <a:pt x="1647318" y="601436"/>
-                  </a:lnTo>
-                  <a:lnTo>
-                    <a:pt x="1718940" y="622636"/>
-                  </a:lnTo>
-                  <a:lnTo>
-                    <a:pt x="1790563" y="643480"/>
-                  </a:lnTo>
-                  <a:lnTo>
-                    <a:pt x="1862185" y="663974"/>
-                  </a:lnTo>
-                  <a:lnTo>
-                    <a:pt x="1933808" y="684123"/>
-                  </a:lnTo>
-                  <a:lnTo>
-                    <a:pt x="2005430" y="703933"/>
-                  </a:lnTo>
-                  <a:lnTo>
-                    <a:pt x="2077053" y="723410"/>
-                  </a:lnTo>
-                  <a:lnTo>
-                    <a:pt x="2148675" y="742559"/>
-                  </a:lnTo>
-                  <a:lnTo>
-                    <a:pt x="2220298" y="761387"/>
-                  </a:lnTo>
-                  <a:lnTo>
-                    <a:pt x="2291920" y="779898"/>
-                  </a:lnTo>
-                  <a:lnTo>
-                    <a:pt x="2363543" y="798098"/>
-                  </a:lnTo>
-                  <a:lnTo>
-                    <a:pt x="2435165" y="815991"/>
-                  </a:lnTo>
-                  <a:lnTo>
-                    <a:pt x="2506788" y="833584"/>
-                  </a:lnTo>
-                  <a:lnTo>
-                    <a:pt x="2578410" y="850881"/>
-                  </a:lnTo>
-                  <a:lnTo>
-                    <a:pt x="2650033" y="867887"/>
-                  </a:lnTo>
-                  <a:lnTo>
-                    <a:pt x="2721655" y="884608"/>
-                  </a:lnTo>
-                  <a:lnTo>
-                    <a:pt x="2793278" y="901047"/>
-                  </a:lnTo>
-                  <a:lnTo>
-                    <a:pt x="2864901" y="917210"/>
-                  </a:lnTo>
-                  <a:lnTo>
-                    <a:pt x="2936523" y="933100"/>
-                  </a:lnTo>
-                  <a:lnTo>
-                    <a:pt x="3008146" y="948724"/>
-                  </a:lnTo>
-                  <a:lnTo>
-                    <a:pt x="3079768" y="964085"/>
-                  </a:lnTo>
-                  <a:lnTo>
-                    <a:pt x="3151391" y="979188"/>
-                  </a:lnTo>
-                  <a:lnTo>
-                    <a:pt x="3223013" y="994037"/>
-                  </a:lnTo>
-                  <a:lnTo>
-                    <a:pt x="3294636" y="1008636"/>
-                  </a:lnTo>
-                  <a:lnTo>
-                    <a:pt x="3366258" y="1022990"/>
-                  </a:lnTo>
-                  <a:lnTo>
-                    <a:pt x="3437881" y="1037102"/>
-                  </a:lnTo>
-                  <a:lnTo>
-                    <a:pt x="3509503" y="1050977"/>
-                  </a:lnTo>
-                  <a:lnTo>
-                    <a:pt x="3581126" y="1064619"/>
-                  </a:lnTo>
-                  <a:lnTo>
-                    <a:pt x="3652748" y="1078031"/>
-                  </a:lnTo>
-                  <a:lnTo>
-                    <a:pt x="3724371" y="1091218"/>
-                  </a:lnTo>
-                  <a:lnTo>
-                    <a:pt x="3795993" y="1104183"/>
-                  </a:lnTo>
-                  <a:lnTo>
-                    <a:pt x="3867616" y="1116930"/>
-                  </a:lnTo>
-                  <a:lnTo>
-                    <a:pt x="3939238" y="1129463"/>
-                  </a:lnTo>
-                  <a:lnTo>
-                    <a:pt x="4010861" y="1141785"/>
-                  </a:lnTo>
-                  <a:lnTo>
-                    <a:pt x="4082483" y="1153900"/>
-                  </a:lnTo>
-                  <a:lnTo>
-                    <a:pt x="4154106" y="1165811"/>
-                  </a:lnTo>
-                  <a:lnTo>
-                    <a:pt x="4225729" y="1177522"/>
-                  </a:lnTo>
-                  <a:lnTo>
-                    <a:pt x="4297351" y="1189036"/>
-                  </a:lnTo>
-                  <a:lnTo>
-                    <a:pt x="4368974" y="1200357"/>
-                  </a:lnTo>
-                  <a:lnTo>
-                    <a:pt x="4440596" y="1211487"/>
-                  </a:lnTo>
-                  <a:lnTo>
-                    <a:pt x="4512219" y="1222430"/>
-                  </a:lnTo>
-                  <a:lnTo>
-                    <a:pt x="4583841" y="1233189"/>
-                  </a:lnTo>
-                  <a:lnTo>
-                    <a:pt x="4655464" y="1243767"/>
-                  </a:lnTo>
-                  <a:lnTo>
-                    <a:pt x="4727086" y="1254167"/>
-                  </a:lnTo>
-                  <a:lnTo>
-                    <a:pt x="4798709" y="1264392"/>
-                  </a:lnTo>
-                  <a:lnTo>
-                    <a:pt x="4870331" y="1274445"/>
-                  </a:lnTo>
-                  <a:lnTo>
-                    <a:pt x="4941954" y="1284330"/>
-                  </a:lnTo>
-                  <a:lnTo>
-                    <a:pt x="5013576" y="1294048"/>
-                  </a:lnTo>
-                  <a:lnTo>
-                    <a:pt x="5085199" y="1303602"/>
-                  </a:lnTo>
-                  <a:lnTo>
-                    <a:pt x="5156821" y="1312997"/>
-                  </a:lnTo>
-                  <a:lnTo>
-                    <a:pt x="5228444" y="1322233"/>
-                  </a:lnTo>
-                  <a:lnTo>
-                    <a:pt x="5300066" y="1331313"/>
-                  </a:lnTo>
-                  <a:lnTo>
-                    <a:pt x="5371689" y="1340242"/>
-                  </a:lnTo>
-                  <a:lnTo>
-                    <a:pt x="5443311" y="1349020"/>
-                  </a:lnTo>
-                  <a:lnTo>
-                    <a:pt x="5514934" y="1357650"/>
-                  </a:lnTo>
-                  <a:lnTo>
-                    <a:pt x="5586557" y="1366135"/>
-                  </a:lnTo>
-                  <a:lnTo>
-                    <a:pt x="5658179" y="1374478"/>
-                  </a:lnTo>
-                  <a:lnTo>
-                    <a:pt x="5729802" y="1382680"/>
-                  </a:lnTo>
-                  <a:lnTo>
-                    <a:pt x="5801424" y="1390745"/>
-                  </a:lnTo>
-                  <a:lnTo>
-                    <a:pt x="5873047" y="1398673"/>
-                  </a:lnTo>
-                  <a:lnTo>
-                    <a:pt x="5944669" y="1406469"/>
-                  </a:lnTo>
-                  <a:lnTo>
-                    <a:pt x="6016292" y="1414133"/>
-                  </a:lnTo>
-                  <a:lnTo>
-                    <a:pt x="6087914" y="1421669"/>
-                  </a:lnTo>
-                  <a:lnTo>
-                    <a:pt x="6159537" y="1429078"/>
-                  </a:lnTo>
-                  <a:lnTo>
-                    <a:pt x="6231159" y="1436362"/>
-                  </a:lnTo>
-                  <a:lnTo>
-                    <a:pt x="6302782" y="1443524"/>
-                  </a:lnTo>
-                  <a:lnTo>
-                    <a:pt x="6374404" y="1450565"/>
-                  </a:lnTo>
-                  <a:lnTo>
-                    <a:pt x="6446027" y="1457488"/>
-                  </a:lnTo>
-                  <a:lnTo>
-                    <a:pt x="6517649" y="1464295"/>
-                  </a:lnTo>
-                  <a:lnTo>
-                    <a:pt x="6589272" y="1470987"/>
-                  </a:lnTo>
-                  <a:lnTo>
-                    <a:pt x="6660894" y="1477567"/>
-                  </a:lnTo>
-                  <a:lnTo>
-                    <a:pt x="6732517" y="1484036"/>
-                  </a:lnTo>
-                  <a:lnTo>
-                    <a:pt x="6804139" y="1490396"/>
-                  </a:lnTo>
-                  <a:lnTo>
-                    <a:pt x="6875762" y="1496649"/>
-                  </a:lnTo>
-                  <a:lnTo>
-                    <a:pt x="6947385" y="1502797"/>
-                  </a:lnTo>
-                  <a:lnTo>
-                    <a:pt x="7019007" y="1508842"/>
-                  </a:lnTo>
-                  <a:lnTo>
-                    <a:pt x="7090630" y="1514785"/>
+                    <a:pt x="70344" y="11300"/>
+                  </a:lnTo>
+                  <a:lnTo>
+                    <a:pt x="140688" y="22410"/>
+                  </a:lnTo>
+                  <a:lnTo>
+                    <a:pt x="211033" y="33333"/>
+                  </a:lnTo>
+                  <a:lnTo>
+                    <a:pt x="281377" y="44073"/>
+                  </a:lnTo>
+                  <a:lnTo>
+                    <a:pt x="351722" y="54632"/>
+                  </a:lnTo>
+                  <a:lnTo>
+                    <a:pt x="422066" y="65014"/>
+                  </a:lnTo>
+                  <a:lnTo>
+                    <a:pt x="492411" y="75221"/>
+                  </a:lnTo>
+                  <a:lnTo>
+                    <a:pt x="562755" y="85256"/>
+                  </a:lnTo>
+                  <a:lnTo>
+                    <a:pt x="633100" y="95123"/>
+                  </a:lnTo>
+                  <a:lnTo>
+                    <a:pt x="703444" y="104823"/>
+                  </a:lnTo>
+                  <a:lnTo>
+                    <a:pt x="773789" y="114361"/>
+                  </a:lnTo>
+                  <a:lnTo>
+                    <a:pt x="844133" y="123738"/>
+                  </a:lnTo>
+                  <a:lnTo>
+                    <a:pt x="914478" y="132958"/>
+                  </a:lnTo>
+                  <a:lnTo>
+                    <a:pt x="984822" y="142022"/>
+                  </a:lnTo>
+                  <a:lnTo>
+                    <a:pt x="1055167" y="150935"/>
+                  </a:lnTo>
+                  <a:lnTo>
+                    <a:pt x="1125511" y="159697"/>
+                  </a:lnTo>
+                  <a:lnTo>
+                    <a:pt x="1195856" y="168312"/>
+                  </a:lnTo>
+                  <a:lnTo>
+                    <a:pt x="1266200" y="176782"/>
+                  </a:lnTo>
+                  <a:lnTo>
+                    <a:pt x="1336545" y="185110"/>
+                  </a:lnTo>
+                  <a:lnTo>
+                    <a:pt x="1406889" y="193297"/>
+                  </a:lnTo>
+                  <a:lnTo>
+                    <a:pt x="1477234" y="201347"/>
+                  </a:lnTo>
+                  <a:lnTo>
+                    <a:pt x="1547578" y="209262"/>
+                  </a:lnTo>
+                  <a:lnTo>
+                    <a:pt x="1617923" y="217044"/>
+                  </a:lnTo>
+                  <a:lnTo>
+                    <a:pt x="1688267" y="224694"/>
+                  </a:lnTo>
+                  <a:lnTo>
+                    <a:pt x="1758612" y="232217"/>
+                  </a:lnTo>
+                  <a:lnTo>
+                    <a:pt x="1828956" y="239612"/>
+                  </a:lnTo>
+                  <a:lnTo>
+                    <a:pt x="1899301" y="246883"/>
+                  </a:lnTo>
+                  <a:lnTo>
+                    <a:pt x="1969645" y="254032"/>
+                  </a:lnTo>
+                  <a:lnTo>
+                    <a:pt x="2039990" y="261061"/>
+                  </a:lnTo>
+                  <a:lnTo>
+                    <a:pt x="2110334" y="267972"/>
+                  </a:lnTo>
+                  <a:lnTo>
+                    <a:pt x="2180679" y="274766"/>
+                  </a:lnTo>
+                  <a:lnTo>
+                    <a:pt x="2251023" y="281446"/>
+                  </a:lnTo>
+                  <a:lnTo>
+                    <a:pt x="2321368" y="288014"/>
+                  </a:lnTo>
+                  <a:lnTo>
+                    <a:pt x="2391712" y="294472"/>
+                  </a:lnTo>
+                  <a:lnTo>
+                    <a:pt x="2462057" y="300821"/>
+                  </a:lnTo>
+                  <a:lnTo>
+                    <a:pt x="2532401" y="307063"/>
+                  </a:lnTo>
+                  <a:lnTo>
+                    <a:pt x="2602746" y="313200"/>
+                  </a:lnTo>
+                  <a:lnTo>
+                    <a:pt x="2673090" y="319234"/>
+                  </a:lnTo>
+                  <a:lnTo>
+                    <a:pt x="2743435" y="325166"/>
+                  </a:lnTo>
+                  <a:lnTo>
+                    <a:pt x="2813779" y="330999"/>
+                  </a:lnTo>
+                  <a:lnTo>
+                    <a:pt x="2884124" y="336734"/>
+                  </a:lnTo>
+                  <a:lnTo>
+                    <a:pt x="2954468" y="342372"/>
+                  </a:lnTo>
+                  <a:lnTo>
+                    <a:pt x="3024813" y="347915"/>
+                  </a:lnTo>
+                  <a:lnTo>
+                    <a:pt x="3095157" y="353366"/>
+                  </a:lnTo>
+                  <a:lnTo>
+                    <a:pt x="3165502" y="358724"/>
+                  </a:lnTo>
+                  <a:lnTo>
+                    <a:pt x="3235846" y="363993"/>
+                  </a:lnTo>
+                  <a:lnTo>
+                    <a:pt x="3306191" y="369173"/>
+                  </a:lnTo>
+                  <a:lnTo>
+                    <a:pt x="3376535" y="374265"/>
+                  </a:lnTo>
+                  <a:lnTo>
+                    <a:pt x="3446880" y="379273"/>
+                  </a:lnTo>
+                  <a:lnTo>
+                    <a:pt x="3517224" y="384196"/>
+                  </a:lnTo>
+                  <a:lnTo>
+                    <a:pt x="3587569" y="389036"/>
+                  </a:lnTo>
+                  <a:lnTo>
+                    <a:pt x="3657913" y="393795"/>
+                  </a:lnTo>
+                  <a:lnTo>
+                    <a:pt x="3728257" y="398473"/>
+                  </a:lnTo>
+                  <a:lnTo>
+                    <a:pt x="3798602" y="403074"/>
+                  </a:lnTo>
+                  <a:lnTo>
+                    <a:pt x="3868946" y="407596"/>
+                  </a:lnTo>
+                  <a:lnTo>
+                    <a:pt x="3939291" y="412043"/>
+                  </a:lnTo>
+                  <a:lnTo>
+                    <a:pt x="4009635" y="416415"/>
+                  </a:lnTo>
+                  <a:lnTo>
+                    <a:pt x="4079980" y="420714"/>
+                  </a:lnTo>
+                  <a:lnTo>
+                    <a:pt x="4150324" y="424940"/>
+                  </a:lnTo>
+                  <a:lnTo>
+                    <a:pt x="4220669" y="429095"/>
+                  </a:lnTo>
+                  <a:lnTo>
+                    <a:pt x="4291013" y="433180"/>
+                  </a:lnTo>
+                  <a:lnTo>
+                    <a:pt x="4361358" y="437197"/>
+                  </a:lnTo>
+                  <a:lnTo>
+                    <a:pt x="4431702" y="441146"/>
+                  </a:lnTo>
+                  <a:lnTo>
+                    <a:pt x="4502047" y="445028"/>
+                  </a:lnTo>
+                  <a:lnTo>
+                    <a:pt x="4572391" y="448846"/>
+                  </a:lnTo>
+                  <a:lnTo>
+                    <a:pt x="4642736" y="452599"/>
+                  </a:lnTo>
+                  <a:lnTo>
+                    <a:pt x="4713080" y="456289"/>
+                  </a:lnTo>
+                  <a:lnTo>
+                    <a:pt x="4783425" y="459917"/>
+                  </a:lnTo>
+                  <a:lnTo>
+                    <a:pt x="4853769" y="463484"/>
+                  </a:lnTo>
+                  <a:lnTo>
+                    <a:pt x="4924114" y="466991"/>
+                  </a:lnTo>
+                  <a:lnTo>
+                    <a:pt x="4994458" y="470439"/>
+                  </a:lnTo>
+                  <a:lnTo>
+                    <a:pt x="5064803" y="473829"/>
+                  </a:lnTo>
+                  <a:lnTo>
+                    <a:pt x="5135147" y="477162"/>
+                  </a:lnTo>
+                  <a:lnTo>
+                    <a:pt x="5205492" y="480439"/>
+                  </a:lnTo>
+                  <a:lnTo>
+                    <a:pt x="5275836" y="483661"/>
+                  </a:lnTo>
+                  <a:lnTo>
+                    <a:pt x="5346181" y="486829"/>
+                  </a:lnTo>
+                  <a:lnTo>
+                    <a:pt x="5416525" y="489944"/>
+                  </a:lnTo>
+                  <a:lnTo>
+                    <a:pt x="5486870" y="493006"/>
+                  </a:lnTo>
+                  <a:lnTo>
+                    <a:pt x="5557214" y="496016"/>
+                  </a:lnTo>
+                  <a:lnTo>
+                    <a:pt x="5627559" y="498976"/>
+                  </a:lnTo>
+                  <a:lnTo>
+                    <a:pt x="5697903" y="501887"/>
+                  </a:lnTo>
+                  <a:lnTo>
+                    <a:pt x="5768248" y="504748"/>
+                  </a:lnTo>
+                  <a:lnTo>
+                    <a:pt x="5838592" y="507561"/>
+                  </a:lnTo>
+                  <a:lnTo>
+                    <a:pt x="5908937" y="510327"/>
+                  </a:lnTo>
+                  <a:lnTo>
+                    <a:pt x="5979281" y="513047"/>
+                  </a:lnTo>
+                  <a:lnTo>
+                    <a:pt x="6049626" y="515720"/>
+                  </a:lnTo>
+                  <a:lnTo>
+                    <a:pt x="6119970" y="518349"/>
+                  </a:lnTo>
+                  <a:lnTo>
+                    <a:pt x="6190315" y="520934"/>
+                  </a:lnTo>
+                  <a:lnTo>
+                    <a:pt x="6260659" y="523475"/>
+                  </a:lnTo>
+                  <a:lnTo>
+                    <a:pt x="6331004" y="525973"/>
+                  </a:lnTo>
+                  <a:lnTo>
+                    <a:pt x="6401348" y="528429"/>
+                  </a:lnTo>
+                  <a:lnTo>
+                    <a:pt x="6471693" y="530844"/>
+                  </a:lnTo>
+                  <a:lnTo>
+                    <a:pt x="6542037" y="533219"/>
+                  </a:lnTo>
+                  <a:lnTo>
+                    <a:pt x="6612382" y="535553"/>
+                  </a:lnTo>
+                  <a:lnTo>
+                    <a:pt x="6682726" y="537848"/>
+                  </a:lnTo>
+                  <a:lnTo>
+                    <a:pt x="6753071" y="540105"/>
+                  </a:lnTo>
+                  <a:lnTo>
+                    <a:pt x="6823415" y="542324"/>
+                  </a:lnTo>
+                  <a:lnTo>
+                    <a:pt x="6893760" y="544505"/>
+                  </a:lnTo>
+                  <a:lnTo>
+                    <a:pt x="6964104" y="546650"/>
                   </a:lnTo>
                 </a:path>
               </a:pathLst>
@@ -4568,27 +4603,27 @@
         </p:sp>
         <p:sp>
           <p:nvSpPr>
-            <p:cNvPr id="24" name="pl24"/>
+            <p:cNvPr id="25" name="pl25"/>
             <p:cNvSpPr/>
             <p:nvPr/>
           </p:nvSpPr>
           <p:spPr>
             <a:xfrm>
-              <a:off x="817517" y="4727786"/>
-              <a:ext cx="7799693" cy="0"/>
+              <a:off x="887106" y="3100960"/>
+              <a:ext cx="7660515" cy="0"/>
             </a:xfrm>
             <a:custGeom>
               <a:avLst/>
               <a:pathLst>
-                <a:path w="7799693" h="0">
+                <a:path w="7660515" h="0">
                   <a:moveTo>
                     <a:pt x="0" y="0"/>
                   </a:moveTo>
                   <a:lnTo>
-                    <a:pt x="7799693" y="0"/>
-                  </a:lnTo>
-                  <a:lnTo>
-                    <a:pt x="7799693" y="0"/>
+                    <a:pt x="7660515" y="0"/>
+                  </a:lnTo>
+                  <a:lnTo>
+                    <a:pt x="7660515" y="0"/>
                   </a:lnTo>
                 </a:path>
               </a:pathLst>
@@ -4611,21 +4646,21 @@
         </p:sp>
         <p:sp>
           <p:nvSpPr>
-            <p:cNvPr id="25" name="pl25"/>
+            <p:cNvPr id="26" name="pl26"/>
             <p:cNvSpPr/>
             <p:nvPr/>
           </p:nvSpPr>
           <p:spPr>
             <a:xfrm>
-              <a:off x="4588151" y="2073503"/>
-              <a:ext cx="0" cy="3649639"/>
+              <a:off x="4590457" y="2143092"/>
+              <a:ext cx="0" cy="1317069"/>
             </a:xfrm>
             <a:custGeom>
               <a:avLst/>
               <a:pathLst>
-                <a:path w="0" h="3649639">
+                <a:path w="0" h="1317069">
                   <a:moveTo>
-                    <a:pt x="0" y="3649639"/>
+                    <a:pt x="0" y="1317069"/>
                   </a:moveTo>
                   <a:lnTo>
                     <a:pt x="0" y="0"/>
@@ -4654,13 +4689,13 @@
         </p:sp>
         <p:sp>
           <p:nvSpPr>
-            <p:cNvPr id="26" name="tx26"/>
+            <p:cNvPr id="27" name="tx27"/>
             <p:cNvSpPr/>
             <p:nvPr/>
           </p:nvSpPr>
           <p:spPr>
             <a:xfrm>
-              <a:off x="692708" y="5517199"/>
+              <a:off x="762297" y="3360243"/>
               <a:ext cx="62179" cy="80101"/>
             </a:xfrm>
             <a:prstGeom prst="rect">
@@ -4700,13 +4735,13 @@
         </p:sp>
         <p:sp>
           <p:nvSpPr>
-            <p:cNvPr id="27" name="tx27"/>
+            <p:cNvPr id="28" name="tx28"/>
             <p:cNvSpPr/>
             <p:nvPr/>
           </p:nvSpPr>
           <p:spPr>
             <a:xfrm>
-              <a:off x="692708" y="4687735"/>
+              <a:off x="762297" y="3060909"/>
               <a:ext cx="62179" cy="80101"/>
             </a:xfrm>
             <a:prstGeom prst="rect">
@@ -4746,13 +4781,13 @@
         </p:sp>
         <p:sp>
           <p:nvSpPr>
-            <p:cNvPr id="28" name="tx28"/>
+            <p:cNvPr id="29" name="tx29"/>
             <p:cNvSpPr/>
             <p:nvPr/>
           </p:nvSpPr>
           <p:spPr>
             <a:xfrm>
-              <a:off x="692708" y="3858272"/>
+              <a:off x="762297" y="2761575"/>
               <a:ext cx="62179" cy="80101"/>
             </a:xfrm>
             <a:prstGeom prst="rect">
@@ -4792,13 +4827,13 @@
         </p:sp>
         <p:sp>
           <p:nvSpPr>
-            <p:cNvPr id="29" name="tx29"/>
+            <p:cNvPr id="30" name="tx30"/>
             <p:cNvSpPr/>
             <p:nvPr/>
           </p:nvSpPr>
           <p:spPr>
             <a:xfrm>
-              <a:off x="692708" y="3028808"/>
+              <a:off x="762297" y="2462242"/>
               <a:ext cx="62179" cy="80101"/>
             </a:xfrm>
             <a:prstGeom prst="rect">
@@ -4838,13 +4873,13 @@
         </p:sp>
         <p:sp>
           <p:nvSpPr>
-            <p:cNvPr id="30" name="tx30"/>
+            <p:cNvPr id="31" name="tx31"/>
             <p:cNvSpPr/>
             <p:nvPr/>
           </p:nvSpPr>
           <p:spPr>
             <a:xfrm>
-              <a:off x="692708" y="2199345"/>
+              <a:off x="762297" y="2162908"/>
               <a:ext cx="62179" cy="80101"/>
             </a:xfrm>
             <a:prstGeom prst="rect">
@@ -4884,13 +4919,13 @@
         </p:sp>
         <p:sp>
           <p:nvSpPr>
-            <p:cNvPr id="31" name="tx31"/>
+            <p:cNvPr id="32" name="tx32"/>
             <p:cNvSpPr/>
             <p:nvPr/>
           </p:nvSpPr>
           <p:spPr>
             <a:xfrm>
-              <a:off x="2360651" y="5785772"/>
+              <a:off x="2401262" y="3522791"/>
               <a:ext cx="161574" cy="80101"/>
             </a:xfrm>
             <a:prstGeom prst="rect">
@@ -4930,13 +4965,13 @@
         </p:sp>
         <p:sp>
           <p:nvSpPr>
-            <p:cNvPr id="32" name="tx32"/>
+            <p:cNvPr id="33" name="tx33"/>
             <p:cNvSpPr/>
             <p:nvPr/>
           </p:nvSpPr>
           <p:spPr>
             <a:xfrm>
-              <a:off x="4561958" y="5785772"/>
+              <a:off x="4564176" y="3522791"/>
               <a:ext cx="62179" cy="80101"/>
             </a:xfrm>
             <a:prstGeom prst="rect">
@@ -4976,13 +5011,13 @@
         </p:sp>
         <p:sp>
           <p:nvSpPr>
-            <p:cNvPr id="33" name="tx33"/>
+            <p:cNvPr id="34" name="tx34"/>
             <p:cNvSpPr/>
             <p:nvPr/>
           </p:nvSpPr>
           <p:spPr>
             <a:xfrm>
-              <a:off x="6682478" y="5785772"/>
+              <a:off x="6646302" y="3522791"/>
               <a:ext cx="124358" cy="80101"/>
             </a:xfrm>
             <a:prstGeom prst="rect">
@@ -5022,13 +5057,13 @@
         </p:sp>
         <p:sp>
           <p:nvSpPr>
-            <p:cNvPr id="34" name="tx34"/>
+            <p:cNvPr id="35" name="tx35"/>
             <p:cNvSpPr/>
             <p:nvPr/>
           </p:nvSpPr>
           <p:spPr>
             <a:xfrm>
-              <a:off x="2928340" y="5925448"/>
+              <a:off x="2928340" y="3662467"/>
               <a:ext cx="3578047" cy="100218"/>
             </a:xfrm>
             <a:prstGeom prst="rect">
@@ -5068,13 +5103,13 @@
         </p:sp>
         <p:sp>
           <p:nvSpPr>
-            <p:cNvPr id="35" name="tx35"/>
+            <p:cNvPr id="36" name="tx36"/>
             <p:cNvSpPr/>
             <p:nvPr/>
           </p:nvSpPr>
           <p:spPr>
             <a:xfrm rot="-5400000">
-              <a:off x="68446" y="3848213"/>
+              <a:off x="138035" y="2751517"/>
               <a:ext cx="1016904" cy="100218"/>
             </a:xfrm>
             <a:prstGeom prst="rect">
@@ -5114,13 +5149,13 @@
         </p:sp>
         <p:sp>
           <p:nvSpPr>
-            <p:cNvPr id="36" name="tx36"/>
+            <p:cNvPr id="37" name="tx37"/>
             <p:cNvSpPr/>
             <p:nvPr/>
           </p:nvSpPr>
           <p:spPr>
             <a:xfrm>
-              <a:off x="817517" y="1896563"/>
+              <a:off x="887106" y="1966152"/>
               <a:ext cx="7052127" cy="82021"/>
             </a:xfrm>
             <a:prstGeom prst="rect">
@@ -5160,13 +5195,3703 @@
         </p:sp>
         <p:sp>
           <p:nvSpPr>
-            <p:cNvPr id="37" name="tx37"/>
+            <p:cNvPr id="38" name="tx38"/>
             <p:cNvSpPr/>
             <p:nvPr/>
           </p:nvSpPr>
           <p:spPr>
             <a:xfrm>
-              <a:off x="817517" y="1669789"/>
+              <a:off x="887106" y="1739378"/>
+              <a:ext cx="1219901" cy="120152"/>
+            </a:xfrm>
+            <a:prstGeom prst="rect">
+              <a:avLst/>
+            </a:prstGeom>
+            <a:noFill/>
+          </p:spPr>
+          <p:txBody>
+            <a:bodyPr lIns="0" rIns="0" tIns="0" bIns="0" anchorCtr="1" anchor="ctr" wrap="none"/>
+            <a:lstStyle/>
+            <a:p>
+              <a:pPr algn="l" marL="0" marR="0" indent="0">
+                <a:lnSpc>
+                  <a:spcPts val="1320"/>
+                </a:lnSpc>
+                <a:spcBef>
+                  <a:spcPts val="0"/>
+                </a:spcBef>
+                <a:spcAft>
+                  <a:spcPts val="0"/>
+                </a:spcAft>
+              </a:pPr>
+              <a:r>
+                <a:rPr sz="1320">
+                  <a:solidFill>
+                    <a:srgbClr val="000000">
+                      <a:alpha val="100000"/>
+                    </a:srgbClr>
+                  </a:solidFill>
+                  <a:latin typeface="Helvetica"/>
+                  <a:cs typeface="Helvetica"/>
+                </a:rPr>
+                <a:t>Anemia Grade 2</a:t>
+              </a:r>
+            </a:p>
+          </p:txBody>
+        </p:sp>
+        <p:sp>
+          <p:nvSpPr>
+            <p:cNvPr id="39" name="pl39"/>
+            <p:cNvSpPr/>
+            <p:nvPr/>
+          </p:nvSpPr>
+          <p:spPr>
+            <a:xfrm>
+              <a:off x="887106" y="5444019"/>
+              <a:ext cx="7660515" cy="0"/>
+            </a:xfrm>
+            <a:custGeom>
+              <a:avLst/>
+              <a:pathLst>
+                <a:path w="7660515" h="0">
+                  <a:moveTo>
+                    <a:pt x="0" y="0"/>
+                  </a:moveTo>
+                  <a:lnTo>
+                    <a:pt x="7660515" y="0"/>
+                  </a:lnTo>
+                  <a:lnTo>
+                    <a:pt x="7660515" y="0"/>
+                  </a:lnTo>
+                </a:path>
+              </a:pathLst>
+            </a:custGeom>
+            <a:ln w="6775" cap="flat">
+              <a:solidFill>
+                <a:srgbClr val="EBEBEB">
+                  <a:alpha val="100000"/>
+                </a:srgbClr>
+              </a:solidFill>
+              <a:prstDash val="solid"/>
+              <a:round/>
+            </a:ln>
+          </p:spPr>
+          <p:txBody>
+            <a:bodyPr/>
+            <a:lstStyle/>
+            <a:p/>
+          </p:txBody>
+        </p:sp>
+        <p:sp>
+          <p:nvSpPr>
+            <p:cNvPr id="40" name="pl40"/>
+            <p:cNvSpPr/>
+            <p:nvPr/>
+          </p:nvSpPr>
+          <p:spPr>
+            <a:xfrm>
+              <a:off x="887106" y="5144686"/>
+              <a:ext cx="7660515" cy="0"/>
+            </a:xfrm>
+            <a:custGeom>
+              <a:avLst/>
+              <a:pathLst>
+                <a:path w="7660515" h="0">
+                  <a:moveTo>
+                    <a:pt x="0" y="0"/>
+                  </a:moveTo>
+                  <a:lnTo>
+                    <a:pt x="7660515" y="0"/>
+                  </a:lnTo>
+                  <a:lnTo>
+                    <a:pt x="7660515" y="0"/>
+                  </a:lnTo>
+                </a:path>
+              </a:pathLst>
+            </a:custGeom>
+            <a:ln w="6775" cap="flat">
+              <a:solidFill>
+                <a:srgbClr val="EBEBEB">
+                  <a:alpha val="100000"/>
+                </a:srgbClr>
+              </a:solidFill>
+              <a:prstDash val="solid"/>
+              <a:round/>
+            </a:ln>
+          </p:spPr>
+          <p:txBody>
+            <a:bodyPr/>
+            <a:lstStyle/>
+            <a:p/>
+          </p:txBody>
+        </p:sp>
+        <p:sp>
+          <p:nvSpPr>
+            <p:cNvPr id="41" name="pl41"/>
+            <p:cNvSpPr/>
+            <p:nvPr/>
+          </p:nvSpPr>
+          <p:spPr>
+            <a:xfrm>
+              <a:off x="887106" y="4845352"/>
+              <a:ext cx="7660515" cy="0"/>
+            </a:xfrm>
+            <a:custGeom>
+              <a:avLst/>
+              <a:pathLst>
+                <a:path w="7660515" h="0">
+                  <a:moveTo>
+                    <a:pt x="0" y="0"/>
+                  </a:moveTo>
+                  <a:lnTo>
+                    <a:pt x="7660515" y="0"/>
+                  </a:lnTo>
+                  <a:lnTo>
+                    <a:pt x="7660515" y="0"/>
+                  </a:lnTo>
+                </a:path>
+              </a:pathLst>
+            </a:custGeom>
+            <a:ln w="6775" cap="flat">
+              <a:solidFill>
+                <a:srgbClr val="EBEBEB">
+                  <a:alpha val="100000"/>
+                </a:srgbClr>
+              </a:solidFill>
+              <a:prstDash val="solid"/>
+              <a:round/>
+            </a:ln>
+          </p:spPr>
+          <p:txBody>
+            <a:bodyPr/>
+            <a:lstStyle/>
+            <a:p/>
+          </p:txBody>
+        </p:sp>
+        <p:sp>
+          <p:nvSpPr>
+            <p:cNvPr id="42" name="pl42"/>
+            <p:cNvSpPr/>
+            <p:nvPr/>
+          </p:nvSpPr>
+          <p:spPr>
+            <a:xfrm>
+              <a:off x="887106" y="4546018"/>
+              <a:ext cx="7660515" cy="0"/>
+            </a:xfrm>
+            <a:custGeom>
+              <a:avLst/>
+              <a:pathLst>
+                <a:path w="7660515" h="0">
+                  <a:moveTo>
+                    <a:pt x="0" y="0"/>
+                  </a:moveTo>
+                  <a:lnTo>
+                    <a:pt x="7660515" y="0"/>
+                  </a:lnTo>
+                  <a:lnTo>
+                    <a:pt x="7660515" y="0"/>
+                  </a:lnTo>
+                </a:path>
+              </a:pathLst>
+            </a:custGeom>
+            <a:ln w="6775" cap="flat">
+              <a:solidFill>
+                <a:srgbClr val="EBEBEB">
+                  <a:alpha val="100000"/>
+                </a:srgbClr>
+              </a:solidFill>
+              <a:prstDash val="solid"/>
+              <a:round/>
+            </a:ln>
+          </p:spPr>
+          <p:txBody>
+            <a:bodyPr/>
+            <a:lstStyle/>
+            <a:p/>
+          </p:txBody>
+        </p:sp>
+        <p:sp>
+          <p:nvSpPr>
+            <p:cNvPr id="43" name="pl43"/>
+            <p:cNvSpPr/>
+            <p:nvPr/>
+          </p:nvSpPr>
+          <p:spPr>
+            <a:xfrm>
+              <a:off x="1636763" y="4336484"/>
+              <a:ext cx="0" cy="1317069"/>
+            </a:xfrm>
+            <a:custGeom>
+              <a:avLst/>
+              <a:pathLst>
+                <a:path w="0" h="1317069">
+                  <a:moveTo>
+                    <a:pt x="0" y="1317069"/>
+                  </a:moveTo>
+                  <a:lnTo>
+                    <a:pt x="0" y="0"/>
+                  </a:lnTo>
+                  <a:lnTo>
+                    <a:pt x="0" y="0"/>
+                  </a:lnTo>
+                </a:path>
+              </a:pathLst>
+            </a:custGeom>
+            <a:ln w="6775" cap="flat">
+              <a:solidFill>
+                <a:srgbClr val="EBEBEB">
+                  <a:alpha val="100000"/>
+                </a:srgbClr>
+              </a:solidFill>
+              <a:prstDash val="solid"/>
+              <a:round/>
+            </a:ln>
+          </p:spPr>
+          <p:txBody>
+            <a:bodyPr/>
+            <a:lstStyle/>
+            <a:p/>
+          </p:txBody>
+        </p:sp>
+        <p:sp>
+          <p:nvSpPr>
+            <p:cNvPr id="44" name="pl44"/>
+            <p:cNvSpPr/>
+            <p:nvPr/>
+          </p:nvSpPr>
+          <p:spPr>
+            <a:xfrm>
+              <a:off x="2482050" y="4336484"/>
+              <a:ext cx="0" cy="1317069"/>
+            </a:xfrm>
+            <a:custGeom>
+              <a:avLst/>
+              <a:pathLst>
+                <a:path w="0" h="1317069">
+                  <a:moveTo>
+                    <a:pt x="0" y="1317069"/>
+                  </a:moveTo>
+                  <a:lnTo>
+                    <a:pt x="0" y="0"/>
+                  </a:lnTo>
+                  <a:lnTo>
+                    <a:pt x="0" y="0"/>
+                  </a:lnTo>
+                </a:path>
+              </a:pathLst>
+            </a:custGeom>
+            <a:ln w="6775" cap="flat">
+              <a:solidFill>
+                <a:srgbClr val="EBEBEB">
+                  <a:alpha val="100000"/>
+                </a:srgbClr>
+              </a:solidFill>
+              <a:prstDash val="solid"/>
+              <a:round/>
+            </a:ln>
+          </p:spPr>
+          <p:txBody>
+            <a:bodyPr/>
+            <a:lstStyle/>
+            <a:p/>
+          </p:txBody>
+        </p:sp>
+        <p:sp>
+          <p:nvSpPr>
+            <p:cNvPr id="45" name="pl45"/>
+            <p:cNvSpPr/>
+            <p:nvPr/>
+          </p:nvSpPr>
+          <p:spPr>
+            <a:xfrm>
+              <a:off x="3327336" y="4336484"/>
+              <a:ext cx="0" cy="1317069"/>
+            </a:xfrm>
+            <a:custGeom>
+              <a:avLst/>
+              <a:pathLst>
+                <a:path w="0" h="1317069">
+                  <a:moveTo>
+                    <a:pt x="0" y="1317069"/>
+                  </a:moveTo>
+                  <a:lnTo>
+                    <a:pt x="0" y="0"/>
+                  </a:lnTo>
+                  <a:lnTo>
+                    <a:pt x="0" y="0"/>
+                  </a:lnTo>
+                </a:path>
+              </a:pathLst>
+            </a:custGeom>
+            <a:ln w="6775" cap="flat">
+              <a:solidFill>
+                <a:srgbClr val="EBEBEB">
+                  <a:alpha val="100000"/>
+                </a:srgbClr>
+              </a:solidFill>
+              <a:prstDash val="solid"/>
+              <a:round/>
+            </a:ln>
+          </p:spPr>
+          <p:txBody>
+            <a:bodyPr/>
+            <a:lstStyle/>
+            <a:p/>
+          </p:txBody>
+        </p:sp>
+        <p:sp>
+          <p:nvSpPr>
+            <p:cNvPr id="46" name="pl46"/>
+            <p:cNvSpPr/>
+            <p:nvPr/>
+          </p:nvSpPr>
+          <p:spPr>
+            <a:xfrm>
+              <a:off x="4172622" y="4336484"/>
+              <a:ext cx="0" cy="1317069"/>
+            </a:xfrm>
+            <a:custGeom>
+              <a:avLst/>
+              <a:pathLst>
+                <a:path w="0" h="1317069">
+                  <a:moveTo>
+                    <a:pt x="0" y="1317069"/>
+                  </a:moveTo>
+                  <a:lnTo>
+                    <a:pt x="0" y="0"/>
+                  </a:lnTo>
+                  <a:lnTo>
+                    <a:pt x="0" y="0"/>
+                  </a:lnTo>
+                </a:path>
+              </a:pathLst>
+            </a:custGeom>
+            <a:ln w="6775" cap="flat">
+              <a:solidFill>
+                <a:srgbClr val="EBEBEB">
+                  <a:alpha val="100000"/>
+                </a:srgbClr>
+              </a:solidFill>
+              <a:prstDash val="solid"/>
+              <a:round/>
+            </a:ln>
+          </p:spPr>
+          <p:txBody>
+            <a:bodyPr/>
+            <a:lstStyle/>
+            <a:p/>
+          </p:txBody>
+        </p:sp>
+        <p:sp>
+          <p:nvSpPr>
+            <p:cNvPr id="47" name="pl47"/>
+            <p:cNvSpPr/>
+            <p:nvPr/>
+          </p:nvSpPr>
+          <p:spPr>
+            <a:xfrm>
+              <a:off x="5017909" y="4336484"/>
+              <a:ext cx="0" cy="1317069"/>
+            </a:xfrm>
+            <a:custGeom>
+              <a:avLst/>
+              <a:pathLst>
+                <a:path w="0" h="1317069">
+                  <a:moveTo>
+                    <a:pt x="0" y="1317069"/>
+                  </a:moveTo>
+                  <a:lnTo>
+                    <a:pt x="0" y="0"/>
+                  </a:lnTo>
+                  <a:lnTo>
+                    <a:pt x="0" y="0"/>
+                  </a:lnTo>
+                </a:path>
+              </a:pathLst>
+            </a:custGeom>
+            <a:ln w="6775" cap="flat">
+              <a:solidFill>
+                <a:srgbClr val="EBEBEB">
+                  <a:alpha val="100000"/>
+                </a:srgbClr>
+              </a:solidFill>
+              <a:prstDash val="solid"/>
+              <a:round/>
+            </a:ln>
+          </p:spPr>
+          <p:txBody>
+            <a:bodyPr/>
+            <a:lstStyle/>
+            <a:p/>
+          </p:txBody>
+        </p:sp>
+        <p:sp>
+          <p:nvSpPr>
+            <p:cNvPr id="48" name="pl48"/>
+            <p:cNvSpPr/>
+            <p:nvPr/>
+          </p:nvSpPr>
+          <p:spPr>
+            <a:xfrm>
+              <a:off x="5863195" y="4336484"/>
+              <a:ext cx="0" cy="1317069"/>
+            </a:xfrm>
+            <a:custGeom>
+              <a:avLst/>
+              <a:pathLst>
+                <a:path w="0" h="1317069">
+                  <a:moveTo>
+                    <a:pt x="0" y="1317069"/>
+                  </a:moveTo>
+                  <a:lnTo>
+                    <a:pt x="0" y="0"/>
+                  </a:lnTo>
+                  <a:lnTo>
+                    <a:pt x="0" y="0"/>
+                  </a:lnTo>
+                </a:path>
+              </a:pathLst>
+            </a:custGeom>
+            <a:ln w="6775" cap="flat">
+              <a:solidFill>
+                <a:srgbClr val="EBEBEB">
+                  <a:alpha val="100000"/>
+                </a:srgbClr>
+              </a:solidFill>
+              <a:prstDash val="solid"/>
+              <a:round/>
+            </a:ln>
+          </p:spPr>
+          <p:txBody>
+            <a:bodyPr/>
+            <a:lstStyle/>
+            <a:p/>
+          </p:txBody>
+        </p:sp>
+        <p:sp>
+          <p:nvSpPr>
+            <p:cNvPr id="49" name="pl49"/>
+            <p:cNvSpPr/>
+            <p:nvPr/>
+          </p:nvSpPr>
+          <p:spPr>
+            <a:xfrm>
+              <a:off x="6708482" y="4336484"/>
+              <a:ext cx="0" cy="1317069"/>
+            </a:xfrm>
+            <a:custGeom>
+              <a:avLst/>
+              <a:pathLst>
+                <a:path w="0" h="1317069">
+                  <a:moveTo>
+                    <a:pt x="0" y="1317069"/>
+                  </a:moveTo>
+                  <a:lnTo>
+                    <a:pt x="0" y="0"/>
+                  </a:lnTo>
+                  <a:lnTo>
+                    <a:pt x="0" y="0"/>
+                  </a:lnTo>
+                </a:path>
+              </a:pathLst>
+            </a:custGeom>
+            <a:ln w="6775" cap="flat">
+              <a:solidFill>
+                <a:srgbClr val="EBEBEB">
+                  <a:alpha val="100000"/>
+                </a:srgbClr>
+              </a:solidFill>
+              <a:prstDash val="solid"/>
+              <a:round/>
+            </a:ln>
+          </p:spPr>
+          <p:txBody>
+            <a:bodyPr/>
+            <a:lstStyle/>
+            <a:p/>
+          </p:txBody>
+        </p:sp>
+        <p:sp>
+          <p:nvSpPr>
+            <p:cNvPr id="50" name="pl50"/>
+            <p:cNvSpPr/>
+            <p:nvPr/>
+          </p:nvSpPr>
+          <p:spPr>
+            <a:xfrm>
+              <a:off x="7553768" y="4336484"/>
+              <a:ext cx="0" cy="1317069"/>
+            </a:xfrm>
+            <a:custGeom>
+              <a:avLst/>
+              <a:pathLst>
+                <a:path w="0" h="1317069">
+                  <a:moveTo>
+                    <a:pt x="0" y="1317069"/>
+                  </a:moveTo>
+                  <a:lnTo>
+                    <a:pt x="0" y="0"/>
+                  </a:lnTo>
+                  <a:lnTo>
+                    <a:pt x="0" y="0"/>
+                  </a:lnTo>
+                </a:path>
+              </a:pathLst>
+            </a:custGeom>
+            <a:ln w="6775" cap="flat">
+              <a:solidFill>
+                <a:srgbClr val="EBEBEB">
+                  <a:alpha val="100000"/>
+                </a:srgbClr>
+              </a:solidFill>
+              <a:prstDash val="solid"/>
+              <a:round/>
+            </a:ln>
+          </p:spPr>
+          <p:txBody>
+            <a:bodyPr/>
+            <a:lstStyle/>
+            <a:p/>
+          </p:txBody>
+        </p:sp>
+        <p:sp>
+          <p:nvSpPr>
+            <p:cNvPr id="51" name="pl51"/>
+            <p:cNvSpPr/>
+            <p:nvPr/>
+          </p:nvSpPr>
+          <p:spPr>
+            <a:xfrm>
+              <a:off x="8399054" y="4336484"/>
+              <a:ext cx="0" cy="1317069"/>
+            </a:xfrm>
+            <a:custGeom>
+              <a:avLst/>
+              <a:pathLst>
+                <a:path w="0" h="1317069">
+                  <a:moveTo>
+                    <a:pt x="0" y="1317069"/>
+                  </a:moveTo>
+                  <a:lnTo>
+                    <a:pt x="0" y="0"/>
+                  </a:lnTo>
+                  <a:lnTo>
+                    <a:pt x="0" y="0"/>
+                  </a:lnTo>
+                </a:path>
+              </a:pathLst>
+            </a:custGeom>
+            <a:ln w="6775" cap="flat">
+              <a:solidFill>
+                <a:srgbClr val="EBEBEB">
+                  <a:alpha val="100000"/>
+                </a:srgbClr>
+              </a:solidFill>
+              <a:prstDash val="solid"/>
+              <a:round/>
+            </a:ln>
+          </p:spPr>
+          <p:txBody>
+            <a:bodyPr/>
+            <a:lstStyle/>
+            <a:p/>
+          </p:txBody>
+        </p:sp>
+        <p:sp>
+          <p:nvSpPr>
+            <p:cNvPr id="52" name="pl52"/>
+            <p:cNvSpPr/>
+            <p:nvPr/>
+          </p:nvSpPr>
+          <p:spPr>
+            <a:xfrm>
+              <a:off x="887106" y="5593686"/>
+              <a:ext cx="7660515" cy="0"/>
+            </a:xfrm>
+            <a:custGeom>
+              <a:avLst/>
+              <a:pathLst>
+                <a:path w="7660515" h="0">
+                  <a:moveTo>
+                    <a:pt x="0" y="0"/>
+                  </a:moveTo>
+                  <a:lnTo>
+                    <a:pt x="7660515" y="0"/>
+                  </a:lnTo>
+                  <a:lnTo>
+                    <a:pt x="7660515" y="0"/>
+                  </a:lnTo>
+                </a:path>
+              </a:pathLst>
+            </a:custGeom>
+            <a:ln w="13550" cap="flat">
+              <a:solidFill>
+                <a:srgbClr val="EBEBEB">
+                  <a:alpha val="100000"/>
+                </a:srgbClr>
+              </a:solidFill>
+              <a:prstDash val="solid"/>
+              <a:round/>
+            </a:ln>
+          </p:spPr>
+          <p:txBody>
+            <a:bodyPr/>
+            <a:lstStyle/>
+            <a:p/>
+          </p:txBody>
+        </p:sp>
+        <p:sp>
+          <p:nvSpPr>
+            <p:cNvPr id="53" name="pl53"/>
+            <p:cNvSpPr/>
+            <p:nvPr/>
+          </p:nvSpPr>
+          <p:spPr>
+            <a:xfrm>
+              <a:off x="887106" y="5294352"/>
+              <a:ext cx="7660515" cy="0"/>
+            </a:xfrm>
+            <a:custGeom>
+              <a:avLst/>
+              <a:pathLst>
+                <a:path w="7660515" h="0">
+                  <a:moveTo>
+                    <a:pt x="0" y="0"/>
+                  </a:moveTo>
+                  <a:lnTo>
+                    <a:pt x="7660515" y="0"/>
+                  </a:lnTo>
+                  <a:lnTo>
+                    <a:pt x="7660515" y="0"/>
+                  </a:lnTo>
+                </a:path>
+              </a:pathLst>
+            </a:custGeom>
+            <a:ln w="13550" cap="flat">
+              <a:solidFill>
+                <a:srgbClr val="EBEBEB">
+                  <a:alpha val="100000"/>
+                </a:srgbClr>
+              </a:solidFill>
+              <a:prstDash val="solid"/>
+              <a:round/>
+            </a:ln>
+          </p:spPr>
+          <p:txBody>
+            <a:bodyPr/>
+            <a:lstStyle/>
+            <a:p/>
+          </p:txBody>
+        </p:sp>
+        <p:sp>
+          <p:nvSpPr>
+            <p:cNvPr id="54" name="pl54"/>
+            <p:cNvSpPr/>
+            <p:nvPr/>
+          </p:nvSpPr>
+          <p:spPr>
+            <a:xfrm>
+              <a:off x="887106" y="4995019"/>
+              <a:ext cx="7660515" cy="0"/>
+            </a:xfrm>
+            <a:custGeom>
+              <a:avLst/>
+              <a:pathLst>
+                <a:path w="7660515" h="0">
+                  <a:moveTo>
+                    <a:pt x="0" y="0"/>
+                  </a:moveTo>
+                  <a:lnTo>
+                    <a:pt x="7660515" y="0"/>
+                  </a:lnTo>
+                  <a:lnTo>
+                    <a:pt x="7660515" y="0"/>
+                  </a:lnTo>
+                </a:path>
+              </a:pathLst>
+            </a:custGeom>
+            <a:ln w="13550" cap="flat">
+              <a:solidFill>
+                <a:srgbClr val="EBEBEB">
+                  <a:alpha val="100000"/>
+                </a:srgbClr>
+              </a:solidFill>
+              <a:prstDash val="solid"/>
+              <a:round/>
+            </a:ln>
+          </p:spPr>
+          <p:txBody>
+            <a:bodyPr/>
+            <a:lstStyle/>
+            <a:p/>
+          </p:txBody>
+        </p:sp>
+        <p:sp>
+          <p:nvSpPr>
+            <p:cNvPr id="55" name="pl55"/>
+            <p:cNvSpPr/>
+            <p:nvPr/>
+          </p:nvSpPr>
+          <p:spPr>
+            <a:xfrm>
+              <a:off x="887106" y="4695685"/>
+              <a:ext cx="7660515" cy="0"/>
+            </a:xfrm>
+            <a:custGeom>
+              <a:avLst/>
+              <a:pathLst>
+                <a:path w="7660515" h="0">
+                  <a:moveTo>
+                    <a:pt x="0" y="0"/>
+                  </a:moveTo>
+                  <a:lnTo>
+                    <a:pt x="7660515" y="0"/>
+                  </a:lnTo>
+                  <a:lnTo>
+                    <a:pt x="7660515" y="0"/>
+                  </a:lnTo>
+                </a:path>
+              </a:pathLst>
+            </a:custGeom>
+            <a:ln w="13550" cap="flat">
+              <a:solidFill>
+                <a:srgbClr val="EBEBEB">
+                  <a:alpha val="100000"/>
+                </a:srgbClr>
+              </a:solidFill>
+              <a:prstDash val="solid"/>
+              <a:round/>
+            </a:ln>
+          </p:spPr>
+          <p:txBody>
+            <a:bodyPr/>
+            <a:lstStyle/>
+            <a:p/>
+          </p:txBody>
+        </p:sp>
+        <p:sp>
+          <p:nvSpPr>
+            <p:cNvPr id="56" name="pl56"/>
+            <p:cNvSpPr/>
+            <p:nvPr/>
+          </p:nvSpPr>
+          <p:spPr>
+            <a:xfrm>
+              <a:off x="887106" y="4396351"/>
+              <a:ext cx="7660515" cy="0"/>
+            </a:xfrm>
+            <a:custGeom>
+              <a:avLst/>
+              <a:pathLst>
+                <a:path w="7660515" h="0">
+                  <a:moveTo>
+                    <a:pt x="0" y="0"/>
+                  </a:moveTo>
+                  <a:lnTo>
+                    <a:pt x="7660515" y="0"/>
+                  </a:lnTo>
+                  <a:lnTo>
+                    <a:pt x="7660515" y="0"/>
+                  </a:lnTo>
+                </a:path>
+              </a:pathLst>
+            </a:custGeom>
+            <a:ln w="13550" cap="flat">
+              <a:solidFill>
+                <a:srgbClr val="EBEBEB">
+                  <a:alpha val="100000"/>
+                </a:srgbClr>
+              </a:solidFill>
+              <a:prstDash val="solid"/>
+              <a:round/>
+            </a:ln>
+          </p:spPr>
+          <p:txBody>
+            <a:bodyPr/>
+            <a:lstStyle/>
+            <a:p/>
+          </p:txBody>
+        </p:sp>
+        <p:sp>
+          <p:nvSpPr>
+            <p:cNvPr id="57" name="pl57"/>
+            <p:cNvSpPr/>
+            <p:nvPr/>
+          </p:nvSpPr>
+          <p:spPr>
+            <a:xfrm>
+              <a:off x="1214120" y="4336484"/>
+              <a:ext cx="0" cy="1317069"/>
+            </a:xfrm>
+            <a:custGeom>
+              <a:avLst/>
+              <a:pathLst>
+                <a:path w="0" h="1317069">
+                  <a:moveTo>
+                    <a:pt x="0" y="1317069"/>
+                  </a:moveTo>
+                  <a:lnTo>
+                    <a:pt x="0" y="0"/>
+                  </a:lnTo>
+                  <a:lnTo>
+                    <a:pt x="0" y="0"/>
+                  </a:lnTo>
+                </a:path>
+              </a:pathLst>
+            </a:custGeom>
+            <a:ln w="13550" cap="flat">
+              <a:solidFill>
+                <a:srgbClr val="EBEBEB">
+                  <a:alpha val="100000"/>
+                </a:srgbClr>
+              </a:solidFill>
+              <a:prstDash val="solid"/>
+              <a:round/>
+            </a:ln>
+          </p:spPr>
+          <p:txBody>
+            <a:bodyPr/>
+            <a:lstStyle/>
+            <a:p/>
+          </p:txBody>
+        </p:sp>
+        <p:sp>
+          <p:nvSpPr>
+            <p:cNvPr id="58" name="pl58"/>
+            <p:cNvSpPr/>
+            <p:nvPr/>
+          </p:nvSpPr>
+          <p:spPr>
+            <a:xfrm>
+              <a:off x="2059406" y="4336484"/>
+              <a:ext cx="0" cy="1317069"/>
+            </a:xfrm>
+            <a:custGeom>
+              <a:avLst/>
+              <a:pathLst>
+                <a:path w="0" h="1317069">
+                  <a:moveTo>
+                    <a:pt x="0" y="1317069"/>
+                  </a:moveTo>
+                  <a:lnTo>
+                    <a:pt x="0" y="0"/>
+                  </a:lnTo>
+                  <a:lnTo>
+                    <a:pt x="0" y="0"/>
+                  </a:lnTo>
+                </a:path>
+              </a:pathLst>
+            </a:custGeom>
+            <a:ln w="13550" cap="flat">
+              <a:solidFill>
+                <a:srgbClr val="EBEBEB">
+                  <a:alpha val="100000"/>
+                </a:srgbClr>
+              </a:solidFill>
+              <a:prstDash val="solid"/>
+              <a:round/>
+            </a:ln>
+          </p:spPr>
+          <p:txBody>
+            <a:bodyPr/>
+            <a:lstStyle/>
+            <a:p/>
+          </p:txBody>
+        </p:sp>
+        <p:sp>
+          <p:nvSpPr>
+            <p:cNvPr id="59" name="pl59"/>
+            <p:cNvSpPr/>
+            <p:nvPr/>
+          </p:nvSpPr>
+          <p:spPr>
+            <a:xfrm>
+              <a:off x="2904693" y="4336484"/>
+              <a:ext cx="0" cy="1317069"/>
+            </a:xfrm>
+            <a:custGeom>
+              <a:avLst/>
+              <a:pathLst>
+                <a:path w="0" h="1317069">
+                  <a:moveTo>
+                    <a:pt x="0" y="1317069"/>
+                  </a:moveTo>
+                  <a:lnTo>
+                    <a:pt x="0" y="0"/>
+                  </a:lnTo>
+                  <a:lnTo>
+                    <a:pt x="0" y="0"/>
+                  </a:lnTo>
+                </a:path>
+              </a:pathLst>
+            </a:custGeom>
+            <a:ln w="13550" cap="flat">
+              <a:solidFill>
+                <a:srgbClr val="EBEBEB">
+                  <a:alpha val="100000"/>
+                </a:srgbClr>
+              </a:solidFill>
+              <a:prstDash val="solid"/>
+              <a:round/>
+            </a:ln>
+          </p:spPr>
+          <p:txBody>
+            <a:bodyPr/>
+            <a:lstStyle/>
+            <a:p/>
+          </p:txBody>
+        </p:sp>
+        <p:sp>
+          <p:nvSpPr>
+            <p:cNvPr id="60" name="pl60"/>
+            <p:cNvSpPr/>
+            <p:nvPr/>
+          </p:nvSpPr>
+          <p:spPr>
+            <a:xfrm>
+              <a:off x="3749979" y="4336484"/>
+              <a:ext cx="0" cy="1317069"/>
+            </a:xfrm>
+            <a:custGeom>
+              <a:avLst/>
+              <a:pathLst>
+                <a:path w="0" h="1317069">
+                  <a:moveTo>
+                    <a:pt x="0" y="1317069"/>
+                  </a:moveTo>
+                  <a:lnTo>
+                    <a:pt x="0" y="0"/>
+                  </a:lnTo>
+                  <a:lnTo>
+                    <a:pt x="0" y="0"/>
+                  </a:lnTo>
+                </a:path>
+              </a:pathLst>
+            </a:custGeom>
+            <a:ln w="13550" cap="flat">
+              <a:solidFill>
+                <a:srgbClr val="EBEBEB">
+                  <a:alpha val="100000"/>
+                </a:srgbClr>
+              </a:solidFill>
+              <a:prstDash val="solid"/>
+              <a:round/>
+            </a:ln>
+          </p:spPr>
+          <p:txBody>
+            <a:bodyPr/>
+            <a:lstStyle/>
+            <a:p/>
+          </p:txBody>
+        </p:sp>
+        <p:sp>
+          <p:nvSpPr>
+            <p:cNvPr id="61" name="pl61"/>
+            <p:cNvSpPr/>
+            <p:nvPr/>
+          </p:nvSpPr>
+          <p:spPr>
+            <a:xfrm>
+              <a:off x="4595266" y="4336484"/>
+              <a:ext cx="0" cy="1317069"/>
+            </a:xfrm>
+            <a:custGeom>
+              <a:avLst/>
+              <a:pathLst>
+                <a:path w="0" h="1317069">
+                  <a:moveTo>
+                    <a:pt x="0" y="1317069"/>
+                  </a:moveTo>
+                  <a:lnTo>
+                    <a:pt x="0" y="0"/>
+                  </a:lnTo>
+                  <a:lnTo>
+                    <a:pt x="0" y="0"/>
+                  </a:lnTo>
+                </a:path>
+              </a:pathLst>
+            </a:custGeom>
+            <a:ln w="13550" cap="flat">
+              <a:solidFill>
+                <a:srgbClr val="EBEBEB">
+                  <a:alpha val="100000"/>
+                </a:srgbClr>
+              </a:solidFill>
+              <a:prstDash val="solid"/>
+              <a:round/>
+            </a:ln>
+          </p:spPr>
+          <p:txBody>
+            <a:bodyPr/>
+            <a:lstStyle/>
+            <a:p/>
+          </p:txBody>
+        </p:sp>
+        <p:sp>
+          <p:nvSpPr>
+            <p:cNvPr id="62" name="pl62"/>
+            <p:cNvSpPr/>
+            <p:nvPr/>
+          </p:nvSpPr>
+          <p:spPr>
+            <a:xfrm>
+              <a:off x="5440552" y="4336484"/>
+              <a:ext cx="0" cy="1317069"/>
+            </a:xfrm>
+            <a:custGeom>
+              <a:avLst/>
+              <a:pathLst>
+                <a:path w="0" h="1317069">
+                  <a:moveTo>
+                    <a:pt x="0" y="1317069"/>
+                  </a:moveTo>
+                  <a:lnTo>
+                    <a:pt x="0" y="0"/>
+                  </a:lnTo>
+                  <a:lnTo>
+                    <a:pt x="0" y="0"/>
+                  </a:lnTo>
+                </a:path>
+              </a:pathLst>
+            </a:custGeom>
+            <a:ln w="13550" cap="flat">
+              <a:solidFill>
+                <a:srgbClr val="EBEBEB">
+                  <a:alpha val="100000"/>
+                </a:srgbClr>
+              </a:solidFill>
+              <a:prstDash val="solid"/>
+              <a:round/>
+            </a:ln>
+          </p:spPr>
+          <p:txBody>
+            <a:bodyPr/>
+            <a:lstStyle/>
+            <a:p/>
+          </p:txBody>
+        </p:sp>
+        <p:sp>
+          <p:nvSpPr>
+            <p:cNvPr id="63" name="pl63"/>
+            <p:cNvSpPr/>
+            <p:nvPr/>
+          </p:nvSpPr>
+          <p:spPr>
+            <a:xfrm>
+              <a:off x="6285838" y="4336484"/>
+              <a:ext cx="0" cy="1317069"/>
+            </a:xfrm>
+            <a:custGeom>
+              <a:avLst/>
+              <a:pathLst>
+                <a:path w="0" h="1317069">
+                  <a:moveTo>
+                    <a:pt x="0" y="1317069"/>
+                  </a:moveTo>
+                  <a:lnTo>
+                    <a:pt x="0" y="0"/>
+                  </a:lnTo>
+                  <a:lnTo>
+                    <a:pt x="0" y="0"/>
+                  </a:lnTo>
+                </a:path>
+              </a:pathLst>
+            </a:custGeom>
+            <a:ln w="13550" cap="flat">
+              <a:solidFill>
+                <a:srgbClr val="EBEBEB">
+                  <a:alpha val="100000"/>
+                </a:srgbClr>
+              </a:solidFill>
+              <a:prstDash val="solid"/>
+              <a:round/>
+            </a:ln>
+          </p:spPr>
+          <p:txBody>
+            <a:bodyPr/>
+            <a:lstStyle/>
+            <a:p/>
+          </p:txBody>
+        </p:sp>
+        <p:sp>
+          <p:nvSpPr>
+            <p:cNvPr id="64" name="pl64"/>
+            <p:cNvSpPr/>
+            <p:nvPr/>
+          </p:nvSpPr>
+          <p:spPr>
+            <a:xfrm>
+              <a:off x="7131125" y="4336484"/>
+              <a:ext cx="0" cy="1317069"/>
+            </a:xfrm>
+            <a:custGeom>
+              <a:avLst/>
+              <a:pathLst>
+                <a:path w="0" h="1317069">
+                  <a:moveTo>
+                    <a:pt x="0" y="1317069"/>
+                  </a:moveTo>
+                  <a:lnTo>
+                    <a:pt x="0" y="0"/>
+                  </a:lnTo>
+                  <a:lnTo>
+                    <a:pt x="0" y="0"/>
+                  </a:lnTo>
+                </a:path>
+              </a:pathLst>
+            </a:custGeom>
+            <a:ln w="13550" cap="flat">
+              <a:solidFill>
+                <a:srgbClr val="EBEBEB">
+                  <a:alpha val="100000"/>
+                </a:srgbClr>
+              </a:solidFill>
+              <a:prstDash val="solid"/>
+              <a:round/>
+            </a:ln>
+          </p:spPr>
+          <p:txBody>
+            <a:bodyPr/>
+            <a:lstStyle/>
+            <a:p/>
+          </p:txBody>
+        </p:sp>
+        <p:sp>
+          <p:nvSpPr>
+            <p:cNvPr id="65" name="pl65"/>
+            <p:cNvSpPr/>
+            <p:nvPr/>
+          </p:nvSpPr>
+          <p:spPr>
+            <a:xfrm>
+              <a:off x="7976411" y="4336484"/>
+              <a:ext cx="0" cy="1317069"/>
+            </a:xfrm>
+            <a:custGeom>
+              <a:avLst/>
+              <a:pathLst>
+                <a:path w="0" h="1317069">
+                  <a:moveTo>
+                    <a:pt x="0" y="1317069"/>
+                  </a:moveTo>
+                  <a:lnTo>
+                    <a:pt x="0" y="0"/>
+                  </a:lnTo>
+                  <a:lnTo>
+                    <a:pt x="0" y="0"/>
+                  </a:lnTo>
+                </a:path>
+              </a:pathLst>
+            </a:custGeom>
+            <a:ln w="13550" cap="flat">
+              <a:solidFill>
+                <a:srgbClr val="EBEBEB">
+                  <a:alpha val="100000"/>
+                </a:srgbClr>
+              </a:solidFill>
+              <a:prstDash val="solid"/>
+              <a:round/>
+            </a:ln>
+          </p:spPr>
+          <p:txBody>
+            <a:bodyPr/>
+            <a:lstStyle/>
+            <a:p/>
+          </p:txBody>
+        </p:sp>
+        <p:sp>
+          <p:nvSpPr>
+            <p:cNvPr id="66" name="pg66"/>
+            <p:cNvSpPr/>
+            <p:nvPr/>
+          </p:nvSpPr>
+          <p:spPr>
+            <a:xfrm>
+              <a:off x="1235312" y="4691491"/>
+              <a:ext cx="6964104" cy="810834"/>
+            </a:xfrm>
+            <a:custGeom>
+              <a:avLst/>
+              <a:pathLst>
+                <a:path w="6964104" h="810834">
+                  <a:moveTo>
+                    <a:pt x="0" y="0"/>
+                  </a:moveTo>
+                  <a:lnTo>
+                    <a:pt x="70344" y="20629"/>
+                  </a:lnTo>
+                  <a:lnTo>
+                    <a:pt x="140688" y="40787"/>
+                  </a:lnTo>
+                  <a:lnTo>
+                    <a:pt x="211033" y="60484"/>
+                  </a:lnTo>
+                  <a:lnTo>
+                    <a:pt x="281377" y="79730"/>
+                  </a:lnTo>
+                  <a:lnTo>
+                    <a:pt x="351722" y="98537"/>
+                  </a:lnTo>
+                  <a:lnTo>
+                    <a:pt x="422066" y="116913"/>
+                  </a:lnTo>
+                  <a:lnTo>
+                    <a:pt x="492411" y="134869"/>
+                  </a:lnTo>
+                  <a:lnTo>
+                    <a:pt x="562755" y="152415"/>
+                  </a:lnTo>
+                  <a:lnTo>
+                    <a:pt x="633100" y="169559"/>
+                  </a:lnTo>
+                  <a:lnTo>
+                    <a:pt x="703444" y="186311"/>
+                  </a:lnTo>
+                  <a:lnTo>
+                    <a:pt x="773789" y="202681"/>
+                  </a:lnTo>
+                  <a:lnTo>
+                    <a:pt x="844133" y="218676"/>
+                  </a:lnTo>
+                  <a:lnTo>
+                    <a:pt x="914478" y="234305"/>
+                  </a:lnTo>
+                  <a:lnTo>
+                    <a:pt x="984822" y="249577"/>
+                  </a:lnTo>
+                  <a:lnTo>
+                    <a:pt x="1055167" y="264500"/>
+                  </a:lnTo>
+                  <a:lnTo>
+                    <a:pt x="1125511" y="279081"/>
+                  </a:lnTo>
+                  <a:lnTo>
+                    <a:pt x="1195856" y="293329"/>
+                  </a:lnTo>
+                  <a:lnTo>
+                    <a:pt x="1266200" y="307251"/>
+                  </a:lnTo>
+                  <a:lnTo>
+                    <a:pt x="1336545" y="320855"/>
+                  </a:lnTo>
+                  <a:lnTo>
+                    <a:pt x="1406889" y="334148"/>
+                  </a:lnTo>
+                  <a:lnTo>
+                    <a:pt x="1477234" y="347137"/>
+                  </a:lnTo>
+                  <a:lnTo>
+                    <a:pt x="1547578" y="359829"/>
+                  </a:lnTo>
+                  <a:lnTo>
+                    <a:pt x="1617923" y="372231"/>
+                  </a:lnTo>
+                  <a:lnTo>
+                    <a:pt x="1688267" y="384349"/>
+                  </a:lnTo>
+                  <a:lnTo>
+                    <a:pt x="1758612" y="396190"/>
+                  </a:lnTo>
+                  <a:lnTo>
+                    <a:pt x="1828956" y="407760"/>
+                  </a:lnTo>
+                  <a:lnTo>
+                    <a:pt x="1899301" y="419066"/>
+                  </a:lnTo>
+                  <a:lnTo>
+                    <a:pt x="1969645" y="430113"/>
+                  </a:lnTo>
+                  <a:lnTo>
+                    <a:pt x="2039990" y="440908"/>
+                  </a:lnTo>
+                  <a:lnTo>
+                    <a:pt x="2110334" y="451455"/>
+                  </a:lnTo>
+                  <a:lnTo>
+                    <a:pt x="2180679" y="461762"/>
+                  </a:lnTo>
+                  <a:lnTo>
+                    <a:pt x="2251023" y="471833"/>
+                  </a:lnTo>
+                  <a:lnTo>
+                    <a:pt x="2321368" y="481673"/>
+                  </a:lnTo>
+                  <a:lnTo>
+                    <a:pt x="2391712" y="491289"/>
+                  </a:lnTo>
+                  <a:lnTo>
+                    <a:pt x="2462057" y="500685"/>
+                  </a:lnTo>
+                  <a:lnTo>
+                    <a:pt x="2532401" y="509866"/>
+                  </a:lnTo>
+                  <a:lnTo>
+                    <a:pt x="2602746" y="518837"/>
+                  </a:lnTo>
+                  <a:lnTo>
+                    <a:pt x="2673090" y="527602"/>
+                  </a:lnTo>
+                  <a:lnTo>
+                    <a:pt x="2743435" y="536168"/>
+                  </a:lnTo>
+                  <a:lnTo>
+                    <a:pt x="2813779" y="544537"/>
+                  </a:lnTo>
+                  <a:lnTo>
+                    <a:pt x="2884124" y="552716"/>
+                  </a:lnTo>
+                  <a:lnTo>
+                    <a:pt x="2954468" y="560707"/>
+                  </a:lnTo>
+                  <a:lnTo>
+                    <a:pt x="3024813" y="568515"/>
+                  </a:lnTo>
+                  <a:lnTo>
+                    <a:pt x="3095157" y="576145"/>
+                  </a:lnTo>
+                  <a:lnTo>
+                    <a:pt x="3165502" y="583600"/>
+                  </a:lnTo>
+                  <a:lnTo>
+                    <a:pt x="3235846" y="590885"/>
+                  </a:lnTo>
+                  <a:lnTo>
+                    <a:pt x="3306191" y="598004"/>
+                  </a:lnTo>
+                  <a:lnTo>
+                    <a:pt x="3376535" y="603841"/>
+                  </a:lnTo>
+                  <a:lnTo>
+                    <a:pt x="3446880" y="607041"/>
+                  </a:lnTo>
+                  <a:lnTo>
+                    <a:pt x="3517224" y="610207"/>
+                  </a:lnTo>
+                  <a:lnTo>
+                    <a:pt x="3587569" y="613338"/>
+                  </a:lnTo>
+                  <a:lnTo>
+                    <a:pt x="3657913" y="616436"/>
+                  </a:lnTo>
+                  <a:lnTo>
+                    <a:pt x="3728257" y="619501"/>
+                  </a:lnTo>
+                  <a:lnTo>
+                    <a:pt x="3798602" y="622533"/>
+                  </a:lnTo>
+                  <a:lnTo>
+                    <a:pt x="3868946" y="625532"/>
+                  </a:lnTo>
+                  <a:lnTo>
+                    <a:pt x="3939291" y="628500"/>
+                  </a:lnTo>
+                  <a:lnTo>
+                    <a:pt x="4009635" y="631435"/>
+                  </a:lnTo>
+                  <a:lnTo>
+                    <a:pt x="4079980" y="634339"/>
+                  </a:lnTo>
+                  <a:lnTo>
+                    <a:pt x="4150324" y="637212"/>
+                  </a:lnTo>
+                  <a:lnTo>
+                    <a:pt x="4220669" y="640054"/>
+                  </a:lnTo>
+                  <a:lnTo>
+                    <a:pt x="4291013" y="642865"/>
+                  </a:lnTo>
+                  <a:lnTo>
+                    <a:pt x="4361358" y="645646"/>
+                  </a:lnTo>
+                  <a:lnTo>
+                    <a:pt x="4431702" y="648398"/>
+                  </a:lnTo>
+                  <a:lnTo>
+                    <a:pt x="4502047" y="651120"/>
+                  </a:lnTo>
+                  <a:lnTo>
+                    <a:pt x="4572391" y="653813"/>
+                  </a:lnTo>
+                  <a:lnTo>
+                    <a:pt x="4642736" y="656477"/>
+                  </a:lnTo>
+                  <a:lnTo>
+                    <a:pt x="4713080" y="659112"/>
+                  </a:lnTo>
+                  <a:lnTo>
+                    <a:pt x="4783425" y="661719"/>
+                  </a:lnTo>
+                  <a:lnTo>
+                    <a:pt x="4853769" y="664298"/>
+                  </a:lnTo>
+                  <a:lnTo>
+                    <a:pt x="4924114" y="666850"/>
+                  </a:lnTo>
+                  <a:lnTo>
+                    <a:pt x="4994458" y="669374"/>
+                  </a:lnTo>
+                  <a:lnTo>
+                    <a:pt x="5064803" y="671871"/>
+                  </a:lnTo>
+                  <a:lnTo>
+                    <a:pt x="5135147" y="674341"/>
+                  </a:lnTo>
+                  <a:lnTo>
+                    <a:pt x="5205492" y="676785"/>
+                  </a:lnTo>
+                  <a:lnTo>
+                    <a:pt x="5275836" y="679202"/>
+                  </a:lnTo>
+                  <a:lnTo>
+                    <a:pt x="5346181" y="681594"/>
+                  </a:lnTo>
+                  <a:lnTo>
+                    <a:pt x="5416525" y="683960"/>
+                  </a:lnTo>
+                  <a:lnTo>
+                    <a:pt x="5486870" y="686301"/>
+                  </a:lnTo>
+                  <a:lnTo>
+                    <a:pt x="5557214" y="688616"/>
+                  </a:lnTo>
+                  <a:lnTo>
+                    <a:pt x="5627559" y="690907"/>
+                  </a:lnTo>
+                  <a:lnTo>
+                    <a:pt x="5697903" y="693173"/>
+                  </a:lnTo>
+                  <a:lnTo>
+                    <a:pt x="5768248" y="695415"/>
+                  </a:lnTo>
+                  <a:lnTo>
+                    <a:pt x="5838592" y="697632"/>
+                  </a:lnTo>
+                  <a:lnTo>
+                    <a:pt x="5908937" y="699826"/>
+                  </a:lnTo>
+                  <a:lnTo>
+                    <a:pt x="5979281" y="701997"/>
+                  </a:lnTo>
+                  <a:lnTo>
+                    <a:pt x="6049626" y="704144"/>
+                  </a:lnTo>
+                  <a:lnTo>
+                    <a:pt x="6119970" y="706268"/>
+                  </a:lnTo>
+                  <a:lnTo>
+                    <a:pt x="6190315" y="708369"/>
+                  </a:lnTo>
+                  <a:lnTo>
+                    <a:pt x="6260659" y="710448"/>
+                  </a:lnTo>
+                  <a:lnTo>
+                    <a:pt x="6331004" y="712505"/>
+                  </a:lnTo>
+                  <a:lnTo>
+                    <a:pt x="6401348" y="714539"/>
+                  </a:lnTo>
+                  <a:lnTo>
+                    <a:pt x="6471693" y="716552"/>
+                  </a:lnTo>
+                  <a:lnTo>
+                    <a:pt x="6542037" y="718543"/>
+                  </a:lnTo>
+                  <a:lnTo>
+                    <a:pt x="6612382" y="720512"/>
+                  </a:lnTo>
+                  <a:lnTo>
+                    <a:pt x="6682726" y="722461"/>
+                  </a:lnTo>
+                  <a:lnTo>
+                    <a:pt x="6753071" y="724389"/>
+                  </a:lnTo>
+                  <a:lnTo>
+                    <a:pt x="6823415" y="726296"/>
+                  </a:lnTo>
+                  <a:lnTo>
+                    <a:pt x="6893760" y="728182"/>
+                  </a:lnTo>
+                  <a:lnTo>
+                    <a:pt x="6964104" y="730048"/>
+                  </a:lnTo>
+                  <a:lnTo>
+                    <a:pt x="6964104" y="810834"/>
+                  </a:lnTo>
+                  <a:lnTo>
+                    <a:pt x="6893760" y="808696"/>
+                  </a:lnTo>
+                  <a:lnTo>
+                    <a:pt x="6823415" y="806508"/>
+                  </a:lnTo>
+                  <a:lnTo>
+                    <a:pt x="6753071" y="804268"/>
+                  </a:lnTo>
+                  <a:lnTo>
+                    <a:pt x="6682726" y="801977"/>
+                  </a:lnTo>
+                  <a:lnTo>
+                    <a:pt x="6612382" y="799632"/>
+                  </a:lnTo>
+                  <a:lnTo>
+                    <a:pt x="6542037" y="797232"/>
+                  </a:lnTo>
+                  <a:lnTo>
+                    <a:pt x="6471693" y="794775"/>
+                  </a:lnTo>
+                  <a:lnTo>
+                    <a:pt x="6401348" y="792262"/>
+                  </a:lnTo>
+                  <a:lnTo>
+                    <a:pt x="6331004" y="789689"/>
+                  </a:lnTo>
+                  <a:lnTo>
+                    <a:pt x="6260659" y="787056"/>
+                  </a:lnTo>
+                  <a:lnTo>
+                    <a:pt x="6190315" y="784362"/>
+                  </a:lnTo>
+                  <a:lnTo>
+                    <a:pt x="6119970" y="781604"/>
+                  </a:lnTo>
+                  <a:lnTo>
+                    <a:pt x="6049626" y="778783"/>
+                  </a:lnTo>
+                  <a:lnTo>
+                    <a:pt x="5979281" y="775895"/>
+                  </a:lnTo>
+                  <a:lnTo>
+                    <a:pt x="5908937" y="772939"/>
+                  </a:lnTo>
+                  <a:lnTo>
+                    <a:pt x="5838592" y="769914"/>
+                  </a:lnTo>
+                  <a:lnTo>
+                    <a:pt x="5768248" y="766819"/>
+                  </a:lnTo>
+                  <a:lnTo>
+                    <a:pt x="5697903" y="763651"/>
+                  </a:lnTo>
+                  <a:lnTo>
+                    <a:pt x="5627559" y="760409"/>
+                  </a:lnTo>
+                  <a:lnTo>
+                    <a:pt x="5557214" y="757091"/>
+                  </a:lnTo>
+                  <a:lnTo>
+                    <a:pt x="5486870" y="753695"/>
+                  </a:lnTo>
+                  <a:lnTo>
+                    <a:pt x="5416525" y="750220"/>
+                  </a:lnTo>
+                  <a:lnTo>
+                    <a:pt x="5346181" y="746664"/>
+                  </a:lnTo>
+                  <a:lnTo>
+                    <a:pt x="5275836" y="743024"/>
+                  </a:lnTo>
+                  <a:lnTo>
+                    <a:pt x="5205492" y="739299"/>
+                  </a:lnTo>
+                  <a:lnTo>
+                    <a:pt x="5135147" y="735488"/>
+                  </a:lnTo>
+                  <a:lnTo>
+                    <a:pt x="5064803" y="731586"/>
+                  </a:lnTo>
+                  <a:lnTo>
+                    <a:pt x="4994458" y="727594"/>
+                  </a:lnTo>
+                  <a:lnTo>
+                    <a:pt x="4924114" y="723508"/>
+                  </a:lnTo>
+                  <a:lnTo>
+                    <a:pt x="4853769" y="719327"/>
+                  </a:lnTo>
+                  <a:lnTo>
+                    <a:pt x="4783425" y="715047"/>
+                  </a:lnTo>
+                  <a:lnTo>
+                    <a:pt x="4713080" y="710668"/>
+                  </a:lnTo>
+                  <a:lnTo>
+                    <a:pt x="4642736" y="706186"/>
+                  </a:lnTo>
+                  <a:lnTo>
+                    <a:pt x="4572391" y="701599"/>
+                  </a:lnTo>
+                  <a:lnTo>
+                    <a:pt x="4502047" y="696905"/>
+                  </a:lnTo>
+                  <a:lnTo>
+                    <a:pt x="4431702" y="692101"/>
+                  </a:lnTo>
+                  <a:lnTo>
+                    <a:pt x="4361358" y="687185"/>
+                  </a:lnTo>
+                  <a:lnTo>
+                    <a:pt x="4291013" y="682153"/>
+                  </a:lnTo>
+                  <a:lnTo>
+                    <a:pt x="4220669" y="677004"/>
+                  </a:lnTo>
+                  <a:lnTo>
+                    <a:pt x="4150324" y="671734"/>
+                  </a:lnTo>
+                  <a:lnTo>
+                    <a:pt x="4079980" y="666341"/>
+                  </a:lnTo>
+                  <a:lnTo>
+                    <a:pt x="4009635" y="660822"/>
+                  </a:lnTo>
+                  <a:lnTo>
+                    <a:pt x="3939291" y="655174"/>
+                  </a:lnTo>
+                  <a:lnTo>
+                    <a:pt x="3868946" y="649393"/>
+                  </a:lnTo>
+                  <a:lnTo>
+                    <a:pt x="3798602" y="643477"/>
+                  </a:lnTo>
+                  <a:lnTo>
+                    <a:pt x="3728257" y="637423"/>
+                  </a:lnTo>
+                  <a:lnTo>
+                    <a:pt x="3657913" y="631227"/>
+                  </a:lnTo>
+                  <a:lnTo>
+                    <a:pt x="3587569" y="624886"/>
+                  </a:lnTo>
+                  <a:lnTo>
+                    <a:pt x="3517224" y="618397"/>
+                  </a:lnTo>
+                  <a:lnTo>
+                    <a:pt x="3446880" y="611756"/>
+                  </a:lnTo>
+                  <a:lnTo>
+                    <a:pt x="3376535" y="604959"/>
+                  </a:lnTo>
+                  <a:lnTo>
+                    <a:pt x="3306191" y="600607"/>
+                  </a:lnTo>
+                  <a:lnTo>
+                    <a:pt x="3235846" y="597337"/>
+                  </a:lnTo>
+                  <a:lnTo>
+                    <a:pt x="3165502" y="594032"/>
+                  </a:lnTo>
+                  <a:lnTo>
+                    <a:pt x="3095157" y="590691"/>
+                  </a:lnTo>
+                  <a:lnTo>
+                    <a:pt x="3024813" y="587314"/>
+                  </a:lnTo>
+                  <a:lnTo>
+                    <a:pt x="2954468" y="583900"/>
+                  </a:lnTo>
+                  <a:lnTo>
+                    <a:pt x="2884124" y="580449"/>
+                  </a:lnTo>
+                  <a:lnTo>
+                    <a:pt x="2813779" y="576961"/>
+                  </a:lnTo>
+                  <a:lnTo>
+                    <a:pt x="2743435" y="573435"/>
+                  </a:lnTo>
+                  <a:lnTo>
+                    <a:pt x="2673090" y="569871"/>
+                  </a:lnTo>
+                  <a:lnTo>
+                    <a:pt x="2602746" y="566268"/>
+                  </a:lnTo>
+                  <a:lnTo>
+                    <a:pt x="2532401" y="562626"/>
+                  </a:lnTo>
+                  <a:lnTo>
+                    <a:pt x="2462057" y="558945"/>
+                  </a:lnTo>
+                  <a:lnTo>
+                    <a:pt x="2391712" y="555224"/>
+                  </a:lnTo>
+                  <a:lnTo>
+                    <a:pt x="2321368" y="551462"/>
+                  </a:lnTo>
+                  <a:lnTo>
+                    <a:pt x="2251023" y="547660"/>
+                  </a:lnTo>
+                  <a:lnTo>
+                    <a:pt x="2180679" y="543816"/>
+                  </a:lnTo>
+                  <a:lnTo>
+                    <a:pt x="2110334" y="539931"/>
+                  </a:lnTo>
+                  <a:lnTo>
+                    <a:pt x="2039990" y="536003"/>
+                  </a:lnTo>
+                  <a:lnTo>
+                    <a:pt x="1969645" y="532033"/>
+                  </a:lnTo>
+                  <a:lnTo>
+                    <a:pt x="1899301" y="528020"/>
+                  </a:lnTo>
+                  <a:lnTo>
+                    <a:pt x="1828956" y="523964"/>
+                  </a:lnTo>
+                  <a:lnTo>
+                    <a:pt x="1758612" y="519863"/>
+                  </a:lnTo>
+                  <a:lnTo>
+                    <a:pt x="1688267" y="515718"/>
+                  </a:lnTo>
+                  <a:lnTo>
+                    <a:pt x="1617923" y="511528"/>
+                  </a:lnTo>
+                  <a:lnTo>
+                    <a:pt x="1547578" y="507293"/>
+                  </a:lnTo>
+                  <a:lnTo>
+                    <a:pt x="1477234" y="503012"/>
+                  </a:lnTo>
+                  <a:lnTo>
+                    <a:pt x="1406889" y="498684"/>
+                  </a:lnTo>
+                  <a:lnTo>
+                    <a:pt x="1336545" y="494309"/>
+                  </a:lnTo>
+                  <a:lnTo>
+                    <a:pt x="1266200" y="489887"/>
+                  </a:lnTo>
+                  <a:lnTo>
+                    <a:pt x="1195856" y="485417"/>
+                  </a:lnTo>
+                  <a:lnTo>
+                    <a:pt x="1125511" y="480899"/>
+                  </a:lnTo>
+                  <a:lnTo>
+                    <a:pt x="1055167" y="476331"/>
+                  </a:lnTo>
+                  <a:lnTo>
+                    <a:pt x="984822" y="471714"/>
+                  </a:lnTo>
+                  <a:lnTo>
+                    <a:pt x="914478" y="467047"/>
+                  </a:lnTo>
+                  <a:lnTo>
+                    <a:pt x="844133" y="462330"/>
+                  </a:lnTo>
+                  <a:lnTo>
+                    <a:pt x="773789" y="457561"/>
+                  </a:lnTo>
+                  <a:lnTo>
+                    <a:pt x="703444" y="452741"/>
+                  </a:lnTo>
+                  <a:lnTo>
+                    <a:pt x="633100" y="447868"/>
+                  </a:lnTo>
+                  <a:lnTo>
+                    <a:pt x="562755" y="442942"/>
+                  </a:lnTo>
+                  <a:lnTo>
+                    <a:pt x="492411" y="437964"/>
+                  </a:lnTo>
+                  <a:lnTo>
+                    <a:pt x="422066" y="432931"/>
+                  </a:lnTo>
+                  <a:lnTo>
+                    <a:pt x="351722" y="427843"/>
+                  </a:lnTo>
+                  <a:lnTo>
+                    <a:pt x="281377" y="422701"/>
+                  </a:lnTo>
+                  <a:lnTo>
+                    <a:pt x="211033" y="417502"/>
+                  </a:lnTo>
+                  <a:lnTo>
+                    <a:pt x="140688" y="412247"/>
+                  </a:lnTo>
+                  <a:lnTo>
+                    <a:pt x="70344" y="406936"/>
+                  </a:lnTo>
+                  <a:lnTo>
+                    <a:pt x="0" y="401567"/>
+                  </a:lnTo>
+                  <a:close/>
+                </a:path>
+              </a:pathLst>
+            </a:custGeom>
+            <a:solidFill>
+              <a:srgbClr val="FF8C00">
+                <a:alpha val="20000"/>
+              </a:srgbClr>
+            </a:solidFill>
+          </p:spPr>
+          <p:txBody>
+            <a:bodyPr/>
+            <a:lstStyle/>
+            <a:p/>
+          </p:txBody>
+        </p:sp>
+        <p:sp>
+          <p:nvSpPr>
+            <p:cNvPr id="67" name="pl67"/>
+            <p:cNvSpPr/>
+            <p:nvPr/>
+          </p:nvSpPr>
+          <p:spPr>
+            <a:xfrm>
+              <a:off x="1235312" y="4691491"/>
+              <a:ext cx="6964104" cy="730048"/>
+            </a:xfrm>
+            <a:custGeom>
+              <a:avLst/>
+              <a:pathLst>
+                <a:path w="6964104" h="730048">
+                  <a:moveTo>
+                    <a:pt x="0" y="0"/>
+                  </a:moveTo>
+                  <a:lnTo>
+                    <a:pt x="70344" y="20629"/>
+                  </a:lnTo>
+                  <a:lnTo>
+                    <a:pt x="140688" y="40787"/>
+                  </a:lnTo>
+                  <a:lnTo>
+                    <a:pt x="211033" y="60484"/>
+                  </a:lnTo>
+                  <a:lnTo>
+                    <a:pt x="281377" y="79730"/>
+                  </a:lnTo>
+                  <a:lnTo>
+                    <a:pt x="351722" y="98537"/>
+                  </a:lnTo>
+                  <a:lnTo>
+                    <a:pt x="422066" y="116913"/>
+                  </a:lnTo>
+                  <a:lnTo>
+                    <a:pt x="492411" y="134869"/>
+                  </a:lnTo>
+                  <a:lnTo>
+                    <a:pt x="562755" y="152415"/>
+                  </a:lnTo>
+                  <a:lnTo>
+                    <a:pt x="633100" y="169559"/>
+                  </a:lnTo>
+                  <a:lnTo>
+                    <a:pt x="703444" y="186311"/>
+                  </a:lnTo>
+                  <a:lnTo>
+                    <a:pt x="773789" y="202681"/>
+                  </a:lnTo>
+                  <a:lnTo>
+                    <a:pt x="844133" y="218676"/>
+                  </a:lnTo>
+                  <a:lnTo>
+                    <a:pt x="914478" y="234305"/>
+                  </a:lnTo>
+                  <a:lnTo>
+                    <a:pt x="984822" y="249577"/>
+                  </a:lnTo>
+                  <a:lnTo>
+                    <a:pt x="1055167" y="264500"/>
+                  </a:lnTo>
+                  <a:lnTo>
+                    <a:pt x="1125511" y="279081"/>
+                  </a:lnTo>
+                  <a:lnTo>
+                    <a:pt x="1195856" y="293329"/>
+                  </a:lnTo>
+                  <a:lnTo>
+                    <a:pt x="1266200" y="307251"/>
+                  </a:lnTo>
+                  <a:lnTo>
+                    <a:pt x="1336545" y="320855"/>
+                  </a:lnTo>
+                  <a:lnTo>
+                    <a:pt x="1406889" y="334148"/>
+                  </a:lnTo>
+                  <a:lnTo>
+                    <a:pt x="1477234" y="347137"/>
+                  </a:lnTo>
+                  <a:lnTo>
+                    <a:pt x="1547578" y="359829"/>
+                  </a:lnTo>
+                  <a:lnTo>
+                    <a:pt x="1617923" y="372231"/>
+                  </a:lnTo>
+                  <a:lnTo>
+                    <a:pt x="1688267" y="384349"/>
+                  </a:lnTo>
+                  <a:lnTo>
+                    <a:pt x="1758612" y="396190"/>
+                  </a:lnTo>
+                  <a:lnTo>
+                    <a:pt x="1828956" y="407760"/>
+                  </a:lnTo>
+                  <a:lnTo>
+                    <a:pt x="1899301" y="419066"/>
+                  </a:lnTo>
+                  <a:lnTo>
+                    <a:pt x="1969645" y="430113"/>
+                  </a:lnTo>
+                  <a:lnTo>
+                    <a:pt x="2039990" y="440908"/>
+                  </a:lnTo>
+                  <a:lnTo>
+                    <a:pt x="2110334" y="451455"/>
+                  </a:lnTo>
+                  <a:lnTo>
+                    <a:pt x="2180679" y="461762"/>
+                  </a:lnTo>
+                  <a:lnTo>
+                    <a:pt x="2251023" y="471833"/>
+                  </a:lnTo>
+                  <a:lnTo>
+                    <a:pt x="2321368" y="481673"/>
+                  </a:lnTo>
+                  <a:lnTo>
+                    <a:pt x="2391712" y="491289"/>
+                  </a:lnTo>
+                  <a:lnTo>
+                    <a:pt x="2462057" y="500685"/>
+                  </a:lnTo>
+                  <a:lnTo>
+                    <a:pt x="2532401" y="509866"/>
+                  </a:lnTo>
+                  <a:lnTo>
+                    <a:pt x="2602746" y="518837"/>
+                  </a:lnTo>
+                  <a:lnTo>
+                    <a:pt x="2673090" y="527602"/>
+                  </a:lnTo>
+                  <a:lnTo>
+                    <a:pt x="2743435" y="536168"/>
+                  </a:lnTo>
+                  <a:lnTo>
+                    <a:pt x="2813779" y="544537"/>
+                  </a:lnTo>
+                  <a:lnTo>
+                    <a:pt x="2884124" y="552716"/>
+                  </a:lnTo>
+                  <a:lnTo>
+                    <a:pt x="2954468" y="560707"/>
+                  </a:lnTo>
+                  <a:lnTo>
+                    <a:pt x="3024813" y="568515"/>
+                  </a:lnTo>
+                  <a:lnTo>
+                    <a:pt x="3095157" y="576145"/>
+                  </a:lnTo>
+                  <a:lnTo>
+                    <a:pt x="3165502" y="583600"/>
+                  </a:lnTo>
+                  <a:lnTo>
+                    <a:pt x="3235846" y="590885"/>
+                  </a:lnTo>
+                  <a:lnTo>
+                    <a:pt x="3306191" y="598004"/>
+                  </a:lnTo>
+                  <a:lnTo>
+                    <a:pt x="3376535" y="603841"/>
+                  </a:lnTo>
+                  <a:lnTo>
+                    <a:pt x="3446880" y="607041"/>
+                  </a:lnTo>
+                  <a:lnTo>
+                    <a:pt x="3517224" y="610207"/>
+                  </a:lnTo>
+                  <a:lnTo>
+                    <a:pt x="3587569" y="613338"/>
+                  </a:lnTo>
+                  <a:lnTo>
+                    <a:pt x="3657913" y="616436"/>
+                  </a:lnTo>
+                  <a:lnTo>
+                    <a:pt x="3728257" y="619501"/>
+                  </a:lnTo>
+                  <a:lnTo>
+                    <a:pt x="3798602" y="622533"/>
+                  </a:lnTo>
+                  <a:lnTo>
+                    <a:pt x="3868946" y="625532"/>
+                  </a:lnTo>
+                  <a:lnTo>
+                    <a:pt x="3939291" y="628500"/>
+                  </a:lnTo>
+                  <a:lnTo>
+                    <a:pt x="4009635" y="631435"/>
+                  </a:lnTo>
+                  <a:lnTo>
+                    <a:pt x="4079980" y="634339"/>
+                  </a:lnTo>
+                  <a:lnTo>
+                    <a:pt x="4150324" y="637212"/>
+                  </a:lnTo>
+                  <a:lnTo>
+                    <a:pt x="4220669" y="640054"/>
+                  </a:lnTo>
+                  <a:lnTo>
+                    <a:pt x="4291013" y="642865"/>
+                  </a:lnTo>
+                  <a:lnTo>
+                    <a:pt x="4361358" y="645646"/>
+                  </a:lnTo>
+                  <a:lnTo>
+                    <a:pt x="4431702" y="648398"/>
+                  </a:lnTo>
+                  <a:lnTo>
+                    <a:pt x="4502047" y="651120"/>
+                  </a:lnTo>
+                  <a:lnTo>
+                    <a:pt x="4572391" y="653813"/>
+                  </a:lnTo>
+                  <a:lnTo>
+                    <a:pt x="4642736" y="656477"/>
+                  </a:lnTo>
+                  <a:lnTo>
+                    <a:pt x="4713080" y="659112"/>
+                  </a:lnTo>
+                  <a:lnTo>
+                    <a:pt x="4783425" y="661719"/>
+                  </a:lnTo>
+                  <a:lnTo>
+                    <a:pt x="4853769" y="664298"/>
+                  </a:lnTo>
+                  <a:lnTo>
+                    <a:pt x="4924114" y="666850"/>
+                  </a:lnTo>
+                  <a:lnTo>
+                    <a:pt x="4994458" y="669374"/>
+                  </a:lnTo>
+                  <a:lnTo>
+                    <a:pt x="5064803" y="671871"/>
+                  </a:lnTo>
+                  <a:lnTo>
+                    <a:pt x="5135147" y="674341"/>
+                  </a:lnTo>
+                  <a:lnTo>
+                    <a:pt x="5205492" y="676785"/>
+                  </a:lnTo>
+                  <a:lnTo>
+                    <a:pt x="5275836" y="679202"/>
+                  </a:lnTo>
+                  <a:lnTo>
+                    <a:pt x="5346181" y="681594"/>
+                  </a:lnTo>
+                  <a:lnTo>
+                    <a:pt x="5416525" y="683960"/>
+                  </a:lnTo>
+                  <a:lnTo>
+                    <a:pt x="5486870" y="686301"/>
+                  </a:lnTo>
+                  <a:lnTo>
+                    <a:pt x="5557214" y="688616"/>
+                  </a:lnTo>
+                  <a:lnTo>
+                    <a:pt x="5627559" y="690907"/>
+                  </a:lnTo>
+                  <a:lnTo>
+                    <a:pt x="5697903" y="693173"/>
+                  </a:lnTo>
+                  <a:lnTo>
+                    <a:pt x="5768248" y="695415"/>
+                  </a:lnTo>
+                  <a:lnTo>
+                    <a:pt x="5838592" y="697632"/>
+                  </a:lnTo>
+                  <a:lnTo>
+                    <a:pt x="5908937" y="699826"/>
+                  </a:lnTo>
+                  <a:lnTo>
+                    <a:pt x="5979281" y="701997"/>
+                  </a:lnTo>
+                  <a:lnTo>
+                    <a:pt x="6049626" y="704144"/>
+                  </a:lnTo>
+                  <a:lnTo>
+                    <a:pt x="6119970" y="706268"/>
+                  </a:lnTo>
+                  <a:lnTo>
+                    <a:pt x="6190315" y="708369"/>
+                  </a:lnTo>
+                  <a:lnTo>
+                    <a:pt x="6260659" y="710448"/>
+                  </a:lnTo>
+                  <a:lnTo>
+                    <a:pt x="6331004" y="712505"/>
+                  </a:lnTo>
+                  <a:lnTo>
+                    <a:pt x="6401348" y="714539"/>
+                  </a:lnTo>
+                  <a:lnTo>
+                    <a:pt x="6471693" y="716552"/>
+                  </a:lnTo>
+                  <a:lnTo>
+                    <a:pt x="6542037" y="718543"/>
+                  </a:lnTo>
+                  <a:lnTo>
+                    <a:pt x="6612382" y="720512"/>
+                  </a:lnTo>
+                  <a:lnTo>
+                    <a:pt x="6682726" y="722461"/>
+                  </a:lnTo>
+                  <a:lnTo>
+                    <a:pt x="6753071" y="724389"/>
+                  </a:lnTo>
+                  <a:lnTo>
+                    <a:pt x="6823415" y="726296"/>
+                  </a:lnTo>
+                  <a:lnTo>
+                    <a:pt x="6893760" y="728182"/>
+                  </a:lnTo>
+                  <a:lnTo>
+                    <a:pt x="6964104" y="730048"/>
+                  </a:lnTo>
+                </a:path>
+              </a:pathLst>
+            </a:custGeom>
+          </p:spPr>
+          <p:txBody>
+            <a:bodyPr/>
+            <a:lstStyle/>
+            <a:p/>
+          </p:txBody>
+        </p:sp>
+        <p:sp>
+          <p:nvSpPr>
+            <p:cNvPr id="68" name="pl68"/>
+            <p:cNvSpPr/>
+            <p:nvPr/>
+          </p:nvSpPr>
+          <p:spPr>
+            <a:xfrm>
+              <a:off x="1235312" y="5093058"/>
+              <a:ext cx="6964104" cy="409267"/>
+            </a:xfrm>
+            <a:custGeom>
+              <a:avLst/>
+              <a:pathLst>
+                <a:path w="6964104" h="409267">
+                  <a:moveTo>
+                    <a:pt x="6964104" y="409267"/>
+                  </a:moveTo>
+                  <a:lnTo>
+                    <a:pt x="6893760" y="407129"/>
+                  </a:lnTo>
+                  <a:lnTo>
+                    <a:pt x="6823415" y="404941"/>
+                  </a:lnTo>
+                  <a:lnTo>
+                    <a:pt x="6753071" y="402701"/>
+                  </a:lnTo>
+                  <a:lnTo>
+                    <a:pt x="6682726" y="400410"/>
+                  </a:lnTo>
+                  <a:lnTo>
+                    <a:pt x="6612382" y="398065"/>
+                  </a:lnTo>
+                  <a:lnTo>
+                    <a:pt x="6542037" y="395665"/>
+                  </a:lnTo>
+                  <a:lnTo>
+                    <a:pt x="6471693" y="393208"/>
+                  </a:lnTo>
+                  <a:lnTo>
+                    <a:pt x="6401348" y="390695"/>
+                  </a:lnTo>
+                  <a:lnTo>
+                    <a:pt x="6331004" y="388122"/>
+                  </a:lnTo>
+                  <a:lnTo>
+                    <a:pt x="6260659" y="385489"/>
+                  </a:lnTo>
+                  <a:lnTo>
+                    <a:pt x="6190315" y="382795"/>
+                  </a:lnTo>
+                  <a:lnTo>
+                    <a:pt x="6119970" y="380037"/>
+                  </a:lnTo>
+                  <a:lnTo>
+                    <a:pt x="6049626" y="377216"/>
+                  </a:lnTo>
+                  <a:lnTo>
+                    <a:pt x="5979281" y="374328"/>
+                  </a:lnTo>
+                  <a:lnTo>
+                    <a:pt x="5908937" y="371372"/>
+                  </a:lnTo>
+                  <a:lnTo>
+                    <a:pt x="5838592" y="368347"/>
+                  </a:lnTo>
+                  <a:lnTo>
+                    <a:pt x="5768248" y="365252"/>
+                  </a:lnTo>
+                  <a:lnTo>
+                    <a:pt x="5697903" y="362084"/>
+                  </a:lnTo>
+                  <a:lnTo>
+                    <a:pt x="5627559" y="358842"/>
+                  </a:lnTo>
+                  <a:lnTo>
+                    <a:pt x="5557214" y="355524"/>
+                  </a:lnTo>
+                  <a:lnTo>
+                    <a:pt x="5486870" y="352128"/>
+                  </a:lnTo>
+                  <a:lnTo>
+                    <a:pt x="5416525" y="348653"/>
+                  </a:lnTo>
+                  <a:lnTo>
+                    <a:pt x="5346181" y="345097"/>
+                  </a:lnTo>
+                  <a:lnTo>
+                    <a:pt x="5275836" y="341457"/>
+                  </a:lnTo>
+                  <a:lnTo>
+                    <a:pt x="5205492" y="337732"/>
+                  </a:lnTo>
+                  <a:lnTo>
+                    <a:pt x="5135147" y="333921"/>
+                  </a:lnTo>
+                  <a:lnTo>
+                    <a:pt x="5064803" y="330019"/>
+                  </a:lnTo>
+                  <a:lnTo>
+                    <a:pt x="4994458" y="326027"/>
+                  </a:lnTo>
+                  <a:lnTo>
+                    <a:pt x="4924114" y="321941"/>
+                  </a:lnTo>
+                  <a:lnTo>
+                    <a:pt x="4853769" y="317760"/>
+                  </a:lnTo>
+                  <a:lnTo>
+                    <a:pt x="4783425" y="313480"/>
+                  </a:lnTo>
+                  <a:lnTo>
+                    <a:pt x="4713080" y="309101"/>
+                  </a:lnTo>
+                  <a:lnTo>
+                    <a:pt x="4642736" y="304619"/>
+                  </a:lnTo>
+                  <a:lnTo>
+                    <a:pt x="4572391" y="300032"/>
+                  </a:lnTo>
+                  <a:lnTo>
+                    <a:pt x="4502047" y="295338"/>
+                  </a:lnTo>
+                  <a:lnTo>
+                    <a:pt x="4431702" y="290534"/>
+                  </a:lnTo>
+                  <a:lnTo>
+                    <a:pt x="4361358" y="285618"/>
+                  </a:lnTo>
+                  <a:lnTo>
+                    <a:pt x="4291013" y="280586"/>
+                  </a:lnTo>
+                  <a:lnTo>
+                    <a:pt x="4220669" y="275437"/>
+                  </a:lnTo>
+                  <a:lnTo>
+                    <a:pt x="4150324" y="270167"/>
+                  </a:lnTo>
+                  <a:lnTo>
+                    <a:pt x="4079980" y="264774"/>
+                  </a:lnTo>
+                  <a:lnTo>
+                    <a:pt x="4009635" y="259255"/>
+                  </a:lnTo>
+                  <a:lnTo>
+                    <a:pt x="3939291" y="253607"/>
+                  </a:lnTo>
+                  <a:lnTo>
+                    <a:pt x="3868946" y="247826"/>
+                  </a:lnTo>
+                  <a:lnTo>
+                    <a:pt x="3798602" y="241910"/>
+                  </a:lnTo>
+                  <a:lnTo>
+                    <a:pt x="3728257" y="235856"/>
+                  </a:lnTo>
+                  <a:lnTo>
+                    <a:pt x="3657913" y="229660"/>
+                  </a:lnTo>
+                  <a:lnTo>
+                    <a:pt x="3587569" y="223319"/>
+                  </a:lnTo>
+                  <a:lnTo>
+                    <a:pt x="3517224" y="216830"/>
+                  </a:lnTo>
+                  <a:lnTo>
+                    <a:pt x="3446880" y="210189"/>
+                  </a:lnTo>
+                  <a:lnTo>
+                    <a:pt x="3376535" y="203392"/>
+                  </a:lnTo>
+                  <a:lnTo>
+                    <a:pt x="3306191" y="199040"/>
+                  </a:lnTo>
+                  <a:lnTo>
+                    <a:pt x="3235846" y="195770"/>
+                  </a:lnTo>
+                  <a:lnTo>
+                    <a:pt x="3165502" y="192465"/>
+                  </a:lnTo>
+                  <a:lnTo>
+                    <a:pt x="3095157" y="189124"/>
+                  </a:lnTo>
+                  <a:lnTo>
+                    <a:pt x="3024813" y="185747"/>
+                  </a:lnTo>
+                  <a:lnTo>
+                    <a:pt x="2954468" y="182333"/>
+                  </a:lnTo>
+                  <a:lnTo>
+                    <a:pt x="2884124" y="178882"/>
+                  </a:lnTo>
+                  <a:lnTo>
+                    <a:pt x="2813779" y="175394"/>
+                  </a:lnTo>
+                  <a:lnTo>
+                    <a:pt x="2743435" y="171868"/>
+                  </a:lnTo>
+                  <a:lnTo>
+                    <a:pt x="2673090" y="168304"/>
+                  </a:lnTo>
+                  <a:lnTo>
+                    <a:pt x="2602746" y="164701"/>
+                  </a:lnTo>
+                  <a:lnTo>
+                    <a:pt x="2532401" y="161059"/>
+                  </a:lnTo>
+                  <a:lnTo>
+                    <a:pt x="2462057" y="157378"/>
+                  </a:lnTo>
+                  <a:lnTo>
+                    <a:pt x="2391712" y="153657"/>
+                  </a:lnTo>
+                  <a:lnTo>
+                    <a:pt x="2321368" y="149895"/>
+                  </a:lnTo>
+                  <a:lnTo>
+                    <a:pt x="2251023" y="146093"/>
+                  </a:lnTo>
+                  <a:lnTo>
+                    <a:pt x="2180679" y="142249"/>
+                  </a:lnTo>
+                  <a:lnTo>
+                    <a:pt x="2110334" y="138364"/>
+                  </a:lnTo>
+                  <a:lnTo>
+                    <a:pt x="2039990" y="134436"/>
+                  </a:lnTo>
+                  <a:lnTo>
+                    <a:pt x="1969645" y="130466"/>
+                  </a:lnTo>
+                  <a:lnTo>
+                    <a:pt x="1899301" y="126453"/>
+                  </a:lnTo>
+                  <a:lnTo>
+                    <a:pt x="1828956" y="122397"/>
+                  </a:lnTo>
+                  <a:lnTo>
+                    <a:pt x="1758612" y="118296"/>
+                  </a:lnTo>
+                  <a:lnTo>
+                    <a:pt x="1688267" y="114151"/>
+                  </a:lnTo>
+                  <a:lnTo>
+                    <a:pt x="1617923" y="109961"/>
+                  </a:lnTo>
+                  <a:lnTo>
+                    <a:pt x="1547578" y="105726"/>
+                  </a:lnTo>
+                  <a:lnTo>
+                    <a:pt x="1477234" y="101445"/>
+                  </a:lnTo>
+                  <a:lnTo>
+                    <a:pt x="1406889" y="97117"/>
+                  </a:lnTo>
+                  <a:lnTo>
+                    <a:pt x="1336545" y="92742"/>
+                  </a:lnTo>
+                  <a:lnTo>
+                    <a:pt x="1266200" y="88320"/>
+                  </a:lnTo>
+                  <a:lnTo>
+                    <a:pt x="1195856" y="83850"/>
+                  </a:lnTo>
+                  <a:lnTo>
+                    <a:pt x="1125511" y="79332"/>
+                  </a:lnTo>
+                  <a:lnTo>
+                    <a:pt x="1055167" y="74764"/>
+                  </a:lnTo>
+                  <a:lnTo>
+                    <a:pt x="984822" y="70147"/>
+                  </a:lnTo>
+                  <a:lnTo>
+                    <a:pt x="914478" y="65480"/>
+                  </a:lnTo>
+                  <a:lnTo>
+                    <a:pt x="844133" y="60763"/>
+                  </a:lnTo>
+                  <a:lnTo>
+                    <a:pt x="773789" y="55994"/>
+                  </a:lnTo>
+                  <a:lnTo>
+                    <a:pt x="703444" y="51174"/>
+                  </a:lnTo>
+                  <a:lnTo>
+                    <a:pt x="633100" y="46301"/>
+                  </a:lnTo>
+                  <a:lnTo>
+                    <a:pt x="562755" y="41375"/>
+                  </a:lnTo>
+                  <a:lnTo>
+                    <a:pt x="492411" y="36397"/>
+                  </a:lnTo>
+                  <a:lnTo>
+                    <a:pt x="422066" y="31364"/>
+                  </a:lnTo>
+                  <a:lnTo>
+                    <a:pt x="351722" y="26276"/>
+                  </a:lnTo>
+                  <a:lnTo>
+                    <a:pt x="281377" y="21134"/>
+                  </a:lnTo>
+                  <a:lnTo>
+                    <a:pt x="211033" y="15935"/>
+                  </a:lnTo>
+                  <a:lnTo>
+                    <a:pt x="140688" y="10680"/>
+                  </a:lnTo>
+                  <a:lnTo>
+                    <a:pt x="70344" y="5369"/>
+                  </a:lnTo>
+                  <a:lnTo>
+                    <a:pt x="0" y="0"/>
+                  </a:lnTo>
+                </a:path>
+              </a:pathLst>
+            </a:custGeom>
+          </p:spPr>
+          <p:txBody>
+            <a:bodyPr/>
+            <a:lstStyle/>
+            <a:p/>
+          </p:txBody>
+        </p:sp>
+        <p:sp>
+          <p:nvSpPr>
+            <p:cNvPr id="69" name="pl69"/>
+            <p:cNvSpPr/>
+            <p:nvPr/>
+          </p:nvSpPr>
+          <p:spPr>
+            <a:xfrm>
+              <a:off x="1235312" y="4921626"/>
+              <a:ext cx="6964104" cy="546650"/>
+            </a:xfrm>
+            <a:custGeom>
+              <a:avLst/>
+              <a:pathLst>
+                <a:path w="6964104" h="546650">
+                  <a:moveTo>
+                    <a:pt x="0" y="0"/>
+                  </a:moveTo>
+                  <a:lnTo>
+                    <a:pt x="70344" y="11300"/>
+                  </a:lnTo>
+                  <a:lnTo>
+                    <a:pt x="140688" y="22410"/>
+                  </a:lnTo>
+                  <a:lnTo>
+                    <a:pt x="211033" y="33333"/>
+                  </a:lnTo>
+                  <a:lnTo>
+                    <a:pt x="281377" y="44073"/>
+                  </a:lnTo>
+                  <a:lnTo>
+                    <a:pt x="351722" y="54632"/>
+                  </a:lnTo>
+                  <a:lnTo>
+                    <a:pt x="422066" y="65014"/>
+                  </a:lnTo>
+                  <a:lnTo>
+                    <a:pt x="492411" y="75221"/>
+                  </a:lnTo>
+                  <a:lnTo>
+                    <a:pt x="562755" y="85256"/>
+                  </a:lnTo>
+                  <a:lnTo>
+                    <a:pt x="633100" y="95123"/>
+                  </a:lnTo>
+                  <a:lnTo>
+                    <a:pt x="703444" y="104823"/>
+                  </a:lnTo>
+                  <a:lnTo>
+                    <a:pt x="773789" y="114361"/>
+                  </a:lnTo>
+                  <a:lnTo>
+                    <a:pt x="844133" y="123738"/>
+                  </a:lnTo>
+                  <a:lnTo>
+                    <a:pt x="914478" y="132958"/>
+                  </a:lnTo>
+                  <a:lnTo>
+                    <a:pt x="984822" y="142022"/>
+                  </a:lnTo>
+                  <a:lnTo>
+                    <a:pt x="1055167" y="150935"/>
+                  </a:lnTo>
+                  <a:lnTo>
+                    <a:pt x="1125511" y="159697"/>
+                  </a:lnTo>
+                  <a:lnTo>
+                    <a:pt x="1195856" y="168312"/>
+                  </a:lnTo>
+                  <a:lnTo>
+                    <a:pt x="1266200" y="176782"/>
+                  </a:lnTo>
+                  <a:lnTo>
+                    <a:pt x="1336545" y="185110"/>
+                  </a:lnTo>
+                  <a:lnTo>
+                    <a:pt x="1406889" y="193297"/>
+                  </a:lnTo>
+                  <a:lnTo>
+                    <a:pt x="1477234" y="201347"/>
+                  </a:lnTo>
+                  <a:lnTo>
+                    <a:pt x="1547578" y="209262"/>
+                  </a:lnTo>
+                  <a:lnTo>
+                    <a:pt x="1617923" y="217044"/>
+                  </a:lnTo>
+                  <a:lnTo>
+                    <a:pt x="1688267" y="224694"/>
+                  </a:lnTo>
+                  <a:lnTo>
+                    <a:pt x="1758612" y="232217"/>
+                  </a:lnTo>
+                  <a:lnTo>
+                    <a:pt x="1828956" y="239612"/>
+                  </a:lnTo>
+                  <a:lnTo>
+                    <a:pt x="1899301" y="246883"/>
+                  </a:lnTo>
+                  <a:lnTo>
+                    <a:pt x="1969645" y="254032"/>
+                  </a:lnTo>
+                  <a:lnTo>
+                    <a:pt x="2039990" y="261061"/>
+                  </a:lnTo>
+                  <a:lnTo>
+                    <a:pt x="2110334" y="267972"/>
+                  </a:lnTo>
+                  <a:lnTo>
+                    <a:pt x="2180679" y="274766"/>
+                  </a:lnTo>
+                  <a:lnTo>
+                    <a:pt x="2251023" y="281446"/>
+                  </a:lnTo>
+                  <a:lnTo>
+                    <a:pt x="2321368" y="288014"/>
+                  </a:lnTo>
+                  <a:lnTo>
+                    <a:pt x="2391712" y="294472"/>
+                  </a:lnTo>
+                  <a:lnTo>
+                    <a:pt x="2462057" y="300821"/>
+                  </a:lnTo>
+                  <a:lnTo>
+                    <a:pt x="2532401" y="307063"/>
+                  </a:lnTo>
+                  <a:lnTo>
+                    <a:pt x="2602746" y="313200"/>
+                  </a:lnTo>
+                  <a:lnTo>
+                    <a:pt x="2673090" y="319234"/>
+                  </a:lnTo>
+                  <a:lnTo>
+                    <a:pt x="2743435" y="325166"/>
+                  </a:lnTo>
+                  <a:lnTo>
+                    <a:pt x="2813779" y="330999"/>
+                  </a:lnTo>
+                  <a:lnTo>
+                    <a:pt x="2884124" y="336734"/>
+                  </a:lnTo>
+                  <a:lnTo>
+                    <a:pt x="2954468" y="342372"/>
+                  </a:lnTo>
+                  <a:lnTo>
+                    <a:pt x="3024813" y="347915"/>
+                  </a:lnTo>
+                  <a:lnTo>
+                    <a:pt x="3095157" y="353366"/>
+                  </a:lnTo>
+                  <a:lnTo>
+                    <a:pt x="3165502" y="358724"/>
+                  </a:lnTo>
+                  <a:lnTo>
+                    <a:pt x="3235846" y="363993"/>
+                  </a:lnTo>
+                  <a:lnTo>
+                    <a:pt x="3306191" y="369173"/>
+                  </a:lnTo>
+                  <a:lnTo>
+                    <a:pt x="3376535" y="374265"/>
+                  </a:lnTo>
+                  <a:lnTo>
+                    <a:pt x="3446880" y="379273"/>
+                  </a:lnTo>
+                  <a:lnTo>
+                    <a:pt x="3517224" y="384196"/>
+                  </a:lnTo>
+                  <a:lnTo>
+                    <a:pt x="3587569" y="389036"/>
+                  </a:lnTo>
+                  <a:lnTo>
+                    <a:pt x="3657913" y="393795"/>
+                  </a:lnTo>
+                  <a:lnTo>
+                    <a:pt x="3728257" y="398473"/>
+                  </a:lnTo>
+                  <a:lnTo>
+                    <a:pt x="3798602" y="403074"/>
+                  </a:lnTo>
+                  <a:lnTo>
+                    <a:pt x="3868946" y="407596"/>
+                  </a:lnTo>
+                  <a:lnTo>
+                    <a:pt x="3939291" y="412043"/>
+                  </a:lnTo>
+                  <a:lnTo>
+                    <a:pt x="4009635" y="416415"/>
+                  </a:lnTo>
+                  <a:lnTo>
+                    <a:pt x="4079980" y="420714"/>
+                  </a:lnTo>
+                  <a:lnTo>
+                    <a:pt x="4150324" y="424940"/>
+                  </a:lnTo>
+                  <a:lnTo>
+                    <a:pt x="4220669" y="429095"/>
+                  </a:lnTo>
+                  <a:lnTo>
+                    <a:pt x="4291013" y="433180"/>
+                  </a:lnTo>
+                  <a:lnTo>
+                    <a:pt x="4361358" y="437197"/>
+                  </a:lnTo>
+                  <a:lnTo>
+                    <a:pt x="4431702" y="441146"/>
+                  </a:lnTo>
+                  <a:lnTo>
+                    <a:pt x="4502047" y="445028"/>
+                  </a:lnTo>
+                  <a:lnTo>
+                    <a:pt x="4572391" y="448846"/>
+                  </a:lnTo>
+                  <a:lnTo>
+                    <a:pt x="4642736" y="452599"/>
+                  </a:lnTo>
+                  <a:lnTo>
+                    <a:pt x="4713080" y="456289"/>
+                  </a:lnTo>
+                  <a:lnTo>
+                    <a:pt x="4783425" y="459917"/>
+                  </a:lnTo>
+                  <a:lnTo>
+                    <a:pt x="4853769" y="463484"/>
+                  </a:lnTo>
+                  <a:lnTo>
+                    <a:pt x="4924114" y="466991"/>
+                  </a:lnTo>
+                  <a:lnTo>
+                    <a:pt x="4994458" y="470439"/>
+                  </a:lnTo>
+                  <a:lnTo>
+                    <a:pt x="5064803" y="473829"/>
+                  </a:lnTo>
+                  <a:lnTo>
+                    <a:pt x="5135147" y="477162"/>
+                  </a:lnTo>
+                  <a:lnTo>
+                    <a:pt x="5205492" y="480439"/>
+                  </a:lnTo>
+                  <a:lnTo>
+                    <a:pt x="5275836" y="483661"/>
+                  </a:lnTo>
+                  <a:lnTo>
+                    <a:pt x="5346181" y="486829"/>
+                  </a:lnTo>
+                  <a:lnTo>
+                    <a:pt x="5416525" y="489944"/>
+                  </a:lnTo>
+                  <a:lnTo>
+                    <a:pt x="5486870" y="493006"/>
+                  </a:lnTo>
+                  <a:lnTo>
+                    <a:pt x="5557214" y="496016"/>
+                  </a:lnTo>
+                  <a:lnTo>
+                    <a:pt x="5627559" y="498976"/>
+                  </a:lnTo>
+                  <a:lnTo>
+                    <a:pt x="5697903" y="501887"/>
+                  </a:lnTo>
+                  <a:lnTo>
+                    <a:pt x="5768248" y="504748"/>
+                  </a:lnTo>
+                  <a:lnTo>
+                    <a:pt x="5838592" y="507561"/>
+                  </a:lnTo>
+                  <a:lnTo>
+                    <a:pt x="5908937" y="510327"/>
+                  </a:lnTo>
+                  <a:lnTo>
+                    <a:pt x="5979281" y="513047"/>
+                  </a:lnTo>
+                  <a:lnTo>
+                    <a:pt x="6049626" y="515720"/>
+                  </a:lnTo>
+                  <a:lnTo>
+                    <a:pt x="6119970" y="518349"/>
+                  </a:lnTo>
+                  <a:lnTo>
+                    <a:pt x="6190315" y="520934"/>
+                  </a:lnTo>
+                  <a:lnTo>
+                    <a:pt x="6260659" y="523475"/>
+                  </a:lnTo>
+                  <a:lnTo>
+                    <a:pt x="6331004" y="525973"/>
+                  </a:lnTo>
+                  <a:lnTo>
+                    <a:pt x="6401348" y="528429"/>
+                  </a:lnTo>
+                  <a:lnTo>
+                    <a:pt x="6471693" y="530844"/>
+                  </a:lnTo>
+                  <a:lnTo>
+                    <a:pt x="6542037" y="533219"/>
+                  </a:lnTo>
+                  <a:lnTo>
+                    <a:pt x="6612382" y="535553"/>
+                  </a:lnTo>
+                  <a:lnTo>
+                    <a:pt x="6682726" y="537848"/>
+                  </a:lnTo>
+                  <a:lnTo>
+                    <a:pt x="6753071" y="540105"/>
+                  </a:lnTo>
+                  <a:lnTo>
+                    <a:pt x="6823415" y="542324"/>
+                  </a:lnTo>
+                  <a:lnTo>
+                    <a:pt x="6893760" y="544505"/>
+                  </a:lnTo>
+                  <a:lnTo>
+                    <a:pt x="6964104" y="546650"/>
+                  </a:lnTo>
+                </a:path>
+              </a:pathLst>
+            </a:custGeom>
+            <a:ln w="27101" cap="flat">
+              <a:solidFill>
+                <a:srgbClr val="FF8C00">
+                  <a:alpha val="100000"/>
+                </a:srgbClr>
+              </a:solidFill>
+              <a:prstDash val="solid"/>
+              <a:round/>
+            </a:ln>
+          </p:spPr>
+          <p:txBody>
+            <a:bodyPr/>
+            <a:lstStyle/>
+            <a:p/>
+          </p:txBody>
+        </p:sp>
+        <p:sp>
+          <p:nvSpPr>
+            <p:cNvPr id="70" name="pl70"/>
+            <p:cNvSpPr/>
+            <p:nvPr/>
+          </p:nvSpPr>
+          <p:spPr>
+            <a:xfrm>
+              <a:off x="887106" y="5294352"/>
+              <a:ext cx="7660515" cy="0"/>
+            </a:xfrm>
+            <a:custGeom>
+              <a:avLst/>
+              <a:pathLst>
+                <a:path w="7660515" h="0">
+                  <a:moveTo>
+                    <a:pt x="0" y="0"/>
+                  </a:moveTo>
+                  <a:lnTo>
+                    <a:pt x="7660515" y="0"/>
+                  </a:lnTo>
+                  <a:lnTo>
+                    <a:pt x="7660515" y="0"/>
+                  </a:lnTo>
+                </a:path>
+              </a:pathLst>
+            </a:custGeom>
+            <a:ln w="13550" cap="flat">
+              <a:solidFill>
+                <a:srgbClr val="7F7F7F">
+                  <a:alpha val="100000"/>
+                </a:srgbClr>
+              </a:solidFill>
+              <a:prstDash val="dash"/>
+              <a:round/>
+            </a:ln>
+          </p:spPr>
+          <p:txBody>
+            <a:bodyPr/>
+            <a:lstStyle/>
+            <a:p/>
+          </p:txBody>
+        </p:sp>
+        <p:sp>
+          <p:nvSpPr>
+            <p:cNvPr id="71" name="pl71"/>
+            <p:cNvSpPr/>
+            <p:nvPr/>
+          </p:nvSpPr>
+          <p:spPr>
+            <a:xfrm>
+              <a:off x="4590457" y="4336484"/>
+              <a:ext cx="0" cy="1317069"/>
+            </a:xfrm>
+            <a:custGeom>
+              <a:avLst/>
+              <a:pathLst>
+                <a:path w="0" h="1317069">
+                  <a:moveTo>
+                    <a:pt x="0" y="1317069"/>
+                  </a:moveTo>
+                  <a:lnTo>
+                    <a:pt x="0" y="0"/>
+                  </a:lnTo>
+                  <a:lnTo>
+                    <a:pt x="0" y="0"/>
+                  </a:lnTo>
+                </a:path>
+              </a:pathLst>
+            </a:custGeom>
+            <a:ln w="13550" cap="flat">
+              <a:solidFill>
+                <a:srgbClr val="666666">
+                  <a:alpha val="100000"/>
+                </a:srgbClr>
+              </a:solidFill>
+              <a:prstDash val="dot"/>
+              <a:round/>
+            </a:ln>
+          </p:spPr>
+          <p:txBody>
+            <a:bodyPr/>
+            <a:lstStyle/>
+            <a:p/>
+          </p:txBody>
+        </p:sp>
+        <p:sp>
+          <p:nvSpPr>
+            <p:cNvPr id="72" name="tx72"/>
+            <p:cNvSpPr/>
+            <p:nvPr/>
+          </p:nvSpPr>
+          <p:spPr>
+            <a:xfrm>
+              <a:off x="762297" y="5553636"/>
+              <a:ext cx="62179" cy="80101"/>
+            </a:xfrm>
+            <a:prstGeom prst="rect">
+              <a:avLst/>
+            </a:prstGeom>
+            <a:noFill/>
+          </p:spPr>
+          <p:txBody>
+            <a:bodyPr lIns="0" rIns="0" tIns="0" bIns="0" anchorCtr="1" anchor="ctr" wrap="none"/>
+            <a:lstStyle/>
+            <a:p>
+              <a:pPr algn="l" marL="0" marR="0" indent="0">
+                <a:lnSpc>
+                  <a:spcPts val="880"/>
+                </a:lnSpc>
+                <a:spcBef>
+                  <a:spcPts val="0"/>
+                </a:spcBef>
+                <a:spcAft>
+                  <a:spcPts val="0"/>
+                </a:spcAft>
+              </a:pPr>
+              <a:r>
+                <a:rPr sz="880">
+                  <a:solidFill>
+                    <a:srgbClr val="4D4D4D">
+                      <a:alpha val="100000"/>
+                    </a:srgbClr>
+                  </a:solidFill>
+                  <a:latin typeface="Helvetica"/>
+                  <a:cs typeface="Helvetica"/>
+                </a:rPr>
+                <a:t>0</a:t>
+              </a:r>
+            </a:p>
+          </p:txBody>
+        </p:sp>
+        <p:sp>
+          <p:nvSpPr>
+            <p:cNvPr id="73" name="tx73"/>
+            <p:cNvSpPr/>
+            <p:nvPr/>
+          </p:nvSpPr>
+          <p:spPr>
+            <a:xfrm>
+              <a:off x="762297" y="5254302"/>
+              <a:ext cx="62179" cy="80101"/>
+            </a:xfrm>
+            <a:prstGeom prst="rect">
+              <a:avLst/>
+            </a:prstGeom>
+            <a:noFill/>
+          </p:spPr>
+          <p:txBody>
+            <a:bodyPr lIns="0" rIns="0" tIns="0" bIns="0" anchorCtr="1" anchor="ctr" wrap="none"/>
+            <a:lstStyle/>
+            <a:p>
+              <a:pPr algn="l" marL="0" marR="0" indent="0">
+                <a:lnSpc>
+                  <a:spcPts val="880"/>
+                </a:lnSpc>
+                <a:spcBef>
+                  <a:spcPts val="0"/>
+                </a:spcBef>
+                <a:spcAft>
+                  <a:spcPts val="0"/>
+                </a:spcAft>
+              </a:pPr>
+              <a:r>
+                <a:rPr sz="880">
+                  <a:solidFill>
+                    <a:srgbClr val="4D4D4D">
+                      <a:alpha val="100000"/>
+                    </a:srgbClr>
+                  </a:solidFill>
+                  <a:latin typeface="Helvetica"/>
+                  <a:cs typeface="Helvetica"/>
+                </a:rPr>
+                <a:t>1</a:t>
+              </a:r>
+            </a:p>
+          </p:txBody>
+        </p:sp>
+        <p:sp>
+          <p:nvSpPr>
+            <p:cNvPr id="74" name="tx74"/>
+            <p:cNvSpPr/>
+            <p:nvPr/>
+          </p:nvSpPr>
+          <p:spPr>
+            <a:xfrm>
+              <a:off x="762297" y="4954968"/>
+              <a:ext cx="62179" cy="80101"/>
+            </a:xfrm>
+            <a:prstGeom prst="rect">
+              <a:avLst/>
+            </a:prstGeom>
+            <a:noFill/>
+          </p:spPr>
+          <p:txBody>
+            <a:bodyPr lIns="0" rIns="0" tIns="0" bIns="0" anchorCtr="1" anchor="ctr" wrap="none"/>
+            <a:lstStyle/>
+            <a:p>
+              <a:pPr algn="l" marL="0" marR="0" indent="0">
+                <a:lnSpc>
+                  <a:spcPts val="880"/>
+                </a:lnSpc>
+                <a:spcBef>
+                  <a:spcPts val="0"/>
+                </a:spcBef>
+                <a:spcAft>
+                  <a:spcPts val="0"/>
+                </a:spcAft>
+              </a:pPr>
+              <a:r>
+                <a:rPr sz="880">
+                  <a:solidFill>
+                    <a:srgbClr val="4D4D4D">
+                      <a:alpha val="100000"/>
+                    </a:srgbClr>
+                  </a:solidFill>
+                  <a:latin typeface="Helvetica"/>
+                  <a:cs typeface="Helvetica"/>
+                </a:rPr>
+                <a:t>2</a:t>
+              </a:r>
+            </a:p>
+          </p:txBody>
+        </p:sp>
+        <p:sp>
+          <p:nvSpPr>
+            <p:cNvPr id="75" name="tx75"/>
+            <p:cNvSpPr/>
+            <p:nvPr/>
+          </p:nvSpPr>
+          <p:spPr>
+            <a:xfrm>
+              <a:off x="762297" y="4655634"/>
+              <a:ext cx="62179" cy="80101"/>
+            </a:xfrm>
+            <a:prstGeom prst="rect">
+              <a:avLst/>
+            </a:prstGeom>
+            <a:noFill/>
+          </p:spPr>
+          <p:txBody>
+            <a:bodyPr lIns="0" rIns="0" tIns="0" bIns="0" anchorCtr="1" anchor="ctr" wrap="none"/>
+            <a:lstStyle/>
+            <a:p>
+              <a:pPr algn="l" marL="0" marR="0" indent="0">
+                <a:lnSpc>
+                  <a:spcPts val="880"/>
+                </a:lnSpc>
+                <a:spcBef>
+                  <a:spcPts val="0"/>
+                </a:spcBef>
+                <a:spcAft>
+                  <a:spcPts val="0"/>
+                </a:spcAft>
+              </a:pPr>
+              <a:r>
+                <a:rPr sz="880">
+                  <a:solidFill>
+                    <a:srgbClr val="4D4D4D">
+                      <a:alpha val="100000"/>
+                    </a:srgbClr>
+                  </a:solidFill>
+                  <a:latin typeface="Helvetica"/>
+                  <a:cs typeface="Helvetica"/>
+                </a:rPr>
+                <a:t>3</a:t>
+              </a:r>
+            </a:p>
+          </p:txBody>
+        </p:sp>
+        <p:sp>
+          <p:nvSpPr>
+            <p:cNvPr id="76" name="tx76"/>
+            <p:cNvSpPr/>
+            <p:nvPr/>
+          </p:nvSpPr>
+          <p:spPr>
+            <a:xfrm>
+              <a:off x="762297" y="4356300"/>
+              <a:ext cx="62179" cy="80101"/>
+            </a:xfrm>
+            <a:prstGeom prst="rect">
+              <a:avLst/>
+            </a:prstGeom>
+            <a:noFill/>
+          </p:spPr>
+          <p:txBody>
+            <a:bodyPr lIns="0" rIns="0" tIns="0" bIns="0" anchorCtr="1" anchor="ctr" wrap="none"/>
+            <a:lstStyle/>
+            <a:p>
+              <a:pPr algn="l" marL="0" marR="0" indent="0">
+                <a:lnSpc>
+                  <a:spcPts val="880"/>
+                </a:lnSpc>
+                <a:spcBef>
+                  <a:spcPts val="0"/>
+                </a:spcBef>
+                <a:spcAft>
+                  <a:spcPts val="0"/>
+                </a:spcAft>
+              </a:pPr>
+              <a:r>
+                <a:rPr sz="880">
+                  <a:solidFill>
+                    <a:srgbClr val="4D4D4D">
+                      <a:alpha val="100000"/>
+                    </a:srgbClr>
+                  </a:solidFill>
+                  <a:latin typeface="Helvetica"/>
+                  <a:cs typeface="Helvetica"/>
+                </a:rPr>
+                <a:t>4</a:t>
+              </a:r>
+            </a:p>
+          </p:txBody>
+        </p:sp>
+        <p:sp>
+          <p:nvSpPr>
+            <p:cNvPr id="77" name="tx77"/>
+            <p:cNvSpPr/>
+            <p:nvPr/>
+          </p:nvSpPr>
+          <p:spPr>
+            <a:xfrm>
+              <a:off x="1133333" y="5716183"/>
+              <a:ext cx="161574" cy="80101"/>
+            </a:xfrm>
+            <a:prstGeom prst="rect">
+              <a:avLst/>
+            </a:prstGeom>
+            <a:noFill/>
+          </p:spPr>
+          <p:txBody>
+            <a:bodyPr lIns="0" rIns="0" tIns="0" bIns="0" anchorCtr="1" anchor="ctr" wrap="none"/>
+            <a:lstStyle/>
+            <a:p>
+              <a:pPr algn="l" marL="0" marR="0" indent="0">
+                <a:lnSpc>
+                  <a:spcPts val="880"/>
+                </a:lnSpc>
+                <a:spcBef>
+                  <a:spcPts val="0"/>
+                </a:spcBef>
+                <a:spcAft>
+                  <a:spcPts val="0"/>
+                </a:spcAft>
+              </a:pPr>
+              <a:r>
+                <a:rPr sz="880">
+                  <a:solidFill>
+                    <a:srgbClr val="4D4D4D">
+                      <a:alpha val="100000"/>
+                    </a:srgbClr>
+                  </a:solidFill>
+                  <a:latin typeface="Helvetica"/>
+                  <a:cs typeface="Helvetica"/>
+                </a:rPr>
+                <a:t>-40</a:t>
+              </a:r>
+            </a:p>
+          </p:txBody>
+        </p:sp>
+        <p:sp>
+          <p:nvSpPr>
+            <p:cNvPr id="78" name="tx78"/>
+            <p:cNvSpPr/>
+            <p:nvPr/>
+          </p:nvSpPr>
+          <p:spPr>
+            <a:xfrm>
+              <a:off x="1978619" y="5716183"/>
+              <a:ext cx="161574" cy="80101"/>
+            </a:xfrm>
+            <a:prstGeom prst="rect">
+              <a:avLst/>
+            </a:prstGeom>
+            <a:noFill/>
+          </p:spPr>
+          <p:txBody>
+            <a:bodyPr lIns="0" rIns="0" tIns="0" bIns="0" anchorCtr="1" anchor="ctr" wrap="none"/>
+            <a:lstStyle/>
+            <a:p>
+              <a:pPr algn="l" marL="0" marR="0" indent="0">
+                <a:lnSpc>
+                  <a:spcPts val="880"/>
+                </a:lnSpc>
+                <a:spcBef>
+                  <a:spcPts val="0"/>
+                </a:spcBef>
+                <a:spcAft>
+                  <a:spcPts val="0"/>
+                </a:spcAft>
+              </a:pPr>
+              <a:r>
+                <a:rPr sz="880">
+                  <a:solidFill>
+                    <a:srgbClr val="4D4D4D">
+                      <a:alpha val="100000"/>
+                    </a:srgbClr>
+                  </a:solidFill>
+                  <a:latin typeface="Helvetica"/>
+                  <a:cs typeface="Helvetica"/>
+                </a:rPr>
+                <a:t>-30</a:t>
+              </a:r>
+            </a:p>
+          </p:txBody>
+        </p:sp>
+        <p:sp>
+          <p:nvSpPr>
+            <p:cNvPr id="79" name="tx79"/>
+            <p:cNvSpPr/>
+            <p:nvPr/>
+          </p:nvSpPr>
+          <p:spPr>
+            <a:xfrm>
+              <a:off x="2823906" y="5716183"/>
+              <a:ext cx="161574" cy="80101"/>
+            </a:xfrm>
+            <a:prstGeom prst="rect">
+              <a:avLst/>
+            </a:prstGeom>
+            <a:noFill/>
+          </p:spPr>
+          <p:txBody>
+            <a:bodyPr lIns="0" rIns="0" tIns="0" bIns="0" anchorCtr="1" anchor="ctr" wrap="none"/>
+            <a:lstStyle/>
+            <a:p>
+              <a:pPr algn="l" marL="0" marR="0" indent="0">
+                <a:lnSpc>
+                  <a:spcPts val="880"/>
+                </a:lnSpc>
+                <a:spcBef>
+                  <a:spcPts val="0"/>
+                </a:spcBef>
+                <a:spcAft>
+                  <a:spcPts val="0"/>
+                </a:spcAft>
+              </a:pPr>
+              <a:r>
+                <a:rPr sz="880">
+                  <a:solidFill>
+                    <a:srgbClr val="4D4D4D">
+                      <a:alpha val="100000"/>
+                    </a:srgbClr>
+                  </a:solidFill>
+                  <a:latin typeface="Helvetica"/>
+                  <a:cs typeface="Helvetica"/>
+                </a:rPr>
+                <a:t>-20</a:t>
+              </a:r>
+            </a:p>
+          </p:txBody>
+        </p:sp>
+        <p:sp>
+          <p:nvSpPr>
+            <p:cNvPr id="80" name="tx80"/>
+            <p:cNvSpPr/>
+            <p:nvPr/>
+          </p:nvSpPr>
+          <p:spPr>
+            <a:xfrm>
+              <a:off x="3669192" y="5716183"/>
+              <a:ext cx="161574" cy="80101"/>
+            </a:xfrm>
+            <a:prstGeom prst="rect">
+              <a:avLst/>
+            </a:prstGeom>
+            <a:noFill/>
+          </p:spPr>
+          <p:txBody>
+            <a:bodyPr lIns="0" rIns="0" tIns="0" bIns="0" anchorCtr="1" anchor="ctr" wrap="none"/>
+            <a:lstStyle/>
+            <a:p>
+              <a:pPr algn="l" marL="0" marR="0" indent="0">
+                <a:lnSpc>
+                  <a:spcPts val="880"/>
+                </a:lnSpc>
+                <a:spcBef>
+                  <a:spcPts val="0"/>
+                </a:spcBef>
+                <a:spcAft>
+                  <a:spcPts val="0"/>
+                </a:spcAft>
+              </a:pPr>
+              <a:r>
+                <a:rPr sz="880">
+                  <a:solidFill>
+                    <a:srgbClr val="4D4D4D">
+                      <a:alpha val="100000"/>
+                    </a:srgbClr>
+                  </a:solidFill>
+                  <a:latin typeface="Helvetica"/>
+                  <a:cs typeface="Helvetica"/>
+                </a:rPr>
+                <a:t>-10</a:t>
+              </a:r>
+            </a:p>
+          </p:txBody>
+        </p:sp>
+        <p:sp>
+          <p:nvSpPr>
+            <p:cNvPr id="81" name="tx81"/>
+            <p:cNvSpPr/>
+            <p:nvPr/>
+          </p:nvSpPr>
+          <p:spPr>
+            <a:xfrm>
+              <a:off x="4564176" y="5716183"/>
+              <a:ext cx="62179" cy="80101"/>
+            </a:xfrm>
+            <a:prstGeom prst="rect">
+              <a:avLst/>
+            </a:prstGeom>
+            <a:noFill/>
+          </p:spPr>
+          <p:txBody>
+            <a:bodyPr lIns="0" rIns="0" tIns="0" bIns="0" anchorCtr="1" anchor="ctr" wrap="none"/>
+            <a:lstStyle/>
+            <a:p>
+              <a:pPr algn="l" marL="0" marR="0" indent="0">
+                <a:lnSpc>
+                  <a:spcPts val="880"/>
+                </a:lnSpc>
+                <a:spcBef>
+                  <a:spcPts val="0"/>
+                </a:spcBef>
+                <a:spcAft>
+                  <a:spcPts val="0"/>
+                </a:spcAft>
+              </a:pPr>
+              <a:r>
+                <a:rPr sz="880">
+                  <a:solidFill>
+                    <a:srgbClr val="4D4D4D">
+                      <a:alpha val="100000"/>
+                    </a:srgbClr>
+                  </a:solidFill>
+                  <a:latin typeface="Helvetica"/>
+                  <a:cs typeface="Helvetica"/>
+                </a:rPr>
+                <a:t>0</a:t>
+              </a:r>
+            </a:p>
+          </p:txBody>
+        </p:sp>
+        <p:sp>
+          <p:nvSpPr>
+            <p:cNvPr id="82" name="tx82"/>
+            <p:cNvSpPr/>
+            <p:nvPr/>
+          </p:nvSpPr>
+          <p:spPr>
+            <a:xfrm>
+              <a:off x="5378373" y="5716183"/>
+              <a:ext cx="124358" cy="80101"/>
+            </a:xfrm>
+            <a:prstGeom prst="rect">
+              <a:avLst/>
+            </a:prstGeom>
+            <a:noFill/>
+          </p:spPr>
+          <p:txBody>
+            <a:bodyPr lIns="0" rIns="0" tIns="0" bIns="0" anchorCtr="1" anchor="ctr" wrap="none"/>
+            <a:lstStyle/>
+            <a:p>
+              <a:pPr algn="l" marL="0" marR="0" indent="0">
+                <a:lnSpc>
+                  <a:spcPts val="880"/>
+                </a:lnSpc>
+                <a:spcBef>
+                  <a:spcPts val="0"/>
+                </a:spcBef>
+                <a:spcAft>
+                  <a:spcPts val="0"/>
+                </a:spcAft>
+              </a:pPr>
+              <a:r>
+                <a:rPr sz="880">
+                  <a:solidFill>
+                    <a:srgbClr val="4D4D4D">
+                      <a:alpha val="100000"/>
+                    </a:srgbClr>
+                  </a:solidFill>
+                  <a:latin typeface="Helvetica"/>
+                  <a:cs typeface="Helvetica"/>
+                </a:rPr>
+                <a:t>10</a:t>
+              </a:r>
+            </a:p>
+          </p:txBody>
+        </p:sp>
+        <p:sp>
+          <p:nvSpPr>
+            <p:cNvPr id="83" name="tx83"/>
+            <p:cNvSpPr/>
+            <p:nvPr/>
+          </p:nvSpPr>
+          <p:spPr>
+            <a:xfrm>
+              <a:off x="6223659" y="5716183"/>
+              <a:ext cx="124358" cy="80101"/>
+            </a:xfrm>
+            <a:prstGeom prst="rect">
+              <a:avLst/>
+            </a:prstGeom>
+            <a:noFill/>
+          </p:spPr>
+          <p:txBody>
+            <a:bodyPr lIns="0" rIns="0" tIns="0" bIns="0" anchorCtr="1" anchor="ctr" wrap="none"/>
+            <a:lstStyle/>
+            <a:p>
+              <a:pPr algn="l" marL="0" marR="0" indent="0">
+                <a:lnSpc>
+                  <a:spcPts val="880"/>
+                </a:lnSpc>
+                <a:spcBef>
+                  <a:spcPts val="0"/>
+                </a:spcBef>
+                <a:spcAft>
+                  <a:spcPts val="0"/>
+                </a:spcAft>
+              </a:pPr>
+              <a:r>
+                <a:rPr sz="880">
+                  <a:solidFill>
+                    <a:srgbClr val="4D4D4D">
+                      <a:alpha val="100000"/>
+                    </a:srgbClr>
+                  </a:solidFill>
+                  <a:latin typeface="Helvetica"/>
+                  <a:cs typeface="Helvetica"/>
+                </a:rPr>
+                <a:t>20</a:t>
+              </a:r>
+            </a:p>
+          </p:txBody>
+        </p:sp>
+        <p:sp>
+          <p:nvSpPr>
+            <p:cNvPr id="84" name="tx84"/>
+            <p:cNvSpPr/>
+            <p:nvPr/>
+          </p:nvSpPr>
+          <p:spPr>
+            <a:xfrm>
+              <a:off x="7068946" y="5716183"/>
+              <a:ext cx="124358" cy="80101"/>
+            </a:xfrm>
+            <a:prstGeom prst="rect">
+              <a:avLst/>
+            </a:prstGeom>
+            <a:noFill/>
+          </p:spPr>
+          <p:txBody>
+            <a:bodyPr lIns="0" rIns="0" tIns="0" bIns="0" anchorCtr="1" anchor="ctr" wrap="none"/>
+            <a:lstStyle/>
+            <a:p>
+              <a:pPr algn="l" marL="0" marR="0" indent="0">
+                <a:lnSpc>
+                  <a:spcPts val="880"/>
+                </a:lnSpc>
+                <a:spcBef>
+                  <a:spcPts val="0"/>
+                </a:spcBef>
+                <a:spcAft>
+                  <a:spcPts val="0"/>
+                </a:spcAft>
+              </a:pPr>
+              <a:r>
+                <a:rPr sz="880">
+                  <a:solidFill>
+                    <a:srgbClr val="4D4D4D">
+                      <a:alpha val="100000"/>
+                    </a:srgbClr>
+                  </a:solidFill>
+                  <a:latin typeface="Helvetica"/>
+                  <a:cs typeface="Helvetica"/>
+                </a:rPr>
+                <a:t>30</a:t>
+              </a:r>
+            </a:p>
+          </p:txBody>
+        </p:sp>
+        <p:sp>
+          <p:nvSpPr>
+            <p:cNvPr id="85" name="tx85"/>
+            <p:cNvSpPr/>
+            <p:nvPr/>
+          </p:nvSpPr>
+          <p:spPr>
+            <a:xfrm>
+              <a:off x="7914232" y="5716183"/>
+              <a:ext cx="124358" cy="80101"/>
+            </a:xfrm>
+            <a:prstGeom prst="rect">
+              <a:avLst/>
+            </a:prstGeom>
+            <a:noFill/>
+          </p:spPr>
+          <p:txBody>
+            <a:bodyPr lIns="0" rIns="0" tIns="0" bIns="0" anchorCtr="1" anchor="ctr" wrap="none"/>
+            <a:lstStyle/>
+            <a:p>
+              <a:pPr algn="l" marL="0" marR="0" indent="0">
+                <a:lnSpc>
+                  <a:spcPts val="880"/>
+                </a:lnSpc>
+                <a:spcBef>
+                  <a:spcPts val="0"/>
+                </a:spcBef>
+                <a:spcAft>
+                  <a:spcPts val="0"/>
+                </a:spcAft>
+              </a:pPr>
+              <a:r>
+                <a:rPr sz="880">
+                  <a:solidFill>
+                    <a:srgbClr val="4D4D4D">
+                      <a:alpha val="100000"/>
+                    </a:srgbClr>
+                  </a:solidFill>
+                  <a:latin typeface="Helvetica"/>
+                  <a:cs typeface="Helvetica"/>
+                </a:rPr>
+                <a:t>40</a:t>
+              </a:r>
+            </a:p>
+          </p:txBody>
+        </p:sp>
+        <p:sp>
+          <p:nvSpPr>
+            <p:cNvPr id="86" name="tx86"/>
+            <p:cNvSpPr/>
+            <p:nvPr/>
+          </p:nvSpPr>
+          <p:spPr>
+            <a:xfrm>
+              <a:off x="2928340" y="5855859"/>
+              <a:ext cx="3578047" cy="100218"/>
+            </a:xfrm>
+            <a:prstGeom prst="rect">
+              <a:avLst/>
+            </a:prstGeom>
+            <a:noFill/>
+          </p:spPr>
+          <p:txBody>
+            <a:bodyPr lIns="0" rIns="0" tIns="0" bIns="0" anchorCtr="1" anchor="ctr" wrap="none"/>
+            <a:lstStyle/>
+            <a:p>
+              <a:pPr algn="l" marL="0" marR="0" indent="0">
+                <a:lnSpc>
+                  <a:spcPts val="1100"/>
+                </a:lnSpc>
+                <a:spcBef>
+                  <a:spcPts val="0"/>
+                </a:spcBef>
+                <a:spcAft>
+                  <a:spcPts val="0"/>
+                </a:spcAft>
+              </a:pPr>
+              <a:r>
+                <a:rPr sz="1100">
+                  <a:solidFill>
+                    <a:srgbClr val="000000">
+                      <a:alpha val="100000"/>
+                    </a:srgbClr>
+                  </a:solidFill>
+                  <a:latin typeface="Helvetica"/>
+                  <a:cs typeface="Helvetica"/>
+                </a:rPr>
+                <a:t>eGFR difference (%): 100 × (CKD-EPI Cr-Cys − CG) / CG</a:t>
+              </a:r>
+            </a:p>
+          </p:txBody>
+        </p:sp>
+        <p:sp>
+          <p:nvSpPr>
+            <p:cNvPr id="87" name="tx87"/>
+            <p:cNvSpPr/>
+            <p:nvPr/>
+          </p:nvSpPr>
+          <p:spPr>
+            <a:xfrm rot="-5400000">
+              <a:off x="138035" y="4944909"/>
+              <a:ext cx="1016904" cy="100218"/>
+            </a:xfrm>
+            <a:prstGeom prst="rect">
+              <a:avLst/>
+            </a:prstGeom>
+            <a:noFill/>
+          </p:spPr>
+          <p:txBody>
+            <a:bodyPr lIns="0" rIns="0" tIns="0" bIns="0" anchorCtr="1" anchor="ctr" wrap="none"/>
+            <a:lstStyle/>
+            <a:p>
+              <a:pPr algn="l" marL="0" marR="0" indent="0">
+                <a:lnSpc>
+                  <a:spcPts val="1100"/>
+                </a:lnSpc>
+                <a:spcBef>
+                  <a:spcPts val="0"/>
+                </a:spcBef>
+                <a:spcAft>
+                  <a:spcPts val="0"/>
+                </a:spcAft>
+              </a:pPr>
+              <a:r>
+                <a:rPr sz="1100">
+                  <a:solidFill>
+                    <a:srgbClr val="000000">
+                      <a:alpha val="100000"/>
+                    </a:srgbClr>
+                  </a:solidFill>
+                  <a:latin typeface="Helvetica"/>
+                  <a:cs typeface="Helvetica"/>
+                </a:rPr>
+                <a:t>subHR (95% CI)</a:t>
+              </a:r>
+            </a:p>
+          </p:txBody>
+        </p:sp>
+        <p:sp>
+          <p:nvSpPr>
+            <p:cNvPr id="88" name="tx88"/>
+            <p:cNvSpPr/>
+            <p:nvPr/>
+          </p:nvSpPr>
+          <p:spPr>
+            <a:xfrm>
+              <a:off x="887106" y="4159544"/>
+              <a:ext cx="7052127" cy="82021"/>
+            </a:xfrm>
+            <a:prstGeom prst="rect">
+              <a:avLst/>
+            </a:prstGeom>
+            <a:noFill/>
+          </p:spPr>
+          <p:txBody>
+            <a:bodyPr lIns="0" rIns="0" tIns="0" bIns="0" anchorCtr="1" anchor="ctr" wrap="none"/>
+            <a:lstStyle/>
+            <a:p>
+              <a:pPr algn="l" marL="0" marR="0" indent="0">
+                <a:lnSpc>
+                  <a:spcPts val="900"/>
+                </a:lnSpc>
+                <a:spcBef>
+                  <a:spcPts val="0"/>
+                </a:spcBef>
+                <a:spcAft>
+                  <a:spcPts val="0"/>
+                </a:spcAft>
+              </a:pPr>
+              <a:r>
+                <a:rPr sz="900">
+                  <a:solidFill>
+                    <a:srgbClr val="404040">
+                      <a:alpha val="100000"/>
+                    </a:srgbClr>
+                  </a:solidFill>
+                  <a:latin typeface="Helvetica"/>
+                  <a:cs typeface="Helvetica"/>
+                </a:rPr>
+                <a:t>subHR per 10 % decline: 1.23 (1.14-1.32), p_Bonf = &lt;0.001 (n = 6)  |  per IQR decline (Δ = 29.3 %): 1.82 (1.46-2.26)  |  IQR: [-14.6, 14.7] %</a:t>
+              </a:r>
+            </a:p>
+          </p:txBody>
+        </p:sp>
+        <p:sp>
+          <p:nvSpPr>
+            <p:cNvPr id="89" name="tx89"/>
+            <p:cNvSpPr/>
+            <p:nvPr/>
+          </p:nvSpPr>
+          <p:spPr>
+            <a:xfrm>
+              <a:off x="887106" y="3932770"/>
               <a:ext cx="1219901" cy="120152"/>
             </a:xfrm>
             <a:prstGeom prst="rect">
